--- a/presentation/SIH2026-EvalPro-Idea-Presentation.pptx
+++ b/presentation/SIH2026-EvalPro-Idea-Presentation.pptx
@@ -5963,8 +5963,8 @@
         </p:nvSpPr>
         <p:spPr>
           <a:xfrm>
-            <a:off x="1719072" y="36576"/>
-            <a:ext cx="7818120" cy="987552"/>
+            <a:off x="1719072" y="91440"/>
+            <a:ext cx="7818120" cy="914400"/>
           </a:xfrm>
         </p:spPr>
         <p:txBody>
@@ -5978,14 +5978,14 @@
               <a:buNone/>
             </a:pPr>
             <a:r>
-              <a:rPr sz="2600" b="1" i="0" u="none">
+              <a:rPr sz="2700" b="1" i="0" u="none">
                 <a:solidFill>
                   <a:srgbClr val="1F497D"/>
                 </a:solidFill>
                 <a:latin typeface="Times New Roman"/>
                 <a:cs typeface="Times New Roman" pitchFamily="34" charset="0"/>
               </a:rPr>
-              <a:t>EvalPro: Concept-Level Mastery Analytics for Programming Labs</a:t>
+              <a:t>EvalPro - Programming Labs That Mark Themselves, and Explain Why</a:t>
             </a:r>
           </a:p>
         </p:txBody>
@@ -6000,8 +6000,8 @@
         </p:nvSpPr>
         <p:spPr bwMode="auto">
           <a:xfrm>
-            <a:off x="329184" y="1133856"/>
-            <a:ext cx="11503152" cy="4297680"/>
+            <a:off x="329184" y="1152144"/>
+            <a:ext cx="11503152" cy="5029200"/>
           </a:xfrm>
           <a:prstGeom prst="rect">
             <a:avLst/>
@@ -6025,11 +6025,11 @@
               <a:buFont typeface="Wingdings" pitchFamily="34" charset="0"/>
               <a:buChar char="v"/>
               <a:spcAft>
-                <a:spcPts val="700"/>
+                <a:spcPts val="1000"/>
               </a:spcAft>
             </a:pPr>
             <a:r>
-              <a:rPr sz="1700" b="1" i="0" u="sng">
+              <a:rPr sz="2000" b="1" i="0" u="sng">
                 <a:solidFill>
                   <a:srgbClr val="1F497D"/>
                 </a:solidFill>
@@ -6061,7 +6061,7 @@
               </a:spcAft>
             </a:pPr>
             <a:r>
-              <a:rPr sz="1450" b="1" i="0" u="sng">
+              <a:rPr sz="1700" b="1" i="0" u="sng">
                 <a:solidFill>
                   <a:srgbClr val="1F497D"/>
                 </a:solidFill>
@@ -6083,14 +6083,14 @@
               </a:spcAft>
             </a:pPr>
             <a:r>
-              <a:rPr sz="1150" b="0" i="0" u="none">
+              <a:rPr sz="1400" b="0" i="0" u="none">
                 <a:solidFill>
                   <a:srgbClr val="1A1A1A"/>
                 </a:solidFill>
                 <a:latin typeface="Arial"/>
                 <a:cs typeface="Arial" pitchFamily="34" charset="0"/>
               </a:rPr>
-              <a:t>Not a grader that reports analytics — an analytics platform whose sensor is an automated grader.</a:t>
+              <a:t>A student submits their lab program. The platform runs it, marks it, and shows them exactly why they got each mark.</a:t>
             </a:r>
           </a:p>
           <a:p>
@@ -6105,14 +6105,14 @@
               </a:spcAft>
             </a:pPr>
             <a:r>
-              <a:rPr sz="1150" b="0" i="0" u="none">
+              <a:rPr sz="1400" b="0" i="0" u="none">
                 <a:solidFill>
                   <a:srgbClr val="1A1A1A"/>
                 </a:solidFill>
                 <a:latin typeface="Arial"/>
                 <a:cs typeface="Arial" pitchFamily="34" charset="0"/>
               </a:rPr>
-              <a:t>The spine is a course concept graph (40–80 nodes, prerequisite DAG, ~2 hours to author once, reused every semester). Every rubric item carries concept_ids, so each submission becomes evidence about named competencies.</a:t>
+              <a:t>It does not stop at a number. Each mark is linked to a topic - loops, recursion, error handling - so the student sees which topic they are weak on, not just which lab.</a:t>
             </a:r>
           </a:p>
           <a:p>
@@ -6127,36 +6127,14 @@
               </a:spcAft>
             </a:pPr>
             <a:r>
-              <a:rPr sz="1150" b="0" i="0" u="none">
+              <a:rPr sz="1400" b="0" i="0" u="none">
                 <a:solidFill>
                   <a:srgbClr val="1A1A1A"/>
                 </a:solidFill>
                 <a:latin typeface="Arial"/>
                 <a:cs typeface="Arial" pitchFamily="34" charset="0"/>
               </a:rPr>
-              <a:t>A seven-stage cascade grades it: ingest → tree-sitter parse → integrity screen → sandboxed build → sandboxed test → partial credit → confidence gate. Each stage writes evidence; only the gate writes a score.</a:t>
-            </a:r>
-          </a:p>
-          <a:p>
-            <a:pPr algn="just" marL="329184" indent="-219456">
-              <a:lnSpc>
-                <a:spcPct val="95000"/>
-              </a:lnSpc>
-              <a:buFont typeface="Arial" pitchFamily="34" charset="0"/>
-              <a:buChar char="•"/>
-              <a:spcAft>
-                <a:spcPts val="200"/>
-              </a:spcAft>
-            </a:pPr>
-            <a:r>
-              <a:rPr sz="1150" b="0" i="0" u="none">
-                <a:solidFill>
-                  <a:srgbClr val="1A1A1A"/>
-                </a:solidFill>
-                <a:latin typeface="Arial"/>
-                <a:cs typeface="Arial" pitchFamily="34" charset="0"/>
-              </a:rPr>
-              <a:t>Bayesian Knowledge Tracing accumulates that evidence into per-student mastery with explicit uncertainty, propagated down the prerequisite DAG.</a:t>
+              <a:t>Marks from every lab add up over the semester into a clear picture of what each student actually understands.</a:t>
             </a:r>
           </a:p>
           <a:p>
@@ -6174,7 +6152,7 @@
               </a:spcAft>
             </a:pPr>
             <a:r>
-              <a:rPr sz="1450" b="1" i="0" u="sng">
+              <a:rPr sz="1700" b="1" i="0" u="sng">
                 <a:solidFill>
                   <a:srgbClr val="1F497D"/>
                 </a:solidFill>
@@ -6196,14 +6174,14 @@
               </a:spcAft>
             </a:pPr>
             <a:r>
-              <a:rPr sz="1150" b="0" i="0" u="none">
+              <a:rPr sz="1400" b="0" i="0" u="none">
                 <a:solidFill>
                   <a:srgbClr val="1A1A1A"/>
                 </a:solidFill>
                 <a:latin typeface="Arial"/>
                 <a:cs typeface="Arial" pitchFamily="34" charset="0"/>
               </a:rPr>
-              <a:t>Collect academic information — LTI 1.3 roster and SIS sync, course outcomes, submissions, reports, gradebook writeback.</a:t>
+              <a:t>Collects the academic information: labs, submissions and class lists, straight from the college's existing Moodle or Google Classroom.</a:t>
             </a:r>
           </a:p>
           <a:p>
@@ -6218,14 +6196,14 @@
               </a:spcAft>
             </a:pPr>
             <a:r>
-              <a:rPr sz="1150" b="0" i="0" u="none">
+              <a:rPr sz="1400" b="0" i="0" u="none">
                 <a:solidFill>
                   <a:srgbClr val="1A1A1A"/>
                 </a:solidFill>
                 <a:latin typeface="Arial"/>
                 <a:cs typeface="Arial" pitchFamily="34" charset="0"/>
               </a:rPr>
-              <a:t>Analyse student and course data — per submission, per student longitudinally, per rubric item (classical psychometrics), and per cohort.</a:t>
+              <a:t>Analyses it four ways: each submission, each student over time, each question, and the class as a whole.</a:t>
             </a:r>
           </a:p>
           <a:p>
@@ -6240,14 +6218,14 @@
               </a:spcAft>
             </a:pPr>
             <a:r>
-              <a:rPr sz="1150" b="0" i="0" u="none">
+              <a:rPr sz="1400" b="0" i="0" u="none">
                 <a:solidFill>
                   <a:srgbClr val="1A1A1A"/>
                 </a:solidFill>
                 <a:latin typeface="Arial"/>
                 <a:cs typeface="Arial" pitchFamily="34" charset="0"/>
               </a:rPr>
-              <a:t>Actionable insights — prerequisite-walk remediation for students, re-teach signals ranked by downstream impact for faculty, early warning routed to support for administrators.</a:t>
+              <a:t>Gives everyone a next step: what a student should revise, what a teacher should explain again, which students need support.</a:t>
             </a:r>
           </a:p>
           <a:p>
@@ -6262,14 +6240,14 @@
               </a:spcAft>
             </a:pPr>
             <a:r>
-              <a:rPr sz="1150" b="0" i="0" u="none">
+              <a:rPr sz="1400" b="0" i="0" u="none">
                 <a:solidFill>
                   <a:srgbClr val="1A1A1A"/>
                 </a:solidFill>
                 <a:latin typeface="Arial"/>
                 <a:cs typeface="Arial" pitchFamily="34" charset="0"/>
               </a:rPr>
-              <a:t>Simple interface — one landing question per role: what should I work on / what should I teach / where is this programme weak.</a:t>
+              <a:t>Shows it on one simple screen per person - one for students, one for teachers, one for the department.</a:t>
             </a:r>
           </a:p>
           <a:p>
@@ -6287,7 +6265,7 @@
               </a:spcAft>
             </a:pPr>
             <a:r>
-              <a:rPr sz="1450" b="1" i="0" u="sng">
+              <a:rPr sz="1700" b="1" i="0" u="sng">
                 <a:solidFill>
                   <a:srgbClr val="1F497D"/>
                 </a:solidFill>
@@ -6309,14 +6287,14 @@
               </a:spcAft>
             </a:pPr>
             <a:r>
-              <a:rPr sz="1150" b="0" i="0" u="none">
+              <a:rPr sz="1400" b="0" i="0" u="none">
                 <a:solidFill>
                   <a:srgbClr val="1A1A1A"/>
                 </a:solidFill>
                 <a:latin typeface="Arial"/>
                 <a:cs typeface="Arial" pitchFamily="34" charset="0"/>
               </a:rPr>
-              <a:t>Partial credit by repair distance: the smallest edit that makes the code compile. A missing colon costs two marks, not a hundred percent of them.</a:t>
+              <a:t>A missing bracket costs two marks, not the whole lab. We find the smallest fix that makes the program run, then mark the rest of the work properly.</a:t>
             </a:r>
           </a:p>
           <a:p>
@@ -6331,14 +6309,14 @@
               </a:spcAft>
             </a:pPr>
             <a:r>
-              <a:rPr sz="1150" b="0" i="0" u="none">
+              <a:rPr sz="1400" b="0" i="0" u="none">
                 <a:solidFill>
                   <a:srgbClr val="1A1A1A"/>
                 </a:solidFill>
                 <a:latin typeface="Arial"/>
                 <a:cs typeface="Arial" pitchFamily="34" charset="0"/>
               </a:rPr>
-              <a:t>The test oracle never enters the sandbox — student code cannot hardcode an answer it was never given.</a:t>
+              <a:t>The answer key never goes near the student's program, so it cannot be copied, guessed or hard-coded.</a:t>
             </a:r>
           </a:p>
           <a:p>
@@ -6353,14 +6331,14 @@
               </a:spcAft>
             </a:pPr>
             <a:r>
-              <a:rPr sz="1150" b="0" i="0" u="none">
+              <a:rPr sz="1400" b="0" i="0" u="none">
                 <a:solidFill>
                   <a:srgbClr val="1A1A1A"/>
                 </a:solidFill>
                 <a:latin typeface="Arial"/>
                 <a:cs typeface="Arial" pitchFamily="34" charset="0"/>
               </a:rPr>
-              <a:t>Item analysis grades the assessment, not just the student: negative discrimination exposes an ambiguous spec before sixty students hit it.</a:t>
+              <a:t>It also marks the question paper. If the strongest students all fail one part, the question was probably unclear, and the teacher is told.</a:t>
             </a:r>
           </a:p>
           <a:p>
@@ -6375,36 +6353,14 @@
               </a:spcAft>
             </a:pPr>
             <a:r>
-              <a:rPr sz="1150" b="0" i="0" u="none">
+              <a:rPr sz="1400" b="0" i="0" u="none">
                 <a:solidFill>
                   <a:srgbClr val="1A1A1A"/>
                 </a:solidFill>
                 <a:latin typeface="Arial"/>
                 <a:cs typeface="Arial" pitchFamily="34" charset="0"/>
               </a:rPr>
-              <a:t>Abstain rather than guess — a tunable auto-release dial, and an integrity screen that reports cohort-relative outliers as evidence, never as a verdict.</a:t>
-            </a:r>
-          </a:p>
-          <a:p>
-            <a:pPr algn="just" marL="329184" indent="-219456">
-              <a:lnSpc>
-                <a:spcPct val="95000"/>
-              </a:lnSpc>
-              <a:buFont typeface="Arial" pitchFamily="34" charset="0"/>
-              <a:buChar char="•"/>
-              <a:spcAft>
-                <a:spcPts val="200"/>
-              </a:spcAft>
-            </a:pPr>
-            <a:r>
-              <a:rPr sz="1150" b="0" i="0" u="none">
-                <a:solidFill>
-                  <a:srgbClr val="1A1A1A"/>
-                </a:solidFill>
-                <a:latin typeface="Arial"/>
-                <a:cs typeface="Arial" pitchFamily="34" charset="0"/>
-              </a:rPr>
-              <a:t>CO–PO attainment computed live from real performance evidence, not reconstructed from a spreadsheet.</a:t>
+              <a:t>When it is not sure, it says so and hands the submission to the teacher instead of guessing.</a:t>
             </a:r>
           </a:p>
         </p:txBody>
@@ -6561,322 +6517,6 @@
           </a:prstGeom>
         </p:spPr>
       </p:pic>
-      <p:sp>
-        <p:nvSpPr>
-          <p:cNvPr id="15363" name="Rounded Rectangle 15362"/>
-          <p:cNvSpPr/>
-          <p:nvPr/>
-        </p:nvSpPr>
-        <p:spPr>
-          <a:xfrm>
-            <a:off x="310896" y="5504688"/>
-            <a:ext cx="2724912" cy="694944"/>
-          </a:xfrm>
-          <a:prstGeom prst="roundRect">
-            <a:avLst/>
-          </a:prstGeom>
-          <a:solidFill>
-            <a:srgbClr val="ECF2F9"/>
-          </a:solidFill>
-          <a:ln w="9525">
-            <a:solidFill>
-              <a:srgbClr val="4F81BD"/>
-            </a:solidFill>
-          </a:ln>
-          <a:effectLst/>
-        </p:spPr>
-        <p:style>
-          <a:lnRef idx="1">
-            <a:schemeClr val="accent1"/>
-          </a:lnRef>
-          <a:fillRef idx="3">
-            <a:schemeClr val="accent1"/>
-          </a:fillRef>
-          <a:effectRef idx="2">
-            <a:schemeClr val="accent1"/>
-          </a:effectRef>
-          <a:fontRef idx="minor">
-            <a:schemeClr val="lt1"/>
-          </a:fontRef>
-        </p:style>
-        <p:txBody>
-          <a:bodyPr rtlCol="0" anchor="ctr" wrap="square" lIns="45720" rIns="45720" tIns="22860" bIns="22860"/>
-          <a:lstStyle/>
-          <a:p>
-            <a:pPr algn="ctr" marL="0" indent="0">
-              <a:lnSpc>
-                <a:spcPct val="90000"/>
-              </a:lnSpc>
-              <a:buNone/>
-            </a:pPr>
-            <a:r>
-              <a:rPr sz="1500" b="1" i="0" u="none">
-                <a:solidFill>
-                  <a:srgbClr val="1F497D"/>
-                </a:solidFill>
-                <a:latin typeface="Arial"/>
-                <a:cs typeface="Arial" pitchFamily="34" charset="0"/>
-              </a:rPr>
-              <a:t>91</a:t>
-            </a:r>
-          </a:p>
-          <a:p>
-            <a:pPr algn="ctr" marL="0" indent="0">
-              <a:lnSpc>
-                <a:spcPct val="88000"/>
-              </a:lnSpc>
-              <a:buNone/>
-            </a:pPr>
-            <a:r>
-              <a:rPr sz="800" b="0" i="0" u="none">
-                <a:solidFill>
-                  <a:srgbClr val="1A1A1A"/>
-                </a:solidFill>
-                <a:latin typeface="Arial"/>
-                <a:cs typeface="Arial" pitchFamily="34" charset="0"/>
-              </a:rPr>
-              <a:t>submissions graded end to end by the real cascade, in the real sandbox</a:t>
-            </a:r>
-          </a:p>
-        </p:txBody>
-      </p:sp>
-      <p:sp>
-        <p:nvSpPr>
-          <p:cNvPr id="15364" name="Rounded Rectangle 15363"/>
-          <p:cNvSpPr/>
-          <p:nvPr/>
-        </p:nvSpPr>
-        <p:spPr>
-          <a:xfrm>
-            <a:off x="3236976" y="5504688"/>
-            <a:ext cx="2724912" cy="694944"/>
-          </a:xfrm>
-          <a:prstGeom prst="roundRect">
-            <a:avLst/>
-          </a:prstGeom>
-          <a:solidFill>
-            <a:srgbClr val="ECF2F9"/>
-          </a:solidFill>
-          <a:ln w="9525">
-            <a:solidFill>
-              <a:srgbClr val="4F81BD"/>
-            </a:solidFill>
-          </a:ln>
-          <a:effectLst/>
-        </p:spPr>
-        <p:style>
-          <a:lnRef idx="1">
-            <a:schemeClr val="accent1"/>
-          </a:lnRef>
-          <a:fillRef idx="3">
-            <a:schemeClr val="accent1"/>
-          </a:fillRef>
-          <a:effectRef idx="2">
-            <a:schemeClr val="accent1"/>
-          </a:effectRef>
-          <a:fontRef idx="minor">
-            <a:schemeClr val="lt1"/>
-          </a:fontRef>
-        </p:style>
-        <p:txBody>
-          <a:bodyPr rtlCol="0" anchor="ctr" wrap="square" lIns="45720" rIns="45720" tIns="22860" bIns="22860"/>
-          <a:lstStyle/>
-          <a:p>
-            <a:pPr algn="ctr" marL="0" indent="0">
-              <a:lnSpc>
-                <a:spcPct val="90000"/>
-              </a:lnSpc>
-              <a:buNone/>
-            </a:pPr>
-            <a:r>
-              <a:rPr sz="1500" b="1" i="0" u="none">
-                <a:solidFill>
-                  <a:srgbClr val="1F497D"/>
-                </a:solidFill>
-                <a:latin typeface="Arial"/>
-                <a:cs typeface="Arial" pitchFamily="34" charset="0"/>
-              </a:rPr>
-              <a:t>24</a:t>
-            </a:r>
-          </a:p>
-          <a:p>
-            <a:pPr algn="ctr" marL="0" indent="0">
-              <a:lnSpc>
-                <a:spcPct val="88000"/>
-              </a:lnSpc>
-              <a:buNone/>
-            </a:pPr>
-            <a:r>
-              <a:rPr sz="800" b="0" i="0" u="none">
-                <a:solidFill>
-                  <a:srgbClr val="1A1A1A"/>
-                </a:solidFill>
-                <a:latin typeface="Arial"/>
-                <a:cs typeface="Arial" pitchFamily="34" charset="0"/>
-              </a:rPr>
-              <a:t>concepts tracked per student, mapped to 5 course outcomes</a:t>
-            </a:r>
-          </a:p>
-        </p:txBody>
-      </p:sp>
-      <p:sp>
-        <p:nvSpPr>
-          <p:cNvPr id="15365" name="Rounded Rectangle 15364"/>
-          <p:cNvSpPr/>
-          <p:nvPr/>
-        </p:nvSpPr>
-        <p:spPr>
-          <a:xfrm>
-            <a:off x="6163056" y="5504688"/>
-            <a:ext cx="2724912" cy="694944"/>
-          </a:xfrm>
-          <a:prstGeom prst="roundRect">
-            <a:avLst/>
-          </a:prstGeom>
-          <a:solidFill>
-            <a:srgbClr val="ECF2F9"/>
-          </a:solidFill>
-          <a:ln w="9525">
-            <a:solidFill>
-              <a:srgbClr val="4F81BD"/>
-            </a:solidFill>
-          </a:ln>
-          <a:effectLst/>
-        </p:spPr>
-        <p:style>
-          <a:lnRef idx="1">
-            <a:schemeClr val="accent1"/>
-          </a:lnRef>
-          <a:fillRef idx="3">
-            <a:schemeClr val="accent1"/>
-          </a:fillRef>
-          <a:effectRef idx="2">
-            <a:schemeClr val="accent1"/>
-          </a:effectRef>
-          <a:fontRef idx="minor">
-            <a:schemeClr val="lt1"/>
-          </a:fontRef>
-        </p:style>
-        <p:txBody>
-          <a:bodyPr rtlCol="0" anchor="ctr" wrap="square" lIns="45720" rIns="45720" tIns="22860" bIns="22860"/>
-          <a:lstStyle/>
-          <a:p>
-            <a:pPr algn="ctr" marL="0" indent="0">
-              <a:lnSpc>
-                <a:spcPct val="90000"/>
-              </a:lnSpc>
-              <a:buNone/>
-            </a:pPr>
-            <a:r>
-              <a:rPr sz="1500" b="1" i="0" u="none">
-                <a:solidFill>
-                  <a:srgbClr val="1F497D"/>
-                </a:solidFill>
-                <a:latin typeface="Arial"/>
-                <a:cs typeface="Arial" pitchFamily="34" charset="0"/>
-              </a:rPr>
-              <a:t>0.9 s</a:t>
-            </a:r>
-          </a:p>
-          <a:p>
-            <a:pPr algn="ctr" marL="0" indent="0">
-              <a:lnSpc>
-                <a:spcPct val="88000"/>
-              </a:lnSpc>
-              <a:buNone/>
-            </a:pPr>
-            <a:r>
-              <a:rPr sz="800" b="0" i="0" u="none">
-                <a:solidFill>
-                  <a:srgbClr val="1A1A1A"/>
-                </a:solidFill>
-                <a:latin typeface="Arial"/>
-                <a:cs typeface="Arial" pitchFamily="34" charset="0"/>
-              </a:rPr>
-              <a:t>p95 latency for the whole seven-stage cascade, per submission</a:t>
-            </a:r>
-          </a:p>
-        </p:txBody>
-      </p:sp>
-      <p:sp>
-        <p:nvSpPr>
-          <p:cNvPr id="15366" name="Rounded Rectangle 15365"/>
-          <p:cNvSpPr/>
-          <p:nvPr/>
-        </p:nvSpPr>
-        <p:spPr>
-          <a:xfrm>
-            <a:off x="9089136" y="5504688"/>
-            <a:ext cx="2724912" cy="694944"/>
-          </a:xfrm>
-          <a:prstGeom prst="roundRect">
-            <a:avLst/>
-          </a:prstGeom>
-          <a:solidFill>
-            <a:srgbClr val="ECF2F9"/>
-          </a:solidFill>
-          <a:ln w="9525">
-            <a:solidFill>
-              <a:srgbClr val="4F81BD"/>
-            </a:solidFill>
-          </a:ln>
-          <a:effectLst/>
-        </p:spPr>
-        <p:style>
-          <a:lnRef idx="1">
-            <a:schemeClr val="accent1"/>
-          </a:lnRef>
-          <a:fillRef idx="3">
-            <a:schemeClr val="accent1"/>
-          </a:fillRef>
-          <a:effectRef idx="2">
-            <a:schemeClr val="accent1"/>
-          </a:effectRef>
-          <a:fontRef idx="minor">
-            <a:schemeClr val="lt1"/>
-          </a:fontRef>
-        </p:style>
-        <p:txBody>
-          <a:bodyPr rtlCol="0" anchor="ctr" wrap="square" lIns="45720" rIns="45720" tIns="22860" bIns="22860"/>
-          <a:lstStyle/>
-          <a:p>
-            <a:pPr algn="ctr" marL="0" indent="0">
-              <a:lnSpc>
-                <a:spcPct val="90000"/>
-              </a:lnSpc>
-              <a:buNone/>
-            </a:pPr>
-            <a:r>
-              <a:rPr sz="1500" b="1" i="0" u="none">
-                <a:solidFill>
-                  <a:srgbClr val="1F497D"/>
-                </a:solidFill>
-                <a:latin typeface="Arial"/>
-                <a:cs typeface="Arial" pitchFamily="34" charset="0"/>
-              </a:rPr>
-              <a:t>13</a:t>
-            </a:r>
-          </a:p>
-          <a:p>
-            <a:pPr algn="ctr" marL="0" indent="0">
-              <a:lnSpc>
-                <a:spcPct val="88000"/>
-              </a:lnSpc>
-              <a:buNone/>
-            </a:pPr>
-            <a:r>
-              <a:rPr sz="800" b="0" i="0" u="none">
-                <a:solidFill>
-                  <a:srgbClr val="1A1A1A"/>
-                </a:solidFill>
-                <a:latin typeface="Arial"/>
-                <a:cs typeface="Arial" pitchFamily="34" charset="0"/>
-              </a:rPr>
-              <a:t>isolation layers specified; the test oracle never enters the guest</a:t>
-            </a:r>
-          </a:p>
-        </p:txBody>
-      </p:sp>
     </p:spTree>
   </p:cSld>
   <p:clrMapOvr>
@@ -7003,8 +6643,8 @@
         </p:nvSpPr>
         <p:spPr bwMode="auto">
           <a:xfrm>
-            <a:off x="329184" y="2980944"/>
-            <a:ext cx="11503152" cy="3218688"/>
+            <a:off x="329184" y="3310128"/>
+            <a:ext cx="11503152" cy="2926080"/>
           </a:xfrm>
           <a:prstGeom prst="rect">
             <a:avLst/>
@@ -7028,11 +6668,11 @@
               <a:buFont typeface="Wingdings" pitchFamily="34" charset="0"/>
               <a:buChar char="v"/>
               <a:spcAft>
-                <a:spcPts val="400"/>
+                <a:spcPts val="500"/>
               </a:spcAft>
             </a:pPr>
             <a:r>
-              <a:rPr sz="1400" b="1" i="0" u="sng">
+              <a:rPr sz="1600" b="1" i="0" u="sng">
                 <a:solidFill>
                   <a:srgbClr val="1F497D"/>
                 </a:solidFill>
@@ -7050,18 +6690,18 @@
               <a:buFont typeface="Arial" pitchFamily="34" charset="0"/>
               <a:buChar char="•"/>
               <a:spcAft>
-                <a:spcPts val="200"/>
+                <a:spcPts val="300"/>
               </a:spcAft>
             </a:pPr>
             <a:r>
-              <a:rPr sz="1100" b="0" i="0" u="none">
+              <a:rPr sz="1350" b="0" i="0" u="none">
                 <a:solidFill>
                   <a:srgbClr val="1A1A1A"/>
                 </a:solidFill>
                 <a:latin typeface="Arial"/>
                 <a:cs typeface="Arial" pitchFamily="34" charset="0"/>
               </a:rPr>
-              <a:t>Backend — Python 3.12, FastAPI, SQLAlchemy, PostgreSQL (SQLite for the pilot). Build-free ES-module front end with hand-authored SVG, so a deployment needs no toolchain.</a:t>
+              <a:t>Python and FastAPI on the server. A plain web interface that works in any browser, with nothing to install on a student's machine.</a:t>
             </a:r>
           </a:p>
           <a:p>
@@ -7072,18 +6712,18 @@
               <a:buFont typeface="Arial" pitchFamily="34" charset="0"/>
               <a:buChar char="•"/>
               <a:spcAft>
-                <a:spcPts val="200"/>
+                <a:spcPts val="300"/>
               </a:spcAft>
             </a:pPr>
             <a:r>
-              <a:rPr sz="1100" b="0" i="0" u="none">
+              <a:rPr sz="1350" b="0" i="0" u="none">
                 <a:solidFill>
                   <a:srgbClr val="1A1A1A"/>
                 </a:solidFill>
                 <a:latin typeface="Arial"/>
                 <a:cs typeface="Arial" pitchFamily="34" charset="0"/>
               </a:rPr>
-              <a:t>Analysis — tree-sitter (40+ grammars, error-tolerant), winnowing fingerprints (MOSS), pq-gram/APTED tree edit distance, Bayesian Knowledge Tracing, HDBSCAN, point-biserial item analysis.</a:t>
+              <a:t>Student programs run inside a locked-down sandbox, so nothing they submit can touch the college's systems or see anyone else's work.</a:t>
             </a:r>
           </a:p>
           <a:p>
@@ -7094,18 +6734,18 @@
               <a:buFont typeface="Arial" pitchFamily="34" charset="0"/>
               <a:buChar char="•"/>
               <a:spcAft>
-                <a:spcPts val="200"/>
+                <a:spcPts val="300"/>
               </a:spcAft>
             </a:pPr>
             <a:r>
-              <a:rPr sz="1100" b="0" i="0" u="none">
+              <a:rPr sz="1350" b="0" i="0" u="none">
                 <a:solidFill>
                   <a:srgbClr val="1A1A1A"/>
                 </a:solidFill>
                 <a:latin typeface="Arial"/>
                 <a:cs typeface="Arial" pitchFamily="34" charset="0"/>
               </a:rPr>
-              <a:t>Models — gradient boosting for language ID, confidence estimation and risk; graph embeddings for structural clones; a fine-tuned DeBERTa-v3 encoder for report–code entailment. The LLM drafts rubrics once per assignment and never grades a submission.</a:t>
+              <a:t>Well-established methods do the marking: standard program analysis, the same plagiarism technique universities already use, and a well-known model for tracking what a learner knows.</a:t>
             </a:r>
           </a:p>
           <a:p>
@@ -7116,18 +6756,43 @@
               <a:buFont typeface="Arial" pitchFamily="34" charset="0"/>
               <a:buChar char="•"/>
               <a:spcAft>
-                <a:spcPts val="200"/>
+                <a:spcPts val="300"/>
               </a:spcAft>
             </a:pPr>
             <a:r>
-              <a:rPr sz="1100" b="0" i="0" u="none">
+              <a:rPr sz="1350" b="0" i="0" u="none">
                 <a:solidFill>
                   <a:srgbClr val="1A1A1A"/>
                 </a:solidFill>
                 <a:latin typeface="Arial"/>
                 <a:cs typeface="Arial" pitchFamily="34" charset="0"/>
               </a:rPr>
-              <a:t>Isolation — Firecracker microVM, seccomp-bpf allowlist, cgroups v2, empty network namespace, one-shot instances, supervisor-enforced wall clock.</a:t>
+              <a:t>Runs on an ordinary computer. No expensive hardware, no paid AI service needed to mark a submission.</a:t>
+            </a:r>
+          </a:p>
+          <a:p>
+            <a:pPr algn="l" marL="219456" indent="-219456">
+              <a:lnSpc>
+                <a:spcPct val="100000"/>
+              </a:lnSpc>
+              <a:buFont typeface="Wingdings" pitchFamily="34" charset="0"/>
+              <a:buChar char="v"/>
+              <a:spcBef>
+                <a:spcPts val="1000"/>
+              </a:spcBef>
+              <a:spcAft>
+                <a:spcPts val="500"/>
+              </a:spcAft>
+            </a:pPr>
+            <a:r>
+              <a:rPr sz="1600" b="1" i="0" u="sng">
+                <a:solidFill>
+                  <a:srgbClr val="1F497D"/>
+                </a:solidFill>
+                <a:latin typeface="Arial"/>
+                <a:cs typeface="Arial" pitchFamily="34" charset="0"/>
+              </a:rPr>
+              <a:t>Methodology and process for implementation (Flow Charts/Images/ working prototype)</a:t>
             </a:r>
           </a:p>
           <a:p>
@@ -7138,43 +6803,18 @@
               <a:buFont typeface="Arial" pitchFamily="34" charset="0"/>
               <a:buChar char="•"/>
               <a:spcAft>
-                <a:spcPts val="200"/>
+                <a:spcPts val="300"/>
               </a:spcAft>
             </a:pPr>
             <a:r>
-              <a:rPr sz="1100" b="0" i="0" u="none">
+              <a:rPr sz="1350" b="0" i="0" u="none">
                 <a:solidFill>
                   <a:srgbClr val="1A1A1A"/>
                 </a:solidFill>
                 <a:latin typeface="Arial"/>
                 <a:cs typeface="Arial" pitchFamily="34" charset="0"/>
               </a:rPr>
-              <a:t>Integration — LTI 1.3 tool provider with Assignment and Grade Services writeback (Moodle, Canvas, Google Classroom).</a:t>
-            </a:r>
-          </a:p>
-          <a:p>
-            <a:pPr algn="l" marL="219456" indent="-219456">
-              <a:lnSpc>
-                <a:spcPct val="100000"/>
-              </a:lnSpc>
-              <a:buFont typeface="Wingdings" pitchFamily="34" charset="0"/>
-              <a:buChar char="v"/>
-              <a:spcBef>
-                <a:spcPts val="800"/>
-              </a:spcBef>
-              <a:spcAft>
-                <a:spcPts val="400"/>
-              </a:spcAft>
-            </a:pPr>
-            <a:r>
-              <a:rPr sz="1400" b="1" i="0" u="sng">
-                <a:solidFill>
-                  <a:srgbClr val="1F497D"/>
-                </a:solidFill>
-                <a:latin typeface="Arial"/>
-                <a:cs typeface="Arial" pitchFamily="34" charset="0"/>
-              </a:rPr>
-              <a:t>Methodology and process for implementation (Flow Charts/Images/ working prototype)</a:t>
+              <a:t>The teacher writes the lab question in ordinary English. The platform reads it and works out what it can check - and shows the teacher that list before anything is published.</a:t>
             </a:r>
           </a:p>
           <a:p>
@@ -7185,40 +6825,18 @@
               <a:buFont typeface="Arial" pitchFamily="34" charset="0"/>
               <a:buChar char="•"/>
               <a:spcAft>
-                <a:spcPts val="200"/>
+                <a:spcPts val="300"/>
               </a:spcAft>
             </a:pPr>
             <a:r>
-              <a:rPr sz="1100" b="0" i="0" u="none">
+              <a:rPr sz="1350" b="0" i="0" u="none">
                 <a:solidFill>
                   <a:srgbClr val="1A1A1A"/>
                 </a:solidFill>
                 <a:latin typeface="Arial"/>
                 <a:cs typeface="Arial" pitchFamily="34" charset="0"/>
               </a:rPr>
-              <a:t>Working prototype: the four layers above run today. A 24-student cohort across four labs — 91 submissions — is graded end to end by the real cascade in a real sandbox in under 90 seconds on a laptop; p95 latency is 0.9 s per submission.</a:t>
-            </a:r>
-          </a:p>
-          <a:p>
-            <a:pPr algn="just" marL="329184" indent="-219456">
-              <a:lnSpc>
-                <a:spcPct val="95000"/>
-              </a:lnSpc>
-              <a:buFont typeface="Arial" pitchFamily="34" charset="0"/>
-              <a:buChar char="•"/>
-              <a:spcAft>
-                <a:spcPts val="200"/>
-              </a:spcAft>
-            </a:pPr>
-            <a:r>
-              <a:rPr sz="1100" b="0" i="0" u="none">
-                <a:solidFill>
-                  <a:srgbClr val="1A1A1A"/>
-                </a:solidFill>
-                <a:latin typeface="Arial"/>
-                <a:cs typeface="Arial" pitchFamily="34" charset="0"/>
-              </a:rPr>
-              <a:t>Phase 1 trustworthy execution → Phase 2 partial credit and authoring → Phase 3 accumulation → Phase 4 action → Phase 5 semantic depth. Each phase ships something separately useful.</a:t>
+              <a:t>Working prototype today: a full class of 24 students across four labs, marked from start to finish, with every screen above already built.</a:t>
             </a:r>
           </a:p>
         </p:txBody>
@@ -7384,7 +7002,7 @@
         <p:spPr>
           <a:xfrm>
             <a:off x="329184" y="1115568"/>
-            <a:ext cx="2615184" cy="1371600"/>
+            <a:ext cx="2615184" cy="1481328"/>
           </a:xfrm>
           <a:prstGeom prst="roundRect">
             <a:avLst/>
@@ -7434,7 +7052,7 @@
                 <a:latin typeface="Arial"/>
                 <a:cs typeface="Arial" pitchFamily="34" charset="0"/>
               </a:rPr>
-              <a:t>L0  INSTITUTIONAL CONTEXT</a:t>
+              <a:t>1.  COLLECT</a:t>
             </a:r>
           </a:p>
           <a:p>
@@ -7452,9 +7070,9 @@
                 <a:latin typeface="Arial"/>
                 <a:cs typeface="Arial" pitchFamily="34" charset="0"/>
               </a:rPr>
-              <a:t>LTI 1.3 / SIS sync
-roster · course outcomes
-concept graph</a:t>
+              <a:t>lab questions, submissions
+and class lists, from the
+college's existing system</a:t>
             </a:r>
           </a:p>
         </p:txBody>
@@ -7467,7 +7085,7 @@
         </p:nvCxnSpPr>
         <p:spPr>
           <a:xfrm>
-            <a:off x="2944368" y="1801368"/>
+            <a:off x="2944368" y="1856232"/>
             <a:ext cx="292608" cy="0"/>
           </a:xfrm>
           <a:prstGeom prst="line">
@@ -7504,7 +7122,7 @@
         <p:spPr>
           <a:xfrm>
             <a:off x="3236976" y="1115568"/>
-            <a:ext cx="2615184" cy="1371600"/>
+            <a:ext cx="2615184" cy="1481328"/>
           </a:xfrm>
           <a:prstGeom prst="roundRect">
             <a:avLst/>
@@ -7554,7 +7172,7 @@
                 <a:latin typeface="Arial"/>
                 <a:cs typeface="Arial" pitchFamily="34" charset="0"/>
               </a:rPr>
-              <a:t>L1  SENSING</a:t>
+              <a:t>2.  MARK</a:t>
             </a:r>
           </a:p>
           <a:p>
@@ -7572,9 +7190,9 @@
                 <a:latin typeface="Arial"/>
                 <a:cs typeface="Arial" pitchFamily="34" charset="0"/>
               </a:rPr>
-              <a:t>authoring → cascade
-sandbox → gate
-per-rubric-item evidence</a:t>
+              <a:t>run the program safely,
+check it against the rubric,
+explain every mark</a:t>
             </a:r>
           </a:p>
         </p:txBody>
@@ -7587,7 +7205,7 @@
         </p:nvCxnSpPr>
         <p:spPr>
           <a:xfrm>
-            <a:off x="5852160" y="1801368"/>
+            <a:off x="5852160" y="1856232"/>
             <a:ext cx="292608" cy="0"/>
           </a:xfrm>
           <a:prstGeom prst="line">
@@ -7624,7 +7242,7 @@
         <p:spPr>
           <a:xfrm>
             <a:off x="6144768" y="1115568"/>
-            <a:ext cx="2615184" cy="1371600"/>
+            <a:ext cx="2615184" cy="1481328"/>
           </a:xfrm>
           <a:prstGeom prst="roundRect">
             <a:avLst/>
@@ -7674,7 +7292,7 @@
                 <a:latin typeface="Arial"/>
                 <a:cs typeface="Arial" pitchFamily="34" charset="0"/>
               </a:rPr>
-              <a:t>L2  ACCUMULATION</a:t>
+              <a:t>3.  UNDERSTAND</a:t>
             </a:r>
           </a:p>
           <a:p>
@@ -7692,9 +7310,9 @@
                 <a:latin typeface="Arial"/>
                 <a:cs typeface="Arial" pitchFamily="34" charset="0"/>
               </a:rPr>
-              <a:t>knowledge tracing
-item analysis
-misconception clusters</a:t>
+              <a:t>build a picture of which
+topics each student
+has actually got</a:t>
             </a:r>
           </a:p>
         </p:txBody>
@@ -7707,7 +7325,7 @@
         </p:nvCxnSpPr>
         <p:spPr>
           <a:xfrm>
-            <a:off x="8759952" y="1801368"/>
+            <a:off x="8759952" y="1856232"/>
             <a:ext cx="292608" cy="0"/>
           </a:xfrm>
           <a:prstGeom prst="line">
@@ -7744,7 +7362,7 @@
         <p:spPr>
           <a:xfrm>
             <a:off x="9052560" y="1115568"/>
-            <a:ext cx="2615184" cy="1371600"/>
+            <a:ext cx="2615184" cy="1481328"/>
           </a:xfrm>
           <a:prstGeom prst="roundRect">
             <a:avLst/>
@@ -7794,7 +7412,7 @@
                 <a:latin typeface="Arial"/>
                 <a:cs typeface="Arial" pitchFamily="34" charset="0"/>
               </a:rPr>
-              <a:t>L3  ACTION</a:t>
+              <a:t>4.  ACT</a:t>
             </a:r>
           </a:p>
           <a:p>
@@ -7812,9 +7430,9 @@
                 <a:latin typeface="Arial"/>
                 <a:cs typeface="Arial" pitchFamily="34" charset="0"/>
               </a:rPr>
-              <a:t>remediation · re-teach
-early warning
-CO–PO attainment</a:t>
+              <a:t>tell students what to revise,
+tell teachers what to reteach,
+report on the course</a:t>
             </a:r>
           </a:p>
         </p:txBody>
@@ -7827,7 +7445,7 @@
         </p:nvSpPr>
         <p:spPr>
           <a:xfrm>
-            <a:off x="329184" y="2542032"/>
+            <a:off x="329184" y="2651760"/>
             <a:ext cx="11475720" cy="402336"/>
           </a:xfrm>
           <a:prstGeom prst="rect">
@@ -7846,14 +7464,14 @@
               <a:buNone/>
             </a:pPr>
             <a:r>
-              <a:rPr sz="900" b="1" i="0" u="none">
+              <a:rPr sz="1100" b="1" i="0" u="none">
                 <a:solidFill>
                   <a:srgbClr val="1F497D"/>
                 </a:solidFill>
                 <a:latin typeface="Arial"/>
                 <a:cs typeface="Arial" pitchFamily="34" charset="0"/>
               </a:rPr>
-              <a:t>The single field that connects L1 to L2 is RubricItem.concept_ids — without it you have twelve disconnected gradebooks; with it, every submission is evidence about a named competency.</a:t>
+              <a:t>Every mark is tied to a topic. That one link is what turns a pile of lab marks into a picture of what a student actually understands.</a:t>
             </a:r>
           </a:p>
         </p:txBody>
@@ -7999,8 +7617,8 @@
         </p:nvSpPr>
         <p:spPr bwMode="auto">
           <a:xfrm>
-            <a:off x="329184" y="1133856"/>
-            <a:ext cx="11503152" cy="4297680"/>
+            <a:off x="329184" y="1152144"/>
+            <a:ext cx="11503152" cy="4261104"/>
           </a:xfrm>
           <a:prstGeom prst="rect">
             <a:avLst/>
@@ -8064,7 +7682,7 @@
               </a:spcAft>
             </a:pPr>
             <a:r>
-              <a:rPr sz="1450" b="1" i="0" u="sng">
+              <a:rPr sz="1700" b="1" i="0" u="sng">
                 <a:solidFill>
                   <a:srgbClr val="1F497D"/>
                 </a:solidFill>
@@ -8086,14 +7704,14 @@
               </a:spcAft>
             </a:pPr>
             <a:r>
-              <a:rPr sz="1100" b="0" i="0" u="none">
+              <a:rPr sz="1400" b="0" i="0" u="none">
                 <a:solidFill>
                   <a:srgbClr val="1A1A1A"/>
                 </a:solidFill>
                 <a:latin typeface="Arial"/>
                 <a:cs typeface="Arial" pitchFamily="34" charset="0"/>
               </a:rPr>
-              <a:t>Every component is proven technology in isolation; the contribution is the concept-graph spine that connects them. Nothing here needs a research breakthrough.</a:t>
+              <a:t>It already works. Nothing here waits on a research breakthrough.</a:t>
             </a:r>
           </a:p>
           <a:p>
@@ -8108,14 +7726,14 @@
               </a:spcAft>
             </a:pPr>
             <a:r>
-              <a:rPr sz="1100" b="0" i="0" u="none">
+              <a:rPr sz="1400" b="0" i="0" u="none">
                 <a:solidFill>
                   <a:srgbClr val="1A1A1A"/>
                 </a:solidFill>
                 <a:latin typeface="Arial"/>
                 <a:cs typeface="Arial" pitchFamily="34" charset="0"/>
               </a:rPr>
-              <a:t>The prototype already grades a full cohort end to end on commodity hardware — no GPU, no paid API on the critical path, no network access inside the sandbox.</a:t>
+              <a:t>It runs on a normal laptop or a small college server, and setting up one lab takes a teacher about ten minutes.</a:t>
             </a:r>
           </a:p>
           <a:p>
@@ -8130,36 +7748,14 @@
               </a:spcAft>
             </a:pPr>
             <a:r>
-              <a:rPr sz="1100" b="0" i="0" u="none">
+              <a:rPr sz="1400" b="0" i="0" u="none">
                 <a:solidFill>
                   <a:srgbClr val="1A1A1A"/>
                 </a:solidFill>
                 <a:latin typeface="Arial"/>
                 <a:cs typeface="Arial" pitchFamily="34" charset="0"/>
               </a:rPr>
-              <a:t>The highest-cost input is roughly two hours of instructor time to author the concept graph once per course. Every insight in the platform traces back to it, and it is reused every semester.</a:t>
-            </a:r>
-          </a:p>
-          <a:p>
-            <a:pPr algn="just" marL="329184" indent="-219456">
-              <a:lnSpc>
-                <a:spcPct val="95000"/>
-              </a:lnSpc>
-              <a:buFont typeface="Arial" pitchFamily="34" charset="0"/>
-              <a:buChar char="•"/>
-              <a:spcAft>
-                <a:spcPts val="200"/>
-              </a:spcAft>
-            </a:pPr>
-            <a:r>
-              <a:rPr sz="1100" b="0" i="0" u="none">
-                <a:solidFill>
-                  <a:srgbClr val="1A1A1A"/>
-                </a:solidFill>
-                <a:latin typeface="Arial"/>
-                <a:cs typeface="Arial" pitchFamily="34" charset="0"/>
-              </a:rPr>
-              <a:t>Queue-backed autoscaling workers absorb the spike at a deadline, which is where naive designs fall over.</a:t>
+              <a:t>It fits into the tools a college already uses, so marks go back into the existing gradebook automatically.</a:t>
             </a:r>
           </a:p>
           <a:p>
@@ -8177,7 +7773,7 @@
               </a:spcAft>
             </a:pPr>
             <a:r>
-              <a:rPr sz="1450" b="1" i="0" u="sng">
+              <a:rPr sz="1700" b="1" i="0" u="sng">
                 <a:solidFill>
                   <a:srgbClr val="1F497D"/>
                 </a:solidFill>
@@ -8199,14 +7795,14 @@
               </a:spcAft>
             </a:pPr>
             <a:r>
-              <a:rPr sz="1100" b="0" i="0" u="none">
+              <a:rPr sz="1400" b="0" i="0" u="none">
                 <a:solidFill>
                   <a:srgbClr val="1A1A1A"/>
                 </a:solidFill>
                 <a:latin typeface="Arial"/>
                 <a:cs typeface="Arial" pitchFamily="34" charset="0"/>
               </a:rPr>
-              <a:t>Executing untrusted code written by capable people, at scale, on a deadline.</a:t>
+              <a:t>Student programs are run on our machine, and some of them will be badly behaved.</a:t>
             </a:r>
           </a:p>
           <a:p>
@@ -8221,14 +7817,14 @@
               </a:spcAft>
             </a:pPr>
             <a:r>
-              <a:rPr sz="1100" b="0" i="0" u="none">
+              <a:rPr sz="1400" b="0" i="0" u="none">
                 <a:solidFill>
                   <a:srgbClr val="1A1A1A"/>
                 </a:solidFill>
                 <a:latin typeface="Arial"/>
                 <a:cs typeface="Arial" pitchFamily="34" charset="0"/>
               </a:rPr>
-              <a:t>An LLM hallucinating an expected output and silently penalising a whole cohort.</a:t>
+              <a:t>Automatic marking can get things wrong, and a wrong mark destroys trust quickly.</a:t>
             </a:r>
           </a:p>
           <a:p>
@@ -8243,14 +7839,14 @@
               </a:spcAft>
             </a:pPr>
             <a:r>
-              <a:rPr sz="1100" b="0" i="0" u="none">
+              <a:rPr sz="1400" b="0" i="0" u="none">
                 <a:solidFill>
                   <a:srgbClr val="1A1A1A"/>
                 </a:solidFill>
                 <a:latin typeface="Arial"/>
                 <a:cs typeface="Arial" pitchFamily="34" charset="0"/>
               </a:rPr>
-              <a:t>Cold start: no labelled data in semester zero.</a:t>
+              <a:t>Wrongly accusing a student of copying is the most damaging mistake the system could make.</a:t>
             </a:r>
           </a:p>
           <a:p>
@@ -8265,58 +7861,14 @@
               </a:spcAft>
             </a:pPr>
             <a:r>
-              <a:rPr sz="1100" b="0" i="0" u="none">
+              <a:rPr sz="1400" b="0" i="0" u="none">
                 <a:solidFill>
                   <a:srgbClr val="1A1A1A"/>
                 </a:solidFill>
                 <a:latin typeface="Arial"/>
                 <a:cs typeface="Arial" pitchFamily="34" charset="0"/>
               </a:rPr>
-              <a:t>False plagiarism accusations — the highest-consequence error the system can make.</a:t>
-            </a:r>
-          </a:p>
-          <a:p>
-            <a:pPr algn="just" marL="329184" indent="-219456">
-              <a:lnSpc>
-                <a:spcPct val="95000"/>
-              </a:lnSpc>
-              <a:buFont typeface="Arial" pitchFamily="34" charset="0"/>
-              <a:buChar char="•"/>
-              <a:spcAft>
-                <a:spcPts val="200"/>
-              </a:spcAft>
-            </a:pPr>
-            <a:r>
-              <a:rPr sz="1100" b="0" i="0" u="none">
-                <a:solidFill>
-                  <a:srgbClr val="1A1A1A"/>
-                </a:solidFill>
-                <a:latin typeface="Arial"/>
-                <a:cs typeface="Arial" pitchFamily="34" charset="0"/>
-              </a:rPr>
-              <a:t>Faculty adoption: a tool that costs more time than it saves is abandoned regardless of model quality.</a:t>
-            </a:r>
-          </a:p>
-          <a:p>
-            <a:pPr algn="just" marL="329184" indent="-219456">
-              <a:lnSpc>
-                <a:spcPct val="95000"/>
-              </a:lnSpc>
-              <a:buFont typeface="Arial" pitchFamily="34" charset="0"/>
-              <a:buChar char="•"/>
-              <a:spcAft>
-                <a:spcPts val="200"/>
-              </a:spcAft>
-            </a:pPr>
-            <a:r>
-              <a:rPr sz="1100" b="0" i="0" u="none">
-                <a:solidFill>
-                  <a:srgbClr val="1A1A1A"/>
-                </a:solidFill>
-                <a:latin typeface="Arial"/>
-                <a:cs typeface="Arial" pitchFamily="34" charset="0"/>
-              </a:rPr>
-              <a:t>Demographic bias in the early-warning model.</a:t>
+              <a:t>Teachers will abandon anything that costs them more time than it saves.</a:t>
             </a:r>
           </a:p>
           <a:p>
@@ -8334,7 +7886,7 @@
               </a:spcAft>
             </a:pPr>
             <a:r>
-              <a:rPr sz="1450" b="1" i="0" u="sng">
+              <a:rPr sz="1700" b="1" i="0" u="sng">
                 <a:solidFill>
                   <a:srgbClr val="1F497D"/>
                 </a:solidFill>
@@ -8356,14 +7908,14 @@
               </a:spcAft>
             </a:pPr>
             <a:r>
-              <a:rPr sz="1100" b="0" i="0" u="none">
+              <a:rPr sz="1400" b="0" i="0" u="none">
                 <a:solidFill>
                   <a:srgbClr val="1A1A1A"/>
                 </a:solidFill>
                 <a:latin typeface="Arial"/>
                 <a:cs typeface="Arial" pitchFamily="34" charset="0"/>
               </a:rPr>
-              <a:t>Defence in depth: thirteen isolation layers, one-shot instances, workers holding nothing worth stealing, and the oracle kept outside the guest.</a:t>
+              <a:t>Every program runs sealed off from everything else, and is thrown away afterwards.</a:t>
             </a:r>
           </a:p>
           <a:p>
@@ -8378,14 +7930,14 @@
               </a:spcAft>
             </a:pPr>
             <a:r>
-              <a:rPr sz="1100" b="0" i="0" u="none">
+              <a:rPr sz="1400" b="0" i="0" u="none">
                 <a:solidFill>
                   <a:srgbClr val="1A1A1A"/>
                 </a:solidFill>
                 <a:latin typeface="Arial"/>
                 <a:cs typeface="Arial" pitchFamily="34" charset="0"/>
               </a:rPr>
-              <a:t>Every generated test executes against the instructor's reference solution before admission; more than ~20% failing halts authoring and flags the brief as ambiguous.</a:t>
+              <a:t>The system knows when it is unsure and sends those submissions to the teacher. Students can question any mark and get a human answer.</a:t>
             </a:r>
           </a:p>
           <a:p>
@@ -8400,14 +7952,14 @@
               </a:spcAft>
             </a:pPr>
             <a:r>
-              <a:rPr sz="1100" b="0" i="0" u="none">
+              <a:rPr sz="1400" b="0" i="0" u="none">
                 <a:solidFill>
                   <a:srgbClr val="1A1A1A"/>
                 </a:solidFill>
                 <a:latin typeface="Arial"/>
                 <a:cs typeface="Arial" pitchFamily="34" charset="0"/>
               </a:rPr>
-              <a:t>Unsupervised models (clustering, knowledge tracing) ship on day one; the LLM is a teacher that drafts and bootstraps, not a grader. Per-submission LLM cost trends to zero.</a:t>
+              <a:t>For copying, it only shows the overlapping lines side by side. The judgement stays with the teacher - the platform never accuses anyone.</a:t>
             </a:r>
           </a:p>
           <a:p>
@@ -8422,58 +7974,14 @@
               </a:spcAft>
             </a:pPr>
             <a:r>
-              <a:rPr sz="1100" b="0" i="0" u="none">
+              <a:rPr sz="1400" b="0" i="0" u="none">
                 <a:solidFill>
                   <a:srgbClr val="1A1A1A"/>
                 </a:solidFill>
                 <a:latin typeface="Arial"/>
                 <a:cs typeface="Arial" pitchFamily="34" charset="0"/>
               </a:rPr>
-              <a:t>Base-code and common-idiom exclusion plus cohort-relative outlier detection; similarity is surfaced as ranked evidence with aligned regions, and faculty decide.</a:t>
-            </a:r>
-          </a:p>
-          <a:p>
-            <a:pPr algn="just" marL="329184" indent="-219456">
-              <a:lnSpc>
-                <a:spcPct val="95000"/>
-              </a:lnSpc>
-              <a:buFont typeface="Arial" pitchFamily="34" charset="0"/>
-              <a:buChar char="•"/>
-              <a:spcAft>
-                <a:spcPts val="200"/>
-              </a:spcAft>
-            </a:pPr>
-            <a:r>
-              <a:rPr sz="1100" b="0" i="0" u="none">
-                <a:solidFill>
-                  <a:srgbClr val="1A1A1A"/>
-                </a:solidFill>
-                <a:latin typeface="Arial"/>
-                <a:cs typeface="Arial" pitchFamily="34" charset="0"/>
-              </a:rPr>
-              <a:t>A ten-minute authoring budget and gradebook writeback so faculty never maintain two gradebooks; every override is captured as training data.</a:t>
-            </a:r>
-          </a:p>
-          <a:p>
-            <a:pPr algn="just" marL="329184" indent="-219456">
-              <a:lnSpc>
-                <a:spcPct val="95000"/>
-              </a:lnSpc>
-              <a:buFont typeface="Arial" pitchFamily="34" charset="0"/>
-              <a:buChar char="•"/>
-              <a:spcAft>
-                <a:spcPts val="200"/>
-              </a:spcAft>
-            </a:pPr>
-            <a:r>
-              <a:rPr sz="1100" b="0" i="0" u="none">
-                <a:solidFill>
-                  <a:srgbClr val="1A1A1A"/>
-                </a:solidFill>
-                <a:latin typeface="Arial"/>
-                <a:cs typeface="Arial" pitchFamily="34" charset="0"/>
-              </a:rPr>
-              <a:t>A demographic bias audit that blocks deployment when flag rates differ by more than 5% across any protected group, re-run every semester.</a:t>
+              <a:t>Set-up is ten minutes, marks flow back into the existing gradebook, and every correction a teacher makes teaches the system to do better next time.</a:t>
             </a:r>
           </a:p>
         </p:txBody>
@@ -8722,7 +8230,7 @@
         <p:spPr>
           <a:xfrm>
             <a:off x="310896" y="5504688"/>
-            <a:ext cx="2724912" cy="694944"/>
+            <a:ext cx="3712464" cy="694944"/>
           </a:xfrm>
           <a:prstGeom prst="roundRect">
             <a:avLst/>
@@ -8762,14 +8270,14 @@
               <a:buNone/>
             </a:pPr>
             <a:r>
-              <a:rPr sz="1500" b="1" i="0" u="none">
+              <a:rPr sz="1600" b="1" i="0" u="none">
                 <a:solidFill>
                   <a:srgbClr val="1F497D"/>
                 </a:solidFill>
                 <a:latin typeface="Arial"/>
                 <a:cs typeface="Arial" pitchFamily="34" charset="0"/>
               </a:rPr>
-              <a:t>&lt; 90 s</a:t>
+              <a:t>Already built</a:t>
             </a:r>
           </a:p>
           <a:p>
@@ -8780,14 +8288,14 @@
               <a:buNone/>
             </a:pPr>
             <a:r>
-              <a:rPr sz="800" b="0" i="0" u="none">
+              <a:rPr sz="1000" b="0" i="0" u="none">
                 <a:solidFill>
                   <a:srgbClr val="1A1A1A"/>
                 </a:solidFill>
                 <a:latin typeface="Arial"/>
                 <a:cs typeface="Arial" pitchFamily="34" charset="0"/>
               </a:rPr>
-              <a:t>to grade a 24-student, four-lab cohort end to end on a laptop</a:t>
+              <a:t>a full class of 24 students and four labs, marked end to end</a:t>
             </a:r>
           </a:p>
         </p:txBody>
@@ -8800,8 +8308,8 @@
         </p:nvSpPr>
         <p:spPr>
           <a:xfrm>
-            <a:off x="3236976" y="5504688"/>
-            <a:ext cx="2724912" cy="694944"/>
+            <a:off x="4242816" y="5504688"/>
+            <a:ext cx="3712464" cy="694944"/>
           </a:xfrm>
           <a:prstGeom prst="roundRect">
             <a:avLst/>
@@ -8841,14 +8349,14 @@
               <a:buNone/>
             </a:pPr>
             <a:r>
-              <a:rPr sz="1500" b="1" i="0" u="none">
+              <a:rPr sz="1600" b="1" i="0" u="none">
                 <a:solidFill>
                   <a:srgbClr val="1F497D"/>
                 </a:solidFill>
                 <a:latin typeface="Arial"/>
                 <a:cs typeface="Arial" pitchFamily="34" charset="0"/>
               </a:rPr>
-              <a:t>0</a:t>
+              <a:t>~10 minutes</a:t>
             </a:r>
           </a:p>
           <a:p>
@@ -8859,14 +8367,14 @@
               <a:buNone/>
             </a:pPr>
             <a:r>
-              <a:rPr sz="800" b="0" i="0" u="none">
+              <a:rPr sz="1000" b="0" i="0" u="none">
                 <a:solidFill>
                   <a:srgbClr val="1A1A1A"/>
                 </a:solidFill>
                 <a:latin typeface="Arial"/>
                 <a:cs typeface="Arial" pitchFamily="34" charset="0"/>
               </a:rPr>
-              <a:t>GPUs, paid API calls, or network access needed at grading time</a:t>
+              <a:t>for a teacher to set up one lab</a:t>
             </a:r>
           </a:p>
         </p:txBody>
@@ -8879,8 +8387,8 @@
         </p:nvSpPr>
         <p:spPr>
           <a:xfrm>
-            <a:off x="6163056" y="5504688"/>
-            <a:ext cx="2724912" cy="694944"/>
+            <a:off x="8174736" y="5504688"/>
+            <a:ext cx="3712464" cy="694944"/>
           </a:xfrm>
           <a:prstGeom prst="roundRect">
             <a:avLst/>
@@ -8920,14 +8428,14 @@
               <a:buNone/>
             </a:pPr>
             <a:r>
-              <a:rPr sz="1500" b="1" i="0" u="none">
+              <a:rPr sz="1600" b="1" i="0" u="none">
                 <a:solidFill>
                   <a:srgbClr val="1F497D"/>
                 </a:solidFill>
                 <a:latin typeface="Arial"/>
                 <a:cs typeface="Arial" pitchFamily="34" charset="0"/>
               </a:rPr>
-              <a:t>~2 h</a:t>
+              <a:t>No extra cost</a:t>
             </a:r>
           </a:p>
           <a:p>
@@ -8938,93 +8446,14 @@
               <a:buNone/>
             </a:pPr>
             <a:r>
-              <a:rPr sz="800" b="0" i="0" u="none">
+              <a:rPr sz="1000" b="0" i="0" u="none">
                 <a:solidFill>
                   <a:srgbClr val="1A1A1A"/>
                 </a:solidFill>
                 <a:latin typeface="Arial"/>
                 <a:cs typeface="Arial" pitchFamily="34" charset="0"/>
               </a:rPr>
-              <a:t>of instructor time to author the concept graph, once per course</a:t>
-            </a:r>
-          </a:p>
-        </p:txBody>
-      </p:sp>
-      <p:sp>
-        <p:nvSpPr>
-          <p:cNvPr id="17414" name="Rounded Rectangle 17413"/>
-          <p:cNvSpPr/>
-          <p:nvPr/>
-        </p:nvSpPr>
-        <p:spPr>
-          <a:xfrm>
-            <a:off x="9089136" y="5504688"/>
-            <a:ext cx="2724912" cy="694944"/>
-          </a:xfrm>
-          <a:prstGeom prst="roundRect">
-            <a:avLst/>
-          </a:prstGeom>
-          <a:solidFill>
-            <a:srgbClr val="ECF2F9"/>
-          </a:solidFill>
-          <a:ln w="9525">
-            <a:solidFill>
-              <a:srgbClr val="4F81BD"/>
-            </a:solidFill>
-          </a:ln>
-          <a:effectLst/>
-        </p:spPr>
-        <p:style>
-          <a:lnRef idx="1">
-            <a:schemeClr val="accent1"/>
-          </a:lnRef>
-          <a:fillRef idx="3">
-            <a:schemeClr val="accent1"/>
-          </a:fillRef>
-          <a:effectRef idx="2">
-            <a:schemeClr val="accent1"/>
-          </a:effectRef>
-          <a:fontRef idx="minor">
-            <a:schemeClr val="lt1"/>
-          </a:fontRef>
-        </p:style>
-        <p:txBody>
-          <a:bodyPr rtlCol="0" anchor="ctr" wrap="square" lIns="45720" rIns="45720" tIns="22860" bIns="22860"/>
-          <a:lstStyle/>
-          <a:p>
-            <a:pPr algn="ctr" marL="0" indent="0">
-              <a:lnSpc>
-                <a:spcPct val="90000"/>
-              </a:lnSpc>
-              <a:buNone/>
-            </a:pPr>
-            <a:r>
-              <a:rPr sz="1500" b="1" i="0" u="none">
-                <a:solidFill>
-                  <a:srgbClr val="1F497D"/>
-                </a:solidFill>
-                <a:latin typeface="Arial"/>
-                <a:cs typeface="Arial" pitchFamily="34" charset="0"/>
-              </a:rPr>
-              <a:t>&gt; 20 %</a:t>
-            </a:r>
-          </a:p>
-          <a:p>
-            <a:pPr algn="ctr" marL="0" indent="0">
-              <a:lnSpc>
-                <a:spcPct val="88000"/>
-              </a:lnSpc>
-              <a:buNone/>
-            </a:pPr>
-            <a:r>
-              <a:rPr sz="800" b="0" i="0" u="none">
-                <a:solidFill>
-                  <a:srgbClr val="1A1A1A"/>
-                </a:solidFill>
-                <a:latin typeface="Arial"/>
-                <a:cs typeface="Arial" pitchFamily="34" charset="0"/>
-              </a:rPr>
-              <a:t>reference-test failure halts authoring and flags an ambiguous brief</a:t>
+              <a:t>runs on ordinary hardware, no paid AI service to mark work</a:t>
             </a:r>
           </a:p>
         </p:txBody>
@@ -9175,8 +8604,8 @@
         </p:nvSpPr>
         <p:spPr bwMode="auto">
           <a:xfrm>
-            <a:off x="329184" y="1133856"/>
-            <a:ext cx="11503152" cy="4297680"/>
+            <a:off x="329184" y="1152144"/>
+            <a:ext cx="11503152" cy="5029200"/>
           </a:xfrm>
           <a:prstGeom prst="rect">
             <a:avLst/>
@@ -9226,7 +8655,7 @@
               </a:spcAft>
             </a:pPr>
             <a:r>
-              <a:rPr sz="1450" b="1" i="0" u="sng">
+              <a:rPr sz="1700" b="1" i="0" u="sng">
                 <a:solidFill>
                   <a:srgbClr val="1F497D"/>
                 </a:solidFill>
@@ -9248,14 +8677,14 @@
               </a:spcAft>
             </a:pPr>
             <a:r>
-              <a:rPr sz="1200" b="0" i="0" u="none">
+              <a:rPr sz="1500" b="0" i="0" u="none">
                 <a:solidFill>
                   <a:srgbClr val="1A1A1A"/>
                 </a:solidFill>
                 <a:latin typeface="Arial"/>
                 <a:cs typeface="Arial" pitchFamily="34" charset="0"/>
               </a:rPr>
-              <a:t>Students — feedback that is evidence rather than a number: "Empty-input handling 0/8. Test 11 crashed with IndexError at solution.py:14. No length guard found on the input path." A ranked next action with the reason, and one-click appeal on any rubric item.</a:t>
+              <a:t>Students stop guessing why they lost marks. Instead of "72/100" they see "your program crashes when the list is empty" - and which topic to revise because of it.</a:t>
             </a:r>
           </a:p>
           <a:p>
@@ -9270,14 +8699,14 @@
               </a:spcAft>
             </a:pPr>
             <a:r>
-              <a:rPr sz="1200" b="0" i="0" u="none">
+              <a:rPr sz="1500" b="0" i="0" u="none">
                 <a:solidFill>
                   <a:srgbClr val="1A1A1A"/>
                 </a:solidFill>
                 <a:latin typeface="Arial"/>
                 <a:cs typeface="Arial" pitchFamily="34" charset="0"/>
               </a:rPr>
-              <a:t>Faculty — a course-health landing view that answers what to re-teach, ranked by how many later concepts depend on it, plus alerts for rubric items that are measuring nothing.</a:t>
+              <a:t>Teachers get their marking hours back, and get told what the class did not understand while there is still time to teach it again.</a:t>
             </a:r>
           </a:p>
           <a:p>
@@ -9292,14 +8721,14 @@
               </a:spcAft>
             </a:pPr>
             <a:r>
-              <a:rPr sz="1200" b="0" i="0" u="none">
+              <a:rPr sz="1500" b="0" i="0" u="none">
                 <a:solidFill>
                   <a:srgbClr val="1A1A1A"/>
                 </a:solidFill>
                 <a:latin typeface="Arial"/>
                 <a:cs typeface="Arial" pitchFamily="34" charset="0"/>
               </a:rPr>
-              <a:t>Administrators — live CO–PO attainment with per-student traceability down to individual submissions, and an at-risk view that routes to advising rather than to sanction.</a:t>
+              <a:t>Heads of department see how the course is performing against its stated outcomes, live, instead of reconstructing it at the end of the year.</a:t>
             </a:r>
           </a:p>
           <a:p>
@@ -9317,7 +8746,7 @@
               </a:spcAft>
             </a:pPr>
             <a:r>
-              <a:rPr sz="1450" b="1" i="0" u="sng">
+              <a:rPr sz="1700" b="1" i="0" u="sng">
                 <a:solidFill>
                   <a:srgbClr val="1F497D"/>
                 </a:solidFill>
@@ -9339,14 +8768,14 @@
               </a:spcAft>
             </a:pPr>
             <a:r>
-              <a:rPr sz="1200" b="0" i="0" u="none">
+              <a:rPr sz="1500" b="0" i="0" u="none">
                 <a:solidFill>
                   <a:srgbClr val="1A1A1A"/>
                 </a:solidFill>
                 <a:latin typeface="Arial"/>
                 <a:cs typeface="Arial" pitchFamily="34" charset="0"/>
               </a:rPr>
-              <a:t>Social — grading a student can interrogate, contest, and understand. A missing delimiter stops being worth a hundred percent of the marks. Early warning is a support route by design, and its bias audit is mandatory.</a:t>
+              <a:t>Fairer marking. Every student is marked to the same standard, every mark comes with a reason, and any student can question any mark.</a:t>
             </a:r>
           </a:p>
           <a:p>
@@ -9361,14 +8790,14 @@
               </a:spcAft>
             </a:pPr>
             <a:r>
-              <a:rPr sz="1200" b="0" i="0" u="none">
+              <a:rPr sz="1500" b="0" i="0" u="none">
                 <a:solidFill>
                   <a:srgbClr val="1A1A1A"/>
                 </a:solidFill>
                 <a:latin typeface="Arial"/>
                 <a:cs typeface="Arial" pitchFamily="34" charset="0"/>
               </a:rPr>
-              <a:t>Academic — a misconception library and a mastery model that persist across semesters, so what a cohort got wrong in 2026 informs how the topic is taught in 2027.</a:t>
+              <a:t>Time and cost saved. Marking a lab of sixty students goes from an evening's work to reviewing the handful the system was unsure about.</a:t>
             </a:r>
           </a:p>
           <a:p>
@@ -9383,14 +8812,14 @@
               </a:spcAft>
             </a:pPr>
             <a:r>
-              <a:rPr sz="1200" b="0" i="0" u="none">
+              <a:rPr sz="1500" b="0" i="0" u="none">
                 <a:solidFill>
                   <a:srgbClr val="1A1A1A"/>
                 </a:solidFill>
                 <a:latin typeface="Arial"/>
                 <a:cs typeface="Arial" pitchFamily="34" charset="0"/>
               </a:rPr>
-              <a:t>Economic — faculty minutes per assignment fall semester over semester as auto-release coverage rises; NBA/NAAC attainment reporting collapses from weeks of manual work into a live view.</a:t>
+              <a:t>Accreditation reporting for NBA and NAAC, which takes weeks of manual work today, becomes a report that is always up to date.</a:t>
             </a:r>
           </a:p>
           <a:p>
@@ -9405,36 +8834,14 @@
               </a:spcAft>
             </a:pPr>
             <a:r>
-              <a:rPr sz="1200" b="0" i="0" u="none">
+              <a:rPr sz="1500" b="0" i="0" u="none">
                 <a:solidFill>
                   <a:srgbClr val="1A1A1A"/>
                 </a:solidFill>
                 <a:latin typeface="Arial"/>
                 <a:cs typeface="Arial" pitchFamily="34" charset="0"/>
               </a:rPr>
-              <a:t>Operational — deterministic-first design means most of the pipeline is a parser and a test runner, so it runs on ordinary institutional hardware with no GPU and no per-submission API spend.</a:t>
-            </a:r>
-          </a:p>
-          <a:p>
-            <a:pPr algn="just" marL="329184" indent="-219456">
-              <a:lnSpc>
-                <a:spcPct val="95000"/>
-              </a:lnSpc>
-              <a:buFont typeface="Arial" pitchFamily="34" charset="0"/>
-              <a:buChar char="•"/>
-              <a:spcAft>
-                <a:spcPts val="200"/>
-              </a:spcAft>
-            </a:pPr>
-            <a:r>
-              <a:rPr sz="1200" b="0" i="0" u="none">
-                <a:solidFill>
-                  <a:srgbClr val="1A1A1A"/>
-                </a:solidFill>
-                <a:latin typeface="Arial"/>
-                <a:cs typeface="Arial" pitchFamily="34" charset="0"/>
-              </a:rPr>
-              <a:t>Equity — mastery is inferred from evidence the student generated, disclosed to them, and auditable; protected attributes are used only to audit the model, never as features.</a:t>
+              <a:t>Weaker students are spotted early and offered help, rather than discovered at the end of the semester when nothing can be done.</a:t>
             </a:r>
           </a:p>
         </p:txBody>
@@ -9674,322 +9081,6 @@
           </a:prstGeom>
         </p:spPr>
       </p:pic>
-      <p:sp>
-        <p:nvSpPr>
-          <p:cNvPr id="17411" name="Rounded Rectangle 17410"/>
-          <p:cNvSpPr/>
-          <p:nvPr/>
-        </p:nvSpPr>
-        <p:spPr>
-          <a:xfrm>
-            <a:off x="310896" y="5504688"/>
-            <a:ext cx="2724912" cy="694944"/>
-          </a:xfrm>
-          <a:prstGeom prst="roundRect">
-            <a:avLst/>
-          </a:prstGeom>
-          <a:solidFill>
-            <a:srgbClr val="ECF2F9"/>
-          </a:solidFill>
-          <a:ln w="9525">
-            <a:solidFill>
-              <a:srgbClr val="4F81BD"/>
-            </a:solidFill>
-          </a:ln>
-          <a:effectLst/>
-        </p:spPr>
-        <p:style>
-          <a:lnRef idx="1">
-            <a:schemeClr val="accent1"/>
-          </a:lnRef>
-          <a:fillRef idx="3">
-            <a:schemeClr val="accent1"/>
-          </a:fillRef>
-          <a:effectRef idx="2">
-            <a:schemeClr val="accent1"/>
-          </a:effectRef>
-          <a:fontRef idx="minor">
-            <a:schemeClr val="lt1"/>
-          </a:fontRef>
-        </p:style>
-        <p:txBody>
-          <a:bodyPr rtlCol="0" anchor="ctr" wrap="square" lIns="45720" rIns="45720" tIns="22860" bIns="22860"/>
-          <a:lstStyle/>
-          <a:p>
-            <a:pPr algn="ctr" marL="0" indent="0">
-              <a:lnSpc>
-                <a:spcPct val="90000"/>
-              </a:lnSpc>
-              <a:buNone/>
-            </a:pPr>
-            <a:r>
-              <a:rPr sz="1500" b="1" i="0" u="none">
-                <a:solidFill>
-                  <a:srgbClr val="1F497D"/>
-                </a:solidFill>
-                <a:latin typeface="Arial"/>
-                <a:cs typeface="Arial" pitchFamily="34" charset="0"/>
-              </a:rPr>
-              <a:t>70 %</a:t>
-            </a:r>
-          </a:p>
-          <a:p>
-            <a:pPr algn="ctr" marL="0" indent="0">
-              <a:lnSpc>
-                <a:spcPct val="88000"/>
-              </a:lnSpc>
-              <a:buNone/>
-            </a:pPr>
-            <a:r>
-              <a:rPr sz="800" b="0" i="0" u="none">
-                <a:solidFill>
-                  <a:srgbClr val="1A1A1A"/>
-                </a:solidFill>
-                <a:latin typeface="Arial"/>
-                <a:cs typeface="Arial" pitchFamily="34" charset="0"/>
-              </a:rPr>
-              <a:t>auto-release coverage target by semester 2, at under 3% override rate</a:t>
-            </a:r>
-          </a:p>
-        </p:txBody>
-      </p:sp>
-      <p:sp>
-        <p:nvSpPr>
-          <p:cNvPr id="17412" name="Rounded Rectangle 17411"/>
-          <p:cNvSpPr/>
-          <p:nvPr/>
-        </p:nvSpPr>
-        <p:spPr>
-          <a:xfrm>
-            <a:off x="3236976" y="5504688"/>
-            <a:ext cx="2724912" cy="694944"/>
-          </a:xfrm>
-          <a:prstGeom prst="roundRect">
-            <a:avLst/>
-          </a:prstGeom>
-          <a:solidFill>
-            <a:srgbClr val="ECF2F9"/>
-          </a:solidFill>
-          <a:ln w="9525">
-            <a:solidFill>
-              <a:srgbClr val="4F81BD"/>
-            </a:solidFill>
-          </a:ln>
-          <a:effectLst/>
-        </p:spPr>
-        <p:style>
-          <a:lnRef idx="1">
-            <a:schemeClr val="accent1"/>
-          </a:lnRef>
-          <a:fillRef idx="3">
-            <a:schemeClr val="accent1"/>
-          </a:fillRef>
-          <a:effectRef idx="2">
-            <a:schemeClr val="accent1"/>
-          </a:effectRef>
-          <a:fontRef idx="minor">
-            <a:schemeClr val="lt1"/>
-          </a:fontRef>
-        </p:style>
-        <p:txBody>
-          <a:bodyPr rtlCol="0" anchor="ctr" wrap="square" lIns="45720" rIns="45720" tIns="22860" bIns="22860"/>
-          <a:lstStyle/>
-          <a:p>
-            <a:pPr algn="ctr" marL="0" indent="0">
-              <a:lnSpc>
-                <a:spcPct val="90000"/>
-              </a:lnSpc>
-              <a:buNone/>
-            </a:pPr>
-            <a:r>
-              <a:rPr sz="1500" b="1" i="0" u="none">
-                <a:solidFill>
-                  <a:srgbClr val="1F497D"/>
-                </a:solidFill>
-                <a:latin typeface="Arial"/>
-                <a:cs typeface="Arial" pitchFamily="34" charset="0"/>
-              </a:rPr>
-              <a:t>&lt; 3 min</a:t>
-            </a:r>
-          </a:p>
-          <a:p>
-            <a:pPr algn="ctr" marL="0" indent="0">
-              <a:lnSpc>
-                <a:spcPct val="88000"/>
-              </a:lnSpc>
-              <a:buNone/>
-            </a:pPr>
-            <a:r>
-              <a:rPr sz="800" b="0" i="0" u="none">
-                <a:solidFill>
-                  <a:srgbClr val="1A1A1A"/>
-                </a:solidFill>
-                <a:latin typeface="Arial"/>
-                <a:cs typeface="Arial" pitchFamily="34" charset="0"/>
-              </a:rPr>
-              <a:t>p95 feedback latency target - feedback loses pedagogical value fast</a:t>
-            </a:r>
-          </a:p>
-        </p:txBody>
-      </p:sp>
-      <p:sp>
-        <p:nvSpPr>
-          <p:cNvPr id="17413" name="Rounded Rectangle 17412"/>
-          <p:cNvSpPr/>
-          <p:nvPr/>
-        </p:nvSpPr>
-        <p:spPr>
-          <a:xfrm>
-            <a:off x="6163056" y="5504688"/>
-            <a:ext cx="2724912" cy="694944"/>
-          </a:xfrm>
-          <a:prstGeom prst="roundRect">
-            <a:avLst/>
-          </a:prstGeom>
-          <a:solidFill>
-            <a:srgbClr val="ECF2F9"/>
-          </a:solidFill>
-          <a:ln w="9525">
-            <a:solidFill>
-              <a:srgbClr val="4F81BD"/>
-            </a:solidFill>
-          </a:ln>
-          <a:effectLst/>
-        </p:spPr>
-        <p:style>
-          <a:lnRef idx="1">
-            <a:schemeClr val="accent1"/>
-          </a:lnRef>
-          <a:fillRef idx="3">
-            <a:schemeClr val="accent1"/>
-          </a:fillRef>
-          <a:effectRef idx="2">
-            <a:schemeClr val="accent1"/>
-          </a:effectRef>
-          <a:fontRef idx="minor">
-            <a:schemeClr val="lt1"/>
-          </a:fontRef>
-        </p:style>
-        <p:txBody>
-          <a:bodyPr rtlCol="0" anchor="ctr" wrap="square" lIns="45720" rIns="45720" tIns="22860" bIns="22860"/>
-          <a:lstStyle/>
-          <a:p>
-            <a:pPr algn="ctr" marL="0" indent="0">
-              <a:lnSpc>
-                <a:spcPct val="90000"/>
-              </a:lnSpc>
-              <a:buNone/>
-            </a:pPr>
-            <a:r>
-              <a:rPr sz="1500" b="1" i="0" u="none">
-                <a:solidFill>
-                  <a:srgbClr val="1F497D"/>
-                </a:solidFill>
-                <a:latin typeface="Arial"/>
-                <a:cs typeface="Arial" pitchFamily="34" charset="0"/>
-              </a:rPr>
-              <a:t>3 weeks</a:t>
-            </a:r>
-          </a:p>
-          <a:p>
-            <a:pPr algn="ctr" marL="0" indent="0">
-              <a:lnSpc>
-                <a:spcPct val="88000"/>
-              </a:lnSpc>
-              <a:buNone/>
-            </a:pPr>
-            <a:r>
-              <a:rPr sz="800" b="0" i="0" u="none">
-                <a:solidFill>
-                  <a:srgbClr val="1A1A1A"/>
-                </a:solidFill>
-                <a:latin typeface="Arial"/>
-                <a:cs typeface="Arial" pitchFamily="34" charset="0"/>
-              </a:rPr>
-              <a:t>early-warning lead time before failure, routed to support</a:t>
-            </a:r>
-          </a:p>
-        </p:txBody>
-      </p:sp>
-      <p:sp>
-        <p:nvSpPr>
-          <p:cNvPr id="17414" name="Rounded Rectangle 17413"/>
-          <p:cNvSpPr/>
-          <p:nvPr/>
-        </p:nvSpPr>
-        <p:spPr>
-          <a:xfrm>
-            <a:off x="9089136" y="5504688"/>
-            <a:ext cx="2724912" cy="694944"/>
-          </a:xfrm>
-          <a:prstGeom prst="roundRect">
-            <a:avLst/>
-          </a:prstGeom>
-          <a:solidFill>
-            <a:srgbClr val="ECF2F9"/>
-          </a:solidFill>
-          <a:ln w="9525">
-            <a:solidFill>
-              <a:srgbClr val="4F81BD"/>
-            </a:solidFill>
-          </a:ln>
-          <a:effectLst/>
-        </p:spPr>
-        <p:style>
-          <a:lnRef idx="1">
-            <a:schemeClr val="accent1"/>
-          </a:lnRef>
-          <a:fillRef idx="3">
-            <a:schemeClr val="accent1"/>
-          </a:fillRef>
-          <a:effectRef idx="2">
-            <a:schemeClr val="accent1"/>
-          </a:effectRef>
-          <a:fontRef idx="minor">
-            <a:schemeClr val="lt1"/>
-          </a:fontRef>
-        </p:style>
-        <p:txBody>
-          <a:bodyPr rtlCol="0" anchor="ctr" wrap="square" lIns="45720" rIns="45720" tIns="22860" bIns="22860"/>
-          <a:lstStyle/>
-          <a:p>
-            <a:pPr algn="ctr" marL="0" indent="0">
-              <a:lnSpc>
-                <a:spcPct val="90000"/>
-              </a:lnSpc>
-              <a:buNone/>
-            </a:pPr>
-            <a:r>
-              <a:rPr sz="1500" b="1" i="0" u="none">
-                <a:solidFill>
-                  <a:srgbClr val="1F497D"/>
-                </a:solidFill>
-                <a:latin typeface="Arial"/>
-                <a:cs typeface="Arial" pitchFamily="34" charset="0"/>
-              </a:rPr>
-              <a:t>&lt; 5 %</a:t>
-            </a:r>
-          </a:p>
-          <a:p>
-            <a:pPr algn="ctr" marL="0" indent="0">
-              <a:lnSpc>
-                <a:spcPct val="88000"/>
-              </a:lnSpc>
-              <a:buNone/>
-            </a:pPr>
-            <a:r>
-              <a:rPr sz="800" b="0" i="0" u="none">
-                <a:solidFill>
-                  <a:srgbClr val="1A1A1A"/>
-                </a:solidFill>
-                <a:latin typeface="Arial"/>
-                <a:cs typeface="Arial" pitchFamily="34" charset="0"/>
-              </a:rPr>
-              <a:t>maximum early-warning flag-rate gap across any protected group</a:t>
-            </a:r>
-          </a:p>
-        </p:txBody>
-      </p:sp>
     </p:spTree>
     <p:extLst>
       <p:ext uri="{BB962C8B-B14F-4D97-AF65-F5344CB8AC3E}">
@@ -10136,8 +9227,8 @@
         </p:nvSpPr>
         <p:spPr bwMode="auto">
           <a:xfrm>
-            <a:off x="329184" y="1133856"/>
-            <a:ext cx="11503152" cy="4297680"/>
+            <a:off x="329184" y="1152144"/>
+            <a:ext cx="11503152" cy="4261104"/>
           </a:xfrm>
           <a:prstGeom prst="rect">
             <a:avLst/>
@@ -10161,11 +9252,11 @@
               <a:buFont typeface="Wingdings" pitchFamily="34" charset="0"/>
               <a:buChar char="v"/>
               <a:spcAft>
-                <a:spcPts val="700"/>
+                <a:spcPts val="900"/>
               </a:spcAft>
             </a:pPr>
             <a:r>
-              <a:rPr sz="1500" b="1" i="0" u="sng">
+              <a:rPr sz="1700" b="1" i="0" u="sng">
                 <a:solidFill>
                   <a:srgbClr val="1F497D"/>
                 </a:solidFill>
@@ -10183,21 +9274,21 @@
               <a:buFont typeface="Arial" pitchFamily="34" charset="0"/>
               <a:buChar char="•"/>
               <a:spcBef>
-                <a:spcPts val="300"/>
+                <a:spcPts val="500"/>
               </a:spcBef>
               <a:spcAft>
-                <a:spcPts val="100"/>
+                <a:spcPts val="200"/>
               </a:spcAft>
             </a:pPr>
             <a:r>
-              <a:rPr sz="1200" b="1" i="0" u="none">
+              <a:rPr sz="1400" b="1" i="0" u="none">
                 <a:solidFill>
                   <a:srgbClr val="0070C0"/>
                 </a:solidFill>
                 <a:latin typeface="Arial"/>
                 <a:cs typeface="Arial" pitchFamily="34" charset="0"/>
               </a:rPr>
-              <a:t>Integrity and code similarity</a:t>
+              <a:t>Checking for copied code</a:t>
             </a:r>
           </a:p>
           <a:p>
@@ -10208,18 +9299,43 @@
               <a:buFont typeface="Arial" pitchFamily="34" charset="0"/>
               <a:buChar char="–"/>
               <a:spcAft>
-                <a:spcPts val="100"/>
+                <a:spcPts val="300"/>
               </a:spcAft>
             </a:pPr>
             <a:r>
-              <a:rPr sz="1000" b="0" i="0" u="none">
+              <a:rPr sz="1250" b="0" i="0" u="none">
                 <a:solidFill>
                   <a:srgbClr val="1A1A1A"/>
                 </a:solidFill>
                 <a:latin typeface="Arial"/>
                 <a:cs typeface="Arial" pitchFamily="34" charset="0"/>
               </a:rPr>
-              <a:t>Schleimer, Wilkerson &amp; Aiken — "Winnowing: Local Algorithms for Document Fingerprinting", ACM SIGMOD 2003 (the MOSS algorithm).</a:t>
+              <a:t>Schleimer, Wilkerson &amp; Aiken, "Winnowing: Local Algorithms for Document Fingerprinting", ACM SIGMOD 2003 - the method behind MOSS, used by universities worldwide.</a:t>
+            </a:r>
+          </a:p>
+          <a:p>
+            <a:pPr algn="l" marL="219456" indent="-219456">
+              <a:lnSpc>
+                <a:spcPct val="95000"/>
+              </a:lnSpc>
+              <a:buFont typeface="Arial" pitchFamily="34" charset="0"/>
+              <a:buChar char="•"/>
+              <a:spcBef>
+                <a:spcPts val="500"/>
+              </a:spcBef>
+              <a:spcAft>
+                <a:spcPts val="200"/>
+              </a:spcAft>
+            </a:pPr>
+            <a:r>
+              <a:rPr sz="1400" b="1" i="0" u="none">
+                <a:solidFill>
+                  <a:srgbClr val="0070C0"/>
+                </a:solidFill>
+                <a:latin typeface="Arial"/>
+                <a:cs typeface="Arial" pitchFamily="34" charset="0"/>
+              </a:rPr>
+              <a:t>Tracking what a student knows</a:t>
             </a:r>
           </a:p>
           <a:p>
@@ -10230,18 +9346,40 @@
               <a:buFont typeface="Arial" pitchFamily="34" charset="0"/>
               <a:buChar char="–"/>
               <a:spcAft>
-                <a:spcPts val="100"/>
+                <a:spcPts val="300"/>
               </a:spcAft>
             </a:pPr>
             <a:r>
-              <a:rPr sz="1000" b="0" i="0" u="none">
+              <a:rPr sz="1250" b="0" i="0" u="none">
                 <a:solidFill>
                   <a:srgbClr val="1A1A1A"/>
                 </a:solidFill>
                 <a:latin typeface="Arial"/>
                 <a:cs typeface="Arial" pitchFamily="34" charset="0"/>
               </a:rPr>
-              <a:t>Ragkhitwetsagul, Krinke &amp; Clark — "A comparison of code similarity analysers", Empirical Software Engineering, 2018.</a:t>
+              <a:t>Corbett &amp; Anderson, "Knowledge Tracing", User Modeling and User-Adapted Interaction, 1994 - the standard model for estimating mastery from performance.</a:t>
+            </a:r>
+          </a:p>
+          <a:p>
+            <a:pPr algn="l" marL="493776" indent="-219456">
+              <a:lnSpc>
+                <a:spcPct val="95000"/>
+              </a:lnSpc>
+              <a:buFont typeface="Arial" pitchFamily="34" charset="0"/>
+              <a:buChar char="–"/>
+              <a:spcAft>
+                <a:spcPts val="300"/>
+              </a:spcAft>
+            </a:pPr>
+            <a:r>
+              <a:rPr sz="1250" b="0" i="0" u="none">
+                <a:solidFill>
+                  <a:srgbClr val="1A1A1A"/>
+                </a:solidFill>
+                <a:latin typeface="Arial"/>
+                <a:cs typeface="Arial" pitchFamily="34" charset="0"/>
+              </a:rPr>
+              <a:t>Ebel &amp; Frisbie, Essentials of Educational Measurement - the classical way to tell a good exam question from a bad one.</a:t>
             </a:r>
           </a:p>
           <a:p>
@@ -10252,21 +9390,21 @@
               <a:buFont typeface="Arial" pitchFamily="34" charset="0"/>
               <a:buChar char="•"/>
               <a:spcBef>
-                <a:spcPts val="300"/>
+                <a:spcPts val="500"/>
               </a:spcBef>
               <a:spcAft>
-                <a:spcPts val="100"/>
+                <a:spcPts val="200"/>
               </a:spcAft>
             </a:pPr>
             <a:r>
-              <a:rPr sz="1200" b="1" i="0" u="none">
+              <a:rPr sz="1400" b="1" i="0" u="none">
                 <a:solidFill>
                   <a:srgbClr val="0070C0"/>
                 </a:solidFill>
                 <a:latin typeface="Arial"/>
                 <a:cs typeface="Arial" pitchFamily="34" charset="0"/>
               </a:rPr>
-              <a:t>Knowledge tracing and learning analytics</a:t>
+              <a:t>Marking programs automatically</a:t>
             </a:r>
           </a:p>
           <a:p>
@@ -10277,18 +9415,18 @@
               <a:buFont typeface="Arial" pitchFamily="34" charset="0"/>
               <a:buChar char="–"/>
               <a:spcAft>
-                <a:spcPts val="100"/>
+                <a:spcPts val="300"/>
               </a:spcAft>
             </a:pPr>
             <a:r>
-              <a:rPr sz="1000" b="0" i="0" u="none">
+              <a:rPr sz="1250" b="0" i="0" u="none">
                 <a:solidFill>
                   <a:srgbClr val="1A1A1A"/>
                 </a:solidFill>
                 <a:latin typeface="Arial"/>
                 <a:cs typeface="Arial" pitchFamily="34" charset="0"/>
               </a:rPr>
-              <a:t>Corbett &amp; Anderson — "Knowledge Tracing: Modeling the Acquisition of Procedural Knowledge", User Modeling and User-Adapted Interaction, 1994.</a:t>
+              <a:t>Gulwani, Radicek &amp; Zuleger, "Automated Clustering and Program Repair for Introductory Programming Assignments", PLDI 2018 - the basis for giving partial credit instead of a zero.</a:t>
             </a:r>
           </a:p>
           <a:p>
@@ -10299,18 +9437,43 @@
               <a:buFont typeface="Arial" pitchFamily="34" charset="0"/>
               <a:buChar char="–"/>
               <a:spcAft>
-                <a:spcPts val="100"/>
+                <a:spcPts val="300"/>
               </a:spcAft>
             </a:pPr>
             <a:r>
-              <a:rPr sz="1000" b="0" i="0" u="none">
+              <a:rPr sz="1250" b="0" i="0" u="none">
                 <a:solidFill>
                   <a:srgbClr val="1A1A1A"/>
                 </a:solidFill>
                 <a:latin typeface="Arial"/>
                 <a:cs typeface="Arial" pitchFamily="34" charset="0"/>
               </a:rPr>
-              <a:t>Pardos &amp; Heffernan — "Modeling Individualization in a Bayesian Networks Implementation of Knowledge Tracing", UMAP 2010.</a:t>
+              <a:t>tree-sitter - the parser used to understand student code even when it does not compile.</a:t>
+            </a:r>
+          </a:p>
+          <a:p>
+            <a:pPr algn="l" marL="219456" indent="-219456">
+              <a:lnSpc>
+                <a:spcPct val="95000"/>
+              </a:lnSpc>
+              <a:buFont typeface="Arial" pitchFamily="34" charset="0"/>
+              <a:buChar char="•"/>
+              <a:spcBef>
+                <a:spcPts val="500"/>
+              </a:spcBef>
+              <a:spcAft>
+                <a:spcPts val="200"/>
+              </a:spcAft>
+            </a:pPr>
+            <a:r>
+              <a:rPr sz="1400" b="1" i="0" u="none">
+                <a:solidFill>
+                  <a:srgbClr val="0070C0"/>
+                </a:solidFill>
+                <a:latin typeface="Arial"/>
+                <a:cs typeface="Arial" pitchFamily="34" charset="0"/>
+              </a:rPr>
+              <a:t>Running untrusted code safely</a:t>
             </a:r>
           </a:p>
           <a:p>
@@ -10321,18 +9484,18 @@
               <a:buFont typeface="Arial" pitchFamily="34" charset="0"/>
               <a:buChar char="–"/>
               <a:spcAft>
-                <a:spcPts val="100"/>
+                <a:spcPts val="300"/>
               </a:spcAft>
             </a:pPr>
             <a:r>
-              <a:rPr sz="1000" b="0" i="0" u="none">
+              <a:rPr sz="1250" b="0" i="0" u="none">
                 <a:solidFill>
                   <a:srgbClr val="1A1A1A"/>
                 </a:solidFill>
                 <a:latin typeface="Arial"/>
                 <a:cs typeface="Arial" pitchFamily="34" charset="0"/>
               </a:rPr>
-              <a:t>Ebel &amp; Frisbie — Essentials of Educational Measurement (item difficulty, point-biserial discrimination).</a:t>
+              <a:t>Agache et al., "Firecracker: Lightweight Virtualization", USENIX NSDI 2020.</a:t>
             </a:r>
           </a:p>
           <a:p>
@@ -10343,21 +9506,21 @@
               <a:buFont typeface="Arial" pitchFamily="34" charset="0"/>
               <a:buChar char="•"/>
               <a:spcBef>
-                <a:spcPts val="300"/>
+                <a:spcPts val="500"/>
               </a:spcBef>
               <a:spcAft>
-                <a:spcPts val="100"/>
+                <a:spcPts val="200"/>
               </a:spcAft>
             </a:pPr>
             <a:r>
-              <a:rPr sz="1200" b="1" i="0" u="none">
+              <a:rPr sz="1400" b="1" i="0" u="none">
                 <a:solidFill>
                   <a:srgbClr val="0070C0"/>
                 </a:solidFill>
                 <a:latin typeface="Arial"/>
                 <a:cs typeface="Arial" pitchFamily="34" charset="0"/>
               </a:rPr>
-              <a:t>Program analysis and partial credit</a:t>
+              <a:t>Standards we build to</a:t>
             </a:r>
           </a:p>
           <a:p>
@@ -10368,18 +9531,18 @@
               <a:buFont typeface="Arial" pitchFamily="34" charset="0"/>
               <a:buChar char="–"/>
               <a:spcAft>
-                <a:spcPts val="100"/>
+                <a:spcPts val="300"/>
               </a:spcAft>
             </a:pPr>
             <a:r>
-              <a:rPr sz="1000" b="0" i="0" u="none">
+              <a:rPr sz="1250" b="0" i="0" u="none">
                 <a:solidFill>
                   <a:srgbClr val="1A1A1A"/>
                 </a:solidFill>
                 <a:latin typeface="Arial"/>
                 <a:cs typeface="Arial" pitchFamily="34" charset="0"/>
               </a:rPr>
-              <a:t>Pawlik &amp; Augsten — "Tree edit distance: Robust and memory-efficient" (APTED), Information Systems, 2016.</a:t>
+              <a:t>1EdTech Learning Tools Interoperability 1.3 - how the platform plugs into Moodle and Google Classroom.</a:t>
             </a:r>
           </a:p>
           <a:p>
@@ -10390,222 +9553,18 @@
               <a:buFont typeface="Arial" pitchFamily="34" charset="0"/>
               <a:buChar char="–"/>
               <a:spcAft>
-                <a:spcPts val="100"/>
+                <a:spcPts val="300"/>
               </a:spcAft>
             </a:pPr>
             <a:r>
-              <a:rPr sz="1000" b="0" i="0" u="none">
+              <a:rPr sz="1250" b="0" i="0" u="none">
                 <a:solidFill>
                   <a:srgbClr val="1A1A1A"/>
                 </a:solidFill>
                 <a:latin typeface="Arial"/>
                 <a:cs typeface="Arial" pitchFamily="34" charset="0"/>
               </a:rPr>
-              <a:t>Gulwani, Radiček &amp; Zuleger — "Automated Clustering and Program Repair for Introductory Programming Assignments", PLDI 2018.</a:t>
-            </a:r>
-          </a:p>
-          <a:p>
-            <a:pPr algn="l" marL="493776" indent="-219456">
-              <a:lnSpc>
-                <a:spcPct val="95000"/>
-              </a:lnSpc>
-              <a:buFont typeface="Arial" pitchFamily="34" charset="0"/>
-              <a:buChar char="–"/>
-              <a:spcAft>
-                <a:spcPts val="100"/>
-              </a:spcAft>
-            </a:pPr>
-            <a:r>
-              <a:rPr sz="1000" b="0" i="0" u="none">
-                <a:solidFill>
-                  <a:srgbClr val="1A1A1A"/>
-                </a:solidFill>
-                <a:latin typeface="Arial"/>
-                <a:cs typeface="Arial" pitchFamily="34" charset="0"/>
-              </a:rPr>
-              <a:t>tree-sitter — incremental, error-tolerant parsing library, https://tree-sitter.github.io</a:t>
-            </a:r>
-          </a:p>
-          <a:p>
-            <a:pPr algn="l" marL="219456" indent="-219456">
-              <a:lnSpc>
-                <a:spcPct val="95000"/>
-              </a:lnSpc>
-              <a:buFont typeface="Arial" pitchFamily="34" charset="0"/>
-              <a:buChar char="•"/>
-              <a:spcBef>
-                <a:spcPts val="300"/>
-              </a:spcBef>
-              <a:spcAft>
-                <a:spcPts val="100"/>
-              </a:spcAft>
-            </a:pPr>
-            <a:r>
-              <a:rPr sz="1200" b="1" i="0" u="none">
-                <a:solidFill>
-                  <a:srgbClr val="0070C0"/>
-                </a:solidFill>
-                <a:latin typeface="Arial"/>
-                <a:cs typeface="Arial" pitchFamily="34" charset="0"/>
-              </a:rPr>
-              <a:t>Clustering, NLI, and sandboxing</a:t>
-            </a:r>
-          </a:p>
-          <a:p>
-            <a:pPr algn="l" marL="493776" indent="-219456">
-              <a:lnSpc>
-                <a:spcPct val="95000"/>
-              </a:lnSpc>
-              <a:buFont typeface="Arial" pitchFamily="34" charset="0"/>
-              <a:buChar char="–"/>
-              <a:spcAft>
-                <a:spcPts val="100"/>
-              </a:spcAft>
-            </a:pPr>
-            <a:r>
-              <a:rPr sz="1000" b="0" i="0" u="none">
-                <a:solidFill>
-                  <a:srgbClr val="1A1A1A"/>
-                </a:solidFill>
-                <a:latin typeface="Arial"/>
-                <a:cs typeface="Arial" pitchFamily="34" charset="0"/>
-              </a:rPr>
-              <a:t>Campello, Moulavi &amp; Sander — "Density-Based Clustering Based on Hierarchical Density Estimates" (HDBSCAN), PAKDD 2013.</a:t>
-            </a:r>
-          </a:p>
-          <a:p>
-            <a:pPr algn="l" marL="493776" indent="-219456">
-              <a:lnSpc>
-                <a:spcPct val="95000"/>
-              </a:lnSpc>
-              <a:buFont typeface="Arial" pitchFamily="34" charset="0"/>
-              <a:buChar char="–"/>
-              <a:spcAft>
-                <a:spcPts val="100"/>
-              </a:spcAft>
-            </a:pPr>
-            <a:r>
-              <a:rPr sz="1000" b="0" i="0" u="none">
-                <a:solidFill>
-                  <a:srgbClr val="1A1A1A"/>
-                </a:solidFill>
-                <a:latin typeface="Arial"/>
-                <a:cs typeface="Arial" pitchFamily="34" charset="0"/>
-              </a:rPr>
-              <a:t>He, Gao &amp; Chen — "DeBERTaV3: Improving DeBERTa using ELECTRA-Style Pre-Training", ICLR 2023.</a:t>
-            </a:r>
-          </a:p>
-          <a:p>
-            <a:pPr algn="l" marL="493776" indent="-219456">
-              <a:lnSpc>
-                <a:spcPct val="95000"/>
-              </a:lnSpc>
-              <a:buFont typeface="Arial" pitchFamily="34" charset="0"/>
-              <a:buChar char="–"/>
-              <a:spcAft>
-                <a:spcPts val="100"/>
-              </a:spcAft>
-            </a:pPr>
-            <a:r>
-              <a:rPr sz="1000" b="0" i="0" u="none">
-                <a:solidFill>
-                  <a:srgbClr val="1A1A1A"/>
-                </a:solidFill>
-                <a:latin typeface="Arial"/>
-                <a:cs typeface="Arial" pitchFamily="34" charset="0"/>
-              </a:rPr>
-              <a:t>Agache et al. — "Firecracker: Lightweight Virtualization for Serverless Applications", USENIX NSDI 2020.</a:t>
-            </a:r>
-          </a:p>
-          <a:p>
-            <a:pPr algn="l" marL="219456" indent="-219456">
-              <a:lnSpc>
-                <a:spcPct val="95000"/>
-              </a:lnSpc>
-              <a:buFont typeface="Arial" pitchFamily="34" charset="0"/>
-              <a:buChar char="•"/>
-              <a:spcBef>
-                <a:spcPts val="300"/>
-              </a:spcBef>
-              <a:spcAft>
-                <a:spcPts val="100"/>
-              </a:spcAft>
-            </a:pPr>
-            <a:r>
-              <a:rPr sz="1200" b="1" i="0" u="none">
-                <a:solidFill>
-                  <a:srgbClr val="0070C0"/>
-                </a:solidFill>
-                <a:latin typeface="Arial"/>
-                <a:cs typeface="Arial" pitchFamily="34" charset="0"/>
-              </a:rPr>
-              <a:t>Standards and institutional context</a:t>
-            </a:r>
-          </a:p>
-          <a:p>
-            <a:pPr algn="l" marL="493776" indent="-219456">
-              <a:lnSpc>
-                <a:spcPct val="95000"/>
-              </a:lnSpc>
-              <a:buFont typeface="Arial" pitchFamily="34" charset="0"/>
-              <a:buChar char="–"/>
-              <a:spcAft>
-                <a:spcPts val="100"/>
-              </a:spcAft>
-            </a:pPr>
-            <a:r>
-              <a:rPr sz="1000" b="0" i="0" u="none">
-                <a:solidFill>
-                  <a:srgbClr val="1A1A1A"/>
-                </a:solidFill>
-                <a:latin typeface="Arial"/>
-                <a:cs typeface="Arial" pitchFamily="34" charset="0"/>
-              </a:rPr>
-              <a:t>1EdTech (IMS Global) — Learning Tools Interoperability 1.3 and Assignment and Grade Services, https://www.imsglobal.org/spec/lti/v1p3</a:t>
-            </a:r>
-          </a:p>
-          <a:p>
-            <a:pPr algn="l" marL="493776" indent="-219456">
-              <a:lnSpc>
-                <a:spcPct val="95000"/>
-              </a:lnSpc>
-              <a:buFont typeface="Arial" pitchFamily="34" charset="0"/>
-              <a:buChar char="–"/>
-              <a:spcAft>
-                <a:spcPts val="100"/>
-              </a:spcAft>
-            </a:pPr>
-            <a:r>
-              <a:rPr sz="1000" b="0" i="0" u="none">
-                <a:solidFill>
-                  <a:srgbClr val="1A1A1A"/>
-                </a:solidFill>
-                <a:latin typeface="Arial"/>
-                <a:cs typeface="Arial" pitchFamily="34" charset="0"/>
-              </a:rPr>
-              <a:t>National Board of Accreditation, India — CO–PO attainment guidelines for UG engineering programmes.</a:t>
-            </a:r>
-          </a:p>
-          <a:p>
-            <a:pPr algn="l" marL="493776" indent="-219456">
-              <a:lnSpc>
-                <a:spcPct val="95000"/>
-              </a:lnSpc>
-              <a:buFont typeface="Arial" pitchFamily="34" charset="0"/>
-              <a:buChar char="–"/>
-              <a:spcAft>
-                <a:spcPts val="100"/>
-              </a:spcAft>
-            </a:pPr>
-            <a:r>
-              <a:rPr sz="1000" b="0" i="0" u="none">
-                <a:solidFill>
-                  <a:srgbClr val="1A1A1A"/>
-                </a:solidFill>
-                <a:latin typeface="Arial"/>
-                <a:cs typeface="Arial" pitchFamily="34" charset="0"/>
-              </a:rPr>
-              <a:t>Digital Personal Data Protection Act, 2023 (India) — treatment of inferred attributes as personal data.</a:t>
+              <a:t>National Board of Accreditation (India) - the CO-PO attainment rules the reports follow.</a:t>
             </a:r>
           </a:p>
         </p:txBody>
@@ -10879,32 +9838,14 @@
               <a:buNone/>
             </a:pPr>
             <a:r>
-              <a:rPr sz="1200" b="1" i="0" u="none">
+              <a:rPr sz="1300" b="1" i="0" u="none">
                 <a:solidFill>
                   <a:srgbClr val="1F497D"/>
                 </a:solidFill>
                 <a:latin typeface="Arial"/>
                 <a:cs typeface="Arial" pitchFamily="34" charset="0"/>
               </a:rPr>
-              <a:t>Working prototype and full architecture specification: github.com/Varshith-06/evalpro</a:t>
-            </a:r>
-          </a:p>
-          <a:p>
-            <a:pPr algn="ctr" marL="0" indent="0">
-              <a:lnSpc>
-                <a:spcPct val="92000"/>
-              </a:lnSpc>
-              <a:buNone/>
-            </a:pPr>
-            <a:r>
-              <a:rPr sz="900" b="0" i="0" u="none">
-                <a:solidFill>
-                  <a:srgbClr val="1A1A1A"/>
-                </a:solidFill>
-                <a:latin typeface="Arial"/>
-                <a:cs typeface="Arial" pitchFamily="34" charset="0"/>
-              </a:rPr>
-              <a:t>The demo course builds itself on first run - every score, mastery estimate and attainment figure in it is produced by the real cascade, not seeded.</a:t>
+              <a:t>Working prototype and source code: github.com/Varshith-06/evalpro</a:t>
             </a:r>
           </a:p>
         </p:txBody>

--- a/presentation/SIH2026-EvalPro-Idea-Presentation.pptx
+++ b/presentation/SIH2026-EvalPro-Idea-Presentation.pptx
@@ -5644,18 +5644,18 @@
           <a:bodyPr wrap="square" rtlCol="0" lIns="45720" rIns="45720" tIns="22860" bIns="22860"/>
           <a:lstStyle/>
           <a:p>
-            <a:pPr algn="just" marL="219456" indent="-219456">
+            <a:pPr algn="l" marL="219456" indent="-219456">
               <a:lnSpc>
-                <a:spcPct val="114999"/>
+                <a:spcPct val="112000"/>
               </a:lnSpc>
               <a:buFont typeface="Arial" pitchFamily="34" charset="0"/>
               <a:buChar char="•"/>
               <a:spcAft>
-                <a:spcPts val="1200"/>
+                <a:spcPts val="1400"/>
               </a:spcAft>
             </a:pPr>
             <a:r>
-              <a:rPr sz="1500" b="1" i="0" u="none">
+              <a:rPr sz="1550" b="1" i="0" u="none">
                 <a:solidFill>
                   <a:srgbClr val="1A1A1A"/>
                 </a:solidFill>
@@ -5665,7 +5665,7 @@
               <a:t>Problem Statement ID – </a:t>
             </a:r>
             <a:r>
-              <a:rPr sz="1500" b="0" i="0" u="none">
+              <a:rPr sz="1550" b="0" i="0" u="none">
                 <a:solidFill>
                   <a:srgbClr val="1F497D"/>
                 </a:solidFill>
@@ -5677,18 +5677,18 @@
             <a:endParaRPr lang="en-US" dirty="0"/>
           </a:p>
           <a:p>
-            <a:pPr algn="just" marL="219456" indent="-219456">
+            <a:pPr algn="l" marL="219456" indent="-219456">
               <a:lnSpc>
-                <a:spcPct val="114999"/>
+                <a:spcPct val="112000"/>
               </a:lnSpc>
               <a:buFont typeface="Arial" pitchFamily="34" charset="0"/>
               <a:buChar char="•"/>
               <a:spcAft>
-                <a:spcPts val="1200"/>
+                <a:spcPts val="1400"/>
               </a:spcAft>
             </a:pPr>
             <a:r>
-              <a:rPr sz="1500" b="1" i="0" u="none">
+              <a:rPr sz="1550" b="1" i="0" u="none">
                 <a:solidFill>
                   <a:srgbClr val="1A1A1A"/>
                 </a:solidFill>
@@ -5698,7 +5698,7 @@
               <a:t>Problem Statement Title – </a:t>
             </a:r>
             <a:r>
-              <a:rPr sz="1500" b="0" i="0" u="none">
+              <a:rPr sz="1550" b="0" i="0" u="none">
                 <a:solidFill>
                   <a:srgbClr val="1F497D"/>
                 </a:solidFill>
@@ -5709,18 +5709,18 @@
             </a:r>
           </a:p>
           <a:p>
-            <a:pPr algn="just" marL="219456" indent="-219456">
+            <a:pPr algn="l" marL="219456" indent="-219456">
               <a:lnSpc>
-                <a:spcPct val="114999"/>
+                <a:spcPct val="112000"/>
               </a:lnSpc>
               <a:buFont typeface="Arial" pitchFamily="34" charset="0"/>
               <a:buChar char="•"/>
               <a:spcAft>
-                <a:spcPts val="1200"/>
+                <a:spcPts val="1400"/>
               </a:spcAft>
             </a:pPr>
             <a:r>
-              <a:rPr sz="1500" b="1" i="0" u="none">
+              <a:rPr sz="1550" b="1" i="0" u="none">
                 <a:solidFill>
                   <a:srgbClr val="1A1A1A"/>
                 </a:solidFill>
@@ -5730,7 +5730,7 @@
               <a:t>Theme – </a:t>
             </a:r>
             <a:r>
-              <a:rPr sz="1500" b="0" i="0" u="none">
+              <a:rPr sz="1550" b="0" i="0" u="none">
                 <a:solidFill>
                   <a:srgbClr val="1F497D"/>
                 </a:solidFill>
@@ -5741,18 +5741,18 @@
             </a:r>
           </a:p>
           <a:p>
-            <a:pPr algn="just" marL="219456" indent="-219456">
+            <a:pPr algn="l" marL="219456" indent="-219456">
               <a:lnSpc>
-                <a:spcPct val="114999"/>
+                <a:spcPct val="112000"/>
               </a:lnSpc>
               <a:buFont typeface="Arial" pitchFamily="34" charset="0"/>
               <a:buChar char="•"/>
               <a:spcAft>
-                <a:spcPts val="1200"/>
+                <a:spcPts val="1400"/>
               </a:spcAft>
             </a:pPr>
             <a:r>
-              <a:rPr sz="1500" b="1" i="0" u="none">
+              <a:rPr sz="1550" b="1" i="0" u="none">
                 <a:solidFill>
                   <a:srgbClr val="1A1A1A"/>
                 </a:solidFill>
@@ -5762,7 +5762,7 @@
               <a:t>PS Category – </a:t>
             </a:r>
             <a:r>
-              <a:rPr sz="1500" b="0" i="0" u="none">
+              <a:rPr sz="1550" b="0" i="0" u="none">
                 <a:solidFill>
                   <a:srgbClr val="1F497D"/>
                 </a:solidFill>
@@ -5773,18 +5773,18 @@
             </a:r>
           </a:p>
           <a:p>
-            <a:pPr algn="just" marL="219456" indent="-219456">
+            <a:pPr algn="l" marL="219456" indent="-219456">
               <a:lnSpc>
-                <a:spcPct val="114999"/>
+                <a:spcPct val="112000"/>
               </a:lnSpc>
               <a:buFont typeface="Arial" pitchFamily="34" charset="0"/>
               <a:buChar char="•"/>
               <a:spcAft>
-                <a:spcPts val="1200"/>
+                <a:spcPts val="1400"/>
               </a:spcAft>
             </a:pPr>
             <a:r>
-              <a:rPr sz="1500" b="1" i="0" u="none">
+              <a:rPr sz="1550" b="1" i="0" u="none">
                 <a:solidFill>
                   <a:srgbClr val="1A1A1A"/>
                 </a:solidFill>
@@ -5794,7 +5794,7 @@
               <a:t>Team ID – </a:t>
             </a:r>
             <a:r>
-              <a:rPr sz="1500" b="0" i="0" u="none">
+              <a:rPr sz="1550" b="0" i="0" u="none">
                 <a:solidFill>
                   <a:srgbClr val="1F497D"/>
                 </a:solidFill>
@@ -5805,18 +5805,18 @@
             </a:r>
           </a:p>
           <a:p>
-            <a:pPr algn="just" marL="219456" indent="-219456">
+            <a:pPr algn="l" marL="219456" indent="-219456">
               <a:lnSpc>
-                <a:spcPct val="114999"/>
+                <a:spcPct val="112000"/>
               </a:lnSpc>
               <a:buFont typeface="Arial" pitchFamily="34" charset="0"/>
               <a:buChar char="•"/>
               <a:spcAft>
-                <a:spcPts val="1200"/>
+                <a:spcPts val="1400"/>
               </a:spcAft>
             </a:pPr>
             <a:r>
-              <a:rPr sz="1500" b="1" i="0" u="none">
+              <a:rPr sz="1550" b="1" i="0" u="none">
                 <a:solidFill>
                   <a:srgbClr val="1A1A1A"/>
                 </a:solidFill>
@@ -5826,7 +5826,7 @@
               <a:t>Team Name (Registered on portal) – </a:t>
             </a:r>
             <a:r>
-              <a:rPr sz="1500" b="0" i="0" u="none">
+              <a:rPr sz="1550" b="0" i="0" u="none">
                 <a:solidFill>
                   <a:srgbClr val="1F497D"/>
                 </a:solidFill>
@@ -5963,8 +5963,8 @@
         </p:nvSpPr>
         <p:spPr>
           <a:xfrm>
-            <a:off x="1719072" y="91440"/>
-            <a:ext cx="7818120" cy="914400"/>
+            <a:off x="1719072" y="201168"/>
+            <a:ext cx="7973568" cy="731520"/>
           </a:xfrm>
         </p:spPr>
         <p:txBody>
@@ -5978,14 +5978,14 @@
               <a:buNone/>
             </a:pPr>
             <a:r>
-              <a:rPr sz="2700" b="1" i="0" u="none">
+              <a:rPr sz="2400" b="1" i="0" u="none">
                 <a:solidFill>
                   <a:srgbClr val="1F497D"/>
                 </a:solidFill>
                 <a:latin typeface="Times New Roman"/>
                 <a:cs typeface="Times New Roman" pitchFamily="34" charset="0"/>
               </a:rPr>
-              <a:t>EvalPro - Programming Labs That Mark Themselves, and Explain Why</a:t>
+              <a:t>EvalPro - Programming Labs That Mark Themselves</a:t>
             </a:r>
           </a:p>
         </p:txBody>
@@ -6000,8 +6000,8 @@
         </p:nvSpPr>
         <p:spPr bwMode="auto">
           <a:xfrm>
-            <a:off x="329184" y="1152144"/>
-            <a:ext cx="11503152" cy="5029200"/>
+            <a:off x="329184" y="1188720"/>
+            <a:ext cx="11503152" cy="4992624"/>
           </a:xfrm>
           <a:prstGeom prst="rect">
             <a:avLst/>
@@ -6025,7 +6025,7 @@
               <a:buFont typeface="Wingdings" pitchFamily="34" charset="0"/>
               <a:buChar char="v"/>
               <a:spcAft>
-                <a:spcPts val="1000"/>
+                <a:spcPts val="1100"/>
               </a:spcAft>
             </a:pPr>
             <a:r>
@@ -6054,14 +6054,14 @@
               <a:buFont typeface="Wingdings" pitchFamily="34" charset="0"/>
               <a:buChar char="v"/>
               <a:spcBef>
-                <a:spcPts val="700"/>
+                <a:spcPts val="2000"/>
               </a:spcBef>
               <a:spcAft>
-                <a:spcPts val="300"/>
+                <a:spcPts val="600"/>
               </a:spcAft>
             </a:pPr>
             <a:r>
-              <a:rPr sz="1700" b="1" i="0" u="sng">
+              <a:rPr sz="1800" b="1" i="0" u="sng">
                 <a:solidFill>
                   <a:srgbClr val="1F497D"/>
                 </a:solidFill>
@@ -6072,69 +6072,69 @@
             </a:r>
           </a:p>
           <a:p>
-            <a:pPr algn="just" marL="329184" indent="-219456">
+            <a:pPr algn="l" marL="329184" indent="-219456">
               <a:lnSpc>
-                <a:spcPct val="95000"/>
+                <a:spcPct val="112000"/>
               </a:lnSpc>
               <a:buFont typeface="Arial" pitchFamily="34" charset="0"/>
               <a:buChar char="•"/>
               <a:spcAft>
-                <a:spcPts val="200"/>
+                <a:spcPts val="600"/>
               </a:spcAft>
             </a:pPr>
             <a:r>
-              <a:rPr sz="1400" b="0" i="0" u="none">
+              <a:rPr sz="1600" b="0" i="0" u="none">
                 <a:solidFill>
                   <a:srgbClr val="1A1A1A"/>
                 </a:solidFill>
                 <a:latin typeface="Arial"/>
                 <a:cs typeface="Arial" pitchFamily="34" charset="0"/>
               </a:rPr>
-              <a:t>A student submits their lab program. The platform runs it, marks it, and shows them exactly why they got each mark.</a:t>
-            </a:r>
-          </a:p>
-          <a:p>
-            <a:pPr algn="just" marL="329184" indent="-219456">
+              <a:t>A student submits their lab program. It is run, marked, and every mark is explained.</a:t>
+            </a:r>
+          </a:p>
+          <a:p>
+            <a:pPr algn="l" marL="329184" indent="-219456">
               <a:lnSpc>
-                <a:spcPct val="95000"/>
+                <a:spcPct val="112000"/>
               </a:lnSpc>
               <a:buFont typeface="Arial" pitchFamily="34" charset="0"/>
               <a:buChar char="•"/>
               <a:spcAft>
-                <a:spcPts val="200"/>
+                <a:spcPts val="600"/>
               </a:spcAft>
             </a:pPr>
             <a:r>
-              <a:rPr sz="1400" b="0" i="0" u="none">
+              <a:rPr sz="1600" b="0" i="0" u="none">
                 <a:solidFill>
                   <a:srgbClr val="1A1A1A"/>
                 </a:solidFill>
                 <a:latin typeface="Arial"/>
                 <a:cs typeface="Arial" pitchFamily="34" charset="0"/>
               </a:rPr>
-              <a:t>It does not stop at a number. Each mark is linked to a topic - loops, recursion, error handling - so the student sees which topic they are weak on, not just which lab.</a:t>
-            </a:r>
-          </a:p>
-          <a:p>
-            <a:pPr algn="just" marL="329184" indent="-219456">
+              <a:t>Each mark is tied to a topic, so a student sees which topic is weak - not just which lab.</a:t>
+            </a:r>
+          </a:p>
+          <a:p>
+            <a:pPr algn="l" marL="329184" indent="-219456">
               <a:lnSpc>
-                <a:spcPct val="95000"/>
+                <a:spcPct val="112000"/>
               </a:lnSpc>
               <a:buFont typeface="Arial" pitchFamily="34" charset="0"/>
               <a:buChar char="•"/>
               <a:spcAft>
-                <a:spcPts val="200"/>
+                <a:spcPts val="600"/>
               </a:spcAft>
             </a:pPr>
             <a:r>
-              <a:rPr sz="1400" b="0" i="0" u="none">
+              <a:rPr sz="1600" b="0" i="0" u="none">
                 <a:solidFill>
                   <a:srgbClr val="1A1A1A"/>
                 </a:solidFill>
                 <a:latin typeface="Arial"/>
                 <a:cs typeface="Arial" pitchFamily="34" charset="0"/>
               </a:rPr>
-              <a:t>Marks from every lab add up over the semester into a clear picture of what each student actually understands.</a:t>
+              <a:t>Those marks add up across the semester into a picture of what each student understands.</a:t>
             </a:r>
           </a:p>
           <a:p>
@@ -6145,14 +6145,14 @@
               <a:buFont typeface="Wingdings" pitchFamily="34" charset="0"/>
               <a:buChar char="v"/>
               <a:spcBef>
-                <a:spcPts val="700"/>
+                <a:spcPts val="2000"/>
               </a:spcBef>
               <a:spcAft>
-                <a:spcPts val="300"/>
+                <a:spcPts val="600"/>
               </a:spcAft>
             </a:pPr>
             <a:r>
-              <a:rPr sz="1700" b="1" i="0" u="sng">
+              <a:rPr sz="1800" b="1" i="0" u="sng">
                 <a:solidFill>
                   <a:srgbClr val="1F497D"/>
                 </a:solidFill>
@@ -6163,91 +6163,69 @@
             </a:r>
           </a:p>
           <a:p>
-            <a:pPr algn="just" marL="329184" indent="-219456">
+            <a:pPr algn="l" marL="329184" indent="-219456">
               <a:lnSpc>
-                <a:spcPct val="95000"/>
+                <a:spcPct val="112000"/>
               </a:lnSpc>
               <a:buFont typeface="Arial" pitchFamily="34" charset="0"/>
               <a:buChar char="•"/>
               <a:spcAft>
-                <a:spcPts val="200"/>
+                <a:spcPts val="600"/>
               </a:spcAft>
             </a:pPr>
             <a:r>
-              <a:rPr sz="1400" b="0" i="0" u="none">
+              <a:rPr sz="1600" b="0" i="0" u="none">
                 <a:solidFill>
                   <a:srgbClr val="1A1A1A"/>
                 </a:solidFill>
                 <a:latin typeface="Arial"/>
                 <a:cs typeface="Arial" pitchFamily="34" charset="0"/>
               </a:rPr>
-              <a:t>Collects the academic information: labs, submissions and class lists, straight from the college's existing Moodle or Google Classroom.</a:t>
-            </a:r>
-          </a:p>
-          <a:p>
-            <a:pPr algn="just" marL="329184" indent="-219456">
+              <a:t>Collects labs, submissions and class lists from the college's existing system.</a:t>
+            </a:r>
+          </a:p>
+          <a:p>
+            <a:pPr algn="l" marL="329184" indent="-219456">
               <a:lnSpc>
-                <a:spcPct val="95000"/>
+                <a:spcPct val="112000"/>
               </a:lnSpc>
               <a:buFont typeface="Arial" pitchFamily="34" charset="0"/>
               <a:buChar char="•"/>
               <a:spcAft>
-                <a:spcPts val="200"/>
+                <a:spcPts val="600"/>
               </a:spcAft>
             </a:pPr>
             <a:r>
-              <a:rPr sz="1400" b="0" i="0" u="none">
+              <a:rPr sz="1600" b="0" i="0" u="none">
                 <a:solidFill>
                   <a:srgbClr val="1A1A1A"/>
                 </a:solidFill>
                 <a:latin typeface="Arial"/>
                 <a:cs typeface="Arial" pitchFamily="34" charset="0"/>
               </a:rPr>
-              <a:t>Analyses it four ways: each submission, each student over time, each question, and the class as a whole.</a:t>
-            </a:r>
-          </a:p>
-          <a:p>
-            <a:pPr algn="just" marL="329184" indent="-219456">
+              <a:t>Analyses each submission, each student, each question and the whole class.</a:t>
+            </a:r>
+          </a:p>
+          <a:p>
+            <a:pPr algn="l" marL="329184" indent="-219456">
               <a:lnSpc>
-                <a:spcPct val="95000"/>
+                <a:spcPct val="112000"/>
               </a:lnSpc>
               <a:buFont typeface="Arial" pitchFamily="34" charset="0"/>
               <a:buChar char="•"/>
               <a:spcAft>
-                <a:spcPts val="200"/>
+                <a:spcPts val="600"/>
               </a:spcAft>
             </a:pPr>
             <a:r>
-              <a:rPr sz="1400" b="0" i="0" u="none">
+              <a:rPr sz="1600" b="0" i="0" u="none">
                 <a:solidFill>
                   <a:srgbClr val="1A1A1A"/>
                 </a:solidFill>
                 <a:latin typeface="Arial"/>
                 <a:cs typeface="Arial" pitchFamily="34" charset="0"/>
               </a:rPr>
-              <a:t>Gives everyone a next step: what a student should revise, what a teacher should explain again, which students need support.</a:t>
-            </a:r>
-          </a:p>
-          <a:p>
-            <a:pPr algn="just" marL="329184" indent="-219456">
-              <a:lnSpc>
-                <a:spcPct val="95000"/>
-              </a:lnSpc>
-              <a:buFont typeface="Arial" pitchFamily="34" charset="0"/>
-              <a:buChar char="•"/>
-              <a:spcAft>
-                <a:spcPts val="200"/>
-              </a:spcAft>
-            </a:pPr>
-            <a:r>
-              <a:rPr sz="1400" b="0" i="0" u="none">
-                <a:solidFill>
-                  <a:srgbClr val="1A1A1A"/>
-                </a:solidFill>
-                <a:latin typeface="Arial"/>
-                <a:cs typeface="Arial" pitchFamily="34" charset="0"/>
-              </a:rPr>
-              <a:t>Shows it on one simple screen per person - one for students, one for teachers, one for the department.</a:t>
+              <a:t>Tells students what to revise, and teachers what to explain again.</a:t>
             </a:r>
           </a:p>
           <a:p>
@@ -6258,14 +6236,14 @@
               <a:buFont typeface="Wingdings" pitchFamily="34" charset="0"/>
               <a:buChar char="v"/>
               <a:spcBef>
-                <a:spcPts val="700"/>
+                <a:spcPts val="2000"/>
               </a:spcBef>
               <a:spcAft>
-                <a:spcPts val="300"/>
+                <a:spcPts val="600"/>
               </a:spcAft>
             </a:pPr>
             <a:r>
-              <a:rPr sz="1700" b="1" i="0" u="sng">
+              <a:rPr sz="1800" b="1" i="0" u="sng">
                 <a:solidFill>
                   <a:srgbClr val="1F497D"/>
                 </a:solidFill>
@@ -6276,91 +6254,91 @@
             </a:r>
           </a:p>
           <a:p>
-            <a:pPr algn="just" marL="329184" indent="-219456">
+            <a:pPr algn="l" marL="329184" indent="-219456">
               <a:lnSpc>
-                <a:spcPct val="95000"/>
+                <a:spcPct val="112000"/>
               </a:lnSpc>
               <a:buFont typeface="Arial" pitchFamily="34" charset="0"/>
               <a:buChar char="•"/>
               <a:spcAft>
-                <a:spcPts val="200"/>
+                <a:spcPts val="600"/>
               </a:spcAft>
             </a:pPr>
             <a:r>
-              <a:rPr sz="1400" b="0" i="0" u="none">
+              <a:rPr sz="1600" b="0" i="0" u="none">
                 <a:solidFill>
                   <a:srgbClr val="1A1A1A"/>
                 </a:solidFill>
                 <a:latin typeface="Arial"/>
                 <a:cs typeface="Arial" pitchFamily="34" charset="0"/>
               </a:rPr>
-              <a:t>A missing bracket costs two marks, not the whole lab. We find the smallest fix that makes the program run, then mark the rest of the work properly.</a:t>
-            </a:r>
-          </a:p>
-          <a:p>
-            <a:pPr algn="just" marL="329184" indent="-219456">
+              <a:t>A missing bracket costs two marks, not the whole lab.</a:t>
+            </a:r>
+          </a:p>
+          <a:p>
+            <a:pPr algn="l" marL="329184" indent="-219456">
               <a:lnSpc>
-                <a:spcPct val="95000"/>
+                <a:spcPct val="112000"/>
               </a:lnSpc>
               <a:buFont typeface="Arial" pitchFamily="34" charset="0"/>
               <a:buChar char="•"/>
               <a:spcAft>
-                <a:spcPts val="200"/>
+                <a:spcPts val="600"/>
               </a:spcAft>
             </a:pPr>
             <a:r>
-              <a:rPr sz="1400" b="0" i="0" u="none">
+              <a:rPr sz="1600" b="0" i="0" u="none">
                 <a:solidFill>
                   <a:srgbClr val="1A1A1A"/>
                 </a:solidFill>
                 <a:latin typeface="Arial"/>
                 <a:cs typeface="Arial" pitchFamily="34" charset="0"/>
               </a:rPr>
-              <a:t>The answer key never goes near the student's program, so it cannot be copied, guessed or hard-coded.</a:t>
-            </a:r>
-          </a:p>
-          <a:p>
-            <a:pPr algn="just" marL="329184" indent="-219456">
+              <a:t>The answer key never touches the student's program, so it cannot be copied.</a:t>
+            </a:r>
+          </a:p>
+          <a:p>
+            <a:pPr algn="l" marL="329184" indent="-219456">
               <a:lnSpc>
-                <a:spcPct val="95000"/>
+                <a:spcPct val="112000"/>
               </a:lnSpc>
               <a:buFont typeface="Arial" pitchFamily="34" charset="0"/>
               <a:buChar char="•"/>
               <a:spcAft>
-                <a:spcPts val="200"/>
+                <a:spcPts val="600"/>
               </a:spcAft>
             </a:pPr>
             <a:r>
-              <a:rPr sz="1400" b="0" i="0" u="none">
+              <a:rPr sz="1600" b="0" i="0" u="none">
                 <a:solidFill>
                   <a:srgbClr val="1A1A1A"/>
                 </a:solidFill>
                 <a:latin typeface="Arial"/>
                 <a:cs typeface="Arial" pitchFamily="34" charset="0"/>
               </a:rPr>
-              <a:t>It also marks the question paper. If the strongest students all fail one part, the question was probably unclear, and the teacher is told.</a:t>
-            </a:r>
-          </a:p>
-          <a:p>
-            <a:pPr algn="just" marL="329184" indent="-219456">
+              <a:t>It marks the question paper too - unclear questions are flagged to the teacher.</a:t>
+            </a:r>
+          </a:p>
+          <a:p>
+            <a:pPr algn="l" marL="329184" indent="-219456">
               <a:lnSpc>
-                <a:spcPct val="95000"/>
+                <a:spcPct val="112000"/>
               </a:lnSpc>
               <a:buFont typeface="Arial" pitchFamily="34" charset="0"/>
               <a:buChar char="•"/>
               <a:spcAft>
-                <a:spcPts val="200"/>
+                <a:spcPts val="600"/>
               </a:spcAft>
             </a:pPr>
             <a:r>
-              <a:rPr sz="1400" b="0" i="0" u="none">
+              <a:rPr sz="1600" b="0" i="0" u="none">
                 <a:solidFill>
                   <a:srgbClr val="1A1A1A"/>
                 </a:solidFill>
                 <a:latin typeface="Arial"/>
                 <a:cs typeface="Arial" pitchFamily="34" charset="0"/>
               </a:rPr>
-              <a:t>When it is not sure, it says so and hands the submission to the teacher instead of guessing.</a:t>
+              <a:t>When it is unsure, it says so and hands the work to a human.</a:t>
             </a:r>
           </a:p>
         </p:txBody>
@@ -6644,7 +6622,7 @@
         <p:spPr bwMode="auto">
           <a:xfrm>
             <a:off x="329184" y="3310128"/>
-            <a:ext cx="11503152" cy="2926080"/>
+            <a:ext cx="11503152" cy="2907792"/>
           </a:xfrm>
           <a:prstGeom prst="rect">
             <a:avLst/>
@@ -6668,11 +6646,11 @@
               <a:buFont typeface="Wingdings" pitchFamily="34" charset="0"/>
               <a:buChar char="v"/>
               <a:spcAft>
-                <a:spcPts val="500"/>
+                <a:spcPts val="600"/>
               </a:spcAft>
             </a:pPr>
             <a:r>
-              <a:rPr sz="1600" b="1" i="0" u="sng">
+              <a:rPr sz="1500" b="1" i="0" u="sng">
                 <a:solidFill>
                   <a:srgbClr val="1F497D"/>
                 </a:solidFill>
@@ -6683,14 +6661,14 @@
             </a:r>
           </a:p>
           <a:p>
-            <a:pPr algn="just" marL="329184" indent="-219456">
+            <a:pPr algn="l" marL="329184" indent="-219456">
               <a:lnSpc>
-                <a:spcPct val="95000"/>
+                <a:spcPct val="106000"/>
               </a:lnSpc>
               <a:buFont typeface="Arial" pitchFamily="34" charset="0"/>
               <a:buChar char="•"/>
               <a:spcAft>
-                <a:spcPts val="300"/>
+                <a:spcPts val="400"/>
               </a:spcAft>
             </a:pPr>
             <a:r>
@@ -6701,18 +6679,18 @@
                 <a:latin typeface="Arial"/>
                 <a:cs typeface="Arial" pitchFamily="34" charset="0"/>
               </a:rPr>
-              <a:t>Python and FastAPI on the server. A plain web interface that works in any browser, with nothing to install on a student's machine.</a:t>
-            </a:r>
-          </a:p>
-          <a:p>
-            <a:pPr algn="just" marL="329184" indent="-219456">
+              <a:t>Python and FastAPI, with a plain web interface that runs in any browser.</a:t>
+            </a:r>
+          </a:p>
+          <a:p>
+            <a:pPr algn="l" marL="329184" indent="-219456">
               <a:lnSpc>
-                <a:spcPct val="95000"/>
+                <a:spcPct val="106000"/>
               </a:lnSpc>
               <a:buFont typeface="Arial" pitchFamily="34" charset="0"/>
               <a:buChar char="•"/>
               <a:spcAft>
-                <a:spcPts val="300"/>
+                <a:spcPts val="400"/>
               </a:spcAft>
             </a:pPr>
             <a:r>
@@ -6723,18 +6701,18 @@
                 <a:latin typeface="Arial"/>
                 <a:cs typeface="Arial" pitchFamily="34" charset="0"/>
               </a:rPr>
-              <a:t>Student programs run inside a locked-down sandbox, so nothing they submit can touch the college's systems or see anyone else's work.</a:t>
-            </a:r>
-          </a:p>
-          <a:p>
-            <a:pPr algn="just" marL="329184" indent="-219456">
+              <a:t>Student programs run inside a sealed sandbox, away from college systems.</a:t>
+            </a:r>
+          </a:p>
+          <a:p>
+            <a:pPr algn="l" marL="329184" indent="-219456">
               <a:lnSpc>
-                <a:spcPct val="95000"/>
+                <a:spcPct val="106000"/>
               </a:lnSpc>
               <a:buFont typeface="Arial" pitchFamily="34" charset="0"/>
               <a:buChar char="•"/>
               <a:spcAft>
-                <a:spcPts val="300"/>
+                <a:spcPts val="400"/>
               </a:spcAft>
             </a:pPr>
             <a:r>
@@ -6745,18 +6723,18 @@
                 <a:latin typeface="Arial"/>
                 <a:cs typeface="Arial" pitchFamily="34" charset="0"/>
               </a:rPr>
-              <a:t>Well-established methods do the marking: standard program analysis, the same plagiarism technique universities already use, and a well-known model for tracking what a learner knows.</a:t>
-            </a:r>
-          </a:p>
-          <a:p>
-            <a:pPr algn="just" marL="329184" indent="-219456">
+              <a:t>Proven methods for marking, plagiarism checking and tracking what a learner knows.</a:t>
+            </a:r>
+          </a:p>
+          <a:p>
+            <a:pPr algn="l" marL="329184" indent="-219456">
               <a:lnSpc>
-                <a:spcPct val="95000"/>
+                <a:spcPct val="106000"/>
               </a:lnSpc>
               <a:buFont typeface="Arial" pitchFamily="34" charset="0"/>
               <a:buChar char="•"/>
               <a:spcAft>
-                <a:spcPts val="300"/>
+                <a:spcPts val="400"/>
               </a:spcAft>
             </a:pPr>
             <a:r>
@@ -6767,7 +6745,7 @@
                 <a:latin typeface="Arial"/>
                 <a:cs typeface="Arial" pitchFamily="34" charset="0"/>
               </a:rPr>
-              <a:t>Runs on an ordinary computer. No expensive hardware, no paid AI service needed to mark a submission.</a:t>
+              <a:t>Ordinary hardware - no GPU, and no paid AI service to mark a submission.</a:t>
             </a:r>
           </a:p>
           <a:p>
@@ -6778,14 +6756,14 @@
               <a:buFont typeface="Wingdings" pitchFamily="34" charset="0"/>
               <a:buChar char="v"/>
               <a:spcBef>
-                <a:spcPts val="1000"/>
+                <a:spcPts val="1100"/>
               </a:spcBef>
               <a:spcAft>
-                <a:spcPts val="500"/>
+                <a:spcPts val="600"/>
               </a:spcAft>
             </a:pPr>
             <a:r>
-              <a:rPr sz="1600" b="1" i="0" u="sng">
+              <a:rPr sz="1500" b="1" i="0" u="sng">
                 <a:solidFill>
                   <a:srgbClr val="1F497D"/>
                 </a:solidFill>
@@ -6796,14 +6774,14 @@
             </a:r>
           </a:p>
           <a:p>
-            <a:pPr algn="just" marL="329184" indent="-219456">
+            <a:pPr algn="l" marL="329184" indent="-219456">
               <a:lnSpc>
-                <a:spcPct val="95000"/>
+                <a:spcPct val="106000"/>
               </a:lnSpc>
               <a:buFont typeface="Arial" pitchFamily="34" charset="0"/>
               <a:buChar char="•"/>
               <a:spcAft>
-                <a:spcPts val="300"/>
+                <a:spcPts val="400"/>
               </a:spcAft>
             </a:pPr>
             <a:r>
@@ -6814,18 +6792,18 @@
                 <a:latin typeface="Arial"/>
                 <a:cs typeface="Arial" pitchFamily="34" charset="0"/>
               </a:rPr>
-              <a:t>The teacher writes the lab question in ordinary English. The platform reads it and works out what it can check - and shows the teacher that list before anything is published.</a:t>
-            </a:r>
-          </a:p>
-          <a:p>
-            <a:pPr algn="just" marL="329184" indent="-219456">
+              <a:t>The teacher writes the question in plain English; the platform shows what it will check before anything is published.</a:t>
+            </a:r>
+          </a:p>
+          <a:p>
+            <a:pPr algn="l" marL="329184" indent="-219456">
               <a:lnSpc>
-                <a:spcPct val="95000"/>
+                <a:spcPct val="106000"/>
               </a:lnSpc>
               <a:buFont typeface="Arial" pitchFamily="34" charset="0"/>
               <a:buChar char="•"/>
               <a:spcAft>
-                <a:spcPts val="300"/>
+                <a:spcPts val="400"/>
               </a:spcAft>
             </a:pPr>
             <a:r>
@@ -6836,7 +6814,7 @@
                 <a:latin typeface="Arial"/>
                 <a:cs typeface="Arial" pitchFamily="34" charset="0"/>
               </a:rPr>
-              <a:t>Working prototype today: a full class of 24 students across four labs, marked from start to finish, with every screen above already built.</a:t>
+              <a:t>Working prototype: a class of 24 students across four labs, marked end to end.</a:t>
             </a:r>
           </a:p>
         </p:txBody>
@@ -7037,15 +7015,15 @@
           <a:p>
             <a:pPr algn="ctr" marL="0" indent="0">
               <a:lnSpc>
-                <a:spcPct val="95000"/>
+                <a:spcPct val="100000"/>
               </a:lnSpc>
               <a:buNone/>
               <a:spcAft>
-                <a:spcPts val="300"/>
+                <a:spcPts val="400"/>
               </a:spcAft>
             </a:pPr>
             <a:r>
-              <a:rPr sz="1050" b="1" i="0" u="none">
+              <a:rPr sz="1100" b="1" i="0" u="none">
                 <a:solidFill>
                   <a:srgbClr val="FFFFFF"/>
                 </a:solidFill>
@@ -7058,12 +7036,12 @@
           <a:p>
             <a:pPr algn="ctr" marL="0" indent="0">
               <a:lnSpc>
-                <a:spcPct val="90000"/>
+                <a:spcPct val="106000"/>
               </a:lnSpc>
               <a:buNone/>
             </a:pPr>
             <a:r>
-              <a:rPr sz="850" b="0" i="0" u="none">
+              <a:rPr sz="950" b="0" i="0" u="none">
                 <a:solidFill>
                   <a:srgbClr val="FFFFFF"/>
                 </a:solidFill>
@@ -7157,15 +7135,15 @@
           <a:p>
             <a:pPr algn="ctr" marL="0" indent="0">
               <a:lnSpc>
-                <a:spcPct val="95000"/>
+                <a:spcPct val="100000"/>
               </a:lnSpc>
               <a:buNone/>
               <a:spcAft>
-                <a:spcPts val="300"/>
+                <a:spcPts val="400"/>
               </a:spcAft>
             </a:pPr>
             <a:r>
-              <a:rPr sz="1050" b="1" i="0" u="none">
+              <a:rPr sz="1100" b="1" i="0" u="none">
                 <a:solidFill>
                   <a:srgbClr val="FFFFFF"/>
                 </a:solidFill>
@@ -7178,12 +7156,12 @@
           <a:p>
             <a:pPr algn="ctr" marL="0" indent="0">
               <a:lnSpc>
-                <a:spcPct val="90000"/>
+                <a:spcPct val="106000"/>
               </a:lnSpc>
               <a:buNone/>
             </a:pPr>
             <a:r>
-              <a:rPr sz="850" b="0" i="0" u="none">
+              <a:rPr sz="950" b="0" i="0" u="none">
                 <a:solidFill>
                   <a:srgbClr val="FFFFFF"/>
                 </a:solidFill>
@@ -7277,15 +7255,15 @@
           <a:p>
             <a:pPr algn="ctr" marL="0" indent="0">
               <a:lnSpc>
-                <a:spcPct val="95000"/>
+                <a:spcPct val="100000"/>
               </a:lnSpc>
               <a:buNone/>
               <a:spcAft>
-                <a:spcPts val="300"/>
+                <a:spcPts val="400"/>
               </a:spcAft>
             </a:pPr>
             <a:r>
-              <a:rPr sz="1050" b="1" i="0" u="none">
+              <a:rPr sz="1100" b="1" i="0" u="none">
                 <a:solidFill>
                   <a:srgbClr val="FFFFFF"/>
                 </a:solidFill>
@@ -7298,12 +7276,12 @@
           <a:p>
             <a:pPr algn="ctr" marL="0" indent="0">
               <a:lnSpc>
-                <a:spcPct val="90000"/>
+                <a:spcPct val="106000"/>
               </a:lnSpc>
               <a:buNone/>
             </a:pPr>
             <a:r>
-              <a:rPr sz="850" b="0" i="0" u="none">
+              <a:rPr sz="950" b="0" i="0" u="none">
                 <a:solidFill>
                   <a:srgbClr val="FFFFFF"/>
                 </a:solidFill>
@@ -7397,15 +7375,15 @@
           <a:p>
             <a:pPr algn="ctr" marL="0" indent="0">
               <a:lnSpc>
-                <a:spcPct val="95000"/>
+                <a:spcPct val="100000"/>
               </a:lnSpc>
               <a:buNone/>
               <a:spcAft>
-                <a:spcPts val="300"/>
+                <a:spcPts val="400"/>
               </a:spcAft>
             </a:pPr>
             <a:r>
-              <a:rPr sz="1050" b="1" i="0" u="none">
+              <a:rPr sz="1100" b="1" i="0" u="none">
                 <a:solidFill>
                   <a:srgbClr val="FFFFFF"/>
                 </a:solidFill>
@@ -7418,12 +7396,12 @@
           <a:p>
             <a:pPr algn="ctr" marL="0" indent="0">
               <a:lnSpc>
-                <a:spcPct val="90000"/>
+                <a:spcPct val="106000"/>
               </a:lnSpc>
               <a:buNone/>
             </a:pPr>
             <a:r>
-              <a:rPr sz="850" b="0" i="0" u="none">
+              <a:rPr sz="950" b="0" i="0" u="none">
                 <a:solidFill>
                   <a:srgbClr val="FFFFFF"/>
                 </a:solidFill>
@@ -7459,12 +7437,12 @@
           <a:p>
             <a:pPr algn="ctr" marL="0" indent="0">
               <a:lnSpc>
-                <a:spcPct val="95000"/>
+                <a:spcPct val="104000"/>
               </a:lnSpc>
               <a:buNone/>
             </a:pPr>
             <a:r>
-              <a:rPr sz="1100" b="1" i="0" u="none">
+              <a:rPr sz="1150" b="1" i="0" u="none">
                 <a:solidFill>
                   <a:srgbClr val="1F497D"/>
                 </a:solidFill>
@@ -7617,8 +7595,8 @@
         </p:nvSpPr>
         <p:spPr bwMode="auto">
           <a:xfrm>
-            <a:off x="329184" y="1152144"/>
-            <a:ext cx="11503152" cy="4261104"/>
+            <a:off x="329184" y="1188720"/>
+            <a:ext cx="11503152" cy="4206240"/>
           </a:xfrm>
           <a:prstGeom prst="rect">
             <a:avLst/>
@@ -7675,14 +7653,14 @@
               <a:buFont typeface="Wingdings" pitchFamily="34" charset="0"/>
               <a:buChar char="v"/>
               <a:spcBef>
-                <a:spcPts val="700"/>
+                <a:spcPts val="1300"/>
               </a:spcBef>
               <a:spcAft>
-                <a:spcPts val="300"/>
+                <a:spcPts val="600"/>
               </a:spcAft>
             </a:pPr>
             <a:r>
-              <a:rPr sz="1700" b="1" i="0" u="sng">
+              <a:rPr sz="1600" b="1" i="0" u="sng">
                 <a:solidFill>
                   <a:srgbClr val="1F497D"/>
                 </a:solidFill>
@@ -7693,18 +7671,18 @@
             </a:r>
           </a:p>
           <a:p>
-            <a:pPr algn="just" marL="329184" indent="-219456">
+            <a:pPr algn="l" marL="329184" indent="-219456">
               <a:lnSpc>
-                <a:spcPct val="95000"/>
+                <a:spcPct val="106000"/>
               </a:lnSpc>
               <a:buFont typeface="Arial" pitchFamily="34" charset="0"/>
               <a:buChar char="•"/>
               <a:spcAft>
-                <a:spcPts val="200"/>
+                <a:spcPts val="400"/>
               </a:spcAft>
             </a:pPr>
             <a:r>
-              <a:rPr sz="1400" b="0" i="0" u="none">
+              <a:rPr sz="1350" b="0" i="0" u="none">
                 <a:solidFill>
                   <a:srgbClr val="1A1A1A"/>
                 </a:solidFill>
@@ -7715,47 +7693,47 @@
             </a:r>
           </a:p>
           <a:p>
-            <a:pPr algn="just" marL="329184" indent="-219456">
+            <a:pPr algn="l" marL="329184" indent="-219456">
               <a:lnSpc>
-                <a:spcPct val="95000"/>
+                <a:spcPct val="106000"/>
               </a:lnSpc>
               <a:buFont typeface="Arial" pitchFamily="34" charset="0"/>
               <a:buChar char="•"/>
               <a:spcAft>
-                <a:spcPts val="200"/>
+                <a:spcPts val="400"/>
               </a:spcAft>
             </a:pPr>
             <a:r>
-              <a:rPr sz="1400" b="0" i="0" u="none">
+              <a:rPr sz="1350" b="0" i="0" u="none">
                 <a:solidFill>
                   <a:srgbClr val="1A1A1A"/>
                 </a:solidFill>
                 <a:latin typeface="Arial"/>
                 <a:cs typeface="Arial" pitchFamily="34" charset="0"/>
               </a:rPr>
-              <a:t>It runs on a normal laptop or a small college server, and setting up one lab takes a teacher about ten minutes.</a:t>
-            </a:r>
-          </a:p>
-          <a:p>
-            <a:pPr algn="just" marL="329184" indent="-219456">
+              <a:t>Runs on a normal laptop or a small college server.</a:t>
+            </a:r>
+          </a:p>
+          <a:p>
+            <a:pPr algn="l" marL="329184" indent="-219456">
               <a:lnSpc>
-                <a:spcPct val="95000"/>
+                <a:spcPct val="106000"/>
               </a:lnSpc>
               <a:buFont typeface="Arial" pitchFamily="34" charset="0"/>
               <a:buChar char="•"/>
               <a:spcAft>
-                <a:spcPts val="200"/>
+                <a:spcPts val="400"/>
               </a:spcAft>
             </a:pPr>
             <a:r>
-              <a:rPr sz="1400" b="0" i="0" u="none">
+              <a:rPr sz="1350" b="0" i="0" u="none">
                 <a:solidFill>
                   <a:srgbClr val="1A1A1A"/>
                 </a:solidFill>
                 <a:latin typeface="Arial"/>
                 <a:cs typeface="Arial" pitchFamily="34" charset="0"/>
               </a:rPr>
-              <a:t>It fits into the tools a college already uses, so marks go back into the existing gradebook automatically.</a:t>
+              <a:t>Fits the tools a college already uses, so marks return to the existing gradebook.</a:t>
             </a:r>
           </a:p>
           <a:p>
@@ -7766,14 +7744,14 @@
               <a:buFont typeface="Wingdings" pitchFamily="34" charset="0"/>
               <a:buChar char="v"/>
               <a:spcBef>
-                <a:spcPts val="700"/>
+                <a:spcPts val="1300"/>
               </a:spcBef>
               <a:spcAft>
-                <a:spcPts val="300"/>
+                <a:spcPts val="600"/>
               </a:spcAft>
             </a:pPr>
             <a:r>
-              <a:rPr sz="1700" b="1" i="0" u="sng">
+              <a:rPr sz="1600" b="1" i="0" u="sng">
                 <a:solidFill>
                   <a:srgbClr val="1F497D"/>
                 </a:solidFill>
@@ -7784,91 +7762,91 @@
             </a:r>
           </a:p>
           <a:p>
-            <a:pPr algn="just" marL="329184" indent="-219456">
+            <a:pPr algn="l" marL="329184" indent="-219456">
               <a:lnSpc>
-                <a:spcPct val="95000"/>
+                <a:spcPct val="106000"/>
               </a:lnSpc>
               <a:buFont typeface="Arial" pitchFamily="34" charset="0"/>
               <a:buChar char="•"/>
               <a:spcAft>
-                <a:spcPts val="200"/>
+                <a:spcPts val="400"/>
               </a:spcAft>
             </a:pPr>
             <a:r>
-              <a:rPr sz="1400" b="0" i="0" u="none">
+              <a:rPr sz="1350" b="0" i="0" u="none">
                 <a:solidFill>
                   <a:srgbClr val="1A1A1A"/>
                 </a:solidFill>
                 <a:latin typeface="Arial"/>
                 <a:cs typeface="Arial" pitchFamily="34" charset="0"/>
               </a:rPr>
-              <a:t>Student programs are run on our machine, and some of them will be badly behaved.</a:t>
-            </a:r>
-          </a:p>
-          <a:p>
-            <a:pPr algn="just" marL="329184" indent="-219456">
+              <a:t>Running students' programs safely on our own machine.</a:t>
+            </a:r>
+          </a:p>
+          <a:p>
+            <a:pPr algn="l" marL="329184" indent="-219456">
               <a:lnSpc>
-                <a:spcPct val="95000"/>
+                <a:spcPct val="106000"/>
               </a:lnSpc>
               <a:buFont typeface="Arial" pitchFamily="34" charset="0"/>
               <a:buChar char="•"/>
               <a:spcAft>
-                <a:spcPts val="200"/>
+                <a:spcPts val="400"/>
               </a:spcAft>
             </a:pPr>
             <a:r>
-              <a:rPr sz="1400" b="0" i="0" u="none">
+              <a:rPr sz="1350" b="0" i="0" u="none">
                 <a:solidFill>
                   <a:srgbClr val="1A1A1A"/>
                 </a:solidFill>
                 <a:latin typeface="Arial"/>
                 <a:cs typeface="Arial" pitchFamily="34" charset="0"/>
               </a:rPr>
-              <a:t>Automatic marking can get things wrong, and a wrong mark destroys trust quickly.</a:t>
-            </a:r>
-          </a:p>
-          <a:p>
-            <a:pPr algn="just" marL="329184" indent="-219456">
+              <a:t>A wrong automatic mark loses a class's trust very quickly.</a:t>
+            </a:r>
+          </a:p>
+          <a:p>
+            <a:pPr algn="l" marL="329184" indent="-219456">
               <a:lnSpc>
-                <a:spcPct val="95000"/>
+                <a:spcPct val="106000"/>
               </a:lnSpc>
               <a:buFont typeface="Arial" pitchFamily="34" charset="0"/>
               <a:buChar char="•"/>
               <a:spcAft>
-                <a:spcPts val="200"/>
+                <a:spcPts val="400"/>
               </a:spcAft>
             </a:pPr>
             <a:r>
-              <a:rPr sz="1400" b="0" i="0" u="none">
+              <a:rPr sz="1350" b="0" i="0" u="none">
                 <a:solidFill>
                   <a:srgbClr val="1A1A1A"/>
                 </a:solidFill>
                 <a:latin typeface="Arial"/>
                 <a:cs typeface="Arial" pitchFamily="34" charset="0"/>
               </a:rPr>
-              <a:t>Wrongly accusing a student of copying is the most damaging mistake the system could make.</a:t>
-            </a:r>
-          </a:p>
-          <a:p>
-            <a:pPr algn="just" marL="329184" indent="-219456">
+              <a:t>Wrongly accusing a student of copying.</a:t>
+            </a:r>
+          </a:p>
+          <a:p>
+            <a:pPr algn="l" marL="329184" indent="-219456">
               <a:lnSpc>
-                <a:spcPct val="95000"/>
+                <a:spcPct val="106000"/>
               </a:lnSpc>
               <a:buFont typeface="Arial" pitchFamily="34" charset="0"/>
               <a:buChar char="•"/>
               <a:spcAft>
-                <a:spcPts val="200"/>
+                <a:spcPts val="400"/>
               </a:spcAft>
             </a:pPr>
             <a:r>
-              <a:rPr sz="1400" b="0" i="0" u="none">
+              <a:rPr sz="1350" b="0" i="0" u="none">
                 <a:solidFill>
                   <a:srgbClr val="1A1A1A"/>
                 </a:solidFill>
                 <a:latin typeface="Arial"/>
                 <a:cs typeface="Arial" pitchFamily="34" charset="0"/>
               </a:rPr>
-              <a:t>Teachers will abandon anything that costs them more time than it saves.</a:t>
+              <a:t>Teachers abandoning anything that costs more time than it saves.</a:t>
             </a:r>
           </a:p>
           <a:p>
@@ -7879,14 +7857,14 @@
               <a:buFont typeface="Wingdings" pitchFamily="34" charset="0"/>
               <a:buChar char="v"/>
               <a:spcBef>
-                <a:spcPts val="700"/>
+                <a:spcPts val="1300"/>
               </a:spcBef>
               <a:spcAft>
-                <a:spcPts val="300"/>
+                <a:spcPts val="600"/>
               </a:spcAft>
             </a:pPr>
             <a:r>
-              <a:rPr sz="1700" b="1" i="0" u="sng">
+              <a:rPr sz="1600" b="1" i="0" u="sng">
                 <a:solidFill>
                   <a:srgbClr val="1F497D"/>
                 </a:solidFill>
@@ -7897,91 +7875,91 @@
             </a:r>
           </a:p>
           <a:p>
-            <a:pPr algn="just" marL="329184" indent="-219456">
+            <a:pPr algn="l" marL="329184" indent="-219456">
               <a:lnSpc>
-                <a:spcPct val="95000"/>
+                <a:spcPct val="106000"/>
               </a:lnSpc>
               <a:buFont typeface="Arial" pitchFamily="34" charset="0"/>
               <a:buChar char="•"/>
               <a:spcAft>
-                <a:spcPts val="200"/>
+                <a:spcPts val="400"/>
               </a:spcAft>
             </a:pPr>
             <a:r>
-              <a:rPr sz="1400" b="0" i="0" u="none">
+              <a:rPr sz="1350" b="0" i="0" u="none">
                 <a:solidFill>
                   <a:srgbClr val="1A1A1A"/>
                 </a:solidFill>
                 <a:latin typeface="Arial"/>
                 <a:cs typeface="Arial" pitchFamily="34" charset="0"/>
               </a:rPr>
-              <a:t>Every program runs sealed off from everything else, and is thrown away afterwards.</a:t>
-            </a:r>
-          </a:p>
-          <a:p>
-            <a:pPr algn="just" marL="329184" indent="-219456">
+              <a:t>Every program runs sealed off from everything else, then is destroyed.</a:t>
+            </a:r>
+          </a:p>
+          <a:p>
+            <a:pPr algn="l" marL="329184" indent="-219456">
               <a:lnSpc>
-                <a:spcPct val="95000"/>
+                <a:spcPct val="106000"/>
               </a:lnSpc>
               <a:buFont typeface="Arial" pitchFamily="34" charset="0"/>
               <a:buChar char="•"/>
               <a:spcAft>
-                <a:spcPts val="200"/>
+                <a:spcPts val="400"/>
               </a:spcAft>
             </a:pPr>
             <a:r>
-              <a:rPr sz="1400" b="0" i="0" u="none">
+              <a:rPr sz="1350" b="0" i="0" u="none">
                 <a:solidFill>
                   <a:srgbClr val="1A1A1A"/>
                 </a:solidFill>
                 <a:latin typeface="Arial"/>
                 <a:cs typeface="Arial" pitchFamily="34" charset="0"/>
               </a:rPr>
-              <a:t>The system knows when it is unsure and sends those submissions to the teacher. Students can question any mark and get a human answer.</a:t>
-            </a:r>
-          </a:p>
-          <a:p>
-            <a:pPr algn="just" marL="329184" indent="-219456">
+              <a:t>Unsure work goes to the teacher, and any student can question any mark.</a:t>
+            </a:r>
+          </a:p>
+          <a:p>
+            <a:pPr algn="l" marL="329184" indent="-219456">
               <a:lnSpc>
-                <a:spcPct val="95000"/>
+                <a:spcPct val="106000"/>
               </a:lnSpc>
               <a:buFont typeface="Arial" pitchFamily="34" charset="0"/>
               <a:buChar char="•"/>
               <a:spcAft>
-                <a:spcPts val="200"/>
+                <a:spcPts val="400"/>
               </a:spcAft>
             </a:pPr>
             <a:r>
-              <a:rPr sz="1400" b="0" i="0" u="none">
+              <a:rPr sz="1350" b="0" i="0" u="none">
                 <a:solidFill>
                   <a:srgbClr val="1A1A1A"/>
                 </a:solidFill>
                 <a:latin typeface="Arial"/>
                 <a:cs typeface="Arial" pitchFamily="34" charset="0"/>
               </a:rPr>
-              <a:t>For copying, it only shows the overlapping lines side by side. The judgement stays with the teacher - the platform never accuses anyone.</a:t>
-            </a:r>
-          </a:p>
-          <a:p>
-            <a:pPr algn="just" marL="329184" indent="-219456">
+              <a:t>For copying we show the matching lines only. The teacher decides.</a:t>
+            </a:r>
+          </a:p>
+          <a:p>
+            <a:pPr algn="l" marL="329184" indent="-219456">
               <a:lnSpc>
-                <a:spcPct val="95000"/>
+                <a:spcPct val="106000"/>
               </a:lnSpc>
               <a:buFont typeface="Arial" pitchFamily="34" charset="0"/>
               <a:buChar char="•"/>
               <a:spcAft>
-                <a:spcPts val="200"/>
+                <a:spcPts val="400"/>
               </a:spcAft>
             </a:pPr>
             <a:r>
-              <a:rPr sz="1400" b="0" i="0" u="none">
+              <a:rPr sz="1350" b="0" i="0" u="none">
                 <a:solidFill>
                   <a:srgbClr val="1A1A1A"/>
                 </a:solidFill>
                 <a:latin typeface="Arial"/>
                 <a:cs typeface="Arial" pitchFamily="34" charset="0"/>
               </a:rPr>
-              <a:t>Set-up is ten minutes, marks flow back into the existing gradebook, and every correction a teacher makes teaches the system to do better next time.</a:t>
+              <a:t>Ten-minute setup, and every correction a teacher makes trains the system.</a:t>
             </a:r>
           </a:p>
         </p:txBody>
@@ -8265,7 +8243,7 @@
           <a:p>
             <a:pPr algn="ctr" marL="0" indent="0">
               <a:lnSpc>
-                <a:spcPct val="90000"/>
+                <a:spcPct val="100000"/>
               </a:lnSpc>
               <a:buNone/>
             </a:pPr>
@@ -8283,7 +8261,7 @@
           <a:p>
             <a:pPr algn="ctr" marL="0" indent="0">
               <a:lnSpc>
-                <a:spcPct val="88000"/>
+                <a:spcPct val="104000"/>
               </a:lnSpc>
               <a:buNone/>
             </a:pPr>
@@ -8295,7 +8273,7 @@
                 <a:latin typeface="Arial"/>
                 <a:cs typeface="Arial" pitchFamily="34" charset="0"/>
               </a:rPr>
-              <a:t>a full class of 24 students and four labs, marked end to end</a:t>
+              <a:t>a class of 24 students and four labs, marked end to end</a:t>
             </a:r>
           </a:p>
         </p:txBody>
@@ -8344,7 +8322,7 @@
           <a:p>
             <a:pPr algn="ctr" marL="0" indent="0">
               <a:lnSpc>
-                <a:spcPct val="90000"/>
+                <a:spcPct val="100000"/>
               </a:lnSpc>
               <a:buNone/>
             </a:pPr>
@@ -8362,7 +8340,7 @@
           <a:p>
             <a:pPr algn="ctr" marL="0" indent="0">
               <a:lnSpc>
-                <a:spcPct val="88000"/>
+                <a:spcPct val="104000"/>
               </a:lnSpc>
               <a:buNone/>
             </a:pPr>
@@ -8423,7 +8401,7 @@
           <a:p>
             <a:pPr algn="ctr" marL="0" indent="0">
               <a:lnSpc>
-                <a:spcPct val="90000"/>
+                <a:spcPct val="100000"/>
               </a:lnSpc>
               <a:buNone/>
             </a:pPr>
@@ -8441,7 +8419,7 @@
           <a:p>
             <a:pPr algn="ctr" marL="0" indent="0">
               <a:lnSpc>
-                <a:spcPct val="88000"/>
+                <a:spcPct val="104000"/>
               </a:lnSpc>
               <a:buNone/>
             </a:pPr>
@@ -8453,7 +8431,7 @@
                 <a:latin typeface="Arial"/>
                 <a:cs typeface="Arial" pitchFamily="34" charset="0"/>
               </a:rPr>
-              <a:t>runs on ordinary hardware, no paid AI service to mark work</a:t>
+              <a:t>ordinary hardware, no paid AI service</a:t>
             </a:r>
           </a:p>
         </p:txBody>
@@ -8604,8 +8582,8 @@
         </p:nvSpPr>
         <p:spPr bwMode="auto">
           <a:xfrm>
-            <a:off x="329184" y="1152144"/>
-            <a:ext cx="11503152" cy="5029200"/>
+            <a:off x="329184" y="1389888"/>
+            <a:ext cx="11503152" cy="4791456"/>
           </a:xfrm>
           <a:prstGeom prst="rect">
             <a:avLst/>
@@ -8648,14 +8626,14 @@
               <a:buFont typeface="Wingdings" pitchFamily="34" charset="0"/>
               <a:buChar char="v"/>
               <a:spcBef>
-                <a:spcPts val="700"/>
+                <a:spcPts val="3400"/>
               </a:spcBef>
               <a:spcAft>
-                <a:spcPts val="300"/>
+                <a:spcPts val="600"/>
               </a:spcAft>
             </a:pPr>
             <a:r>
-              <a:rPr sz="1700" b="1" i="0" u="sng">
+              <a:rPr sz="2000" b="1" i="0" u="sng">
                 <a:solidFill>
                   <a:srgbClr val="1F497D"/>
                 </a:solidFill>
@@ -8666,69 +8644,69 @@
             </a:r>
           </a:p>
           <a:p>
-            <a:pPr algn="just" marL="329184" indent="-219456">
+            <a:pPr algn="l" marL="329184" indent="-219456">
               <a:lnSpc>
-                <a:spcPct val="95000"/>
+                <a:spcPct val="118000"/>
               </a:lnSpc>
               <a:buFont typeface="Arial" pitchFamily="34" charset="0"/>
               <a:buChar char="•"/>
               <a:spcAft>
-                <a:spcPts val="200"/>
+                <a:spcPts val="1300"/>
               </a:spcAft>
             </a:pPr>
             <a:r>
-              <a:rPr sz="1500" b="0" i="0" u="none">
+              <a:rPr sz="1750" b="0" i="0" u="none">
                 <a:solidFill>
                   <a:srgbClr val="1A1A1A"/>
                 </a:solidFill>
                 <a:latin typeface="Arial"/>
                 <a:cs typeface="Arial" pitchFamily="34" charset="0"/>
               </a:rPr>
-              <a:t>Students stop guessing why they lost marks. Instead of "72/100" they see "your program crashes when the list is empty" - and which topic to revise because of it.</a:t>
-            </a:r>
-          </a:p>
-          <a:p>
-            <a:pPr algn="just" marL="329184" indent="-219456">
+              <a:t>Students see “your program crashes on an empty list” instead of “72/100”.</a:t>
+            </a:r>
+          </a:p>
+          <a:p>
+            <a:pPr algn="l" marL="329184" indent="-219456">
               <a:lnSpc>
-                <a:spcPct val="95000"/>
+                <a:spcPct val="118000"/>
               </a:lnSpc>
               <a:buFont typeface="Arial" pitchFamily="34" charset="0"/>
               <a:buChar char="•"/>
               <a:spcAft>
-                <a:spcPts val="200"/>
+                <a:spcPts val="1300"/>
               </a:spcAft>
             </a:pPr>
             <a:r>
-              <a:rPr sz="1500" b="0" i="0" u="none">
+              <a:rPr sz="1750" b="0" i="0" u="none">
                 <a:solidFill>
                   <a:srgbClr val="1A1A1A"/>
                 </a:solidFill>
                 <a:latin typeface="Arial"/>
                 <a:cs typeface="Arial" pitchFamily="34" charset="0"/>
               </a:rPr>
-              <a:t>Teachers get their marking hours back, and get told what the class did not understand while there is still time to teach it again.</a:t>
-            </a:r>
-          </a:p>
-          <a:p>
-            <a:pPr algn="just" marL="329184" indent="-219456">
+              <a:t>Teachers get their marking hours back, and hear what the class missed in time to teach it again.</a:t>
+            </a:r>
+          </a:p>
+          <a:p>
+            <a:pPr algn="l" marL="329184" indent="-219456">
               <a:lnSpc>
-                <a:spcPct val="95000"/>
+                <a:spcPct val="118000"/>
               </a:lnSpc>
               <a:buFont typeface="Arial" pitchFamily="34" charset="0"/>
               <a:buChar char="•"/>
               <a:spcAft>
-                <a:spcPts val="200"/>
+                <a:spcPts val="1300"/>
               </a:spcAft>
             </a:pPr>
             <a:r>
-              <a:rPr sz="1500" b="0" i="0" u="none">
+              <a:rPr sz="1750" b="0" i="0" u="none">
                 <a:solidFill>
                   <a:srgbClr val="1A1A1A"/>
                 </a:solidFill>
                 <a:latin typeface="Arial"/>
                 <a:cs typeface="Arial" pitchFamily="34" charset="0"/>
               </a:rPr>
-              <a:t>Heads of department see how the course is performing against its stated outcomes, live, instead of reconstructing it at the end of the year.</a:t>
+              <a:t>Departments get NBA and NAAC outcome reports that are always up to date.</a:t>
             </a:r>
           </a:p>
           <a:p>
@@ -8739,14 +8717,14 @@
               <a:buFont typeface="Wingdings" pitchFamily="34" charset="0"/>
               <a:buChar char="v"/>
               <a:spcBef>
-                <a:spcPts val="700"/>
+                <a:spcPts val="3400"/>
               </a:spcBef>
               <a:spcAft>
-                <a:spcPts val="300"/>
+                <a:spcPts val="600"/>
               </a:spcAft>
             </a:pPr>
             <a:r>
-              <a:rPr sz="1700" b="1" i="0" u="sng">
+              <a:rPr sz="2000" b="1" i="0" u="sng">
                 <a:solidFill>
                   <a:srgbClr val="1F497D"/>
                 </a:solidFill>
@@ -8757,91 +8735,91 @@
             </a:r>
           </a:p>
           <a:p>
-            <a:pPr algn="just" marL="329184" indent="-219456">
+            <a:pPr algn="l" marL="329184" indent="-219456">
               <a:lnSpc>
-                <a:spcPct val="95000"/>
+                <a:spcPct val="118000"/>
               </a:lnSpc>
               <a:buFont typeface="Arial" pitchFamily="34" charset="0"/>
               <a:buChar char="•"/>
               <a:spcAft>
-                <a:spcPts val="200"/>
+                <a:spcPts val="1300"/>
               </a:spcAft>
             </a:pPr>
             <a:r>
-              <a:rPr sz="1500" b="0" i="0" u="none">
+              <a:rPr sz="1750" b="0" i="0" u="none">
                 <a:solidFill>
                   <a:srgbClr val="1A1A1A"/>
                 </a:solidFill>
                 <a:latin typeface="Arial"/>
                 <a:cs typeface="Arial" pitchFamily="34" charset="0"/>
               </a:rPr>
-              <a:t>Fairer marking. Every student is marked to the same standard, every mark comes with a reason, and any student can question any mark.</a:t>
-            </a:r>
-          </a:p>
-          <a:p>
-            <a:pPr algn="just" marL="329184" indent="-219456">
+              <a:t>Fairer - one standard for everyone, every mark has a reason, every mark can be questioned.</a:t>
+            </a:r>
+          </a:p>
+          <a:p>
+            <a:pPr algn="l" marL="329184" indent="-219456">
               <a:lnSpc>
-                <a:spcPct val="95000"/>
+                <a:spcPct val="118000"/>
               </a:lnSpc>
               <a:buFont typeface="Arial" pitchFamily="34" charset="0"/>
               <a:buChar char="•"/>
               <a:spcAft>
-                <a:spcPts val="200"/>
+                <a:spcPts val="1300"/>
               </a:spcAft>
             </a:pPr>
             <a:r>
-              <a:rPr sz="1500" b="0" i="0" u="none">
+              <a:rPr sz="1750" b="0" i="0" u="none">
                 <a:solidFill>
                   <a:srgbClr val="1A1A1A"/>
                 </a:solidFill>
                 <a:latin typeface="Arial"/>
                 <a:cs typeface="Arial" pitchFamily="34" charset="0"/>
               </a:rPr>
-              <a:t>Time and cost saved. Marking a lab of sixty students goes from an evening's work to reviewing the handful the system was unsure about.</a:t>
-            </a:r>
-          </a:p>
-          <a:p>
-            <a:pPr algn="just" marL="329184" indent="-219456">
+              <a:t>Cheaper - an evening of marking becomes reviewing the few cases the system flagged.</a:t>
+            </a:r>
+          </a:p>
+          <a:p>
+            <a:pPr algn="l" marL="329184" indent="-219456">
               <a:lnSpc>
-                <a:spcPct val="95000"/>
+                <a:spcPct val="118000"/>
               </a:lnSpc>
               <a:buFont typeface="Arial" pitchFamily="34" charset="0"/>
               <a:buChar char="•"/>
               <a:spcAft>
-                <a:spcPts val="200"/>
+                <a:spcPts val="1300"/>
               </a:spcAft>
             </a:pPr>
             <a:r>
-              <a:rPr sz="1500" b="0" i="0" u="none">
+              <a:rPr sz="1750" b="0" i="0" u="none">
                 <a:solidFill>
                   <a:srgbClr val="1A1A1A"/>
                 </a:solidFill>
                 <a:latin typeface="Arial"/>
                 <a:cs typeface="Arial" pitchFamily="34" charset="0"/>
               </a:rPr>
-              <a:t>Accreditation reporting for NBA and NAAC, which takes weeks of manual work today, becomes a report that is always up to date.</a:t>
-            </a:r>
-          </a:p>
-          <a:p>
-            <a:pPr algn="just" marL="329184" indent="-219456">
+              <a:t>Earlier - struggling students are found while something can still be done about it.</a:t>
+            </a:r>
+          </a:p>
+          <a:p>
+            <a:pPr algn="l" marL="329184" indent="-219456">
               <a:lnSpc>
-                <a:spcPct val="95000"/>
+                <a:spcPct val="118000"/>
               </a:lnSpc>
               <a:buFont typeface="Arial" pitchFamily="34" charset="0"/>
               <a:buChar char="•"/>
               <a:spcAft>
-                <a:spcPts val="200"/>
+                <a:spcPts val="1300"/>
               </a:spcAft>
             </a:pPr>
             <a:r>
-              <a:rPr sz="1500" b="0" i="0" u="none">
+              <a:rPr sz="1750" b="0" i="0" u="none">
                 <a:solidFill>
                   <a:srgbClr val="1A1A1A"/>
                 </a:solidFill>
                 <a:latin typeface="Arial"/>
                 <a:cs typeface="Arial" pitchFamily="34" charset="0"/>
               </a:rPr>
-              <a:t>Weaker students are spotted early and offered help, rather than discovered at the end of the semester when nothing can be done.</a:t>
+              <a:t>Lasting - what a class got wrong this year improves how it is taught next year.</a:t>
             </a:r>
           </a:p>
         </p:txBody>
@@ -9227,8 +9205,8 @@
         </p:nvSpPr>
         <p:spPr bwMode="auto">
           <a:xfrm>
-            <a:off x="329184" y="1152144"/>
-            <a:ext cx="11503152" cy="4261104"/>
+            <a:off x="329184" y="1188720"/>
+            <a:ext cx="11503152" cy="4206240"/>
           </a:xfrm>
           <a:prstGeom prst="rect">
             <a:avLst/>
@@ -9252,11 +9230,11 @@
               <a:buFont typeface="Wingdings" pitchFamily="34" charset="0"/>
               <a:buChar char="v"/>
               <a:spcAft>
-                <a:spcPts val="900"/>
+                <a:spcPts val="1000"/>
               </a:spcAft>
             </a:pPr>
             <a:r>
-              <a:rPr sz="1700" b="1" i="0" u="sng">
+              <a:rPr sz="1600" b="1" i="0" u="sng">
                 <a:solidFill>
                   <a:srgbClr val="1F497D"/>
                 </a:solidFill>
@@ -9269,19 +9247,19 @@
           <a:p>
             <a:pPr algn="l" marL="219456" indent="-219456">
               <a:lnSpc>
-                <a:spcPct val="95000"/>
+                <a:spcPct val="106000"/>
               </a:lnSpc>
               <a:buFont typeface="Arial" pitchFamily="34" charset="0"/>
               <a:buChar char="•"/>
               <a:spcBef>
-                <a:spcPts val="500"/>
+                <a:spcPts val="1300"/>
               </a:spcBef>
               <a:spcAft>
-                <a:spcPts val="200"/>
+                <a:spcPts val="500"/>
               </a:spcAft>
             </a:pPr>
             <a:r>
-              <a:rPr sz="1400" b="1" i="0" u="none">
+              <a:rPr sz="1500" b="1" i="0" u="none">
                 <a:solidFill>
                   <a:srgbClr val="0070C0"/>
                 </a:solidFill>
@@ -9294,41 +9272,41 @@
           <a:p>
             <a:pPr algn="l" marL="493776" indent="-219456">
               <a:lnSpc>
-                <a:spcPct val="95000"/>
+                <a:spcPct val="108000"/>
               </a:lnSpc>
               <a:buFont typeface="Arial" pitchFamily="34" charset="0"/>
               <a:buChar char="–"/>
               <a:spcAft>
-                <a:spcPts val="300"/>
+                <a:spcPts val="500"/>
               </a:spcAft>
             </a:pPr>
             <a:r>
-              <a:rPr sz="1250" b="0" i="0" u="none">
+              <a:rPr sz="1300" b="0" i="0" u="none">
                 <a:solidFill>
                   <a:srgbClr val="1A1A1A"/>
                 </a:solidFill>
                 <a:latin typeface="Arial"/>
                 <a:cs typeface="Arial" pitchFamily="34" charset="0"/>
               </a:rPr>
-              <a:t>Schleimer, Wilkerson &amp; Aiken, "Winnowing: Local Algorithms for Document Fingerprinting", ACM SIGMOD 2003 - the method behind MOSS, used by universities worldwide.</a:t>
+              <a:t>Schleimer, Wilkerson &amp; Aiken, “Winnowing: Local Algorithms for Document Fingerprinting”, ACM SIGMOD 2003 - the method behind MOSS.</a:t>
             </a:r>
           </a:p>
           <a:p>
             <a:pPr algn="l" marL="219456" indent="-219456">
               <a:lnSpc>
-                <a:spcPct val="95000"/>
+                <a:spcPct val="106000"/>
               </a:lnSpc>
               <a:buFont typeface="Arial" pitchFamily="34" charset="0"/>
               <a:buChar char="•"/>
               <a:spcBef>
-                <a:spcPts val="500"/>
+                <a:spcPts val="1300"/>
               </a:spcBef>
               <a:spcAft>
-                <a:spcPts val="200"/>
+                <a:spcPts val="500"/>
               </a:spcAft>
             </a:pPr>
             <a:r>
-              <a:rPr sz="1400" b="1" i="0" u="none">
+              <a:rPr sz="1500" b="1" i="0" u="none">
                 <a:solidFill>
                   <a:srgbClr val="0070C0"/>
                 </a:solidFill>
@@ -9341,63 +9319,63 @@
           <a:p>
             <a:pPr algn="l" marL="493776" indent="-219456">
               <a:lnSpc>
-                <a:spcPct val="95000"/>
+                <a:spcPct val="108000"/>
               </a:lnSpc>
               <a:buFont typeface="Arial" pitchFamily="34" charset="0"/>
               <a:buChar char="–"/>
               <a:spcAft>
-                <a:spcPts val="300"/>
+                <a:spcPts val="500"/>
               </a:spcAft>
             </a:pPr>
             <a:r>
-              <a:rPr sz="1250" b="0" i="0" u="none">
+              <a:rPr sz="1300" b="0" i="0" u="none">
                 <a:solidFill>
                   <a:srgbClr val="1A1A1A"/>
                 </a:solidFill>
                 <a:latin typeface="Arial"/>
                 <a:cs typeface="Arial" pitchFamily="34" charset="0"/>
               </a:rPr>
-              <a:t>Corbett &amp; Anderson, "Knowledge Tracing", User Modeling and User-Adapted Interaction, 1994 - the standard model for estimating mastery from performance.</a:t>
+              <a:t>Corbett &amp; Anderson, “Knowledge Tracing”, User Modeling and User-Adapted Interaction, 1994.</a:t>
             </a:r>
           </a:p>
           <a:p>
             <a:pPr algn="l" marL="493776" indent="-219456">
               <a:lnSpc>
-                <a:spcPct val="95000"/>
+                <a:spcPct val="108000"/>
               </a:lnSpc>
               <a:buFont typeface="Arial" pitchFamily="34" charset="0"/>
               <a:buChar char="–"/>
               <a:spcAft>
-                <a:spcPts val="300"/>
+                <a:spcPts val="500"/>
               </a:spcAft>
             </a:pPr>
             <a:r>
-              <a:rPr sz="1250" b="0" i="0" u="none">
+              <a:rPr sz="1300" b="0" i="0" u="none">
                 <a:solidFill>
                   <a:srgbClr val="1A1A1A"/>
                 </a:solidFill>
                 <a:latin typeface="Arial"/>
                 <a:cs typeface="Arial" pitchFamily="34" charset="0"/>
               </a:rPr>
-              <a:t>Ebel &amp; Frisbie, Essentials of Educational Measurement - the classical way to tell a good exam question from a bad one.</a:t>
+              <a:t>Ebel &amp; Frisbie, Essentials of Educational Measurement - telling a good exam question from a bad one.</a:t>
             </a:r>
           </a:p>
           <a:p>
             <a:pPr algn="l" marL="219456" indent="-219456">
               <a:lnSpc>
-                <a:spcPct val="95000"/>
+                <a:spcPct val="106000"/>
               </a:lnSpc>
               <a:buFont typeface="Arial" pitchFamily="34" charset="0"/>
               <a:buChar char="•"/>
               <a:spcBef>
-                <a:spcPts val="500"/>
+                <a:spcPts val="1300"/>
               </a:spcBef>
               <a:spcAft>
-                <a:spcPts val="200"/>
+                <a:spcPts val="500"/>
               </a:spcAft>
             </a:pPr>
             <a:r>
-              <a:rPr sz="1400" b="1" i="0" u="none">
+              <a:rPr sz="1500" b="1" i="0" u="none">
                 <a:solidFill>
                   <a:srgbClr val="0070C0"/>
                 </a:solidFill>
@@ -9410,161 +9388,114 @@
           <a:p>
             <a:pPr algn="l" marL="493776" indent="-219456">
               <a:lnSpc>
-                <a:spcPct val="95000"/>
+                <a:spcPct val="108000"/>
               </a:lnSpc>
               <a:buFont typeface="Arial" pitchFamily="34" charset="0"/>
               <a:buChar char="–"/>
               <a:spcAft>
-                <a:spcPts val="300"/>
+                <a:spcPts val="500"/>
               </a:spcAft>
             </a:pPr>
             <a:r>
-              <a:rPr sz="1250" b="0" i="0" u="none">
+              <a:rPr sz="1300" b="0" i="0" u="none">
                 <a:solidFill>
                   <a:srgbClr val="1A1A1A"/>
                 </a:solidFill>
                 <a:latin typeface="Arial"/>
                 <a:cs typeface="Arial" pitchFamily="34" charset="0"/>
               </a:rPr>
-              <a:t>Gulwani, Radicek &amp; Zuleger, "Automated Clustering and Program Repair for Introductory Programming Assignments", PLDI 2018 - the basis for giving partial credit instead of a zero.</a:t>
+              <a:t>Gulwani, Radicek &amp; Zuleger, “Automated Clustering and Program Repair for Introductory Programming Assignments”, PLDI 2018.</a:t>
             </a:r>
           </a:p>
           <a:p>
             <a:pPr algn="l" marL="493776" indent="-219456">
               <a:lnSpc>
-                <a:spcPct val="95000"/>
+                <a:spcPct val="108000"/>
               </a:lnSpc>
               <a:buFont typeface="Arial" pitchFamily="34" charset="0"/>
               <a:buChar char="–"/>
               <a:spcAft>
-                <a:spcPts val="300"/>
+                <a:spcPts val="500"/>
               </a:spcAft>
             </a:pPr>
             <a:r>
-              <a:rPr sz="1250" b="0" i="0" u="none">
+              <a:rPr sz="1300" b="0" i="0" u="none">
                 <a:solidFill>
                   <a:srgbClr val="1A1A1A"/>
                 </a:solidFill>
                 <a:latin typeface="Arial"/>
                 <a:cs typeface="Arial" pitchFamily="34" charset="0"/>
               </a:rPr>
-              <a:t>tree-sitter - the parser used to understand student code even when it does not compile.</a:t>
+              <a:t>tree-sitter - the parser used to read student code even when it does not compile.</a:t>
             </a:r>
           </a:p>
           <a:p>
             <a:pPr algn="l" marL="219456" indent="-219456">
               <a:lnSpc>
-                <a:spcPct val="95000"/>
+                <a:spcPct val="106000"/>
               </a:lnSpc>
               <a:buFont typeface="Arial" pitchFamily="34" charset="0"/>
               <a:buChar char="•"/>
               <a:spcBef>
-                <a:spcPts val="500"/>
+                <a:spcPts val="1300"/>
               </a:spcBef>
               <a:spcAft>
-                <a:spcPts val="200"/>
+                <a:spcPts val="500"/>
               </a:spcAft>
             </a:pPr>
             <a:r>
-              <a:rPr sz="1400" b="1" i="0" u="none">
+              <a:rPr sz="1500" b="1" i="0" u="none">
                 <a:solidFill>
                   <a:srgbClr val="0070C0"/>
                 </a:solidFill>
                 <a:latin typeface="Arial"/>
                 <a:cs typeface="Arial" pitchFamily="34" charset="0"/>
               </a:rPr>
-              <a:t>Running untrusted code safely</a:t>
+              <a:t>Running untrusted code, and the standards we build to</a:t>
             </a:r>
           </a:p>
           <a:p>
             <a:pPr algn="l" marL="493776" indent="-219456">
               <a:lnSpc>
-                <a:spcPct val="95000"/>
+                <a:spcPct val="108000"/>
               </a:lnSpc>
               <a:buFont typeface="Arial" pitchFamily="34" charset="0"/>
               <a:buChar char="–"/>
               <a:spcAft>
-                <a:spcPts val="300"/>
+                <a:spcPts val="500"/>
               </a:spcAft>
             </a:pPr>
             <a:r>
-              <a:rPr sz="1250" b="0" i="0" u="none">
+              <a:rPr sz="1300" b="0" i="0" u="none">
                 <a:solidFill>
                   <a:srgbClr val="1A1A1A"/>
                 </a:solidFill>
                 <a:latin typeface="Arial"/>
                 <a:cs typeface="Arial" pitchFamily="34" charset="0"/>
               </a:rPr>
-              <a:t>Agache et al., "Firecracker: Lightweight Virtualization", USENIX NSDI 2020.</a:t>
-            </a:r>
-          </a:p>
-          <a:p>
-            <a:pPr algn="l" marL="219456" indent="-219456">
-              <a:lnSpc>
-                <a:spcPct val="95000"/>
-              </a:lnSpc>
-              <a:buFont typeface="Arial" pitchFamily="34" charset="0"/>
-              <a:buChar char="•"/>
-              <a:spcBef>
-                <a:spcPts val="500"/>
-              </a:spcBef>
-              <a:spcAft>
-                <a:spcPts val="200"/>
-              </a:spcAft>
-            </a:pPr>
-            <a:r>
-              <a:rPr sz="1400" b="1" i="0" u="none">
-                <a:solidFill>
-                  <a:srgbClr val="0070C0"/>
-                </a:solidFill>
-                <a:latin typeface="Arial"/>
-                <a:cs typeface="Arial" pitchFamily="34" charset="0"/>
-              </a:rPr>
-              <a:t>Standards we build to</a:t>
+              <a:t>Agache et al., “Firecracker: Lightweight Virtualization”, USENIX NSDI 2020.</a:t>
             </a:r>
           </a:p>
           <a:p>
             <a:pPr algn="l" marL="493776" indent="-219456">
               <a:lnSpc>
-                <a:spcPct val="95000"/>
+                <a:spcPct val="108000"/>
               </a:lnSpc>
               <a:buFont typeface="Arial" pitchFamily="34" charset="0"/>
               <a:buChar char="–"/>
               <a:spcAft>
-                <a:spcPts val="300"/>
+                <a:spcPts val="500"/>
               </a:spcAft>
             </a:pPr>
             <a:r>
-              <a:rPr sz="1250" b="0" i="0" u="none">
+              <a:rPr sz="1300" b="0" i="0" u="none">
                 <a:solidFill>
                   <a:srgbClr val="1A1A1A"/>
                 </a:solidFill>
                 <a:latin typeface="Arial"/>
                 <a:cs typeface="Arial" pitchFamily="34" charset="0"/>
               </a:rPr>
-              <a:t>1EdTech Learning Tools Interoperability 1.3 - how the platform plugs into Moodle and Google Classroom.</a:t>
-            </a:r>
-          </a:p>
-          <a:p>
-            <a:pPr algn="l" marL="493776" indent="-219456">
-              <a:lnSpc>
-                <a:spcPct val="95000"/>
-              </a:lnSpc>
-              <a:buFont typeface="Arial" pitchFamily="34" charset="0"/>
-              <a:buChar char="–"/>
-              <a:spcAft>
-                <a:spcPts val="300"/>
-              </a:spcAft>
-            </a:pPr>
-            <a:r>
-              <a:rPr sz="1250" b="0" i="0" u="none">
-                <a:solidFill>
-                  <a:srgbClr val="1A1A1A"/>
-                </a:solidFill>
-                <a:latin typeface="Arial"/>
-                <a:cs typeface="Arial" pitchFamily="34" charset="0"/>
-              </a:rPr>
-              <a:t>National Board of Accreditation (India) - the CO-PO attainment rules the reports follow.</a:t>
+              <a:t>1EdTech LTI 1.3 for Moodle and Google Classroom; NBA (India) for the CO-PO reports.</a:t>
             </a:r>
           </a:p>
         </p:txBody>
@@ -9833,7 +9764,7 @@
           <a:p>
             <a:pPr algn="ctr" marL="0" indent="0">
               <a:lnSpc>
-                <a:spcPct val="95000"/>
+                <a:spcPct val="100000"/>
               </a:lnSpc>
               <a:buNone/>
             </a:pPr>

--- a/presentation/SIH2026-EvalPro-Idea-Presentation.pptx
+++ b/presentation/SIH2026-EvalPro-Idea-Presentation.pptx
@@ -6272,7 +6272,7 @@
                 <a:latin typeface="Arial"/>
                 <a:cs typeface="Arial" pitchFamily="34" charset="0"/>
               </a:rPr>
-              <a:t>A missing bracket costs two marks, not the whole lab.</a:t>
+              <a:t>It marks the thinking, not just the output - a right idea with one wrong line still scores.</a:t>
             </a:r>
           </a:p>
           <a:p>

--- a/presentation/SIH2026-EvalPro-Idea-Presentation.pptx
+++ b/presentation/SIH2026-EvalPro-Idea-Presentation.pptx
@@ -6138,6 +6138,28 @@
             </a:r>
           </a:p>
           <a:p>
+            <a:pPr algn="l" marL="329184" indent="-219456">
+              <a:lnSpc>
+                <a:spcPct val="112000"/>
+              </a:lnSpc>
+              <a:buFont typeface="Arial" pitchFamily="34" charset="0"/>
+              <a:buChar char="•"/>
+              <a:spcAft>
+                <a:spcPts val="600"/>
+              </a:spcAft>
+            </a:pPr>
+            <a:r>
+              <a:rPr sz="1600" b="0" i="0" u="none">
+                <a:solidFill>
+                  <a:srgbClr val="1A1A1A"/>
+                </a:solidFill>
+                <a:latin typeface="Arial"/>
+                <a:cs typeface="Arial" pitchFamily="34" charset="0"/>
+              </a:rPr>
+              <a:t>A student who thinks a mark is wrong can challenge it, and a teacher answers.</a:t>
+            </a:r>
+          </a:p>
+          <a:p>
             <a:pPr algn="l" marL="219456" indent="-219456">
               <a:lnSpc>
                 <a:spcPct val="100000"/>
@@ -6225,7 +6247,29 @@
                 <a:latin typeface="Arial"/>
                 <a:cs typeface="Arial" pitchFamily="34" charset="0"/>
               </a:rPr>
-              <a:t>Tells students what to revise, and teachers what to explain again.</a:t>
+              <a:t>Groups the class's mistakes, so a teacher sees the few things most people got wrong.</a:t>
+            </a:r>
+          </a:p>
+          <a:p>
+            <a:pPr algn="l" marL="329184" indent="-219456">
+              <a:lnSpc>
+                <a:spcPct val="112000"/>
+              </a:lnSpc>
+              <a:buFont typeface="Arial" pitchFamily="34" charset="0"/>
+              <a:buChar char="•"/>
+              <a:spcAft>
+                <a:spcPts val="600"/>
+              </a:spcAft>
+            </a:pPr>
+            <a:r>
+              <a:rPr sz="1600" b="0" i="0" u="none">
+                <a:solidFill>
+                  <a:srgbClr val="1A1A1A"/>
+                </a:solidFill>
+                <a:latin typeface="Arial"/>
+                <a:cs typeface="Arial" pitchFamily="34" charset="0"/>
+              </a:rPr>
+              <a:t>Flags students slipping behind while there is still time to help them.</a:t>
             </a:r>
           </a:p>
           <a:p>
@@ -6317,6 +6361,50 @@
                 <a:cs typeface="Arial" pitchFamily="34" charset="0"/>
               </a:rPr>
               <a:t>It marks the question paper too - unclear questions are flagged to the teacher.</a:t>
+            </a:r>
+          </a:p>
+          <a:p>
+            <a:pPr algn="l" marL="329184" indent="-219456">
+              <a:lnSpc>
+                <a:spcPct val="112000"/>
+              </a:lnSpc>
+              <a:buFont typeface="Arial" pitchFamily="34" charset="0"/>
+              <a:buChar char="•"/>
+              <a:spcAft>
+                <a:spcPts val="600"/>
+              </a:spcAft>
+            </a:pPr>
+            <a:r>
+              <a:rPr sz="1600" b="0" i="0" u="none">
+                <a:solidFill>
+                  <a:srgbClr val="1A1A1A"/>
+                </a:solidFill>
+                <a:latin typeface="Arial"/>
+                <a:cs typeface="Arial" pitchFamily="34" charset="0"/>
+              </a:rPr>
+              <a:t>It spots copied work by showing the matching lines - the teacher decides, not the machine.</a:t>
+            </a:r>
+          </a:p>
+          <a:p>
+            <a:pPr algn="l" marL="329184" indent="-219456">
+              <a:lnSpc>
+                <a:spcPct val="112000"/>
+              </a:lnSpc>
+              <a:buFont typeface="Arial" pitchFamily="34" charset="0"/>
+              <a:buChar char="•"/>
+              <a:spcAft>
+                <a:spcPts val="600"/>
+              </a:spcAft>
+            </a:pPr>
+            <a:r>
+              <a:rPr sz="1600" b="0" i="0" u="none">
+                <a:solidFill>
+                  <a:srgbClr val="1A1A1A"/>
+                </a:solidFill>
+                <a:latin typeface="Arial"/>
+                <a:cs typeface="Arial" pitchFamily="34" charset="0"/>
+              </a:rPr>
+              <a:t>It checks its own fairness: if it marks one group differently, it says so before results go out.</a:t>
             </a:r>
           </a:p>
           <a:p>

--- a/presentation/SIH2026-EvalPro-Idea-Presentation.pptx
+++ b/presentation/SIH2026-EvalPro-Idea-Presentation.pptx
@@ -6090,7 +6090,7 @@
                 <a:latin typeface="Arial"/>
                 <a:cs typeface="Arial" pitchFamily="34" charset="0"/>
               </a:rPr>
-              <a:t>A student submits their lab program. It is run, marked, and every mark is explained.</a:t>
+              <a:t>The teacher writes the question in plain English. No answer key and no test cases needed.</a:t>
             </a:r>
           </a:p>
           <a:p>
@@ -6112,7 +6112,7 @@
                 <a:latin typeface="Arial"/>
                 <a:cs typeface="Arial" pitchFamily="34" charset="0"/>
               </a:rPr>
-              <a:t>Each mark is tied to a topic, so a student sees which topic is weak - not just which lab.</a:t>
+              <a:t>The platform reads how the student solved it and marks the approach, with a reason for every mark.</a:t>
             </a:r>
           </a:p>
           <a:p>
@@ -6134,7 +6134,7 @@
                 <a:latin typeface="Arial"/>
                 <a:cs typeface="Arial" pitchFamily="34" charset="0"/>
               </a:rPr>
-              <a:t>Those marks add up across the semester into a picture of what each student understands.</a:t>
+              <a:t>A right method with one wrong line still scores. Code that will not even run is still read.</a:t>
             </a:r>
           </a:p>
           <a:p>
@@ -6156,7 +6156,7 @@
                 <a:latin typeface="Arial"/>
                 <a:cs typeface="Arial" pitchFamily="34" charset="0"/>
               </a:rPr>
-              <a:t>A student who thinks a mark is wrong can challenge it, and a teacher answers.</a:t>
+              <a:t>Every mark is tied to a topic, so a term of marks becomes a picture of what a student understands.</a:t>
             </a:r>
           </a:p>
           <a:p>
@@ -6203,7 +6203,7 @@
                 <a:latin typeface="Arial"/>
                 <a:cs typeface="Arial" pitchFamily="34" charset="0"/>
               </a:rPr>
-              <a:t>Collects labs, submissions and class lists from the college's existing system.</a:t>
+              <a:t>Plugs into the college's existing system for labs, submissions and class lists.</a:t>
             </a:r>
           </a:p>
           <a:p>
@@ -6225,7 +6225,7 @@
                 <a:latin typeface="Arial"/>
                 <a:cs typeface="Arial" pitchFamily="34" charset="0"/>
               </a:rPr>
-              <a:t>Analyses each submission, each student, each question and the whole class.</a:t>
+              <a:t>Groups the class's mistakes, so a teacher sees the few things most people got wrong.</a:t>
             </a:r>
           </a:p>
           <a:p>
@@ -6247,7 +6247,7 @@
                 <a:latin typeface="Arial"/>
                 <a:cs typeface="Arial" pitchFamily="34" charset="0"/>
               </a:rPr>
-              <a:t>Groups the class's mistakes, so a teacher sees the few things most people got wrong.</a:t>
+              <a:t>Flags students slipping behind while there is still time to help them.</a:t>
             </a:r>
           </a:p>
           <a:p>
@@ -6269,7 +6269,7 @@
                 <a:latin typeface="Arial"/>
                 <a:cs typeface="Arial" pitchFamily="34" charset="0"/>
               </a:rPr>
-              <a:t>Flags students slipping behind while there is still time to help them.</a:t>
+              <a:t>A student who thinks a mark is wrong can challenge it, and a teacher answers.</a:t>
             </a:r>
           </a:p>
           <a:p>
@@ -6316,7 +6316,7 @@
                 <a:latin typeface="Arial"/>
                 <a:cs typeface="Arial" pitchFamily="34" charset="0"/>
               </a:rPr>
-              <a:t>It marks the thinking, not just the output - a right idea with one wrong line still scores.</a:t>
+              <a:t>Other auto-graders ask “did the output match?”. This one asks “was the idea right?”.</a:t>
             </a:r>
           </a:p>
           <a:p>
@@ -6338,7 +6338,7 @@
                 <a:latin typeface="Arial"/>
                 <a:cs typeface="Arial" pitchFamily="34" charset="0"/>
               </a:rPr>
-              <a:t>The answer key never touches the student's program, so it cannot be copied.</a:t>
+              <a:t>So a teacher can set an open question and still get it marked - no test cases to write.</a:t>
             </a:r>
           </a:p>
           <a:p>
@@ -6360,7 +6360,7 @@
                 <a:latin typeface="Arial"/>
                 <a:cs typeface="Arial" pitchFamily="34" charset="0"/>
               </a:rPr>
-              <a:t>It marks the question paper too - unclear questions are flagged to the teacher.</a:t>
+              <a:t>The answer key never touches the student's program, so it cannot be copied.</a:t>
             </a:r>
           </a:p>
           <a:p>
@@ -6382,7 +6382,7 @@
                 <a:latin typeface="Arial"/>
                 <a:cs typeface="Arial" pitchFamily="34" charset="0"/>
               </a:rPr>
-              <a:t>It spots copied work by showing the matching lines - the teacher decides, not the machine.</a:t>
+              <a:t>It marks the question paper too - unclear questions are flagged to the teacher.</a:t>
             </a:r>
           </a:p>
           <a:p>
@@ -6404,7 +6404,7 @@
                 <a:latin typeface="Arial"/>
                 <a:cs typeface="Arial" pitchFamily="34" charset="0"/>
               </a:rPr>
-              <a:t>It checks its own fairness: if it marks one group differently, it says so before results go out.</a:t>
+              <a:t>It spots copied work by showing the matching lines - the teacher decides, not the machine.</a:t>
             </a:r>
           </a:p>
           <a:p>
@@ -6426,7 +6426,7 @@
                 <a:latin typeface="Arial"/>
                 <a:cs typeface="Arial" pitchFamily="34" charset="0"/>
               </a:rPr>
-              <a:t>When it is unsure, it says so and hands the work to a human.</a:t>
+              <a:t>It checks its own fairness: if it marks one group differently, it says so before results go out.</a:t>
             </a:r>
           </a:p>
         </p:txBody>
@@ -6880,7 +6880,7 @@
                 <a:latin typeface="Arial"/>
                 <a:cs typeface="Arial" pitchFamily="34" charset="0"/>
               </a:rPr>
-              <a:t>The teacher writes the question in plain English; the platform shows what it will check before anything is published.</a:t>
+              <a:t>Before publishing, the teacher sees exactly what will be checked, and can change any of it.</a:t>
             </a:r>
           </a:p>
           <a:p>
@@ -7256,8 +7256,8 @@
                 <a:latin typeface="Arial"/>
                 <a:cs typeface="Arial" pitchFamily="34" charset="0"/>
               </a:rPr>
-              <a:t>run the program safely,
-check it against the rubric,
+              <a:t>read how it was solved,
+run it safely, judge the approach,
 explain every mark</a:t>
             </a:r>
           </a:p>

--- a/presentation/SIH2026-EvalPro-Idea-Presentation.pptx
+++ b/presentation/SIH2026-EvalPro-Idea-Presentation.pptx
@@ -6709,8 +6709,8 @@
         </p:nvSpPr>
         <p:spPr bwMode="auto">
           <a:xfrm>
-            <a:off x="329184" y="3310128"/>
-            <a:ext cx="11503152" cy="2907792"/>
+            <a:off x="329184" y="2487168"/>
+            <a:ext cx="11503152" cy="1170432"/>
           </a:xfrm>
           <a:prstGeom prst="rect">
             <a:avLst/>
@@ -6734,11 +6734,11 @@
               <a:buFont typeface="Wingdings" pitchFamily="34" charset="0"/>
               <a:buChar char="v"/>
               <a:spcAft>
-                <a:spcPts val="600"/>
-              </a:spcAft>
-            </a:pPr>
-            <a:r>
-              <a:rPr sz="1500" b="1" i="0" u="sng">
+                <a:spcPts val="500"/>
+              </a:spcAft>
+            </a:pPr>
+            <a:r>
+              <a:rPr sz="1400" b="1" i="0" u="sng">
                 <a:solidFill>
                   <a:srgbClr val="1F497D"/>
                 </a:solidFill>
@@ -6751,16 +6751,16 @@
           <a:p>
             <a:pPr algn="l" marL="329184" indent="-219456">
               <a:lnSpc>
-                <a:spcPct val="106000"/>
+                <a:spcPct val="104000"/>
               </a:lnSpc>
               <a:buFont typeface="Arial" pitchFamily="34" charset="0"/>
               <a:buChar char="•"/>
               <a:spcAft>
-                <a:spcPts val="400"/>
-              </a:spcAft>
-            </a:pPr>
-            <a:r>
-              <a:rPr sz="1350" b="0" i="0" u="none">
+                <a:spcPts val="200"/>
+              </a:spcAft>
+            </a:pPr>
+            <a:r>
+              <a:rPr sz="1250" b="0" i="0" u="none">
                 <a:solidFill>
                   <a:srgbClr val="1A1A1A"/>
                 </a:solidFill>
@@ -6773,16 +6773,16 @@
           <a:p>
             <a:pPr algn="l" marL="329184" indent="-219456">
               <a:lnSpc>
-                <a:spcPct val="106000"/>
+                <a:spcPct val="104000"/>
               </a:lnSpc>
               <a:buFont typeface="Arial" pitchFamily="34" charset="0"/>
               <a:buChar char="•"/>
               <a:spcAft>
-                <a:spcPts val="400"/>
-              </a:spcAft>
-            </a:pPr>
-            <a:r>
-              <a:rPr sz="1350" b="0" i="0" u="none">
+                <a:spcPts val="200"/>
+              </a:spcAft>
+            </a:pPr>
+            <a:r>
+              <a:rPr sz="1250" b="0" i="0" u="none">
                 <a:solidFill>
                   <a:srgbClr val="1A1A1A"/>
                 </a:solidFill>
@@ -6795,114 +6795,23 @@
           <a:p>
             <a:pPr algn="l" marL="329184" indent="-219456">
               <a:lnSpc>
-                <a:spcPct val="106000"/>
+                <a:spcPct val="104000"/>
               </a:lnSpc>
               <a:buFont typeface="Arial" pitchFamily="34" charset="0"/>
               <a:buChar char="•"/>
               <a:spcAft>
-                <a:spcPts val="400"/>
-              </a:spcAft>
-            </a:pPr>
-            <a:r>
-              <a:rPr sz="1350" b="0" i="0" u="none">
+                <a:spcPts val="200"/>
+              </a:spcAft>
+            </a:pPr>
+            <a:r>
+              <a:rPr sz="1250" b="0" i="0" u="none">
                 <a:solidFill>
                   <a:srgbClr val="1A1A1A"/>
                 </a:solidFill>
                 <a:latin typeface="Arial"/>
                 <a:cs typeface="Arial" pitchFamily="34" charset="0"/>
               </a:rPr>
-              <a:t>Proven methods for marking, plagiarism checking and tracking what a learner knows.</a:t>
-            </a:r>
-          </a:p>
-          <a:p>
-            <a:pPr algn="l" marL="329184" indent="-219456">
-              <a:lnSpc>
-                <a:spcPct val="106000"/>
-              </a:lnSpc>
-              <a:buFont typeface="Arial" pitchFamily="34" charset="0"/>
-              <a:buChar char="•"/>
-              <a:spcAft>
-                <a:spcPts val="400"/>
-              </a:spcAft>
-            </a:pPr>
-            <a:r>
-              <a:rPr sz="1350" b="0" i="0" u="none">
-                <a:solidFill>
-                  <a:srgbClr val="1A1A1A"/>
-                </a:solidFill>
-                <a:latin typeface="Arial"/>
-                <a:cs typeface="Arial" pitchFamily="34" charset="0"/>
-              </a:rPr>
-              <a:t>Ordinary hardware - no GPU, and no paid AI service to mark a submission.</a:t>
-            </a:r>
-          </a:p>
-          <a:p>
-            <a:pPr algn="l" marL="219456" indent="-219456">
-              <a:lnSpc>
-                <a:spcPct val="100000"/>
-              </a:lnSpc>
-              <a:buFont typeface="Wingdings" pitchFamily="34" charset="0"/>
-              <a:buChar char="v"/>
-              <a:spcBef>
-                <a:spcPts val="1100"/>
-              </a:spcBef>
-              <a:spcAft>
-                <a:spcPts val="600"/>
-              </a:spcAft>
-            </a:pPr>
-            <a:r>
-              <a:rPr sz="1500" b="1" i="0" u="sng">
-                <a:solidFill>
-                  <a:srgbClr val="1F497D"/>
-                </a:solidFill>
-                <a:latin typeface="Arial"/>
-                <a:cs typeface="Arial" pitchFamily="34" charset="0"/>
-              </a:rPr>
-              <a:t>Methodology and process for implementation (Flow Charts/Images/ working prototype)</a:t>
-            </a:r>
-          </a:p>
-          <a:p>
-            <a:pPr algn="l" marL="329184" indent="-219456">
-              <a:lnSpc>
-                <a:spcPct val="106000"/>
-              </a:lnSpc>
-              <a:buFont typeface="Arial" pitchFamily="34" charset="0"/>
-              <a:buChar char="•"/>
-              <a:spcAft>
-                <a:spcPts val="400"/>
-              </a:spcAft>
-            </a:pPr>
-            <a:r>
-              <a:rPr sz="1350" b="0" i="0" u="none">
-                <a:solidFill>
-                  <a:srgbClr val="1A1A1A"/>
-                </a:solidFill>
-                <a:latin typeface="Arial"/>
-                <a:cs typeface="Arial" pitchFamily="34" charset="0"/>
-              </a:rPr>
-              <a:t>Before publishing, the teacher sees exactly what will be checked, and can change any of it.</a:t>
-            </a:r>
-          </a:p>
-          <a:p>
-            <a:pPr algn="l" marL="329184" indent="-219456">
-              <a:lnSpc>
-                <a:spcPct val="106000"/>
-              </a:lnSpc>
-              <a:buFont typeface="Arial" pitchFamily="34" charset="0"/>
-              <a:buChar char="•"/>
-              <a:spcAft>
-                <a:spcPts val="400"/>
-              </a:spcAft>
-            </a:pPr>
-            <a:r>
-              <a:rPr sz="1350" b="0" i="0" u="none">
-                <a:solidFill>
-                  <a:srgbClr val="1A1A1A"/>
-                </a:solidFill>
-                <a:latin typeface="Arial"/>
-                <a:cs typeface="Arial" pitchFamily="34" charset="0"/>
-              </a:rPr>
-              <a:t>Working prototype: a class of 24 students across four labs, marked end to end.</a:t>
+              <a:t>Ordinary hardware - no GPU, and no AI cost per submission marked.</a:t>
             </a:r>
           </a:p>
         </p:txBody>
@@ -7061,14 +6970,770 @@
       </p:pic>
       <p:sp>
         <p:nvSpPr>
-          <p:cNvPr id="17411" name="Rounded Rectangle 17410"/>
+          <p:cNvPr id="17411" name="TextBox 17410"/>
+          <p:cNvSpPr txBox="1"/>
+          <p:nvPr/>
+        </p:nvSpPr>
+        <p:spPr>
+          <a:xfrm>
+            <a:off x="457200" y="3547872"/>
+            <a:ext cx="2194560" cy="1589227"/>
+          </a:xfrm>
+          <a:prstGeom prst="rect">
+            <a:avLst/>
+          </a:prstGeom>
+          <a:noFill/>
+        </p:spPr>
+        <p:txBody>
+          <a:bodyPr wrap="square" lIns="45720" rIns="45720" tIns="22860" bIns="22860"/>
+          <a:lstStyle/>
+          <a:p>
+            <a:pPr algn="l" marL="0" indent="0">
+              <a:lnSpc>
+                <a:spcPct val="100000"/>
+              </a:lnSpc>
+              <a:buNone/>
+              <a:spcAft>
+                <a:spcPts val="300"/>
+              </a:spcAft>
+            </a:pPr>
+            <a:r>
+              <a:rPr sz="1000" b="1" i="0" u="none">
+                <a:solidFill>
+                  <a:srgbClr val="0070C0"/>
+                </a:solidFill>
+                <a:latin typeface="Arial"/>
+                <a:cs typeface="Arial" pitchFamily="34" charset="0"/>
+              </a:rPr>
+              <a:t>Model</a:t>
+            </a:r>
+          </a:p>
+          <a:p>
+            <a:pPr algn="l" marL="0" indent="0">
+              <a:lnSpc>
+                <a:spcPct val="100000"/>
+              </a:lnSpc>
+              <a:buNone/>
+              <a:spcAft>
+                <a:spcPts val="150"/>
+              </a:spcAft>
+            </a:pPr>
+            <a:r>
+              <a:rPr sz="950" b="1" i="0" u="none">
+                <a:solidFill>
+                  <a:srgbClr val="1A1A1A"/>
+                </a:solidFill>
+                <a:latin typeface="Arial"/>
+                <a:cs typeface="Arial" pitchFamily="34" charset="0"/>
+              </a:rPr>
+              <a:t>Confidence estimator</a:t>
+            </a:r>
+          </a:p>
+          <a:p>
+            <a:pPr algn="l" marL="0" indent="0">
+              <a:lnSpc>
+                <a:spcPct val="100000"/>
+              </a:lnSpc>
+              <a:buNone/>
+              <a:spcAft>
+                <a:spcPts val="150"/>
+              </a:spcAft>
+            </a:pPr>
+            <a:r>
+              <a:rPr sz="950" b="1" i="0" u="none">
+                <a:solidFill>
+                  <a:srgbClr val="1A1A1A"/>
+                </a:solidFill>
+                <a:latin typeface="Arial"/>
+                <a:cs typeface="Arial" pitchFamily="34" charset="0"/>
+              </a:rPr>
+              <a:t>Knowledge tracing</a:t>
+            </a:r>
+          </a:p>
+          <a:p>
+            <a:pPr algn="l" marL="0" indent="0">
+              <a:lnSpc>
+                <a:spcPct val="100000"/>
+              </a:lnSpc>
+              <a:buNone/>
+              <a:spcAft>
+                <a:spcPts val="150"/>
+              </a:spcAft>
+            </a:pPr>
+            <a:r>
+              <a:rPr sz="950" b="1" i="0" u="none">
+                <a:solidFill>
+                  <a:srgbClr val="1A1A1A"/>
+                </a:solidFill>
+                <a:latin typeface="Arial"/>
+                <a:cs typeface="Arial" pitchFamily="34" charset="0"/>
+              </a:rPr>
+              <a:t>Misconception clustering</a:t>
+            </a:r>
+          </a:p>
+          <a:p>
+            <a:pPr algn="l" marL="0" indent="0">
+              <a:lnSpc>
+                <a:spcPct val="100000"/>
+              </a:lnSpc>
+              <a:buNone/>
+              <a:spcAft>
+                <a:spcPts val="150"/>
+              </a:spcAft>
+            </a:pPr>
+            <a:r>
+              <a:rPr sz="950" b="0" i="0" u="none">
+                <a:solidFill>
+                  <a:srgbClr val="5A5A5A"/>
+                </a:solidFill>
+                <a:latin typeface="Arial"/>
+                <a:cs typeface="Arial" pitchFamily="34" charset="0"/>
+              </a:rPr>
+              <a:t>Copy detector</a:t>
+            </a:r>
+          </a:p>
+          <a:p>
+            <a:pPr algn="l" marL="0" indent="0">
+              <a:lnSpc>
+                <a:spcPct val="100000"/>
+              </a:lnSpc>
+              <a:buNone/>
+              <a:spcAft>
+                <a:spcPts val="150"/>
+              </a:spcAft>
+            </a:pPr>
+            <a:r>
+              <a:rPr sz="950" b="0" i="0" u="none">
+                <a:solidFill>
+                  <a:srgbClr val="5A5A5A"/>
+                </a:solidFill>
+                <a:latin typeface="Arial"/>
+                <a:cs typeface="Arial" pitchFamily="34" charset="0"/>
+              </a:rPr>
+              <a:t>Algorithm identifier</a:t>
+            </a:r>
+          </a:p>
+          <a:p>
+            <a:pPr algn="l" marL="0" indent="0">
+              <a:lnSpc>
+                <a:spcPct val="100000"/>
+              </a:lnSpc>
+              <a:buNone/>
+              <a:spcAft>
+                <a:spcPts val="150"/>
+              </a:spcAft>
+            </a:pPr>
+            <a:r>
+              <a:rPr sz="950" b="0" i="0" u="none">
+                <a:solidFill>
+                  <a:srgbClr val="5A5A5A"/>
+                </a:solidFill>
+                <a:latin typeface="Arial"/>
+                <a:cs typeface="Arial" pitchFamily="34" charset="0"/>
+              </a:rPr>
+              <a:t>Report checker</a:t>
+            </a:r>
+          </a:p>
+          <a:p>
+            <a:pPr algn="l" marL="0" indent="0">
+              <a:lnSpc>
+                <a:spcPct val="100000"/>
+              </a:lnSpc>
+              <a:buNone/>
+              <a:spcAft>
+                <a:spcPts val="150"/>
+              </a:spcAft>
+            </a:pPr>
+            <a:r>
+              <a:rPr sz="950" b="0" i="0" u="none">
+                <a:solidFill>
+                  <a:srgbClr val="5A5A5A"/>
+                </a:solidFill>
+                <a:latin typeface="Arial"/>
+                <a:cs typeface="Arial" pitchFamily="34" charset="0"/>
+              </a:rPr>
+              <a:t>Early warning</a:t>
+            </a:r>
+          </a:p>
+          <a:p>
+            <a:pPr algn="l" marL="0" indent="0">
+              <a:lnSpc>
+                <a:spcPct val="100000"/>
+              </a:lnSpc>
+              <a:buNone/>
+              <a:spcAft>
+                <a:spcPts val="150"/>
+              </a:spcAft>
+            </a:pPr>
+            <a:r>
+              <a:rPr sz="950" b="0" i="0" u="none">
+                <a:solidFill>
+                  <a:srgbClr val="5A5A5A"/>
+                </a:solidFill>
+                <a:latin typeface="Arial"/>
+                <a:cs typeface="Arial" pitchFamily="34" charset="0"/>
+              </a:rPr>
+              <a:t>Language detector</a:t>
+            </a:r>
+          </a:p>
+        </p:txBody>
+      </p:sp>
+      <p:sp>
+        <p:nvSpPr>
+          <p:cNvPr id="17412" name="TextBox 17411"/>
+          <p:cNvSpPr txBox="1"/>
+          <p:nvPr/>
+        </p:nvSpPr>
+        <p:spPr>
+          <a:xfrm>
+            <a:off x="2651760" y="3547872"/>
+            <a:ext cx="3291840" cy="1589227"/>
+          </a:xfrm>
+          <a:prstGeom prst="rect">
+            <a:avLst/>
+          </a:prstGeom>
+          <a:noFill/>
+        </p:spPr>
+        <p:txBody>
+          <a:bodyPr wrap="square" lIns="45720" rIns="45720" tIns="22860" bIns="22860"/>
+          <a:lstStyle/>
+          <a:p>
+            <a:pPr algn="l" marL="0" indent="0">
+              <a:lnSpc>
+                <a:spcPct val="100000"/>
+              </a:lnSpc>
+              <a:buNone/>
+              <a:spcAft>
+                <a:spcPts val="300"/>
+              </a:spcAft>
+            </a:pPr>
+            <a:r>
+              <a:rPr sz="1000" b="1" i="0" u="none">
+                <a:solidFill>
+                  <a:srgbClr val="0070C0"/>
+                </a:solidFill>
+                <a:latin typeface="Arial"/>
+                <a:cs typeface="Arial" pitchFamily="34" charset="0"/>
+              </a:rPr>
+              <a:t>What it decides</a:t>
+            </a:r>
+          </a:p>
+          <a:p>
+            <a:pPr algn="l" marL="0" indent="0">
+              <a:lnSpc>
+                <a:spcPct val="100000"/>
+              </a:lnSpc>
+              <a:buNone/>
+              <a:spcAft>
+                <a:spcPts val="150"/>
+              </a:spcAft>
+            </a:pPr>
+            <a:r>
+              <a:rPr sz="950" b="0" i="0" u="none">
+                <a:solidFill>
+                  <a:srgbClr val="1A1A1A"/>
+                </a:solidFill>
+                <a:latin typeface="Arial"/>
+                <a:cs typeface="Arial" pitchFamily="34" charset="0"/>
+              </a:rPr>
+              <a:t>which marks are safe to release without a teacher</a:t>
+            </a:r>
+          </a:p>
+          <a:p>
+            <a:pPr algn="l" marL="0" indent="0">
+              <a:lnSpc>
+                <a:spcPct val="100000"/>
+              </a:lnSpc>
+              <a:buNone/>
+              <a:spcAft>
+                <a:spcPts val="150"/>
+              </a:spcAft>
+            </a:pPr>
+            <a:r>
+              <a:rPr sz="950" b="0" i="0" u="none">
+                <a:solidFill>
+                  <a:srgbClr val="1A1A1A"/>
+                </a:solidFill>
+                <a:latin typeface="Arial"/>
+                <a:cs typeface="Arial" pitchFamily="34" charset="0"/>
+              </a:rPr>
+              <a:t>what each student knows, topic by topic</a:t>
+            </a:r>
+          </a:p>
+          <a:p>
+            <a:pPr algn="l" marL="0" indent="0">
+              <a:lnSpc>
+                <a:spcPct val="100000"/>
+              </a:lnSpc>
+              <a:buNone/>
+              <a:spcAft>
+                <a:spcPts val="150"/>
+              </a:spcAft>
+            </a:pPr>
+            <a:r>
+              <a:rPr sz="950" b="0" i="0" u="none">
+                <a:solidFill>
+                  <a:srgbClr val="1A1A1A"/>
+                </a:solidFill>
+                <a:latin typeface="Arial"/>
+                <a:cs typeface="Arial" pitchFamily="34" charset="0"/>
+              </a:rPr>
+              <a:t>the few mistakes the whole class is making</a:t>
+            </a:r>
+          </a:p>
+          <a:p>
+            <a:pPr algn="l" marL="0" indent="0">
+              <a:lnSpc>
+                <a:spcPct val="100000"/>
+              </a:lnSpc>
+              <a:buNone/>
+              <a:spcAft>
+                <a:spcPts val="150"/>
+              </a:spcAft>
+            </a:pPr>
+            <a:r>
+              <a:rPr sz="950" b="0" i="0" u="none">
+                <a:solidFill>
+                  <a:srgbClr val="5A5A5A"/>
+                </a:solidFill>
+                <a:latin typeface="Arial"/>
+                <a:cs typeface="Arial" pitchFamily="34" charset="0"/>
+              </a:rPr>
+              <a:t>copies that renaming and reordering hide</a:t>
+            </a:r>
+          </a:p>
+          <a:p>
+            <a:pPr algn="l" marL="0" indent="0">
+              <a:lnSpc>
+                <a:spcPct val="100000"/>
+              </a:lnSpc>
+              <a:buNone/>
+              <a:spcAft>
+                <a:spcPts val="150"/>
+              </a:spcAft>
+            </a:pPr>
+            <a:r>
+              <a:rPr sz="950" b="0" i="0" u="none">
+                <a:solidFill>
+                  <a:srgbClr val="5A5A5A"/>
+                </a:solidFill>
+                <a:latin typeface="Arial"/>
+                <a:cs typeface="Arial" pitchFamily="34" charset="0"/>
+              </a:rPr>
+              <a:t>which method the student actually used</a:t>
+            </a:r>
+          </a:p>
+          <a:p>
+            <a:pPr algn="l" marL="0" indent="0">
+              <a:lnSpc>
+                <a:spcPct val="100000"/>
+              </a:lnSpc>
+              <a:buNone/>
+              <a:spcAft>
+                <a:spcPts val="150"/>
+              </a:spcAft>
+            </a:pPr>
+            <a:r>
+              <a:rPr sz="950" b="0" i="0" u="none">
+                <a:solidFill>
+                  <a:srgbClr val="5A5A5A"/>
+                </a:solidFill>
+                <a:latin typeface="Arial"/>
+                <a:cs typeface="Arial" pitchFamily="34" charset="0"/>
+              </a:rPr>
+              <a:t>whether the write-up matches the code</a:t>
+            </a:r>
+          </a:p>
+          <a:p>
+            <a:pPr algn="l" marL="0" indent="0">
+              <a:lnSpc>
+                <a:spcPct val="100000"/>
+              </a:lnSpc>
+              <a:buNone/>
+              <a:spcAft>
+                <a:spcPts val="150"/>
+              </a:spcAft>
+            </a:pPr>
+            <a:r>
+              <a:rPr sz="950" b="0" i="0" u="none">
+                <a:solidFill>
+                  <a:srgbClr val="5A5A5A"/>
+                </a:solidFill>
+                <a:latin typeface="Arial"/>
+                <a:cs typeface="Arial" pitchFamily="34" charset="0"/>
+              </a:rPr>
+              <a:t>who is slipping behind, and why</a:t>
+            </a:r>
+          </a:p>
+          <a:p>
+            <a:pPr algn="l" marL="0" indent="0">
+              <a:lnSpc>
+                <a:spcPct val="100000"/>
+              </a:lnSpc>
+              <a:buNone/>
+              <a:spcAft>
+                <a:spcPts val="150"/>
+              </a:spcAft>
+            </a:pPr>
+            <a:r>
+              <a:rPr sz="950" b="0" i="0" u="none">
+                <a:solidFill>
+                  <a:srgbClr val="5A5A5A"/>
+                </a:solidFill>
+                <a:latin typeface="Arial"/>
+                <a:cs typeface="Arial" pitchFamily="34" charset="0"/>
+              </a:rPr>
+              <a:t>what it is written in and how to run it</a:t>
+            </a:r>
+          </a:p>
+        </p:txBody>
+      </p:sp>
+      <p:sp>
+        <p:nvSpPr>
+          <p:cNvPr id="17413" name="TextBox 17412"/>
+          <p:cNvSpPr txBox="1"/>
+          <p:nvPr/>
+        </p:nvSpPr>
+        <p:spPr>
+          <a:xfrm>
+            <a:off x="6035040" y="3547872"/>
+            <a:ext cx="4846320" cy="1589227"/>
+          </a:xfrm>
+          <a:prstGeom prst="rect">
+            <a:avLst/>
+          </a:prstGeom>
+          <a:noFill/>
+        </p:spPr>
+        <p:txBody>
+          <a:bodyPr wrap="square" lIns="45720" rIns="45720" tIns="22860" bIns="22860"/>
+          <a:lstStyle/>
+          <a:p>
+            <a:pPr algn="l" marL="0" indent="0">
+              <a:lnSpc>
+                <a:spcPct val="100000"/>
+              </a:lnSpc>
+              <a:buNone/>
+              <a:spcAft>
+                <a:spcPts val="300"/>
+              </a:spcAft>
+            </a:pPr>
+            <a:r>
+              <a:rPr sz="1000" b="1" i="0" u="none">
+                <a:solidFill>
+                  <a:srgbClr val="0070C0"/>
+                </a:solidFill>
+                <a:latin typeface="Arial"/>
+                <a:cs typeface="Arial" pitchFamily="34" charset="0"/>
+              </a:rPr>
+              <a:t>How it is trained</a:t>
+            </a:r>
+          </a:p>
+          <a:p>
+            <a:pPr algn="l" marL="0" indent="0">
+              <a:lnSpc>
+                <a:spcPct val="100000"/>
+              </a:lnSpc>
+              <a:buNone/>
+              <a:spcAft>
+                <a:spcPts val="150"/>
+              </a:spcAft>
+            </a:pPr>
+            <a:r>
+              <a:rPr sz="950" b="0" i="0" u="none">
+                <a:solidFill>
+                  <a:srgbClr val="1A1A1A"/>
+                </a:solidFill>
+                <a:latin typeface="Arial"/>
+                <a:cs typeface="Arial" pitchFamily="34" charset="0"/>
+              </a:rPr>
+              <a:t>every mark a teacher corrects, forever</a:t>
+            </a:r>
+          </a:p>
+          <a:p>
+            <a:pPr algn="l" marL="0" indent="0">
+              <a:lnSpc>
+                <a:spcPct val="100000"/>
+              </a:lnSpc>
+              <a:buNone/>
+              <a:spcAft>
+                <a:spcPts val="150"/>
+              </a:spcAft>
+            </a:pPr>
+            <a:r>
+              <a:rPr sz="950" b="0" i="0" u="none">
+                <a:solidFill>
+                  <a:srgbClr val="1A1A1A"/>
+                </a:solidFill>
+                <a:latin typeface="Arial"/>
+                <a:cs typeface="Arial" pitchFamily="34" charset="0"/>
+              </a:rPr>
+              <a:t>the stream of marks itself - no labelling</a:t>
+            </a:r>
+          </a:p>
+          <a:p>
+            <a:pPr algn="l" marL="0" indent="0">
+              <a:lnSpc>
+                <a:spcPct val="100000"/>
+              </a:lnSpc>
+              <a:buNone/>
+              <a:spcAft>
+                <a:spcPts val="150"/>
+              </a:spcAft>
+            </a:pPr>
+            <a:r>
+              <a:rPr sz="950" b="0" i="0" u="none">
+                <a:solidFill>
+                  <a:srgbClr val="1A1A1A"/>
+                </a:solidFill>
+                <a:latin typeface="Arial"/>
+                <a:cs typeface="Arial" pitchFamily="34" charset="0"/>
+              </a:rPr>
+              <a:t>unsupervised - works from day one</a:t>
+            </a:r>
+          </a:p>
+          <a:p>
+            <a:pPr algn="l" marL="0" indent="0">
+              <a:lnSpc>
+                <a:spcPct val="100000"/>
+              </a:lnSpc>
+              <a:buNone/>
+              <a:spcAft>
+                <a:spcPts val="150"/>
+              </a:spcAft>
+            </a:pPr>
+            <a:r>
+              <a:rPr sz="950" b="0" i="0" u="none">
+                <a:solidFill>
+                  <a:srgbClr val="5A5A5A"/>
+                </a:solidFill>
+                <a:latin typeface="Arial"/>
+                <a:cs typeface="Arial" pitchFamily="34" charset="0"/>
+              </a:rPr>
+              <a:t>self-supervised: copies made by renaming</a:t>
+            </a:r>
+          </a:p>
+          <a:p>
+            <a:pPr algn="l" marL="0" indent="0">
+              <a:lnSpc>
+                <a:spcPct val="100000"/>
+              </a:lnSpc>
+              <a:buNone/>
+              <a:spcAft>
+                <a:spcPts val="150"/>
+              </a:spcAft>
+            </a:pPr>
+            <a:r>
+              <a:rPr sz="950" b="0" i="0" u="none">
+                <a:solidFill>
+                  <a:srgbClr val="5A5A5A"/>
+                </a:solidFill>
+                <a:latin typeface="Arial"/>
+                <a:cs typeface="Arial" pitchFamily="34" charset="0"/>
+              </a:rPr>
+              <a:t>reference solutions and teacher tags</a:t>
+            </a:r>
+          </a:p>
+          <a:p>
+            <a:pPr algn="l" marL="0" indent="0">
+              <a:lnSpc>
+                <a:spcPct val="100000"/>
+              </a:lnSpc>
+              <a:buNone/>
+              <a:spcAft>
+                <a:spcPts val="150"/>
+              </a:spcAft>
+            </a:pPr>
+            <a:r>
+              <a:rPr sz="950" b="0" i="0" u="none">
+                <a:solidFill>
+                  <a:srgbClr val="5A5A5A"/>
+                </a:solidFill>
+                <a:latin typeface="Arial"/>
+                <a:cs typeface="Arial" pitchFamily="34" charset="0"/>
+              </a:rPr>
+              <a:t>AI drafts labels, teachers correct, then distil</a:t>
+            </a:r>
+          </a:p>
+          <a:p>
+            <a:pPr algn="l" marL="0" indent="0">
+              <a:lnSpc>
+                <a:spcPct val="100000"/>
+              </a:lnSpc>
+              <a:buNone/>
+              <a:spcAft>
+                <a:spcPts val="150"/>
+              </a:spcAft>
+            </a:pPr>
+            <a:r>
+              <a:rPr sz="950" b="0" i="0" u="none">
+                <a:solidFill>
+                  <a:srgbClr val="5A5A5A"/>
+                </a:solidFill>
+                <a:latin typeface="Arial"/>
+                <a:cs typeface="Arial" pitchFamily="34" charset="0"/>
+              </a:rPr>
+              <a:t>past outcomes, bias-audited before release</a:t>
+            </a:r>
+          </a:p>
+          <a:p>
+            <a:pPr algn="l" marL="0" indent="0">
+              <a:lnSpc>
+                <a:spcPct val="100000"/>
+              </a:lnSpc>
+              <a:buNone/>
+              <a:spcAft>
+                <a:spcPts val="150"/>
+              </a:spcAft>
+            </a:pPr>
+            <a:r>
+              <a:rPr sz="950" b="0" i="0" u="none">
+                <a:solidFill>
+                  <a:srgbClr val="5A5A5A"/>
+                </a:solidFill>
+                <a:latin typeface="Arial"/>
+                <a:cs typeface="Arial" pitchFamily="34" charset="0"/>
+              </a:rPr>
+              <a:t>auto-labelled from any code corpus</a:t>
+            </a:r>
+          </a:p>
+        </p:txBody>
+      </p:sp>
+      <p:sp>
+        <p:nvSpPr>
+          <p:cNvPr id="17414" name="TextBox 17413"/>
+          <p:cNvSpPr txBox="1"/>
+          <p:nvPr/>
+        </p:nvSpPr>
+        <p:spPr>
+          <a:xfrm>
+            <a:off x="457200" y="5155387"/>
+            <a:ext cx="11064240" cy="219456"/>
+          </a:xfrm>
+          <a:prstGeom prst="rect">
+            <a:avLst/>
+          </a:prstGeom>
+          <a:noFill/>
+        </p:spPr>
+        <p:txBody>
+          <a:bodyPr wrap="square" lIns="45720" rIns="45720" tIns="22860" bIns="22860"/>
+          <a:lstStyle/>
+          <a:p>
+            <a:pPr algn="l" marL="0" indent="0">
+              <a:lnSpc>
+                <a:spcPct val="100000"/>
+              </a:lnSpc>
+              <a:buNone/>
+            </a:pPr>
+            <a:r>
+              <a:rPr sz="950" b="0" i="0" u="none">
+                <a:solidFill>
+                  <a:srgbClr val="1F497D"/>
+                </a:solidFill>
+                <a:latin typeface="Arial"/>
+                <a:cs typeface="Arial" pitchFamily="34" charset="0"/>
+              </a:rPr>
+              <a:t>Bold: learns from data already. The rest run on hand-written rules until a semester of use supplies labels - same interface either way, so swapping a model in changes one file. The AI drafts and labels; it never marks a submission.</a:t>
+            </a:r>
+          </a:p>
+        </p:txBody>
+      </p:sp>
+      <p:sp>
+        <p:nvSpPr>
+          <p:cNvPr id="17415" name="TextBox 17414"/>
+          <p:cNvSpPr txBox="1"/>
+          <p:nvPr/>
+        </p:nvSpPr>
+        <p:spPr>
+          <a:xfrm>
+            <a:off x="329184" y="5541264"/>
+            <a:ext cx="11503152" cy="786384"/>
+          </a:xfrm>
+          <a:prstGeom prst="rect">
+            <a:avLst/>
+          </a:prstGeom>
+          <a:noFill/>
+        </p:spPr>
+        <p:txBody>
+          <a:bodyPr wrap="square" lIns="45720" rIns="45720" tIns="22860" bIns="22860"/>
+          <a:lstStyle/>
+          <a:p>
+            <a:pPr algn="l" marL="219456" indent="-219456">
+              <a:lnSpc>
+                <a:spcPct val="100000"/>
+              </a:lnSpc>
+              <a:buFont typeface="Wingdings" pitchFamily="34" charset="0"/>
+              <a:buChar char="v"/>
+              <a:spcAft>
+                <a:spcPts val="500"/>
+              </a:spcAft>
+            </a:pPr>
+            <a:r>
+              <a:rPr sz="1400" b="1" i="0" u="sng">
+                <a:solidFill>
+                  <a:srgbClr val="1F497D"/>
+                </a:solidFill>
+                <a:latin typeface="Arial"/>
+                <a:cs typeface="Arial" pitchFamily="34" charset="0"/>
+              </a:rPr>
+              <a:t>Methodology and process for implementation (Flow Charts/Images/ working prototype)</a:t>
+            </a:r>
+          </a:p>
+          <a:p>
+            <a:pPr algn="l" marL="329184" indent="-219456">
+              <a:lnSpc>
+                <a:spcPct val="104000"/>
+              </a:lnSpc>
+              <a:buFont typeface="Arial" pitchFamily="34" charset="0"/>
+              <a:buChar char="•"/>
+              <a:spcAft>
+                <a:spcPts val="200"/>
+              </a:spcAft>
+            </a:pPr>
+            <a:r>
+              <a:rPr sz="1250" b="0" i="0" u="none">
+                <a:solidFill>
+                  <a:srgbClr val="1A1A1A"/>
+                </a:solidFill>
+                <a:latin typeface="Arial"/>
+                <a:cs typeface="Arial" pitchFamily="34" charset="0"/>
+              </a:rPr>
+              <a:t>Teacher approves the topic map and the rubric; both are drafted for them, neither is imposed.</a:t>
+            </a:r>
+          </a:p>
+          <a:p>
+            <a:pPr algn="l" marL="329184" indent="-219456">
+              <a:lnSpc>
+                <a:spcPct val="104000"/>
+              </a:lnSpc>
+              <a:buFont typeface="Arial" pitchFamily="34" charset="0"/>
+              <a:buChar char="•"/>
+              <a:spcAft>
+                <a:spcPts val="200"/>
+              </a:spcAft>
+            </a:pPr>
+            <a:r>
+              <a:rPr sz="1250" b="0" i="0" u="none">
+                <a:solidFill>
+                  <a:srgbClr val="1A1A1A"/>
+                </a:solidFill>
+                <a:latin typeface="Arial"/>
+                <a:cs typeface="Arial" pitchFamily="34" charset="0"/>
+              </a:rPr>
+              <a:t>Working prototype: a class of 24 students across four labs, marked end to end.</a:t>
+            </a:r>
+          </a:p>
+        </p:txBody>
+      </p:sp>
+      <p:sp>
+        <p:nvSpPr>
+          <p:cNvPr id="17416" name="Rounded Rectangle 17415"/>
           <p:cNvSpPr/>
           <p:nvPr/>
         </p:nvSpPr>
         <p:spPr>
           <a:xfrm>
-            <a:off x="329184" y="1115568"/>
-            <a:ext cx="2615184" cy="1481328"/>
+            <a:off x="329184" y="1042415"/>
+            <a:ext cx="2615184" cy="969264"/>
           </a:xfrm>
           <a:prstGeom prst="roundRect">
             <a:avLst/>
@@ -7145,13 +7810,13 @@
       </p:sp>
       <p:cxnSp>
         <p:nvCxnSpPr>
-          <p:cNvPr id="17412" name="Connector 17411"/>
+          <p:cNvPr id="17417" name="Connector 17416"/>
           <p:cNvCxnSpPr/>
           <p:nvPr/>
         </p:nvCxnSpPr>
         <p:spPr>
           <a:xfrm>
-            <a:off x="2944368" y="1856232"/>
+            <a:off x="2944368" y="1527047"/>
             <a:ext cx="292608" cy="0"/>
           </a:xfrm>
           <a:prstGeom prst="line">
@@ -7181,14 +7846,14 @@
       </p:cxnSp>
       <p:sp>
         <p:nvSpPr>
-          <p:cNvPr id="17413" name="Rounded Rectangle 17412"/>
+          <p:cNvPr id="17418" name="Rounded Rectangle 17417"/>
           <p:cNvSpPr/>
           <p:nvPr/>
         </p:nvSpPr>
         <p:spPr>
           <a:xfrm>
-            <a:off x="3236976" y="1115568"/>
-            <a:ext cx="2615184" cy="1481328"/>
+            <a:off x="3236976" y="1042415"/>
+            <a:ext cx="2615184" cy="969264"/>
           </a:xfrm>
           <a:prstGeom prst="roundRect">
             <a:avLst/>
@@ -7265,13 +7930,13 @@
       </p:sp>
       <p:cxnSp>
         <p:nvCxnSpPr>
-          <p:cNvPr id="17414" name="Connector 17413"/>
+          <p:cNvPr id="17419" name="Connector 17418"/>
           <p:cNvCxnSpPr/>
           <p:nvPr/>
         </p:nvCxnSpPr>
         <p:spPr>
           <a:xfrm>
-            <a:off x="5852160" y="1856232"/>
+            <a:off x="5852160" y="1527047"/>
             <a:ext cx="292608" cy="0"/>
           </a:xfrm>
           <a:prstGeom prst="line">
@@ -7301,14 +7966,14 @@
       </p:cxnSp>
       <p:sp>
         <p:nvSpPr>
-          <p:cNvPr id="17415" name="Rounded Rectangle 17414"/>
+          <p:cNvPr id="17420" name="Rounded Rectangle 17419"/>
           <p:cNvSpPr/>
           <p:nvPr/>
         </p:nvSpPr>
         <p:spPr>
           <a:xfrm>
-            <a:off x="6144768" y="1115568"/>
-            <a:ext cx="2615184" cy="1481328"/>
+            <a:off x="6144768" y="1042415"/>
+            <a:ext cx="2615184" cy="969264"/>
           </a:xfrm>
           <a:prstGeom prst="roundRect">
             <a:avLst/>
@@ -7385,13 +8050,13 @@
       </p:sp>
       <p:cxnSp>
         <p:nvCxnSpPr>
-          <p:cNvPr id="17416" name="Connector 17415"/>
+          <p:cNvPr id="17421" name="Connector 17420"/>
           <p:cNvCxnSpPr/>
           <p:nvPr/>
         </p:nvCxnSpPr>
         <p:spPr>
           <a:xfrm>
-            <a:off x="8759952" y="1856232"/>
+            <a:off x="8759952" y="1527047"/>
             <a:ext cx="292608" cy="0"/>
           </a:xfrm>
           <a:prstGeom prst="line">
@@ -7421,14 +8086,14 @@
       </p:cxnSp>
       <p:sp>
         <p:nvSpPr>
-          <p:cNvPr id="17417" name="Rounded Rectangle 17416"/>
+          <p:cNvPr id="17422" name="Rounded Rectangle 17421"/>
           <p:cNvSpPr/>
           <p:nvPr/>
         </p:nvSpPr>
         <p:spPr>
           <a:xfrm>
-            <a:off x="9052560" y="1115568"/>
-            <a:ext cx="2615184" cy="1481328"/>
+            <a:off x="9052560" y="1042415"/>
+            <a:ext cx="2615184" cy="969264"/>
           </a:xfrm>
           <a:prstGeom prst="roundRect">
             <a:avLst/>
@@ -7505,13 +8170,13 @@
       </p:sp>
       <p:sp>
         <p:nvSpPr>
-          <p:cNvPr id="17418" name="TextBox 17417"/>
+          <p:cNvPr id="17423" name="TextBox 17422"/>
           <p:cNvSpPr txBox="1"/>
           <p:nvPr/>
         </p:nvSpPr>
         <p:spPr>
           <a:xfrm>
-            <a:off x="329184" y="2651760"/>
+            <a:off x="329184" y="2066543"/>
             <a:ext cx="11475720" cy="402336"/>
           </a:xfrm>
           <a:prstGeom prst="rect">
@@ -7537,7 +8202,7 @@
                 <a:latin typeface="Arial"/>
                 <a:cs typeface="Arial" pitchFamily="34" charset="0"/>
               </a:rPr>
-              <a:t>Every mark is tied to a topic. That one link is what turns a pile of lab marks into a picture of what a student actually understands.</a:t>
+              <a:t>Every mark is tied to a topic, and topics are linked into a prerequisite map - drafted from the syllabus, approved by the teacher. The system walks it to find the root gap, not the symptom.</a:t>
             </a:r>
           </a:p>
         </p:txBody>

--- a/presentation/SIH2026-EvalPro-Idea-Presentation.pptx
+++ b/presentation/SIH2026-EvalPro-Idea-Presentation.pptx
@@ -8348,8 +8348,8 @@
         </p:nvSpPr>
         <p:spPr bwMode="auto">
           <a:xfrm>
-            <a:off x="329184" y="1188720"/>
-            <a:ext cx="11503152" cy="4206240"/>
+            <a:off x="329184" y="1152144"/>
+            <a:ext cx="6126480" cy="4206240"/>
           </a:xfrm>
           <a:prstGeom prst="rect">
             <a:avLst/>
@@ -8406,14 +8406,14 @@
               <a:buFont typeface="Wingdings" pitchFamily="34" charset="0"/>
               <a:buChar char="v"/>
               <a:spcBef>
-                <a:spcPts val="1300"/>
+                <a:spcPts val="1100"/>
               </a:spcBef>
               <a:spcAft>
                 <a:spcPts val="600"/>
               </a:spcAft>
             </a:pPr>
             <a:r>
-              <a:rPr sz="1600" b="1" i="0" u="sng">
+              <a:rPr sz="1400" b="1" i="0" u="sng">
                 <a:solidFill>
                   <a:srgbClr val="1F497D"/>
                 </a:solidFill>
@@ -8426,16 +8426,16 @@
           <a:p>
             <a:pPr algn="l" marL="329184" indent="-219456">
               <a:lnSpc>
-                <a:spcPct val="106000"/>
+                <a:spcPct val="104000"/>
               </a:lnSpc>
               <a:buFont typeface="Arial" pitchFamily="34" charset="0"/>
               <a:buChar char="•"/>
               <a:spcAft>
-                <a:spcPts val="400"/>
-              </a:spcAft>
-            </a:pPr>
-            <a:r>
-              <a:rPr sz="1350" b="0" i="0" u="none">
+                <a:spcPts val="200"/>
+              </a:spcAft>
+            </a:pPr>
+            <a:r>
+              <a:rPr sz="1150" b="0" i="0" u="none">
                 <a:solidFill>
                   <a:srgbClr val="1A1A1A"/>
                 </a:solidFill>
@@ -8448,16 +8448,16 @@
           <a:p>
             <a:pPr algn="l" marL="329184" indent="-219456">
               <a:lnSpc>
-                <a:spcPct val="106000"/>
+                <a:spcPct val="104000"/>
               </a:lnSpc>
               <a:buFont typeface="Arial" pitchFamily="34" charset="0"/>
               <a:buChar char="•"/>
               <a:spcAft>
-                <a:spcPts val="400"/>
-              </a:spcAft>
-            </a:pPr>
-            <a:r>
-              <a:rPr sz="1350" b="0" i="0" u="none">
+                <a:spcPts val="200"/>
+              </a:spcAft>
+            </a:pPr>
+            <a:r>
+              <a:rPr sz="1150" b="0" i="0" u="none">
                 <a:solidFill>
                   <a:srgbClr val="1A1A1A"/>
                 </a:solidFill>
@@ -8470,23 +8470,23 @@
           <a:p>
             <a:pPr algn="l" marL="329184" indent="-219456">
               <a:lnSpc>
-                <a:spcPct val="106000"/>
+                <a:spcPct val="104000"/>
               </a:lnSpc>
               <a:buFont typeface="Arial" pitchFamily="34" charset="0"/>
               <a:buChar char="•"/>
               <a:spcAft>
-                <a:spcPts val="400"/>
-              </a:spcAft>
-            </a:pPr>
-            <a:r>
-              <a:rPr sz="1350" b="0" i="0" u="none">
+                <a:spcPts val="200"/>
+              </a:spcAft>
+            </a:pPr>
+            <a:r>
+              <a:rPr sz="1150" b="0" i="0" u="none">
                 <a:solidFill>
                   <a:srgbClr val="1A1A1A"/>
                 </a:solidFill>
                 <a:latin typeface="Arial"/>
                 <a:cs typeface="Arial" pitchFamily="34" charset="0"/>
               </a:rPr>
-              <a:t>Fits the tools a college already uses, so marks return to the existing gradebook.</a:t>
+              <a:t>Fits the tools a college already uses, so marks go back to the gradebook.</a:t>
             </a:r>
           </a:p>
           <a:p>
@@ -8497,14 +8497,14 @@
               <a:buFont typeface="Wingdings" pitchFamily="34" charset="0"/>
               <a:buChar char="v"/>
               <a:spcBef>
-                <a:spcPts val="1300"/>
+                <a:spcPts val="1100"/>
               </a:spcBef>
               <a:spcAft>
                 <a:spcPts val="600"/>
               </a:spcAft>
             </a:pPr>
             <a:r>
-              <a:rPr sz="1600" b="1" i="0" u="sng">
+              <a:rPr sz="1400" b="1" i="0" u="sng">
                 <a:solidFill>
                   <a:srgbClr val="1F497D"/>
                 </a:solidFill>
@@ -8517,16 +8517,16 @@
           <a:p>
             <a:pPr algn="l" marL="329184" indent="-219456">
               <a:lnSpc>
-                <a:spcPct val="106000"/>
+                <a:spcPct val="104000"/>
               </a:lnSpc>
               <a:buFont typeface="Arial" pitchFamily="34" charset="0"/>
               <a:buChar char="•"/>
               <a:spcAft>
-                <a:spcPts val="400"/>
-              </a:spcAft>
-            </a:pPr>
-            <a:r>
-              <a:rPr sz="1350" b="0" i="0" u="none">
+                <a:spcPts val="200"/>
+              </a:spcAft>
+            </a:pPr>
+            <a:r>
+              <a:rPr sz="1150" b="0" i="0" u="none">
                 <a:solidFill>
                   <a:srgbClr val="1A1A1A"/>
                 </a:solidFill>
@@ -8539,16 +8539,16 @@
           <a:p>
             <a:pPr algn="l" marL="329184" indent="-219456">
               <a:lnSpc>
-                <a:spcPct val="106000"/>
+                <a:spcPct val="104000"/>
               </a:lnSpc>
               <a:buFont typeface="Arial" pitchFamily="34" charset="0"/>
               <a:buChar char="•"/>
               <a:spcAft>
-                <a:spcPts val="400"/>
-              </a:spcAft>
-            </a:pPr>
-            <a:r>
-              <a:rPr sz="1350" b="0" i="0" u="none">
+                <a:spcPts val="200"/>
+              </a:spcAft>
+            </a:pPr>
+            <a:r>
+              <a:rPr sz="1150" b="0" i="0" u="none">
                 <a:solidFill>
                   <a:srgbClr val="1A1A1A"/>
                 </a:solidFill>
@@ -8561,16 +8561,16 @@
           <a:p>
             <a:pPr algn="l" marL="329184" indent="-219456">
               <a:lnSpc>
-                <a:spcPct val="106000"/>
+                <a:spcPct val="104000"/>
               </a:lnSpc>
               <a:buFont typeface="Arial" pitchFamily="34" charset="0"/>
               <a:buChar char="•"/>
               <a:spcAft>
-                <a:spcPts val="400"/>
-              </a:spcAft>
-            </a:pPr>
-            <a:r>
-              <a:rPr sz="1350" b="0" i="0" u="none">
+                <a:spcPts val="200"/>
+              </a:spcAft>
+            </a:pPr>
+            <a:r>
+              <a:rPr sz="1150" b="0" i="0" u="none">
                 <a:solidFill>
                   <a:srgbClr val="1A1A1A"/>
                 </a:solidFill>
@@ -8583,16 +8583,60 @@
           <a:p>
             <a:pPr algn="l" marL="329184" indent="-219456">
               <a:lnSpc>
-                <a:spcPct val="106000"/>
+                <a:spcPct val="104000"/>
               </a:lnSpc>
               <a:buFont typeface="Arial" pitchFamily="34" charset="0"/>
               <a:buChar char="•"/>
               <a:spcAft>
-                <a:spcPts val="400"/>
-              </a:spcAft>
-            </a:pPr>
-            <a:r>
-              <a:rPr sz="1350" b="0" i="0" u="none">
+                <a:spcPts val="200"/>
+              </a:spcAft>
+            </a:pPr>
+            <a:r>
+              <a:rPr sz="1150" b="0" i="0" u="none">
+                <a:solidFill>
+                  <a:srgbClr val="1A1A1A"/>
+                </a:solidFill>
+                <a:latin typeface="Arial"/>
+                <a:cs typeface="Arial" pitchFamily="34" charset="0"/>
+              </a:rPr>
+              <a:t>Student data is protected by law, here and abroad.</a:t>
+            </a:r>
+          </a:p>
+          <a:p>
+            <a:pPr algn="l" marL="329184" indent="-219456">
+              <a:lnSpc>
+                <a:spcPct val="104000"/>
+              </a:lnSpc>
+              <a:buFont typeface="Arial" pitchFamily="34" charset="0"/>
+              <a:buChar char="•"/>
+              <a:spcAft>
+                <a:spcPts val="200"/>
+              </a:spcAft>
+            </a:pPr>
+            <a:r>
+              <a:rPr sz="1150" b="0" i="0" u="none">
+                <a:solidFill>
+                  <a:srgbClr val="1A1A1A"/>
+                </a:solidFill>
+                <a:latin typeface="Arial"/>
+                <a:cs typeface="Arial" pitchFamily="34" charset="0"/>
+              </a:rPr>
+              <a:t>Everyone submits in the last hour before the deadline.</a:t>
+            </a:r>
+          </a:p>
+          <a:p>
+            <a:pPr algn="l" marL="329184" indent="-219456">
+              <a:lnSpc>
+                <a:spcPct val="104000"/>
+              </a:lnSpc>
+              <a:buFont typeface="Arial" pitchFamily="34" charset="0"/>
+              <a:buChar char="•"/>
+              <a:spcAft>
+                <a:spcPts val="200"/>
+              </a:spcAft>
+            </a:pPr>
+            <a:r>
+              <a:rPr sz="1150" b="0" i="0" u="none">
                 <a:solidFill>
                   <a:srgbClr val="1A1A1A"/>
                 </a:solidFill>
@@ -8610,14 +8654,14 @@
               <a:buFont typeface="Wingdings" pitchFamily="34" charset="0"/>
               <a:buChar char="v"/>
               <a:spcBef>
-                <a:spcPts val="1300"/>
+                <a:spcPts val="1100"/>
               </a:spcBef>
               <a:spcAft>
                 <a:spcPts val="600"/>
               </a:spcAft>
             </a:pPr>
             <a:r>
-              <a:rPr sz="1600" b="1" i="0" u="sng">
+              <a:rPr sz="1400" b="1" i="0" u="sng">
                 <a:solidFill>
                   <a:srgbClr val="1F497D"/>
                 </a:solidFill>
@@ -8630,16 +8674,16 @@
           <a:p>
             <a:pPr algn="l" marL="329184" indent="-219456">
               <a:lnSpc>
-                <a:spcPct val="106000"/>
+                <a:spcPct val="104000"/>
               </a:lnSpc>
               <a:buFont typeface="Arial" pitchFamily="34" charset="0"/>
               <a:buChar char="•"/>
               <a:spcAft>
-                <a:spcPts val="400"/>
-              </a:spcAft>
-            </a:pPr>
-            <a:r>
-              <a:rPr sz="1350" b="0" i="0" u="none">
+                <a:spcPts val="200"/>
+              </a:spcAft>
+            </a:pPr>
+            <a:r>
+              <a:rPr sz="1150" b="0" i="0" u="none">
                 <a:solidFill>
                   <a:srgbClr val="1A1A1A"/>
                 </a:solidFill>
@@ -8652,16 +8696,16 @@
           <a:p>
             <a:pPr algn="l" marL="329184" indent="-219456">
               <a:lnSpc>
-                <a:spcPct val="106000"/>
+                <a:spcPct val="104000"/>
               </a:lnSpc>
               <a:buFont typeface="Arial" pitchFamily="34" charset="0"/>
               <a:buChar char="•"/>
               <a:spcAft>
-                <a:spcPts val="400"/>
-              </a:spcAft>
-            </a:pPr>
-            <a:r>
-              <a:rPr sz="1350" b="0" i="0" u="none">
+                <a:spcPts val="200"/>
+              </a:spcAft>
+            </a:pPr>
+            <a:r>
+              <a:rPr sz="1150" b="0" i="0" u="none">
                 <a:solidFill>
                   <a:srgbClr val="1A1A1A"/>
                 </a:solidFill>
@@ -8674,16 +8718,16 @@
           <a:p>
             <a:pPr algn="l" marL="329184" indent="-219456">
               <a:lnSpc>
-                <a:spcPct val="106000"/>
+                <a:spcPct val="104000"/>
               </a:lnSpc>
               <a:buFont typeface="Arial" pitchFamily="34" charset="0"/>
               <a:buChar char="•"/>
               <a:spcAft>
-                <a:spcPts val="400"/>
-              </a:spcAft>
-            </a:pPr>
-            <a:r>
-              <a:rPr sz="1350" b="0" i="0" u="none">
+                <a:spcPts val="200"/>
+              </a:spcAft>
+            </a:pPr>
+            <a:r>
+              <a:rPr sz="1150" b="0" i="0" u="none">
                 <a:solidFill>
                   <a:srgbClr val="1A1A1A"/>
                 </a:solidFill>
@@ -8696,16 +8740,60 @@
           <a:p>
             <a:pPr algn="l" marL="329184" indent="-219456">
               <a:lnSpc>
-                <a:spcPct val="106000"/>
+                <a:spcPct val="104000"/>
               </a:lnSpc>
               <a:buFont typeface="Arial" pitchFamily="34" charset="0"/>
               <a:buChar char="•"/>
               <a:spcAft>
-                <a:spcPts val="400"/>
-              </a:spcAft>
-            </a:pPr>
-            <a:r>
-              <a:rPr sz="1350" b="0" i="0" u="none">
+                <a:spcPts val="200"/>
+              </a:spcAft>
+            </a:pPr>
+            <a:r>
+              <a:rPr sz="1150" b="0" i="0" u="none">
+                <a:solidFill>
+                  <a:srgbClr val="1A1A1A"/>
+                </a:solidFill>
+                <a:latin typeface="Arial"/>
+                <a:cs typeface="Arial" pitchFamily="34" charset="0"/>
+              </a:rPr>
+              <a:t>Role-scoped access, and a student can see what is inferred about them.</a:t>
+            </a:r>
+          </a:p>
+          <a:p>
+            <a:pPr algn="l" marL="329184" indent="-219456">
+              <a:lnSpc>
+                <a:spcPct val="104000"/>
+              </a:lnSpc>
+              <a:buFont typeface="Arial" pitchFamily="34" charset="0"/>
+              <a:buChar char="•"/>
+              <a:spcAft>
+                <a:spcPts val="200"/>
+              </a:spcAft>
+            </a:pPr>
+            <a:r>
+              <a:rPr sz="1150" b="0" i="0" u="none">
+                <a:solidFill>
+                  <a:srgbClr val="1A1A1A"/>
+                </a:solidFill>
+                <a:latin typeface="Arial"/>
+                <a:cs typeface="Arial" pitchFamily="34" charset="0"/>
+              </a:rPr>
+              <a:t>A queue that adds workers on demand, with a ceiling per lab.</a:t>
+            </a:r>
+          </a:p>
+          <a:p>
+            <a:pPr algn="l" marL="329184" indent="-219456">
+              <a:lnSpc>
+                <a:spcPct val="104000"/>
+              </a:lnSpc>
+              <a:buFont typeface="Arial" pitchFamily="34" charset="0"/>
+              <a:buChar char="•"/>
+              <a:spcAft>
+                <a:spcPts val="200"/>
+              </a:spcAft>
+            </a:pPr>
+            <a:r>
+              <a:rPr sz="1150" b="0" i="0" u="none">
                 <a:solidFill>
                   <a:srgbClr val="1A1A1A"/>
                 </a:solidFill>
@@ -8960,6 +9048,336 @@
         </p:nvSpPr>
         <p:spPr>
           <a:xfrm>
+            <a:off x="6693408" y="1152144"/>
+            <a:ext cx="5138928" cy="3010204"/>
+          </a:xfrm>
+          <a:prstGeom prst="roundRect">
+            <a:avLst>
+              <a:gd name="adj" fmla="val 3500"/>
+            </a:avLst>
+          </a:prstGeom>
+          <a:solidFill>
+            <a:srgbClr val="ECF2F9"/>
+          </a:solidFill>
+          <a:ln w="9525">
+            <a:solidFill>
+              <a:srgbClr val="4F81BD"/>
+            </a:solidFill>
+          </a:ln>
+          <a:effectLst/>
+        </p:spPr>
+        <p:style>
+          <a:lnRef idx="1">
+            <a:schemeClr val="accent1"/>
+          </a:lnRef>
+          <a:fillRef idx="3">
+            <a:schemeClr val="accent1"/>
+          </a:fillRef>
+          <a:effectRef idx="2">
+            <a:schemeClr val="accent1"/>
+          </a:effectRef>
+          <a:fontRef idx="minor">
+            <a:schemeClr val="lt1"/>
+          </a:fontRef>
+        </p:style>
+        <p:txBody>
+          <a:bodyPr rtlCol="0" anchor="ctr" wrap="square" lIns="45720" rIns="45720" tIns="22860" bIns="22860"/>
+          <a:lstStyle/>
+          <a:p>
+            <a:pPr algn="ctr"/>
+          </a:p>
+        </p:txBody>
+      </p:sp>
+      <p:sp>
+        <p:nvSpPr>
+          <p:cNvPr id="17412" name="TextBox 17411"/>
+          <p:cNvSpPr txBox="1"/>
+          <p:nvPr/>
+        </p:nvSpPr>
+        <p:spPr>
+          <a:xfrm>
+            <a:off x="6876288" y="1271016"/>
+            <a:ext cx="4773168" cy="2772460"/>
+          </a:xfrm>
+          <a:prstGeom prst="rect">
+            <a:avLst/>
+          </a:prstGeom>
+          <a:noFill/>
+        </p:spPr>
+        <p:txBody>
+          <a:bodyPr wrap="square" lIns="45720" rIns="45720" tIns="22860" bIns="22860"/>
+          <a:lstStyle/>
+          <a:p>
+            <a:pPr algn="l" marL="0" indent="0">
+              <a:lnSpc>
+                <a:spcPct val="100000"/>
+              </a:lnSpc>
+              <a:buNone/>
+              <a:spcAft>
+                <a:spcPts val="600"/>
+              </a:spcAft>
+            </a:pPr>
+            <a:r>
+              <a:rPr sz="1250" b="1" i="0" u="none">
+                <a:solidFill>
+                  <a:srgbClr val="1F497D"/>
+                </a:solidFill>
+                <a:latin typeface="Arial"/>
+                <a:cs typeface="Arial" pitchFamily="34" charset="0"/>
+              </a:rPr>
+              <a:t>Running untrusted code safely - the shipped design</a:t>
+            </a:r>
+          </a:p>
+          <a:p>
+            <a:pPr algn="l" marL="310896" indent="-219456">
+              <a:lnSpc>
+                <a:spcPct val="100000"/>
+              </a:lnSpc>
+              <a:buFont typeface="Arial" pitchFamily="34" charset="0"/>
+              <a:buChar char="•"/>
+            </a:pPr>
+            <a:r>
+              <a:rPr sz="1100" b="1" i="0" u="none">
+                <a:solidFill>
+                  <a:srgbClr val="0070C0"/>
+                </a:solidFill>
+                <a:latin typeface="Arial"/>
+                <a:cs typeface="Arial" pitchFamily="34" charset="0"/>
+              </a:rPr>
+              <a:t>Its own tiny virtual machine</a:t>
+            </a:r>
+          </a:p>
+          <a:p>
+            <a:pPr algn="l" marL="219456" indent="0">
+              <a:lnSpc>
+                <a:spcPct val="102000"/>
+              </a:lnSpc>
+              <a:buNone/>
+              <a:spcAft>
+                <a:spcPts val="400"/>
+              </a:spcAft>
+            </a:pPr>
+            <a:r>
+              <a:rPr sz="950" b="0" i="0" u="none">
+                <a:solidFill>
+                  <a:srgbClr val="1A1A1A"/>
+                </a:solidFill>
+                <a:latin typeface="Arial"/>
+                <a:cs typeface="Arial" pitchFamily="34" charset="0"/>
+              </a:rPr>
+              <a:t>every submission gets a Firecracker microVM, not just a container, so an escape still lands nowhere</a:t>
+            </a:r>
+          </a:p>
+          <a:p>
+            <a:pPr algn="l" marL="310896" indent="-219456">
+              <a:lnSpc>
+                <a:spcPct val="100000"/>
+              </a:lnSpc>
+              <a:buFont typeface="Arial" pitchFamily="34" charset="0"/>
+              <a:buChar char="•"/>
+            </a:pPr>
+            <a:r>
+              <a:rPr sz="1100" b="1" i="0" u="none">
+                <a:solidFill>
+                  <a:srgbClr val="0070C0"/>
+                </a:solidFill>
+                <a:latin typeface="Arial"/>
+                <a:cs typeface="Arial" pitchFamily="34" charset="0"/>
+              </a:rPr>
+              <a:t>An allow-list of system calls</a:t>
+            </a:r>
+          </a:p>
+          <a:p>
+            <a:pPr algn="l" marL="219456" indent="0">
+              <a:lnSpc>
+                <a:spcPct val="102000"/>
+              </a:lnSpc>
+              <a:buNone/>
+              <a:spcAft>
+                <a:spcPts val="400"/>
+              </a:spcAft>
+            </a:pPr>
+            <a:r>
+              <a:rPr sz="950" b="0" i="0" u="none">
+                <a:solidFill>
+                  <a:srgbClr val="1A1A1A"/>
+                </a:solidFill>
+                <a:latin typeface="Arial"/>
+                <a:cs typeface="Arial" pitchFamily="34" charset="0"/>
+              </a:rPr>
+              <a:t>seccomp-bpf: anything not on the list is denied, and repeated denials from one student raise a flag</a:t>
+            </a:r>
+          </a:p>
+          <a:p>
+            <a:pPr algn="l" marL="310896" indent="-219456">
+              <a:lnSpc>
+                <a:spcPct val="100000"/>
+              </a:lnSpc>
+              <a:buFont typeface="Arial" pitchFamily="34" charset="0"/>
+              <a:buChar char="•"/>
+            </a:pPr>
+            <a:r>
+              <a:rPr sz="1100" b="1" i="0" u="none">
+                <a:solidFill>
+                  <a:srgbClr val="0070C0"/>
+                </a:solidFill>
+                <a:latin typeface="Arial"/>
+                <a:cs typeface="Arial" pitchFamily="34" charset="0"/>
+              </a:rPr>
+              <a:t>No network at all</a:t>
+            </a:r>
+          </a:p>
+          <a:p>
+            <a:pPr algn="l" marL="219456" indent="0">
+              <a:lnSpc>
+                <a:spcPct val="102000"/>
+              </a:lnSpc>
+              <a:buNone/>
+              <a:spcAft>
+                <a:spcPts val="400"/>
+              </a:spcAft>
+            </a:pPr>
+            <a:r>
+              <a:rPr sz="950" b="0" i="0" u="none">
+                <a:solidFill>
+                  <a:srgbClr val="1A1A1A"/>
+                </a:solidFill>
+                <a:latin typeface="Arial"/>
+                <a:cs typeface="Arial" pitchFamily="34" charset="0"/>
+              </a:rPr>
+              <a:t>no interfaces, no loopback, and the package manager is not reachable - nothing can phone home</a:t>
+            </a:r>
+          </a:p>
+          <a:p>
+            <a:pPr algn="l" marL="310896" indent="-219456">
+              <a:lnSpc>
+                <a:spcPct val="100000"/>
+              </a:lnSpc>
+              <a:buFont typeface="Arial" pitchFamily="34" charset="0"/>
+              <a:buChar char="•"/>
+            </a:pPr>
+            <a:r>
+              <a:rPr sz="1100" b="1" i="0" u="none">
+                <a:solidFill>
+                  <a:srgbClr val="0070C0"/>
+                </a:solidFill>
+                <a:latin typeface="Arial"/>
+                <a:cs typeface="Arial" pitchFamily="34" charset="0"/>
+              </a:rPr>
+              <a:t>Hard ceilings</a:t>
+            </a:r>
+          </a:p>
+          <a:p>
+            <a:pPr algn="l" marL="219456" indent="0">
+              <a:lnSpc>
+                <a:spcPct val="102000"/>
+              </a:lnSpc>
+              <a:buNone/>
+              <a:spcAft>
+                <a:spcPts val="400"/>
+              </a:spcAft>
+            </a:pPr>
+            <a:r>
+              <a:rPr sz="950" b="0" i="0" u="none">
+                <a:solidFill>
+                  <a:srgbClr val="1A1A1A"/>
+                </a:solidFill>
+                <a:latin typeface="Arial"/>
+                <a:cs typeface="Arial" pitchFamily="34" charset="0"/>
+              </a:rPr>
+              <a:t>memory, processes and CPU are capped, so a fork bomb or a runaway loop dies instead of the server</a:t>
+            </a:r>
+          </a:p>
+          <a:p>
+            <a:pPr algn="l" marL="310896" indent="-219456">
+              <a:lnSpc>
+                <a:spcPct val="100000"/>
+              </a:lnSpc>
+              <a:buFont typeface="Arial" pitchFamily="34" charset="0"/>
+              <a:buChar char="•"/>
+            </a:pPr>
+            <a:r>
+              <a:rPr sz="1100" b="1" i="0" u="none">
+                <a:solidFill>
+                  <a:srgbClr val="0070C0"/>
+                </a:solidFill>
+                <a:latin typeface="Arial"/>
+                <a:cs typeface="Arial" pitchFamily="34" charset="0"/>
+              </a:rPr>
+              <a:t>Destroyed after every run</a:t>
+            </a:r>
+          </a:p>
+          <a:p>
+            <a:pPr algn="l" marL="219456" indent="0">
+              <a:lnSpc>
+                <a:spcPct val="102000"/>
+              </a:lnSpc>
+              <a:buNone/>
+              <a:spcAft>
+                <a:spcPts val="400"/>
+              </a:spcAft>
+            </a:pPr>
+            <a:r>
+              <a:rPr sz="950" b="0" i="0" u="none">
+                <a:solidFill>
+                  <a:srgbClr val="1A1A1A"/>
+                </a:solidFill>
+                <a:latin typeface="Arial"/>
+                <a:cs typeface="Arial" pitchFamily="34" charset="0"/>
+              </a:rPr>
+              <a:t>one-shot machines, so nothing a student leaves behind can reach the next student</a:t>
+            </a:r>
+          </a:p>
+          <a:p>
+            <a:pPr algn="l" marL="310896" indent="-219456">
+              <a:lnSpc>
+                <a:spcPct val="100000"/>
+              </a:lnSpc>
+              <a:buFont typeface="Arial" pitchFamily="34" charset="0"/>
+              <a:buChar char="•"/>
+            </a:pPr>
+            <a:r>
+              <a:rPr sz="1100" b="1" i="0" u="none">
+                <a:solidFill>
+                  <a:srgbClr val="0070C0"/>
+                </a:solidFill>
+                <a:latin typeface="Arial"/>
+                <a:cs typeface="Arial" pitchFamily="34" charset="0"/>
+              </a:rPr>
+              <a:t>Nothing worth stealing inside</a:t>
+            </a:r>
+          </a:p>
+          <a:p>
+            <a:pPr algn="l" marL="219456" indent="0">
+              <a:lnSpc>
+                <a:spcPct val="102000"/>
+              </a:lnSpc>
+              <a:buNone/>
+              <a:spcAft>
+                <a:spcPts val="400"/>
+              </a:spcAft>
+            </a:pPr>
+            <a:r>
+              <a:rPr sz="950" b="0" i="0" u="none">
+                <a:solidFill>
+                  <a:srgbClr val="1A1A1A"/>
+                </a:solidFill>
+                <a:latin typeface="Arial"/>
+                <a:cs typeface="Arial" pitchFamily="34" charset="0"/>
+              </a:rPr>
+              <a:t>the answer key never enters, and workers hold no keys and no database - a full breach wins one job</a:t>
+            </a:r>
+          </a:p>
+        </p:txBody>
+      </p:sp>
+      <p:sp>
+        <p:nvSpPr>
+          <p:cNvPr id="17413" name="Rounded Rectangle 17412"/>
+          <p:cNvSpPr/>
+          <p:nvPr/>
+        </p:nvSpPr>
+        <p:spPr>
+          <a:xfrm>
             <a:off x="310896" y="5504688"/>
             <a:ext cx="3712464" cy="694944"/>
           </a:xfrm>
@@ -9033,7 +9451,7 @@
       </p:sp>
       <p:sp>
         <p:nvSpPr>
-          <p:cNvPr id="17412" name="Rounded Rectangle 17411"/>
+          <p:cNvPr id="17414" name="Rounded Rectangle 17413"/>
           <p:cNvSpPr/>
           <p:nvPr/>
         </p:nvSpPr>
@@ -9112,7 +9530,7 @@
       </p:sp>
       <p:sp>
         <p:nvSpPr>
-          <p:cNvPr id="17413" name="Rounded Rectangle 17412"/>
+          <p:cNvPr id="17415" name="Rounded Rectangle 17414"/>
           <p:cNvSpPr/>
           <p:nvPr/>
         </p:nvSpPr>
@@ -9184,7 +9602,7 @@
                 <a:latin typeface="Arial"/>
                 <a:cs typeface="Arial" pitchFamily="34" charset="0"/>
               </a:rPr>
-              <a:t>ordinary hardware, no paid AI service</a:t>
+              <a:t>ordinary hardware, and no AI cost per submission</a:t>
             </a:r>
           </a:p>
         </p:txBody>
@@ -9379,14 +9797,14 @@
               <a:buFont typeface="Wingdings" pitchFamily="34" charset="0"/>
               <a:buChar char="v"/>
               <a:spcBef>
-                <a:spcPts val="3400"/>
+                <a:spcPts val="1700"/>
               </a:spcBef>
               <a:spcAft>
                 <a:spcPts val="600"/>
               </a:spcAft>
             </a:pPr>
             <a:r>
-              <a:rPr sz="2000" b="1" i="0" u="sng">
+              <a:rPr sz="1700" b="1" i="0" u="sng">
                 <a:solidFill>
                   <a:srgbClr val="1F497D"/>
                 </a:solidFill>
@@ -9399,16 +9817,16 @@
           <a:p>
             <a:pPr algn="l" marL="329184" indent="-219456">
               <a:lnSpc>
-                <a:spcPct val="118000"/>
+                <a:spcPct val="112000"/>
               </a:lnSpc>
               <a:buFont typeface="Arial" pitchFamily="34" charset="0"/>
               <a:buChar char="•"/>
               <a:spcAft>
-                <a:spcPts val="1300"/>
-              </a:spcAft>
-            </a:pPr>
-            <a:r>
-              <a:rPr sz="1750" b="0" i="0" u="none">
+                <a:spcPts val="500"/>
+              </a:spcAft>
+            </a:pPr>
+            <a:r>
+              <a:rPr sz="1450" b="0" i="0" u="none">
                 <a:solidFill>
                   <a:srgbClr val="1A1A1A"/>
                 </a:solidFill>
@@ -9421,16 +9839,16 @@
           <a:p>
             <a:pPr algn="l" marL="329184" indent="-219456">
               <a:lnSpc>
-                <a:spcPct val="118000"/>
+                <a:spcPct val="112000"/>
               </a:lnSpc>
               <a:buFont typeface="Arial" pitchFamily="34" charset="0"/>
               <a:buChar char="•"/>
               <a:spcAft>
-                <a:spcPts val="1300"/>
-              </a:spcAft>
-            </a:pPr>
-            <a:r>
-              <a:rPr sz="1750" b="0" i="0" u="none">
+                <a:spcPts val="500"/>
+              </a:spcAft>
+            </a:pPr>
+            <a:r>
+              <a:rPr sz="1450" b="0" i="0" u="none">
                 <a:solidFill>
                   <a:srgbClr val="1A1A1A"/>
                 </a:solidFill>
@@ -9443,16 +9861,16 @@
           <a:p>
             <a:pPr algn="l" marL="329184" indent="-219456">
               <a:lnSpc>
-                <a:spcPct val="118000"/>
+                <a:spcPct val="112000"/>
               </a:lnSpc>
               <a:buFont typeface="Arial" pitchFamily="34" charset="0"/>
               <a:buChar char="•"/>
               <a:spcAft>
-                <a:spcPts val="1300"/>
-              </a:spcAft>
-            </a:pPr>
-            <a:r>
-              <a:rPr sz="1750" b="0" i="0" u="none">
+                <a:spcPts val="500"/>
+              </a:spcAft>
+            </a:pPr>
+            <a:r>
+              <a:rPr sz="1450" b="0" i="0" u="none">
                 <a:solidFill>
                   <a:srgbClr val="1A1A1A"/>
                 </a:solidFill>
@@ -9470,14 +9888,14 @@
               <a:buFont typeface="Wingdings" pitchFamily="34" charset="0"/>
               <a:buChar char="v"/>
               <a:spcBef>
-                <a:spcPts val="3400"/>
+                <a:spcPts val="1700"/>
               </a:spcBef>
               <a:spcAft>
                 <a:spcPts val="600"/>
               </a:spcAft>
             </a:pPr>
             <a:r>
-              <a:rPr sz="2000" b="1" i="0" u="sng">
+              <a:rPr sz="1700" b="1" i="0" u="sng">
                 <a:solidFill>
                   <a:srgbClr val="1F497D"/>
                 </a:solidFill>
@@ -9490,16 +9908,16 @@
           <a:p>
             <a:pPr algn="l" marL="329184" indent="-219456">
               <a:lnSpc>
-                <a:spcPct val="118000"/>
+                <a:spcPct val="112000"/>
               </a:lnSpc>
               <a:buFont typeface="Arial" pitchFamily="34" charset="0"/>
               <a:buChar char="•"/>
               <a:spcAft>
-                <a:spcPts val="1300"/>
-              </a:spcAft>
-            </a:pPr>
-            <a:r>
-              <a:rPr sz="1750" b="0" i="0" u="none">
+                <a:spcPts val="500"/>
+              </a:spcAft>
+            </a:pPr>
+            <a:r>
+              <a:rPr sz="1450" b="0" i="0" u="none">
                 <a:solidFill>
                   <a:srgbClr val="1A1A1A"/>
                 </a:solidFill>
@@ -9512,16 +9930,16 @@
           <a:p>
             <a:pPr algn="l" marL="329184" indent="-219456">
               <a:lnSpc>
-                <a:spcPct val="118000"/>
+                <a:spcPct val="112000"/>
               </a:lnSpc>
               <a:buFont typeface="Arial" pitchFamily="34" charset="0"/>
               <a:buChar char="•"/>
               <a:spcAft>
-                <a:spcPts val="1300"/>
-              </a:spcAft>
-            </a:pPr>
-            <a:r>
-              <a:rPr sz="1750" b="0" i="0" u="none">
+                <a:spcPts val="500"/>
+              </a:spcAft>
+            </a:pPr>
+            <a:r>
+              <a:rPr sz="1450" b="0" i="0" u="none">
                 <a:solidFill>
                   <a:srgbClr val="1A1A1A"/>
                 </a:solidFill>
@@ -9534,16 +9952,16 @@
           <a:p>
             <a:pPr algn="l" marL="329184" indent="-219456">
               <a:lnSpc>
-                <a:spcPct val="118000"/>
+                <a:spcPct val="112000"/>
               </a:lnSpc>
               <a:buFont typeface="Arial" pitchFamily="34" charset="0"/>
               <a:buChar char="•"/>
               <a:spcAft>
-                <a:spcPts val="1300"/>
-              </a:spcAft>
-            </a:pPr>
-            <a:r>
-              <a:rPr sz="1750" b="0" i="0" u="none">
+                <a:spcPts val="500"/>
+              </a:spcAft>
+            </a:pPr>
+            <a:r>
+              <a:rPr sz="1450" b="0" i="0" u="none">
                 <a:solidFill>
                   <a:srgbClr val="1A1A1A"/>
                 </a:solidFill>
@@ -9556,16 +9974,16 @@
           <a:p>
             <a:pPr algn="l" marL="329184" indent="-219456">
               <a:lnSpc>
-                <a:spcPct val="118000"/>
+                <a:spcPct val="112000"/>
               </a:lnSpc>
               <a:buFont typeface="Arial" pitchFamily="34" charset="0"/>
               <a:buChar char="•"/>
               <a:spcAft>
-                <a:spcPts val="1300"/>
-              </a:spcAft>
-            </a:pPr>
-            <a:r>
-              <a:rPr sz="1750" b="0" i="0" u="none">
+                <a:spcPts val="500"/>
+              </a:spcAft>
+            </a:pPr>
+            <a:r>
+              <a:rPr sz="1450" b="0" i="0" u="none">
                 <a:solidFill>
                   <a:srgbClr val="1A1A1A"/>
                 </a:solidFill>
@@ -9812,6 +10230,540 @@
           </a:prstGeom>
         </p:spPr>
       </p:pic>
+      <p:sp>
+        <p:nvSpPr>
+          <p:cNvPr id="17411" name="Rounded Rectangle 17410"/>
+          <p:cNvSpPr/>
+          <p:nvPr/>
+        </p:nvSpPr>
+        <p:spPr>
+          <a:xfrm>
+            <a:off x="329184" y="3968496"/>
+            <a:ext cx="3712463" cy="1920240"/>
+          </a:xfrm>
+          <a:prstGeom prst="roundRect">
+            <a:avLst>
+              <a:gd name="adj" fmla="val 5500"/>
+            </a:avLst>
+          </a:prstGeom>
+          <a:solidFill>
+            <a:srgbClr val="ECF2F9"/>
+          </a:solidFill>
+          <a:ln w="9525">
+            <a:solidFill>
+              <a:srgbClr val="4F81BD"/>
+            </a:solidFill>
+          </a:ln>
+          <a:effectLst/>
+        </p:spPr>
+        <p:style>
+          <a:lnRef idx="1">
+            <a:schemeClr val="accent1"/>
+          </a:lnRef>
+          <a:fillRef idx="3">
+            <a:schemeClr val="accent1"/>
+          </a:fillRef>
+          <a:effectRef idx="2">
+            <a:schemeClr val="accent1"/>
+          </a:effectRef>
+          <a:fontRef idx="minor">
+            <a:schemeClr val="lt1"/>
+          </a:fontRef>
+        </p:style>
+        <p:txBody>
+          <a:bodyPr rtlCol="0" anchor="ctr" wrap="square" lIns="45720" rIns="45720" tIns="22860" bIns="22860"/>
+          <a:lstStyle/>
+          <a:p>
+            <a:pPr algn="ctr"/>
+          </a:p>
+        </p:txBody>
+      </p:sp>
+      <p:sp>
+        <p:nvSpPr>
+          <p:cNvPr id="17412" name="TextBox 17411"/>
+          <p:cNvSpPr txBox="1"/>
+          <p:nvPr/>
+        </p:nvSpPr>
+        <p:spPr>
+          <a:xfrm>
+            <a:off x="475488" y="4078224"/>
+            <a:ext cx="3419856" cy="1700784"/>
+          </a:xfrm>
+          <a:prstGeom prst="rect">
+            <a:avLst/>
+          </a:prstGeom>
+          <a:noFill/>
+        </p:spPr>
+        <p:txBody>
+          <a:bodyPr wrap="square" lIns="45720" rIns="45720" tIns="22860" bIns="22860"/>
+          <a:lstStyle/>
+          <a:p>
+            <a:pPr algn="l" marL="0" indent="0">
+              <a:lnSpc>
+                <a:spcPct val="102000"/>
+              </a:lnSpc>
+              <a:buNone/>
+              <a:spcAft>
+                <a:spcPts val="500"/>
+              </a:spcAft>
+            </a:pPr>
+            <a:r>
+              <a:rPr sz="1150" b="1" i="0" u="none">
+                <a:solidFill>
+                  <a:srgbClr val="1F497D"/>
+                </a:solidFill>
+                <a:latin typeface="Arial"/>
+                <a:cs typeface="Arial" pitchFamily="34" charset="0"/>
+              </a:rPr>
+              <a:t>Works with what a college already has</a:t>
+            </a:r>
+          </a:p>
+          <a:p>
+            <a:pPr algn="l" marL="310896" indent="-219456">
+              <a:lnSpc>
+                <a:spcPct val="104000"/>
+              </a:lnSpc>
+              <a:buFont typeface="Arial" pitchFamily="34" charset="0"/>
+              <a:buChar char="•"/>
+              <a:spcAft>
+                <a:spcPts val="300"/>
+              </a:spcAft>
+            </a:pPr>
+            <a:r>
+              <a:rPr sz="1000" b="0" i="0" u="none">
+                <a:solidFill>
+                  <a:srgbClr val="1A1A1A"/>
+                </a:solidFill>
+                <a:latin typeface="Arial"/>
+                <a:cs typeface="Arial" pitchFamily="34" charset="0"/>
+              </a:rPr>
+              <a:t>Plugs into Moodle, Canvas, Blackboard or Google Classroom (LTI 1.3).</a:t>
+            </a:r>
+          </a:p>
+          <a:p>
+            <a:pPr algn="l" marL="310896" indent="-219456">
+              <a:lnSpc>
+                <a:spcPct val="104000"/>
+              </a:lnSpc>
+              <a:buFont typeface="Arial" pitchFamily="34" charset="0"/>
+              <a:buChar char="•"/>
+              <a:spcAft>
+                <a:spcPts val="300"/>
+              </a:spcAft>
+            </a:pPr>
+            <a:r>
+              <a:rPr sz="1000" b="0" i="0" u="none">
+                <a:solidFill>
+                  <a:srgbClr val="1A1A1A"/>
+                </a:solidFill>
+                <a:latin typeface="Arial"/>
+                <a:cs typeface="Arial" pitchFamily="34" charset="0"/>
+              </a:rPr>
+              <a:t>Class lists come in, marks go back out - nobody keeps two gradebooks.</a:t>
+            </a:r>
+          </a:p>
+          <a:p>
+            <a:pPr algn="l" marL="310896" indent="-219456">
+              <a:lnSpc>
+                <a:spcPct val="104000"/>
+              </a:lnSpc>
+              <a:buFont typeface="Arial" pitchFamily="34" charset="0"/>
+              <a:buChar char="•"/>
+              <a:spcAft>
+                <a:spcPts val="300"/>
+              </a:spcAft>
+            </a:pPr>
+            <a:r>
+              <a:rPr sz="1000" b="0" i="0" u="none">
+                <a:solidFill>
+                  <a:srgbClr val="1A1A1A"/>
+                </a:solidFill>
+                <a:latin typeface="Arial"/>
+                <a:cs typeface="Arial" pitchFamily="34" charset="0"/>
+              </a:rPr>
+              <a:t>One parser reads 40+ languages, so it is not a Python-only tool.</a:t>
+            </a:r>
+          </a:p>
+          <a:p>
+            <a:pPr algn="l" marL="310896" indent="-219456">
+              <a:lnSpc>
+                <a:spcPct val="104000"/>
+              </a:lnSpc>
+              <a:buFont typeface="Arial" pitchFamily="34" charset="0"/>
+              <a:buChar char="•"/>
+              <a:spcAft>
+                <a:spcPts val="300"/>
+              </a:spcAft>
+            </a:pPr>
+            <a:r>
+              <a:rPr sz="1000" b="0" i="0" u="none">
+                <a:solidFill>
+                  <a:srgbClr val="1A1A1A"/>
+                </a:solidFill>
+                <a:latin typeface="Arial"/>
+                <a:cs typeface="Arial" pitchFamily="34" charset="0"/>
+              </a:rPr>
+              <a:t>Reports out as PDF, Excel or CSV for accreditation files.</a:t>
+            </a:r>
+          </a:p>
+        </p:txBody>
+      </p:sp>
+      <p:sp>
+        <p:nvSpPr>
+          <p:cNvPr id="17413" name="Rounded Rectangle 17412"/>
+          <p:cNvSpPr/>
+          <p:nvPr/>
+        </p:nvSpPr>
+        <p:spPr>
+          <a:xfrm>
+            <a:off x="4224528" y="3968496"/>
+            <a:ext cx="3712463" cy="1920240"/>
+          </a:xfrm>
+          <a:prstGeom prst="roundRect">
+            <a:avLst>
+              <a:gd name="adj" fmla="val 5500"/>
+            </a:avLst>
+          </a:prstGeom>
+          <a:solidFill>
+            <a:srgbClr val="ECF2F9"/>
+          </a:solidFill>
+          <a:ln w="9525">
+            <a:solidFill>
+              <a:srgbClr val="4F81BD"/>
+            </a:solidFill>
+          </a:ln>
+          <a:effectLst/>
+        </p:spPr>
+        <p:style>
+          <a:lnRef idx="1">
+            <a:schemeClr val="accent1"/>
+          </a:lnRef>
+          <a:fillRef idx="3">
+            <a:schemeClr val="accent1"/>
+          </a:fillRef>
+          <a:effectRef idx="2">
+            <a:schemeClr val="accent1"/>
+          </a:effectRef>
+          <a:fontRef idx="minor">
+            <a:schemeClr val="lt1"/>
+          </a:fontRef>
+        </p:style>
+        <p:txBody>
+          <a:bodyPr rtlCol="0" anchor="ctr" wrap="square" lIns="45720" rIns="45720" tIns="22860" bIns="22860"/>
+          <a:lstStyle/>
+          <a:p>
+            <a:pPr algn="ctr"/>
+          </a:p>
+        </p:txBody>
+      </p:sp>
+      <p:sp>
+        <p:nvSpPr>
+          <p:cNvPr id="17414" name="TextBox 17413"/>
+          <p:cNvSpPr txBox="1"/>
+          <p:nvPr/>
+        </p:nvSpPr>
+        <p:spPr>
+          <a:xfrm>
+            <a:off x="4370832" y="4078224"/>
+            <a:ext cx="3419856" cy="1700784"/>
+          </a:xfrm>
+          <a:prstGeom prst="rect">
+            <a:avLst/>
+          </a:prstGeom>
+          <a:noFill/>
+        </p:spPr>
+        <p:txBody>
+          <a:bodyPr wrap="square" lIns="45720" rIns="45720" tIns="22860" bIns="22860"/>
+          <a:lstStyle/>
+          <a:p>
+            <a:pPr algn="l" marL="0" indent="0">
+              <a:lnSpc>
+                <a:spcPct val="102000"/>
+              </a:lnSpc>
+              <a:buNone/>
+              <a:spcAft>
+                <a:spcPts val="500"/>
+              </a:spcAft>
+            </a:pPr>
+            <a:r>
+              <a:rPr sz="1150" b="1" i="0" u="none">
+                <a:solidFill>
+                  <a:srgbClr val="1F497D"/>
+                </a:solidFill>
+                <a:latin typeface="Arial"/>
+                <a:cs typeface="Arial" pitchFamily="34" charset="0"/>
+              </a:rPr>
+              <a:t>Claims we are willing to be measured on</a:t>
+            </a:r>
+          </a:p>
+          <a:p>
+            <a:pPr algn="l" marL="310896" indent="-219456">
+              <a:lnSpc>
+                <a:spcPct val="104000"/>
+              </a:lnSpc>
+              <a:buFont typeface="Arial" pitchFamily="34" charset="0"/>
+              <a:buChar char="•"/>
+              <a:spcAft>
+                <a:spcPts val="300"/>
+              </a:spcAft>
+            </a:pPr>
+            <a:r>
+              <a:rPr sz="1000" b="0" i="0" u="none">
+                <a:solidFill>
+                  <a:srgbClr val="1A1A1A"/>
+                </a:solidFill>
+                <a:latin typeface="Arial"/>
+                <a:cs typeface="Arial" pitchFamily="34" charset="0"/>
+              </a:rPr>
+              <a:t>Agrees with teachers on held-back marking, or it does not ship.</a:t>
+            </a:r>
+          </a:p>
+          <a:p>
+            <a:pPr algn="l" marL="310896" indent="-219456">
+              <a:lnSpc>
+                <a:spcPct val="104000"/>
+              </a:lnSpc>
+              <a:buFont typeface="Arial" pitchFamily="34" charset="0"/>
+              <a:buChar char="•"/>
+              <a:spcAft>
+                <a:spcPts val="300"/>
+              </a:spcAft>
+            </a:pPr>
+            <a:r>
+              <a:rPr sz="1000" b="0" i="0" u="none">
+                <a:solidFill>
+                  <a:srgbClr val="1A1A1A"/>
+                </a:solidFill>
+                <a:latin typeface="Arial"/>
+                <a:cs typeface="Arial" pitchFamily="34" charset="0"/>
+              </a:rPr>
+              <a:t>Under 3% of released marks later overturned.</a:t>
+            </a:r>
+          </a:p>
+          <a:p>
+            <a:pPr algn="l" marL="310896" indent="-219456">
+              <a:lnSpc>
+                <a:spcPct val="104000"/>
+              </a:lnSpc>
+              <a:buFont typeface="Arial" pitchFamily="34" charset="0"/>
+              <a:buChar char="•"/>
+              <a:spcAft>
+                <a:spcPts val="300"/>
+              </a:spcAft>
+            </a:pPr>
+            <a:r>
+              <a:rPr sz="1000" b="0" i="0" u="none">
+                <a:solidFill>
+                  <a:srgbClr val="1A1A1A"/>
+                </a:solidFill>
+                <a:latin typeface="Arial"/>
+                <a:cs typeface="Arial" pitchFamily="34" charset="0"/>
+              </a:rPr>
+              <a:t>A submission marked in under three minutes at the deadline rush.</a:t>
+            </a:r>
+          </a:p>
+          <a:p>
+            <a:pPr algn="l" marL="310896" indent="-219456">
+              <a:lnSpc>
+                <a:spcPct val="104000"/>
+              </a:lnSpc>
+              <a:buFont typeface="Arial" pitchFamily="34" charset="0"/>
+              <a:buChar char="•"/>
+              <a:spcAft>
+                <a:spcPts val="300"/>
+              </a:spcAft>
+            </a:pPr>
+            <a:r>
+              <a:rPr sz="1000" b="0" i="0" u="none">
+                <a:solidFill>
+                  <a:srgbClr val="1A1A1A"/>
+                </a:solidFill>
+                <a:latin typeface="Arial"/>
+                <a:cs typeface="Arial" pitchFamily="34" charset="0"/>
+              </a:rPr>
+              <a:t>Students at risk flagged three weeks before it is too late.</a:t>
+            </a:r>
+          </a:p>
+        </p:txBody>
+      </p:sp>
+      <p:sp>
+        <p:nvSpPr>
+          <p:cNvPr id="17415" name="Rounded Rectangle 17414"/>
+          <p:cNvSpPr/>
+          <p:nvPr/>
+        </p:nvSpPr>
+        <p:spPr>
+          <a:xfrm>
+            <a:off x="8119871" y="3968496"/>
+            <a:ext cx="3712463" cy="1920240"/>
+          </a:xfrm>
+          <a:prstGeom prst="roundRect">
+            <a:avLst>
+              <a:gd name="adj" fmla="val 5500"/>
+            </a:avLst>
+          </a:prstGeom>
+          <a:solidFill>
+            <a:srgbClr val="ECF2F9"/>
+          </a:solidFill>
+          <a:ln w="9525">
+            <a:solidFill>
+              <a:srgbClr val="4F81BD"/>
+            </a:solidFill>
+          </a:ln>
+          <a:effectLst/>
+        </p:spPr>
+        <p:style>
+          <a:lnRef idx="1">
+            <a:schemeClr val="accent1"/>
+          </a:lnRef>
+          <a:fillRef idx="3">
+            <a:schemeClr val="accent1"/>
+          </a:fillRef>
+          <a:effectRef idx="2">
+            <a:schemeClr val="accent1"/>
+          </a:effectRef>
+          <a:fontRef idx="minor">
+            <a:schemeClr val="lt1"/>
+          </a:fontRef>
+        </p:style>
+        <p:txBody>
+          <a:bodyPr rtlCol="0" anchor="ctr" wrap="square" lIns="45720" rIns="45720" tIns="22860" bIns="22860"/>
+          <a:lstStyle/>
+          <a:p>
+            <a:pPr algn="ctr"/>
+          </a:p>
+        </p:txBody>
+      </p:sp>
+      <p:sp>
+        <p:nvSpPr>
+          <p:cNvPr id="17416" name="TextBox 17415"/>
+          <p:cNvSpPr txBox="1"/>
+          <p:nvPr/>
+        </p:nvSpPr>
+        <p:spPr>
+          <a:xfrm>
+            <a:off x="8266175" y="4078224"/>
+            <a:ext cx="3419856" cy="1700784"/>
+          </a:xfrm>
+          <a:prstGeom prst="rect">
+            <a:avLst/>
+          </a:prstGeom>
+          <a:noFill/>
+        </p:spPr>
+        <p:txBody>
+          <a:bodyPr wrap="square" lIns="45720" rIns="45720" tIns="22860" bIns="22860"/>
+          <a:lstStyle/>
+          <a:p>
+            <a:pPr algn="l" marL="0" indent="0">
+              <a:lnSpc>
+                <a:spcPct val="102000"/>
+              </a:lnSpc>
+              <a:buNone/>
+              <a:spcAft>
+                <a:spcPts val="500"/>
+              </a:spcAft>
+            </a:pPr>
+            <a:r>
+              <a:rPr sz="1150" b="1" i="0" u="none">
+                <a:solidFill>
+                  <a:srgbClr val="1F497D"/>
+                </a:solidFill>
+                <a:latin typeface="Arial"/>
+                <a:cs typeface="Arial" pitchFamily="34" charset="0"/>
+              </a:rPr>
+              <a:t>The road from here</a:t>
+            </a:r>
+          </a:p>
+          <a:p>
+            <a:pPr algn="l" marL="310896" indent="-219456">
+              <a:lnSpc>
+                <a:spcPct val="104000"/>
+              </a:lnSpc>
+              <a:buFont typeface="Arial" pitchFamily="34" charset="0"/>
+              <a:buChar char="•"/>
+              <a:spcAft>
+                <a:spcPts val="300"/>
+              </a:spcAft>
+            </a:pPr>
+            <a:r>
+              <a:rPr sz="1000" b="0" i="0" u="none">
+                <a:solidFill>
+                  <a:srgbClr val="1A1A1A"/>
+                </a:solidFill>
+                <a:latin typeface="Arial"/>
+                <a:cs typeface="Arial" pitchFamily="34" charset="0"/>
+              </a:rPr>
+              <a:t>Today: a working prototype, marking a class of 24 end to end.</a:t>
+            </a:r>
+          </a:p>
+          <a:p>
+            <a:pPr algn="l" marL="310896" indent="-219456">
+              <a:lnSpc>
+                <a:spcPct val="104000"/>
+              </a:lnSpc>
+              <a:buFont typeface="Arial" pitchFamily="34" charset="0"/>
+              <a:buChar char="•"/>
+              <a:spcAft>
+                <a:spcPts val="300"/>
+              </a:spcAft>
+            </a:pPr>
+            <a:r>
+              <a:rPr sz="1000" b="0" i="0" u="none">
+                <a:solidFill>
+                  <a:srgbClr val="1A1A1A"/>
+                </a:solidFill>
+                <a:latin typeface="Arial"/>
+                <a:cs typeface="Arial" pitchFamily="34" charset="0"/>
+              </a:rPr>
+              <a:t>Semester 1: the models start learning; about 40% marked without a human.</a:t>
+            </a:r>
+          </a:p>
+          <a:p>
+            <a:pPr algn="l" marL="310896" indent="-219456">
+              <a:lnSpc>
+                <a:spcPct val="104000"/>
+              </a:lnSpc>
+              <a:buFont typeface="Arial" pitchFamily="34" charset="0"/>
+              <a:buChar char="•"/>
+              <a:spcAft>
+                <a:spcPts val="300"/>
+              </a:spcAft>
+            </a:pPr>
+            <a:r>
+              <a:rPr sz="1000" b="0" i="0" u="none">
+                <a:solidFill>
+                  <a:srgbClr val="1A1A1A"/>
+                </a:solidFill>
+                <a:latin typeface="Arial"/>
+                <a:cs typeface="Arial" pitchFamily="34" charset="0"/>
+              </a:rPr>
+              <a:t>Semester 2: about 70%, and the full picture of the course.</a:t>
+            </a:r>
+          </a:p>
+          <a:p>
+            <a:pPr algn="l" marL="310896" indent="-219456">
+              <a:lnSpc>
+                <a:spcPct val="104000"/>
+              </a:lnSpc>
+              <a:buFont typeface="Arial" pitchFamily="34" charset="0"/>
+              <a:buChar char="•"/>
+              <a:spcAft>
+                <a:spcPts val="300"/>
+              </a:spcAft>
+            </a:pPr>
+            <a:r>
+              <a:rPr sz="1000" b="0" i="0" u="none">
+                <a:solidFill>
+                  <a:srgbClr val="1A1A1A"/>
+                </a:solidFill>
+                <a:latin typeface="Arial"/>
+                <a:cs typeface="Arial" pitchFamily="34" charset="0"/>
+              </a:rPr>
+              <a:t>Semester 3: about 85%, steady, and the AI drafting replaced by our own model.</a:t>
+            </a:r>
+          </a:p>
+        </p:txBody>
+      </p:sp>
     </p:spTree>
     <p:extLst>
       <p:ext uri="{BB962C8B-B14F-4D97-AF65-F5344CB8AC3E}">

--- a/presentation/SIH2026-EvalPro-Idea-Presentation.pptx
+++ b/presentation/SIH2026-EvalPro-Idea-Presentation.pptx
@@ -5632,8 +5632,8 @@
         </p:nvSpPr>
         <p:spPr>
           <a:xfrm>
-            <a:off x="329184" y="1920240"/>
-            <a:ext cx="5669280" cy="4617720"/>
+            <a:off x="365760" y="1883664"/>
+            <a:ext cx="6583680" cy="4617720"/>
           </a:xfrm>
           <a:prstGeom prst="rect">
             <a:avLst/>
@@ -5648,192 +5648,160 @@
               <a:lnSpc>
                 <a:spcPct val="112000"/>
               </a:lnSpc>
+              <a:spcAft>
+                <a:spcPts val="1400"/>
+              </a:spcAft>
               <a:buFont typeface="Arial" pitchFamily="34" charset="0"/>
               <a:buChar char="•"/>
+            </a:pPr>
+            <a:r>
+              <a:rPr sz="1350" b="1" i="0" u="none">
+                <a:solidFill>
+                  <a:srgbClr val="1A1A1A"/>
+                </a:solidFill>
+                <a:latin typeface="Arial"/>
+                <a:cs typeface="Arial" pitchFamily="34" charset="0"/>
+              </a:rPr>
+              <a:t>Problem Statement ID – </a:t>
+            </a:r>
+            <a:r>
+              <a:rPr sz="1350" b="0" i="0" u="none">
+                <a:solidFill>
+                  <a:srgbClr val="1F497D"/>
+                </a:solidFill>
+                <a:latin typeface="Arial"/>
+                <a:cs typeface="Arial" pitchFamily="34" charset="0"/>
+              </a:rPr>
+              <a:t>16</a:t>
+            </a:r>
+            <a:endParaRPr lang="en-US" dirty="0"/>
+          </a:p>
+          <a:p>
+            <a:pPr algn="l" marL="219456" indent="-219456">
+              <a:lnSpc>
+                <a:spcPct val="112000"/>
+              </a:lnSpc>
               <a:spcAft>
                 <a:spcPts val="1400"/>
               </a:spcAft>
-            </a:pPr>
-            <a:r>
-              <a:rPr sz="1550" b="1" i="0" u="none">
-                <a:solidFill>
-                  <a:srgbClr val="1A1A1A"/>
-                </a:solidFill>
-                <a:latin typeface="Arial"/>
-                <a:cs typeface="Arial" pitchFamily="34" charset="0"/>
-              </a:rPr>
-              <a:t>Problem Statement ID – </a:t>
-            </a:r>
-            <a:r>
-              <a:rPr sz="1550" b="0" i="0" u="none">
-                <a:solidFill>
-                  <a:srgbClr val="1F497D"/>
-                </a:solidFill>
-                <a:latin typeface="Arial"/>
-                <a:cs typeface="Arial" pitchFamily="34" charset="0"/>
-              </a:rPr>
-              <a:t>[Problem Statement ID from the SIH portal]</a:t>
-            </a:r>
-            <a:endParaRPr lang="en-US" dirty="0"/>
-          </a:p>
-          <a:p>
-            <a:pPr algn="l" marL="219456" indent="-219456">
-              <a:lnSpc>
-                <a:spcPct val="112000"/>
-              </a:lnSpc>
               <a:buFont typeface="Arial" pitchFamily="34" charset="0"/>
               <a:buChar char="•"/>
+            </a:pPr>
+            <a:r>
+              <a:rPr sz="1350" b="1" i="0" u="none">
+                <a:solidFill>
+                  <a:srgbClr val="1A1A1A"/>
+                </a:solidFill>
+                <a:latin typeface="Arial"/>
+                <a:cs typeface="Arial" pitchFamily="34" charset="0"/>
+              </a:rPr>
+              <a:t>Problem Statement Title – </a:t>
+            </a:r>
+            <a:r>
+              <a:rPr sz="1350" b="0" i="0" u="none">
+                <a:solidFill>
+                  <a:srgbClr val="1F497D"/>
+                </a:solidFill>
+                <a:latin typeface="Arial"/>
+                <a:cs typeface="Arial" pitchFamily="34" charset="0"/>
+              </a:rPr>
+              <a:t>Automated Programming Lab Evaluation Platform</a:t>
+            </a:r>
+          </a:p>
+          <a:p>
+            <a:pPr algn="l" marL="219456" indent="-219456">
+              <a:lnSpc>
+                <a:spcPct val="112000"/>
+              </a:lnSpc>
               <a:spcAft>
                 <a:spcPts val="1400"/>
               </a:spcAft>
-            </a:pPr>
-            <a:r>
-              <a:rPr sz="1550" b="1" i="0" u="none">
-                <a:solidFill>
-                  <a:srgbClr val="1A1A1A"/>
-                </a:solidFill>
-                <a:latin typeface="Arial"/>
-                <a:cs typeface="Arial" pitchFamily="34" charset="0"/>
-              </a:rPr>
-              <a:t>Problem Statement Title – </a:t>
-            </a:r>
-            <a:r>
-              <a:rPr sz="1550" b="0" i="0" u="none">
-                <a:solidFill>
-                  <a:srgbClr val="1F497D"/>
-                </a:solidFill>
-                <a:latin typeface="Arial"/>
-                <a:cs typeface="Arial" pitchFamily="34" charset="0"/>
-              </a:rPr>
-              <a:t>Automated Programming Lab Evaluation Platform</a:t>
-            </a:r>
-          </a:p>
-          <a:p>
-            <a:pPr algn="l" marL="219456" indent="-219456">
-              <a:lnSpc>
-                <a:spcPct val="112000"/>
-              </a:lnSpc>
               <a:buFont typeface="Arial" pitchFamily="34" charset="0"/>
               <a:buChar char="•"/>
+            </a:pPr>
+            <a:r>
+              <a:rPr sz="1350" b="1" i="0" u="none">
+                <a:solidFill>
+                  <a:srgbClr val="1A1A1A"/>
+                </a:solidFill>
+                <a:latin typeface="Arial"/>
+                <a:cs typeface="Arial" pitchFamily="34" charset="0"/>
+              </a:rPr>
+              <a:t>Theme – </a:t>
+            </a:r>
+            <a:r>
+              <a:rPr sz="1350" b="0" i="0" u="none">
+                <a:solidFill>
+                  <a:srgbClr val="1F497D"/>
+                </a:solidFill>
+                <a:latin typeface="Arial"/>
+                <a:cs typeface="Arial" pitchFamily="34" charset="0"/>
+              </a:rPr>
+              <a:t>Smart Education</a:t>
+            </a:r>
+          </a:p>
+          <a:p>
+            <a:pPr algn="l" marL="219456" indent="-219456">
+              <a:lnSpc>
+                <a:spcPct val="112000"/>
+              </a:lnSpc>
               <a:spcAft>
                 <a:spcPts val="1400"/>
               </a:spcAft>
-            </a:pPr>
-            <a:r>
-              <a:rPr sz="1550" b="1" i="0" u="none">
-                <a:solidFill>
-                  <a:srgbClr val="1A1A1A"/>
-                </a:solidFill>
-                <a:latin typeface="Arial"/>
-                <a:cs typeface="Arial" pitchFamily="34" charset="0"/>
-              </a:rPr>
-              <a:t>Theme – </a:t>
-            </a:r>
-            <a:r>
-              <a:rPr sz="1550" b="0" i="0" u="none">
-                <a:solidFill>
-                  <a:srgbClr val="1F497D"/>
-                </a:solidFill>
-                <a:latin typeface="Arial"/>
-                <a:cs typeface="Arial" pitchFamily="34" charset="0"/>
-              </a:rPr>
-              <a:t>Smart Education</a:t>
-            </a:r>
-          </a:p>
-          <a:p>
-            <a:pPr algn="l" marL="219456" indent="-219456">
-              <a:lnSpc>
-                <a:spcPct val="112000"/>
-              </a:lnSpc>
               <a:buFont typeface="Arial" pitchFamily="34" charset="0"/>
               <a:buChar char="•"/>
+            </a:pPr>
+            <a:r>
+              <a:rPr sz="1350" b="1" i="0" u="none">
+                <a:solidFill>
+                  <a:srgbClr val="1A1A1A"/>
+                </a:solidFill>
+                <a:latin typeface="Arial"/>
+                <a:cs typeface="Arial" pitchFamily="34" charset="0"/>
+              </a:rPr>
+              <a:t>PS Category – </a:t>
+            </a:r>
+            <a:r>
+              <a:rPr sz="1350" b="0" i="0" u="none">
+                <a:solidFill>
+                  <a:srgbClr val="1F497D"/>
+                </a:solidFill>
+                <a:latin typeface="Arial"/>
+                <a:cs typeface="Arial" pitchFamily="34" charset="0"/>
+              </a:rPr>
+              <a:t>Software</a:t>
+            </a:r>
+          </a:p>
+          <a:p>
+            <a:pPr algn="l" marL="219456" indent="-219456">
+              <a:lnSpc>
+                <a:spcPct val="112000"/>
+              </a:lnSpc>
               <a:spcAft>
                 <a:spcPts val="1400"/>
               </a:spcAft>
-            </a:pPr>
-            <a:r>
-              <a:rPr sz="1550" b="1" i="0" u="none">
-                <a:solidFill>
-                  <a:srgbClr val="1A1A1A"/>
-                </a:solidFill>
-                <a:latin typeface="Arial"/>
-                <a:cs typeface="Arial" pitchFamily="34" charset="0"/>
-              </a:rPr>
-              <a:t>PS Category – </a:t>
-            </a:r>
-            <a:r>
-              <a:rPr sz="1550" b="0" i="0" u="none">
-                <a:solidFill>
-                  <a:srgbClr val="1F497D"/>
-                </a:solidFill>
-                <a:latin typeface="Arial"/>
-                <a:cs typeface="Arial" pitchFamily="34" charset="0"/>
-              </a:rPr>
-              <a:t>Software</a:t>
-            </a:r>
-          </a:p>
-          <a:p>
-            <a:pPr algn="l" marL="219456" indent="-219456">
-              <a:lnSpc>
-                <a:spcPct val="112000"/>
-              </a:lnSpc>
               <a:buFont typeface="Arial" pitchFamily="34" charset="0"/>
               <a:buChar char="•"/>
-              <a:spcAft>
-                <a:spcPts val="1400"/>
-              </a:spcAft>
-            </a:pPr>
-            <a:r>
-              <a:rPr sz="1550" b="1" i="0" u="none">
+            </a:pPr>
+            <a:r>
+              <a:rPr sz="1350" b="1" i="0" u="none">
                 <a:solidFill>
                   <a:srgbClr val="1A1A1A"/>
                 </a:solidFill>
                 <a:latin typeface="Arial"/>
                 <a:cs typeface="Arial" pitchFamily="34" charset="0"/>
               </a:rPr>
-              <a:t>Team ID – </a:t>
-            </a:r>
-            <a:r>
-              <a:rPr sz="1550" b="0" i="0" u="none">
+              <a:t>Team Name – </a:t>
+            </a:r>
+            <a:r>
+              <a:rPr sz="1350" b="0" i="0" u="none">
                 <a:solidFill>
                   <a:srgbClr val="1F497D"/>
                 </a:solidFill>
                 <a:latin typeface="Arial"/>
                 <a:cs typeface="Arial" pitchFamily="34" charset="0"/>
               </a:rPr>
-              <a:t>[Team ID from the SIH portal]</a:t>
-            </a:r>
-          </a:p>
-          <a:p>
-            <a:pPr algn="l" marL="219456" indent="-219456">
-              <a:lnSpc>
-                <a:spcPct val="112000"/>
-              </a:lnSpc>
-              <a:buFont typeface="Arial" pitchFamily="34" charset="0"/>
-              <a:buChar char="•"/>
-              <a:spcAft>
-                <a:spcPts val="1400"/>
-              </a:spcAft>
-            </a:pPr>
-            <a:r>
-              <a:rPr sz="1550" b="1" i="0" u="none">
-                <a:solidFill>
-                  <a:srgbClr val="1A1A1A"/>
-                </a:solidFill>
-                <a:latin typeface="Arial"/>
-                <a:cs typeface="Arial" pitchFamily="34" charset="0"/>
-              </a:rPr>
-              <a:t>Team Name (Registered on portal) – </a:t>
-            </a:r>
-            <a:r>
-              <a:rPr sz="1550" b="0" i="0" u="none">
-                <a:solidFill>
-                  <a:srgbClr val="1F497D"/>
-                </a:solidFill>
-                <a:latin typeface="Arial"/>
-                <a:cs typeface="Arial" pitchFamily="34" charset="0"/>
-              </a:rPr>
-              <a:t>[Team Name as registered on the portal]</a:t>
+              <a:t>Nullcheck</a:t>
             </a:r>
           </a:p>
         </p:txBody>
@@ -5963,8 +5931,8 @@
         </p:nvSpPr>
         <p:spPr>
           <a:xfrm>
-            <a:off x="1719072" y="201168"/>
-            <a:ext cx="7973568" cy="731520"/>
+            <a:off x="365760" y="219456"/>
+            <a:ext cx="9509760" cy="713232"/>
           </a:xfrm>
         </p:spPr>
         <p:txBody>
@@ -6022,14 +5990,14 @@
               <a:lnSpc>
                 <a:spcPct val="100000"/>
               </a:lnSpc>
+              <a:spcAft>
+                <a:spcPts val="400"/>
+              </a:spcAft>
               <a:buFont typeface="Wingdings" pitchFamily="34" charset="0"/>
               <a:buChar char="v"/>
-              <a:spcAft>
-                <a:spcPts val="1100"/>
-              </a:spcAft>
-            </a:pPr>
-            <a:r>
-              <a:rPr sz="2000" b="1" i="0" u="sng">
+            </a:pPr>
+            <a:r>
+              <a:rPr sz="1800" b="1" i="0" u="sng">
                 <a:solidFill>
                   <a:srgbClr val="1F497D"/>
                 </a:solidFill>
@@ -6051,17 +6019,17 @@
               <a:lnSpc>
                 <a:spcPct val="100000"/>
               </a:lnSpc>
+              <a:spcBef>
+                <a:spcPts val="500"/>
+              </a:spcBef>
+              <a:spcAft>
+                <a:spcPts val="600"/>
+              </a:spcAft>
               <a:buFont typeface="Wingdings" pitchFamily="34" charset="0"/>
               <a:buChar char="v"/>
-              <a:spcBef>
-                <a:spcPts val="2000"/>
-              </a:spcBef>
-              <a:spcAft>
-                <a:spcPts val="600"/>
-              </a:spcAft>
-            </a:pPr>
-            <a:r>
-              <a:rPr sz="1800" b="1" i="0" u="sng">
+            </a:pPr>
+            <a:r>
+              <a:rPr sz="1600" b="1" i="0" u="sng">
                 <a:solidFill>
                   <a:srgbClr val="1F497D"/>
                 </a:solidFill>
@@ -6074,16 +6042,16 @@
           <a:p>
             <a:pPr algn="l" marL="329184" indent="-219456">
               <a:lnSpc>
-                <a:spcPct val="112000"/>
-              </a:lnSpc>
+                <a:spcPct val="106000"/>
+              </a:lnSpc>
+              <a:spcAft>
+                <a:spcPts val="100"/>
+              </a:spcAft>
               <a:buFont typeface="Arial" pitchFamily="34" charset="0"/>
               <a:buChar char="•"/>
-              <a:spcAft>
-                <a:spcPts val="600"/>
-              </a:spcAft>
-            </a:pPr>
-            <a:r>
-              <a:rPr sz="1600" b="0" i="0" u="none">
+            </a:pPr>
+            <a:r>
+              <a:rPr sz="1400" b="0" i="0" u="none">
                 <a:solidFill>
                   <a:srgbClr val="1A1A1A"/>
                 </a:solidFill>
@@ -6096,16 +6064,16 @@
           <a:p>
             <a:pPr algn="l" marL="329184" indent="-219456">
               <a:lnSpc>
-                <a:spcPct val="112000"/>
-              </a:lnSpc>
+                <a:spcPct val="106000"/>
+              </a:lnSpc>
+              <a:spcAft>
+                <a:spcPts val="100"/>
+              </a:spcAft>
               <a:buFont typeface="Arial" pitchFamily="34" charset="0"/>
               <a:buChar char="•"/>
-              <a:spcAft>
-                <a:spcPts val="600"/>
-              </a:spcAft>
-            </a:pPr>
-            <a:r>
-              <a:rPr sz="1600" b="0" i="0" u="none">
+            </a:pPr>
+            <a:r>
+              <a:rPr sz="1400" b="0" i="0" u="none">
                 <a:solidFill>
                   <a:srgbClr val="1A1A1A"/>
                 </a:solidFill>
@@ -6118,16 +6086,16 @@
           <a:p>
             <a:pPr algn="l" marL="329184" indent="-219456">
               <a:lnSpc>
-                <a:spcPct val="112000"/>
-              </a:lnSpc>
+                <a:spcPct val="106000"/>
+              </a:lnSpc>
+              <a:spcAft>
+                <a:spcPts val="100"/>
+              </a:spcAft>
               <a:buFont typeface="Arial" pitchFamily="34" charset="0"/>
               <a:buChar char="•"/>
-              <a:spcAft>
-                <a:spcPts val="600"/>
-              </a:spcAft>
-            </a:pPr>
-            <a:r>
-              <a:rPr sz="1600" b="0" i="0" u="none">
+            </a:pPr>
+            <a:r>
+              <a:rPr sz="1400" b="0" i="0" u="none">
                 <a:solidFill>
                   <a:srgbClr val="1A1A1A"/>
                 </a:solidFill>
@@ -6140,41 +6108,41 @@
           <a:p>
             <a:pPr algn="l" marL="329184" indent="-219456">
               <a:lnSpc>
-                <a:spcPct val="112000"/>
-              </a:lnSpc>
+                <a:spcPct val="106000"/>
+              </a:lnSpc>
+              <a:spcAft>
+                <a:spcPts val="100"/>
+              </a:spcAft>
               <a:buFont typeface="Arial" pitchFamily="34" charset="0"/>
               <a:buChar char="•"/>
+            </a:pPr>
+            <a:r>
+              <a:rPr sz="1400" b="0" i="0" u="none">
+                <a:solidFill>
+                  <a:srgbClr val="1A1A1A"/>
+                </a:solidFill>
+                <a:latin typeface="Arial"/>
+                <a:cs typeface="Arial" pitchFamily="34" charset="0"/>
+              </a:rPr>
+              <a:t>Every mark is tied to a topic, so a term of marks becomes a picture of what a student understands.</a:t>
+            </a:r>
+          </a:p>
+          <a:p>
+            <a:pPr algn="l" marL="219456" indent="-219456">
+              <a:lnSpc>
+                <a:spcPct val="100000"/>
+              </a:lnSpc>
+              <a:spcBef>
+                <a:spcPts val="500"/>
+              </a:spcBef>
               <a:spcAft>
                 <a:spcPts val="600"/>
               </a:spcAft>
-            </a:pPr>
-            <a:r>
-              <a:rPr sz="1600" b="0" i="0" u="none">
-                <a:solidFill>
-                  <a:srgbClr val="1A1A1A"/>
-                </a:solidFill>
-                <a:latin typeface="Arial"/>
-                <a:cs typeface="Arial" pitchFamily="34" charset="0"/>
-              </a:rPr>
-              <a:t>Every mark is tied to a topic, so a term of marks becomes a picture of what a student understands.</a:t>
-            </a:r>
-          </a:p>
-          <a:p>
-            <a:pPr algn="l" marL="219456" indent="-219456">
-              <a:lnSpc>
-                <a:spcPct val="100000"/>
-              </a:lnSpc>
               <a:buFont typeface="Wingdings" pitchFamily="34" charset="0"/>
               <a:buChar char="v"/>
-              <a:spcBef>
-                <a:spcPts val="2000"/>
-              </a:spcBef>
-              <a:spcAft>
-                <a:spcPts val="600"/>
-              </a:spcAft>
-            </a:pPr>
-            <a:r>
-              <a:rPr sz="1800" b="1" i="0" u="sng">
+            </a:pPr>
+            <a:r>
+              <a:rPr sz="1600" b="1" i="0" u="sng">
                 <a:solidFill>
                   <a:srgbClr val="1F497D"/>
                 </a:solidFill>
@@ -6187,16 +6155,16 @@
           <a:p>
             <a:pPr algn="l" marL="329184" indent="-219456">
               <a:lnSpc>
-                <a:spcPct val="112000"/>
-              </a:lnSpc>
+                <a:spcPct val="106000"/>
+              </a:lnSpc>
+              <a:spcAft>
+                <a:spcPts val="100"/>
+              </a:spcAft>
               <a:buFont typeface="Arial" pitchFamily="34" charset="0"/>
               <a:buChar char="•"/>
-              <a:spcAft>
-                <a:spcPts val="600"/>
-              </a:spcAft>
-            </a:pPr>
-            <a:r>
-              <a:rPr sz="1600" b="0" i="0" u="none">
+            </a:pPr>
+            <a:r>
+              <a:rPr sz="1400" b="0" i="0" u="none">
                 <a:solidFill>
                   <a:srgbClr val="1A1A1A"/>
                 </a:solidFill>
@@ -6209,16 +6177,16 @@
           <a:p>
             <a:pPr algn="l" marL="329184" indent="-219456">
               <a:lnSpc>
-                <a:spcPct val="112000"/>
-              </a:lnSpc>
+                <a:spcPct val="106000"/>
+              </a:lnSpc>
+              <a:spcAft>
+                <a:spcPts val="100"/>
+              </a:spcAft>
               <a:buFont typeface="Arial" pitchFamily="34" charset="0"/>
               <a:buChar char="•"/>
-              <a:spcAft>
-                <a:spcPts val="600"/>
-              </a:spcAft>
-            </a:pPr>
-            <a:r>
-              <a:rPr sz="1600" b="0" i="0" u="none">
+            </a:pPr>
+            <a:r>
+              <a:rPr sz="1400" b="0" i="0" u="none">
                 <a:solidFill>
                   <a:srgbClr val="1A1A1A"/>
                 </a:solidFill>
@@ -6231,16 +6199,16 @@
           <a:p>
             <a:pPr algn="l" marL="329184" indent="-219456">
               <a:lnSpc>
-                <a:spcPct val="112000"/>
-              </a:lnSpc>
+                <a:spcPct val="106000"/>
+              </a:lnSpc>
+              <a:spcAft>
+                <a:spcPts val="100"/>
+              </a:spcAft>
               <a:buFont typeface="Arial" pitchFamily="34" charset="0"/>
               <a:buChar char="•"/>
-              <a:spcAft>
-                <a:spcPts val="600"/>
-              </a:spcAft>
-            </a:pPr>
-            <a:r>
-              <a:rPr sz="1600" b="0" i="0" u="none">
+            </a:pPr>
+            <a:r>
+              <a:rPr sz="1400" b="0" i="0" u="none">
                 <a:solidFill>
                   <a:srgbClr val="1A1A1A"/>
                 </a:solidFill>
@@ -6253,41 +6221,41 @@
           <a:p>
             <a:pPr algn="l" marL="329184" indent="-219456">
               <a:lnSpc>
-                <a:spcPct val="112000"/>
-              </a:lnSpc>
+                <a:spcPct val="106000"/>
+              </a:lnSpc>
+              <a:spcAft>
+                <a:spcPts val="100"/>
+              </a:spcAft>
               <a:buFont typeface="Arial" pitchFamily="34" charset="0"/>
               <a:buChar char="•"/>
+            </a:pPr>
+            <a:r>
+              <a:rPr sz="1400" b="0" i="0" u="none">
+                <a:solidFill>
+                  <a:srgbClr val="1A1A1A"/>
+                </a:solidFill>
+                <a:latin typeface="Arial"/>
+                <a:cs typeface="Arial" pitchFamily="34" charset="0"/>
+              </a:rPr>
+              <a:t>A student who thinks a mark is wrong can challenge it, and a teacher answers.</a:t>
+            </a:r>
+          </a:p>
+          <a:p>
+            <a:pPr algn="l" marL="219456" indent="-219456">
+              <a:lnSpc>
+                <a:spcPct val="100000"/>
+              </a:lnSpc>
+              <a:spcBef>
+                <a:spcPts val="500"/>
+              </a:spcBef>
               <a:spcAft>
                 <a:spcPts val="600"/>
               </a:spcAft>
-            </a:pPr>
-            <a:r>
-              <a:rPr sz="1600" b="0" i="0" u="none">
-                <a:solidFill>
-                  <a:srgbClr val="1A1A1A"/>
-                </a:solidFill>
-                <a:latin typeface="Arial"/>
-                <a:cs typeface="Arial" pitchFamily="34" charset="0"/>
-              </a:rPr>
-              <a:t>A student who thinks a mark is wrong can challenge it, and a teacher answers.</a:t>
-            </a:r>
-          </a:p>
-          <a:p>
-            <a:pPr algn="l" marL="219456" indent="-219456">
-              <a:lnSpc>
-                <a:spcPct val="100000"/>
-              </a:lnSpc>
               <a:buFont typeface="Wingdings" pitchFamily="34" charset="0"/>
               <a:buChar char="v"/>
-              <a:spcBef>
-                <a:spcPts val="2000"/>
-              </a:spcBef>
-              <a:spcAft>
-                <a:spcPts val="600"/>
-              </a:spcAft>
-            </a:pPr>
-            <a:r>
-              <a:rPr sz="1800" b="1" i="0" u="sng">
+            </a:pPr>
+            <a:r>
+              <a:rPr sz="1600" b="1" i="0" u="sng">
                 <a:solidFill>
                   <a:srgbClr val="1F497D"/>
                 </a:solidFill>
@@ -6300,16 +6268,16 @@
           <a:p>
             <a:pPr algn="l" marL="329184" indent="-219456">
               <a:lnSpc>
-                <a:spcPct val="112000"/>
-              </a:lnSpc>
+                <a:spcPct val="106000"/>
+              </a:lnSpc>
+              <a:spcAft>
+                <a:spcPts val="100"/>
+              </a:spcAft>
               <a:buFont typeface="Arial" pitchFamily="34" charset="0"/>
               <a:buChar char="•"/>
-              <a:spcAft>
-                <a:spcPts val="600"/>
-              </a:spcAft>
-            </a:pPr>
-            <a:r>
-              <a:rPr sz="1600" b="0" i="0" u="none">
+            </a:pPr>
+            <a:r>
+              <a:rPr sz="1400" b="0" i="0" u="none">
                 <a:solidFill>
                   <a:srgbClr val="1A1A1A"/>
                 </a:solidFill>
@@ -6322,16 +6290,16 @@
           <a:p>
             <a:pPr algn="l" marL="329184" indent="-219456">
               <a:lnSpc>
-                <a:spcPct val="112000"/>
-              </a:lnSpc>
+                <a:spcPct val="106000"/>
+              </a:lnSpc>
+              <a:spcAft>
+                <a:spcPts val="100"/>
+              </a:spcAft>
               <a:buFont typeface="Arial" pitchFamily="34" charset="0"/>
               <a:buChar char="•"/>
-              <a:spcAft>
-                <a:spcPts val="600"/>
-              </a:spcAft>
-            </a:pPr>
-            <a:r>
-              <a:rPr sz="1600" b="0" i="0" u="none">
+            </a:pPr>
+            <a:r>
+              <a:rPr sz="1400" b="0" i="0" u="none">
                 <a:solidFill>
                   <a:srgbClr val="1A1A1A"/>
                 </a:solidFill>
@@ -6344,16 +6312,16 @@
           <a:p>
             <a:pPr algn="l" marL="329184" indent="-219456">
               <a:lnSpc>
-                <a:spcPct val="112000"/>
-              </a:lnSpc>
+                <a:spcPct val="106000"/>
+              </a:lnSpc>
+              <a:spcAft>
+                <a:spcPts val="100"/>
+              </a:spcAft>
               <a:buFont typeface="Arial" pitchFamily="34" charset="0"/>
               <a:buChar char="•"/>
-              <a:spcAft>
-                <a:spcPts val="600"/>
-              </a:spcAft>
-            </a:pPr>
-            <a:r>
-              <a:rPr sz="1600" b="0" i="0" u="none">
+            </a:pPr>
+            <a:r>
+              <a:rPr sz="1400" b="0" i="0" u="none">
                 <a:solidFill>
                   <a:srgbClr val="1A1A1A"/>
                 </a:solidFill>
@@ -6366,16 +6334,16 @@
           <a:p>
             <a:pPr algn="l" marL="329184" indent="-219456">
               <a:lnSpc>
-                <a:spcPct val="112000"/>
-              </a:lnSpc>
+                <a:spcPct val="106000"/>
+              </a:lnSpc>
+              <a:spcAft>
+                <a:spcPts val="100"/>
+              </a:spcAft>
               <a:buFont typeface="Arial" pitchFamily="34" charset="0"/>
               <a:buChar char="•"/>
-              <a:spcAft>
-                <a:spcPts val="600"/>
-              </a:spcAft>
-            </a:pPr>
-            <a:r>
-              <a:rPr sz="1600" b="0" i="0" u="none">
+            </a:pPr>
+            <a:r>
+              <a:rPr sz="1400" b="0" i="0" u="none">
                 <a:solidFill>
                   <a:srgbClr val="1A1A1A"/>
                 </a:solidFill>
@@ -6388,16 +6356,16 @@
           <a:p>
             <a:pPr algn="l" marL="329184" indent="-219456">
               <a:lnSpc>
-                <a:spcPct val="112000"/>
-              </a:lnSpc>
+                <a:spcPct val="106000"/>
+              </a:lnSpc>
+              <a:spcAft>
+                <a:spcPts val="100"/>
+              </a:spcAft>
               <a:buFont typeface="Arial" pitchFamily="34" charset="0"/>
               <a:buChar char="•"/>
-              <a:spcAft>
-                <a:spcPts val="600"/>
-              </a:spcAft>
-            </a:pPr>
-            <a:r>
-              <a:rPr sz="1600" b="0" i="0" u="none">
+            </a:pPr>
+            <a:r>
+              <a:rPr sz="1400" b="0" i="0" u="none">
                 <a:solidFill>
                   <a:srgbClr val="1A1A1A"/>
                 </a:solidFill>
@@ -6410,16 +6378,16 @@
           <a:p>
             <a:pPr algn="l" marL="329184" indent="-219456">
               <a:lnSpc>
-                <a:spcPct val="112000"/>
-              </a:lnSpc>
+                <a:spcPct val="106000"/>
+              </a:lnSpc>
+              <a:spcAft>
+                <a:spcPts val="100"/>
+              </a:spcAft>
               <a:buFont typeface="Arial" pitchFamily="34" charset="0"/>
               <a:buChar char="•"/>
-              <a:spcAft>
-                <a:spcPts val="600"/>
-              </a:spcAft>
-            </a:pPr>
-            <a:r>
-              <a:rPr sz="1600" b="0" i="0" u="none">
+            </a:pPr>
+            <a:r>
+              <a:rPr sz="1400" b="0" i="0" u="none">
                 <a:solidFill>
                   <a:srgbClr val="1A1A1A"/>
                 </a:solidFill>
@@ -6460,96 +6428,6 @@
                 <a:schemeClr val="bg1"/>
               </a:solidFill>
             </a:endParaRPr>
-          </a:p>
-        </p:txBody>
-      </p:sp>
-      <p:sp>
-        <p:nvSpPr>
-          <p:cNvPr id="7" name="Footer Placeholder 6"/>
-          <p:cNvSpPr>
-            <a:spLocks noGrp="1"/>
-          </p:cNvSpPr>
-          <p:nvPr>
-            <p:ph type="ftr" sz="quarter" idx="11"/>
-          </p:nvPr>
-        </p:nvSpPr>
-        <p:spPr>
-          <a:xfrm>
-            <a:off x="4648200" y="6356353"/>
-            <a:ext cx="3204000" cy="365125"/>
-          </a:xfrm>
-        </p:spPr>
-        <p:txBody>
-          <a:bodyPr/>
-          <a:lstStyle/>
-          <a:p>
-            <a:pPr>
-              <a:defRPr/>
-            </a:pPr>
-            <a:r>
-              <a:rPr lang="en-US">
-                <a:solidFill>
-                  <a:schemeClr val="bg1"/>
-                </a:solidFill>
-              </a:rPr>
-              <a:t>@SIH Idea submission- Template</a:t>
-            </a:r>
-            <a:endParaRPr lang="en-US" dirty="0">
-              <a:solidFill>
-                <a:schemeClr val="bg1"/>
-              </a:solidFill>
-            </a:endParaRPr>
-          </a:p>
-        </p:txBody>
-      </p:sp>
-      <p:sp>
-        <p:nvSpPr>
-          <p:cNvPr id="10" name="Oval 9" descr="Your startup LOGO">
-            <a:extLst>
-              <a:ext uri="{FF2B5EF4-FFF2-40B4-BE49-F238E27FC236}">
-                <a16:creationId xmlns:a16="http://schemas.microsoft.com/office/drawing/2014/main" id="{5DBCE864-823D-4A13-9607-5DA1F0ED5FB8}"/>
-              </a:ext>
-              <a:ext uri="{C183D7F6-B498-43B3-948B-1728B52AA6E4}">
-                <adec:decorative xmlns:adec="http://schemas.microsoft.com/office/drawing/2017/decorative" xmlns="" val="0"/>
-              </a:ext>
-            </a:extLst>
-          </p:cNvPr>
-          <p:cNvSpPr/>
-          <p:nvPr/>
-        </p:nvSpPr>
-        <p:spPr>
-          <a:xfrm>
-            <a:off x="329773" y="252246"/>
-            <a:ext cx="1251857" cy="807334"/>
-          </a:xfrm>
-          <a:prstGeom prst="ellipse">
-            <a:avLst/>
-          </a:prstGeom>
-        </p:spPr>
-        <p:style>
-          <a:lnRef idx="2">
-            <a:schemeClr val="accent4"/>
-          </a:lnRef>
-          <a:fillRef idx="1">
-            <a:schemeClr val="lt1"/>
-          </a:fillRef>
-          <a:effectRef idx="0">
-            <a:schemeClr val="accent4"/>
-          </a:effectRef>
-          <a:fontRef idx="minor">
-            <a:schemeClr val="dk1"/>
-          </a:fontRef>
-        </p:style>
-        <p:txBody>
-          <a:bodyPr rtlCol="0" anchor="ctr"/>
-          <a:lstStyle/>
-          <a:p>
-            <a:pPr algn="ctr"/>
-            <a:r>
-              <a:rPr lang="en-US" dirty="0"/>
-              <a:t>Your Team Name</a:t>
-            </a:r>
-            <a:endParaRPr lang="en-IN" dirty="0"/>
           </a:p>
         </p:txBody>
       </p:sp>
@@ -6731,11 +6609,11 @@
               <a:lnSpc>
                 <a:spcPct val="100000"/>
               </a:lnSpc>
+              <a:spcAft>
+                <a:spcPts val="500"/>
+              </a:spcAft>
               <a:buFont typeface="Wingdings" pitchFamily="34" charset="0"/>
               <a:buChar char="v"/>
-              <a:spcAft>
-                <a:spcPts val="500"/>
-              </a:spcAft>
             </a:pPr>
             <a:r>
               <a:rPr sz="1400" b="1" i="0" u="sng">
@@ -6753,55 +6631,55 @@
               <a:lnSpc>
                 <a:spcPct val="104000"/>
               </a:lnSpc>
+              <a:spcAft>
+                <a:spcPts val="200"/>
+              </a:spcAft>
               <a:buFont typeface="Arial" pitchFamily="34" charset="0"/>
               <a:buChar char="•"/>
+            </a:pPr>
+            <a:r>
+              <a:rPr sz="1250" b="0" i="0" u="none">
+                <a:solidFill>
+                  <a:srgbClr val="1A1A1A"/>
+                </a:solidFill>
+                <a:latin typeface="Arial"/>
+                <a:cs typeface="Arial" pitchFamily="34" charset="0"/>
+              </a:rPr>
+              <a:t>Python and FastAPI, with a plain web interface that runs in any browser.</a:t>
+            </a:r>
+          </a:p>
+          <a:p>
+            <a:pPr algn="l" marL="329184" indent="-219456">
+              <a:lnSpc>
+                <a:spcPct val="104000"/>
+              </a:lnSpc>
               <a:spcAft>
                 <a:spcPts val="200"/>
               </a:spcAft>
-            </a:pPr>
-            <a:r>
-              <a:rPr sz="1250" b="0" i="0" u="none">
-                <a:solidFill>
-                  <a:srgbClr val="1A1A1A"/>
-                </a:solidFill>
-                <a:latin typeface="Arial"/>
-                <a:cs typeface="Arial" pitchFamily="34" charset="0"/>
-              </a:rPr>
-              <a:t>Python and FastAPI, with a plain web interface that runs in any browser.</a:t>
-            </a:r>
-          </a:p>
-          <a:p>
-            <a:pPr algn="l" marL="329184" indent="-219456">
-              <a:lnSpc>
-                <a:spcPct val="104000"/>
-              </a:lnSpc>
               <a:buFont typeface="Arial" pitchFamily="34" charset="0"/>
               <a:buChar char="•"/>
+            </a:pPr>
+            <a:r>
+              <a:rPr sz="1250" b="0" i="0" u="none">
+                <a:solidFill>
+                  <a:srgbClr val="1A1A1A"/>
+                </a:solidFill>
+                <a:latin typeface="Arial"/>
+                <a:cs typeface="Arial" pitchFamily="34" charset="0"/>
+              </a:rPr>
+              <a:t>Student programs run inside a sealed sandbox, away from college systems.</a:t>
+            </a:r>
+          </a:p>
+          <a:p>
+            <a:pPr algn="l" marL="329184" indent="-219456">
+              <a:lnSpc>
+                <a:spcPct val="104000"/>
+              </a:lnSpc>
               <a:spcAft>
                 <a:spcPts val="200"/>
               </a:spcAft>
-            </a:pPr>
-            <a:r>
-              <a:rPr sz="1250" b="0" i="0" u="none">
-                <a:solidFill>
-                  <a:srgbClr val="1A1A1A"/>
-                </a:solidFill>
-                <a:latin typeface="Arial"/>
-                <a:cs typeface="Arial" pitchFamily="34" charset="0"/>
-              </a:rPr>
-              <a:t>Student programs run inside a sealed sandbox, away from college systems.</a:t>
-            </a:r>
-          </a:p>
-          <a:p>
-            <a:pPr algn="l" marL="329184" indent="-219456">
-              <a:lnSpc>
-                <a:spcPct val="104000"/>
-              </a:lnSpc>
               <a:buFont typeface="Arial" pitchFamily="34" charset="0"/>
               <a:buChar char="•"/>
-              <a:spcAft>
-                <a:spcPts val="200"/>
-              </a:spcAft>
             </a:pPr>
             <a:r>
               <a:rPr sz="1250" b="0" i="0" u="none">
@@ -6845,96 +6723,6 @@
                 <a:schemeClr val="bg1"/>
               </a:solidFill>
             </a:endParaRPr>
-          </a:p>
-        </p:txBody>
-      </p:sp>
-      <p:sp>
-        <p:nvSpPr>
-          <p:cNvPr id="7" name="Footer Placeholder 6"/>
-          <p:cNvSpPr>
-            <a:spLocks noGrp="1"/>
-          </p:cNvSpPr>
-          <p:nvPr>
-            <p:ph type="ftr" sz="quarter" idx="11"/>
-          </p:nvPr>
-        </p:nvSpPr>
-        <p:spPr>
-          <a:xfrm>
-            <a:off x="4648200" y="6356353"/>
-            <a:ext cx="3204000" cy="365125"/>
-          </a:xfrm>
-        </p:spPr>
-        <p:txBody>
-          <a:bodyPr/>
-          <a:lstStyle/>
-          <a:p>
-            <a:pPr>
-              <a:defRPr/>
-            </a:pPr>
-            <a:r>
-              <a:rPr lang="en-US">
-                <a:solidFill>
-                  <a:schemeClr val="bg1"/>
-                </a:solidFill>
-              </a:rPr>
-              <a:t>@SIH Idea submission- Template</a:t>
-            </a:r>
-            <a:endParaRPr lang="en-US" dirty="0">
-              <a:solidFill>
-                <a:schemeClr val="bg1"/>
-              </a:solidFill>
-            </a:endParaRPr>
-          </a:p>
-        </p:txBody>
-      </p:sp>
-      <p:sp>
-        <p:nvSpPr>
-          <p:cNvPr id="11" name="Oval 10" descr="Your startup LOGO">
-            <a:extLst>
-              <a:ext uri="{FF2B5EF4-FFF2-40B4-BE49-F238E27FC236}">
-                <a16:creationId xmlns:a16="http://schemas.microsoft.com/office/drawing/2014/main" id="{5DBCE864-823D-4A13-9607-5DA1F0ED5FB8}"/>
-              </a:ext>
-              <a:ext uri="{C183D7F6-B498-43B3-948B-1728B52AA6E4}">
-                <adec:decorative xmlns:adec="http://schemas.microsoft.com/office/drawing/2017/decorative" xmlns="" val="0"/>
-              </a:ext>
-            </a:extLst>
-          </p:cNvPr>
-          <p:cNvSpPr/>
-          <p:nvPr/>
-        </p:nvSpPr>
-        <p:spPr>
-          <a:xfrm>
-            <a:off x="329773" y="252246"/>
-            <a:ext cx="1251857" cy="807334"/>
-          </a:xfrm>
-          <a:prstGeom prst="ellipse">
-            <a:avLst/>
-          </a:prstGeom>
-        </p:spPr>
-        <p:style>
-          <a:lnRef idx="2">
-            <a:schemeClr val="accent4"/>
-          </a:lnRef>
-          <a:fillRef idx="1">
-            <a:schemeClr val="lt1"/>
-          </a:fillRef>
-          <a:effectRef idx="0">
-            <a:schemeClr val="accent4"/>
-          </a:effectRef>
-          <a:fontRef idx="minor">
-            <a:schemeClr val="dk1"/>
-          </a:fontRef>
-        </p:style>
-        <p:txBody>
-          <a:bodyPr rtlCol="0" anchor="ctr"/>
-          <a:lstStyle/>
-          <a:p>
-            <a:pPr algn="ctr"/>
-            <a:r>
-              <a:rPr lang="en-US" dirty="0"/>
-              <a:t>Your Team Name</a:t>
-            </a:r>
-            <a:endParaRPr lang="en-IN" dirty="0"/>
           </a:p>
         </p:txBody>
       </p:sp>
@@ -6976,8 +6764,8 @@
         </p:nvSpPr>
         <p:spPr>
           <a:xfrm>
-            <a:off x="457200" y="3547872"/>
-            <a:ext cx="2194560" cy="1589227"/>
+            <a:off x="365760" y="3547872"/>
+            <a:ext cx="1975104" cy="1589227"/>
           </a:xfrm>
           <a:prstGeom prst="rect">
             <a:avLst/>
@@ -6992,10 +6780,10 @@
               <a:lnSpc>
                 <a:spcPct val="100000"/>
               </a:lnSpc>
-              <a:buNone/>
               <a:spcAft>
                 <a:spcPts val="300"/>
               </a:spcAft>
+              <a:buNone/>
             </a:pPr>
             <a:r>
               <a:rPr sz="1000" b="1" i="0" u="none">
@@ -7013,10 +6801,10 @@
               <a:lnSpc>
                 <a:spcPct val="100000"/>
               </a:lnSpc>
-              <a:buNone/>
               <a:spcAft>
                 <a:spcPts val="150"/>
               </a:spcAft>
+              <a:buNone/>
             </a:pPr>
             <a:r>
               <a:rPr sz="950" b="1" i="0" u="none">
@@ -7034,10 +6822,10 @@
               <a:lnSpc>
                 <a:spcPct val="100000"/>
               </a:lnSpc>
-              <a:buNone/>
               <a:spcAft>
                 <a:spcPts val="150"/>
               </a:spcAft>
+              <a:buNone/>
             </a:pPr>
             <a:r>
               <a:rPr sz="950" b="1" i="0" u="none">
@@ -7055,10 +6843,10 @@
               <a:lnSpc>
                 <a:spcPct val="100000"/>
               </a:lnSpc>
-              <a:buNone/>
               <a:spcAft>
                 <a:spcPts val="150"/>
               </a:spcAft>
+              <a:buNone/>
             </a:pPr>
             <a:r>
               <a:rPr sz="950" b="1" i="0" u="none">
@@ -7076,10 +6864,10 @@
               <a:lnSpc>
                 <a:spcPct val="100000"/>
               </a:lnSpc>
-              <a:buNone/>
               <a:spcAft>
                 <a:spcPts val="150"/>
               </a:spcAft>
+              <a:buNone/>
             </a:pPr>
             <a:r>
               <a:rPr sz="950" b="0" i="0" u="none">
@@ -7097,10 +6885,10 @@
               <a:lnSpc>
                 <a:spcPct val="100000"/>
               </a:lnSpc>
-              <a:buNone/>
               <a:spcAft>
                 <a:spcPts val="150"/>
               </a:spcAft>
+              <a:buNone/>
             </a:pPr>
             <a:r>
               <a:rPr sz="950" b="0" i="0" u="none">
@@ -7118,10 +6906,10 @@
               <a:lnSpc>
                 <a:spcPct val="100000"/>
               </a:lnSpc>
-              <a:buNone/>
               <a:spcAft>
                 <a:spcPts val="150"/>
               </a:spcAft>
+              <a:buNone/>
             </a:pPr>
             <a:r>
               <a:rPr sz="950" b="0" i="0" u="none">
@@ -7139,10 +6927,10 @@
               <a:lnSpc>
                 <a:spcPct val="100000"/>
               </a:lnSpc>
-              <a:buNone/>
               <a:spcAft>
                 <a:spcPts val="150"/>
               </a:spcAft>
+              <a:buNone/>
             </a:pPr>
             <a:r>
               <a:rPr sz="950" b="0" i="0" u="none">
@@ -7160,10 +6948,10 @@
               <a:lnSpc>
                 <a:spcPct val="100000"/>
               </a:lnSpc>
-              <a:buNone/>
               <a:spcAft>
                 <a:spcPts val="150"/>
               </a:spcAft>
+              <a:buNone/>
             </a:pPr>
             <a:r>
               <a:rPr sz="950" b="0" i="0" u="none">
@@ -7186,8 +6974,8 @@
         </p:nvSpPr>
         <p:spPr>
           <a:xfrm>
-            <a:off x="2651760" y="3547872"/>
-            <a:ext cx="3291840" cy="1589227"/>
+            <a:off x="2340864" y="3547872"/>
+            <a:ext cx="2724912" cy="1589227"/>
           </a:xfrm>
           <a:prstGeom prst="rect">
             <a:avLst/>
@@ -7202,10 +6990,10 @@
               <a:lnSpc>
                 <a:spcPct val="100000"/>
               </a:lnSpc>
-              <a:buNone/>
               <a:spcAft>
                 <a:spcPts val="300"/>
               </a:spcAft>
+              <a:buNone/>
             </a:pPr>
             <a:r>
               <a:rPr sz="1000" b="1" i="0" u="none">
@@ -7215,7 +7003,7 @@
                 <a:latin typeface="Arial"/>
                 <a:cs typeface="Arial" pitchFamily="34" charset="0"/>
               </a:rPr>
-              <a:t>What it decides</a:t>
+              <a:t>Algorithm</a:t>
             </a:r>
           </a:p>
           <a:p>
@@ -7223,10 +7011,10 @@
               <a:lnSpc>
                 <a:spcPct val="100000"/>
               </a:lnSpc>
-              <a:buNone/>
               <a:spcAft>
                 <a:spcPts val="150"/>
               </a:spcAft>
+              <a:buNone/>
             </a:pPr>
             <a:r>
               <a:rPr sz="950" b="0" i="0" u="none">
@@ -7236,7 +7024,7 @@
                 <a:latin typeface="Arial"/>
                 <a:cs typeface="Arial" pitchFamily="34" charset="0"/>
               </a:rPr>
-              <a:t>which marks are safe to release without a teacher</a:t>
+              <a:t>Gradient boosting, tabular</a:t>
             </a:r>
           </a:p>
           <a:p>
@@ -7244,10 +7032,10 @@
               <a:lnSpc>
                 <a:spcPct val="100000"/>
               </a:lnSpc>
-              <a:buNone/>
               <a:spcAft>
                 <a:spcPts val="150"/>
               </a:spcAft>
+              <a:buNone/>
             </a:pPr>
             <a:r>
               <a:rPr sz="950" b="0" i="0" u="none">
@@ -7257,7 +7045,7 @@
                 <a:latin typeface="Arial"/>
                 <a:cs typeface="Arial" pitchFamily="34" charset="0"/>
               </a:rPr>
-              <a:t>what each student knows, topic by topic</a:t>
+              <a:t>Bayesian knowledge tracing, EM-fitted</a:t>
             </a:r>
           </a:p>
           <a:p>
@@ -7265,10 +7053,10 @@
               <a:lnSpc>
                 <a:spcPct val="100000"/>
               </a:lnSpc>
-              <a:buNone/>
               <a:spcAft>
                 <a:spcPts val="150"/>
               </a:spcAft>
+              <a:buNone/>
             </a:pPr>
             <a:r>
               <a:rPr sz="950" b="0" i="0" u="none">
@@ -7278,7 +7066,7 @@
                 <a:latin typeface="Arial"/>
                 <a:cs typeface="Arial" pitchFamily="34" charset="0"/>
               </a:rPr>
-              <a:t>the few mistakes the whole class is making</a:t>
+              <a:t>HDBSCAN over error signatures</a:t>
             </a:r>
           </a:p>
           <a:p>
@@ -7286,10 +7074,10 @@
               <a:lnSpc>
                 <a:spcPct val="100000"/>
               </a:lnSpc>
-              <a:buNone/>
               <a:spcAft>
                 <a:spcPts val="150"/>
               </a:spcAft>
+              <a:buNone/>
             </a:pPr>
             <a:r>
               <a:rPr sz="950" b="0" i="0" u="none">
@@ -7299,7 +7087,7 @@
                 <a:latin typeface="Arial"/>
                 <a:cs typeface="Arial" pitchFamily="34" charset="0"/>
               </a:rPr>
-              <a:t>copies that renaming and reordering hide</a:t>
+              <a:t>Winnowing (MOSS) + graph embeddings</a:t>
             </a:r>
           </a:p>
           <a:p>
@@ -7307,10 +7095,10 @@
               <a:lnSpc>
                 <a:spcPct val="100000"/>
               </a:lnSpc>
-              <a:buNone/>
               <a:spcAft>
                 <a:spcPts val="150"/>
               </a:spcAft>
+              <a:buNone/>
             </a:pPr>
             <a:r>
               <a:rPr sz="950" b="0" i="0" u="none">
@@ -7320,7 +7108,7 @@
                 <a:latin typeface="Arial"/>
                 <a:cs typeface="Arial" pitchFamily="34" charset="0"/>
               </a:rPr>
-              <a:t>which method the student actually used</a:t>
+              <a:t>Graph neural net over the CFG</a:t>
             </a:r>
           </a:p>
           <a:p>
@@ -7328,10 +7116,10 @@
               <a:lnSpc>
                 <a:spcPct val="100000"/>
               </a:lnSpc>
-              <a:buNone/>
               <a:spcAft>
                 <a:spcPts val="150"/>
               </a:spcAft>
+              <a:buNone/>
             </a:pPr>
             <a:r>
               <a:rPr sz="950" b="0" i="0" u="none">
@@ -7341,7 +7129,7 @@
                 <a:latin typeface="Arial"/>
                 <a:cs typeface="Arial" pitchFamily="34" charset="0"/>
               </a:rPr>
-              <a:t>whether the write-up matches the code</a:t>
+              <a:t>DeBERTa-v3 encoder, 3-way entailment</a:t>
             </a:r>
           </a:p>
           <a:p>
@@ -7349,10 +7137,10 @@
               <a:lnSpc>
                 <a:spcPct val="100000"/>
               </a:lnSpc>
-              <a:buNone/>
               <a:spcAft>
                 <a:spcPts val="150"/>
               </a:spcAft>
+              <a:buNone/>
             </a:pPr>
             <a:r>
               <a:rPr sz="950" b="0" i="0" u="none">
@@ -7362,7 +7150,7 @@
                 <a:latin typeface="Arial"/>
                 <a:cs typeface="Arial" pitchFamily="34" charset="0"/>
               </a:rPr>
-              <a:t>who is slipping behind, and why</a:t>
+              <a:t>Gradient boosting, calibrated</a:t>
             </a:r>
           </a:p>
           <a:p>
@@ -7370,10 +7158,10 @@
               <a:lnSpc>
                 <a:spcPct val="100000"/>
               </a:lnSpc>
-              <a:buNone/>
               <a:spcAft>
                 <a:spcPts val="150"/>
               </a:spcAft>
+              <a:buNone/>
             </a:pPr>
             <a:r>
               <a:rPr sz="950" b="0" i="0" u="none">
@@ -7383,7 +7171,7 @@
                 <a:latin typeface="Arial"/>
                 <a:cs typeface="Arial" pitchFamily="34" charset="0"/>
               </a:rPr>
-              <a:t>what it is written in and how to run it</a:t>
+              <a:t>Gradient boosting on lexical features</a:t>
             </a:r>
           </a:p>
         </p:txBody>
@@ -7396,8 +7184,8 @@
         </p:nvSpPr>
         <p:spPr>
           <a:xfrm>
-            <a:off x="6035040" y="3547872"/>
-            <a:ext cx="4846320" cy="1589227"/>
+            <a:off x="5065776" y="3547872"/>
+            <a:ext cx="3072384" cy="1589227"/>
           </a:xfrm>
           <a:prstGeom prst="rect">
             <a:avLst/>
@@ -7412,10 +7200,10 @@
               <a:lnSpc>
                 <a:spcPct val="100000"/>
               </a:lnSpc>
-              <a:buNone/>
               <a:spcAft>
                 <a:spcPts val="300"/>
               </a:spcAft>
+              <a:buNone/>
             </a:pPr>
             <a:r>
               <a:rPr sz="1000" b="1" i="0" u="none">
@@ -7425,7 +7213,7 @@
                 <a:latin typeface="Arial"/>
                 <a:cs typeface="Arial" pitchFamily="34" charset="0"/>
               </a:rPr>
-              <a:t>How it is trained</a:t>
+              <a:t>What it decides</a:t>
             </a:r>
           </a:p>
           <a:p>
@@ -7433,10 +7221,10 @@
               <a:lnSpc>
                 <a:spcPct val="100000"/>
               </a:lnSpc>
-              <a:buNone/>
               <a:spcAft>
                 <a:spcPts val="150"/>
               </a:spcAft>
+              <a:buNone/>
             </a:pPr>
             <a:r>
               <a:rPr sz="950" b="0" i="0" u="none">
@@ -7446,7 +7234,7 @@
                 <a:latin typeface="Arial"/>
                 <a:cs typeface="Arial" pitchFamily="34" charset="0"/>
               </a:rPr>
-              <a:t>every mark a teacher corrects, forever</a:t>
+              <a:t>which marks are safe to release without a teacher</a:t>
             </a:r>
           </a:p>
           <a:p>
@@ -7454,10 +7242,10 @@
               <a:lnSpc>
                 <a:spcPct val="100000"/>
               </a:lnSpc>
-              <a:buNone/>
               <a:spcAft>
                 <a:spcPts val="150"/>
               </a:spcAft>
+              <a:buNone/>
             </a:pPr>
             <a:r>
               <a:rPr sz="950" b="0" i="0" u="none">
@@ -7467,7 +7255,7 @@
                 <a:latin typeface="Arial"/>
                 <a:cs typeface="Arial" pitchFamily="34" charset="0"/>
               </a:rPr>
-              <a:t>the stream of marks itself - no labelling</a:t>
+              <a:t>what each student knows, topic by topic</a:t>
             </a:r>
           </a:p>
           <a:p>
@@ -7475,10 +7263,10 @@
               <a:lnSpc>
                 <a:spcPct val="100000"/>
               </a:lnSpc>
-              <a:buNone/>
               <a:spcAft>
                 <a:spcPts val="150"/>
               </a:spcAft>
+              <a:buNone/>
             </a:pPr>
             <a:r>
               <a:rPr sz="950" b="0" i="0" u="none">
@@ -7488,7 +7276,7 @@
                 <a:latin typeface="Arial"/>
                 <a:cs typeface="Arial" pitchFamily="34" charset="0"/>
               </a:rPr>
-              <a:t>unsupervised - works from day one</a:t>
+              <a:t>the few mistakes the whole class is making</a:t>
             </a:r>
           </a:p>
           <a:p>
@@ -7496,10 +7284,10 @@
               <a:lnSpc>
                 <a:spcPct val="100000"/>
               </a:lnSpc>
-              <a:buNone/>
               <a:spcAft>
                 <a:spcPts val="150"/>
               </a:spcAft>
+              <a:buNone/>
             </a:pPr>
             <a:r>
               <a:rPr sz="950" b="0" i="0" u="none">
@@ -7509,7 +7297,7 @@
                 <a:latin typeface="Arial"/>
                 <a:cs typeface="Arial" pitchFamily="34" charset="0"/>
               </a:rPr>
-              <a:t>self-supervised: copies made by renaming</a:t>
+              <a:t>copies that renaming and reordering hide</a:t>
             </a:r>
           </a:p>
           <a:p>
@@ -7517,10 +7305,10 @@
               <a:lnSpc>
                 <a:spcPct val="100000"/>
               </a:lnSpc>
-              <a:buNone/>
               <a:spcAft>
                 <a:spcPts val="150"/>
               </a:spcAft>
+              <a:buNone/>
             </a:pPr>
             <a:r>
               <a:rPr sz="950" b="0" i="0" u="none">
@@ -7530,7 +7318,7 @@
                 <a:latin typeface="Arial"/>
                 <a:cs typeface="Arial" pitchFamily="34" charset="0"/>
               </a:rPr>
-              <a:t>reference solutions and teacher tags</a:t>
+              <a:t>which method the student actually used</a:t>
             </a:r>
           </a:p>
           <a:p>
@@ -7538,10 +7326,10 @@
               <a:lnSpc>
                 <a:spcPct val="100000"/>
               </a:lnSpc>
-              <a:buNone/>
               <a:spcAft>
                 <a:spcPts val="150"/>
               </a:spcAft>
+              <a:buNone/>
             </a:pPr>
             <a:r>
               <a:rPr sz="950" b="0" i="0" u="none">
@@ -7551,7 +7339,7 @@
                 <a:latin typeface="Arial"/>
                 <a:cs typeface="Arial" pitchFamily="34" charset="0"/>
               </a:rPr>
-              <a:t>AI drafts labels, teachers correct, then distil</a:t>
+              <a:t>whether the write-up matches the code</a:t>
             </a:r>
           </a:p>
           <a:p>
@@ -7559,10 +7347,10 @@
               <a:lnSpc>
                 <a:spcPct val="100000"/>
               </a:lnSpc>
-              <a:buNone/>
               <a:spcAft>
                 <a:spcPts val="150"/>
               </a:spcAft>
+              <a:buNone/>
             </a:pPr>
             <a:r>
               <a:rPr sz="950" b="0" i="0" u="none">
@@ -7572,7 +7360,7 @@
                 <a:latin typeface="Arial"/>
                 <a:cs typeface="Arial" pitchFamily="34" charset="0"/>
               </a:rPr>
-              <a:t>past outcomes, bias-audited before release</a:t>
+              <a:t>who is slipping behind, and why</a:t>
             </a:r>
           </a:p>
           <a:p>
@@ -7580,10 +7368,10 @@
               <a:lnSpc>
                 <a:spcPct val="100000"/>
               </a:lnSpc>
-              <a:buNone/>
               <a:spcAft>
                 <a:spcPts val="150"/>
               </a:spcAft>
+              <a:buNone/>
             </a:pPr>
             <a:r>
               <a:rPr sz="950" b="0" i="0" u="none">
@@ -7593,7 +7381,7 @@
                 <a:latin typeface="Arial"/>
                 <a:cs typeface="Arial" pitchFamily="34" charset="0"/>
               </a:rPr>
-              <a:t>auto-labelled from any code corpus</a:t>
+              <a:t>what it is written in and how to run it</a:t>
             </a:r>
           </a:p>
         </p:txBody>
@@ -7606,7 +7394,217 @@
         </p:nvSpPr>
         <p:spPr>
           <a:xfrm>
-            <a:off x="457200" y="5155387"/>
+            <a:off x="8138160" y="3547872"/>
+            <a:ext cx="3749039" cy="1589227"/>
+          </a:xfrm>
+          <a:prstGeom prst="rect">
+            <a:avLst/>
+          </a:prstGeom>
+          <a:noFill/>
+        </p:spPr>
+        <p:txBody>
+          <a:bodyPr wrap="square" lIns="45720" rIns="45720" tIns="22860" bIns="22860"/>
+          <a:lstStyle/>
+          <a:p>
+            <a:pPr algn="l" marL="0" indent="0">
+              <a:lnSpc>
+                <a:spcPct val="100000"/>
+              </a:lnSpc>
+              <a:spcAft>
+                <a:spcPts val="300"/>
+              </a:spcAft>
+              <a:buNone/>
+            </a:pPr>
+            <a:r>
+              <a:rPr sz="1000" b="1" i="0" u="none">
+                <a:solidFill>
+                  <a:srgbClr val="0070C0"/>
+                </a:solidFill>
+                <a:latin typeface="Arial"/>
+                <a:cs typeface="Arial" pitchFamily="34" charset="0"/>
+              </a:rPr>
+              <a:t>How it is trained</a:t>
+            </a:r>
+          </a:p>
+          <a:p>
+            <a:pPr algn="l" marL="0" indent="0">
+              <a:lnSpc>
+                <a:spcPct val="100000"/>
+              </a:lnSpc>
+              <a:spcAft>
+                <a:spcPts val="150"/>
+              </a:spcAft>
+              <a:buNone/>
+            </a:pPr>
+            <a:r>
+              <a:rPr sz="950" b="0" i="0" u="none">
+                <a:solidFill>
+                  <a:srgbClr val="1A1A1A"/>
+                </a:solidFill>
+                <a:latin typeface="Arial"/>
+                <a:cs typeface="Arial" pitchFamily="34" charset="0"/>
+              </a:rPr>
+              <a:t>every mark a teacher corrects, forever</a:t>
+            </a:r>
+          </a:p>
+          <a:p>
+            <a:pPr algn="l" marL="0" indent="0">
+              <a:lnSpc>
+                <a:spcPct val="100000"/>
+              </a:lnSpc>
+              <a:spcAft>
+                <a:spcPts val="150"/>
+              </a:spcAft>
+              <a:buNone/>
+            </a:pPr>
+            <a:r>
+              <a:rPr sz="950" b="0" i="0" u="none">
+                <a:solidFill>
+                  <a:srgbClr val="1A1A1A"/>
+                </a:solidFill>
+                <a:latin typeface="Arial"/>
+                <a:cs typeface="Arial" pitchFamily="34" charset="0"/>
+              </a:rPr>
+              <a:t>the stream of marks itself - no labelling</a:t>
+            </a:r>
+          </a:p>
+          <a:p>
+            <a:pPr algn="l" marL="0" indent="0">
+              <a:lnSpc>
+                <a:spcPct val="100000"/>
+              </a:lnSpc>
+              <a:spcAft>
+                <a:spcPts val="150"/>
+              </a:spcAft>
+              <a:buNone/>
+            </a:pPr>
+            <a:r>
+              <a:rPr sz="950" b="0" i="0" u="none">
+                <a:solidFill>
+                  <a:srgbClr val="1A1A1A"/>
+                </a:solidFill>
+                <a:latin typeface="Arial"/>
+                <a:cs typeface="Arial" pitchFamily="34" charset="0"/>
+              </a:rPr>
+              <a:t>unsupervised - works from day one</a:t>
+            </a:r>
+          </a:p>
+          <a:p>
+            <a:pPr algn="l" marL="0" indent="0">
+              <a:lnSpc>
+                <a:spcPct val="100000"/>
+              </a:lnSpc>
+              <a:spcAft>
+                <a:spcPts val="150"/>
+              </a:spcAft>
+              <a:buNone/>
+            </a:pPr>
+            <a:r>
+              <a:rPr sz="950" b="0" i="0" u="none">
+                <a:solidFill>
+                  <a:srgbClr val="5A5A5A"/>
+                </a:solidFill>
+                <a:latin typeface="Arial"/>
+                <a:cs typeface="Arial" pitchFamily="34" charset="0"/>
+              </a:rPr>
+              <a:t>self-supervised: copies made by renaming</a:t>
+            </a:r>
+          </a:p>
+          <a:p>
+            <a:pPr algn="l" marL="0" indent="0">
+              <a:lnSpc>
+                <a:spcPct val="100000"/>
+              </a:lnSpc>
+              <a:spcAft>
+                <a:spcPts val="150"/>
+              </a:spcAft>
+              <a:buNone/>
+            </a:pPr>
+            <a:r>
+              <a:rPr sz="950" b="0" i="0" u="none">
+                <a:solidFill>
+                  <a:srgbClr val="5A5A5A"/>
+                </a:solidFill>
+                <a:latin typeface="Arial"/>
+                <a:cs typeface="Arial" pitchFamily="34" charset="0"/>
+              </a:rPr>
+              <a:t>reference solutions and teacher tags</a:t>
+            </a:r>
+          </a:p>
+          <a:p>
+            <a:pPr algn="l" marL="0" indent="0">
+              <a:lnSpc>
+                <a:spcPct val="100000"/>
+              </a:lnSpc>
+              <a:spcAft>
+                <a:spcPts val="150"/>
+              </a:spcAft>
+              <a:buNone/>
+            </a:pPr>
+            <a:r>
+              <a:rPr sz="950" b="0" i="0" u="none">
+                <a:solidFill>
+                  <a:srgbClr val="5A5A5A"/>
+                </a:solidFill>
+                <a:latin typeface="Arial"/>
+                <a:cs typeface="Arial" pitchFamily="34" charset="0"/>
+              </a:rPr>
+              <a:t>AI drafts labels, teachers correct, then distil</a:t>
+            </a:r>
+          </a:p>
+          <a:p>
+            <a:pPr algn="l" marL="0" indent="0">
+              <a:lnSpc>
+                <a:spcPct val="100000"/>
+              </a:lnSpc>
+              <a:spcAft>
+                <a:spcPts val="150"/>
+              </a:spcAft>
+              <a:buNone/>
+            </a:pPr>
+            <a:r>
+              <a:rPr sz="950" b="0" i="0" u="none">
+                <a:solidFill>
+                  <a:srgbClr val="5A5A5A"/>
+                </a:solidFill>
+                <a:latin typeface="Arial"/>
+                <a:cs typeface="Arial" pitchFamily="34" charset="0"/>
+              </a:rPr>
+              <a:t>past outcomes, bias-audited before release</a:t>
+            </a:r>
+          </a:p>
+          <a:p>
+            <a:pPr algn="l" marL="0" indent="0">
+              <a:lnSpc>
+                <a:spcPct val="100000"/>
+              </a:lnSpc>
+              <a:spcAft>
+                <a:spcPts val="150"/>
+              </a:spcAft>
+              <a:buNone/>
+            </a:pPr>
+            <a:r>
+              <a:rPr sz="950" b="0" i="0" u="none">
+                <a:solidFill>
+                  <a:srgbClr val="5A5A5A"/>
+                </a:solidFill>
+                <a:latin typeface="Arial"/>
+                <a:cs typeface="Arial" pitchFamily="34" charset="0"/>
+              </a:rPr>
+              <a:t>auto-labelled from any code corpus</a:t>
+            </a:r>
+          </a:p>
+        </p:txBody>
+      </p:sp>
+      <p:sp>
+        <p:nvSpPr>
+          <p:cNvPr id="17415" name="TextBox 17414"/>
+          <p:cNvSpPr txBox="1"/>
+          <p:nvPr/>
+        </p:nvSpPr>
+        <p:spPr>
+          <a:xfrm>
+            <a:off x="365760" y="5155387"/>
             <a:ext cx="11064240" cy="219456"/>
           </a:xfrm>
           <a:prstGeom prst="rect">
@@ -7632,14 +7630,14 @@
                 <a:latin typeface="Arial"/>
                 <a:cs typeface="Arial" pitchFamily="34" charset="0"/>
               </a:rPr>
-              <a:t>Bold: learns from data already. The rest run on hand-written rules until a semester of use supplies labels - same interface either way, so swapping a model in changes one file. The AI drafts and labels; it never marks a submission.</a:t>
-            </a:r>
-          </a:p>
-        </p:txBody>
-      </p:sp>
-      <p:sp>
-        <p:nvSpPr>
-          <p:cNvPr id="17415" name="TextBox 17414"/>
+              <a:t>Bold: learns from data already. The rest run on hand-written rules behind the same interface until a semester of use supplies labels. The AI drafts and labels; it never marks a submission.</a:t>
+            </a:r>
+          </a:p>
+        </p:txBody>
+      </p:sp>
+      <p:sp>
+        <p:nvSpPr>
+          <p:cNvPr id="17416" name="TextBox 17415"/>
           <p:cNvSpPr txBox="1"/>
           <p:nvPr/>
         </p:nvSpPr>
@@ -7661,11 +7659,11 @@
               <a:lnSpc>
                 <a:spcPct val="100000"/>
               </a:lnSpc>
+              <a:spcAft>
+                <a:spcPts val="500"/>
+              </a:spcAft>
               <a:buFont typeface="Wingdings" pitchFamily="34" charset="0"/>
               <a:buChar char="v"/>
-              <a:spcAft>
-                <a:spcPts val="500"/>
-              </a:spcAft>
             </a:pPr>
             <a:r>
               <a:rPr sz="1400" b="1" i="0" u="sng">
@@ -7683,33 +7681,33 @@
               <a:lnSpc>
                 <a:spcPct val="104000"/>
               </a:lnSpc>
+              <a:spcAft>
+                <a:spcPts val="200"/>
+              </a:spcAft>
               <a:buFont typeface="Arial" pitchFamily="34" charset="0"/>
               <a:buChar char="•"/>
+            </a:pPr>
+            <a:r>
+              <a:rPr sz="1250" b="0" i="0" u="none">
+                <a:solidFill>
+                  <a:srgbClr val="1A1A1A"/>
+                </a:solidFill>
+                <a:latin typeface="Arial"/>
+                <a:cs typeface="Arial" pitchFamily="34" charset="0"/>
+              </a:rPr>
+              <a:t>Teacher approves the topic map and the rubric; both are drafted for them, neither is imposed.</a:t>
+            </a:r>
+          </a:p>
+          <a:p>
+            <a:pPr algn="l" marL="329184" indent="-219456">
+              <a:lnSpc>
+                <a:spcPct val="104000"/>
+              </a:lnSpc>
               <a:spcAft>
                 <a:spcPts val="200"/>
               </a:spcAft>
-            </a:pPr>
-            <a:r>
-              <a:rPr sz="1250" b="0" i="0" u="none">
-                <a:solidFill>
-                  <a:srgbClr val="1A1A1A"/>
-                </a:solidFill>
-                <a:latin typeface="Arial"/>
-                <a:cs typeface="Arial" pitchFamily="34" charset="0"/>
-              </a:rPr>
-              <a:t>Teacher approves the topic map and the rubric; both are drafted for them, neither is imposed.</a:t>
-            </a:r>
-          </a:p>
-          <a:p>
-            <a:pPr algn="l" marL="329184" indent="-219456">
-              <a:lnSpc>
-                <a:spcPct val="104000"/>
-              </a:lnSpc>
               <a:buFont typeface="Arial" pitchFamily="34" charset="0"/>
               <a:buChar char="•"/>
-              <a:spcAft>
-                <a:spcPts val="200"/>
-              </a:spcAft>
             </a:pPr>
             <a:r>
               <a:rPr sz="1250" b="0" i="0" u="none">
@@ -7726,7 +7724,7 @@
       </p:sp>
       <p:sp>
         <p:nvSpPr>
-          <p:cNvPr id="17416" name="Rounded Rectangle 17415"/>
+          <p:cNvPr id="17417" name="Rounded Rectangle 17416"/>
           <p:cNvSpPr/>
           <p:nvPr/>
         </p:nvSpPr>
@@ -7770,10 +7768,10 @@
               <a:lnSpc>
                 <a:spcPct val="100000"/>
               </a:lnSpc>
-              <a:buNone/>
               <a:spcAft>
                 <a:spcPts val="400"/>
               </a:spcAft>
+              <a:buNone/>
             </a:pPr>
             <a:r>
               <a:rPr sz="1100" b="1" i="0" u="none">
@@ -7810,7 +7808,7 @@
       </p:sp>
       <p:cxnSp>
         <p:nvCxnSpPr>
-          <p:cNvPr id="17417" name="Connector 17416"/>
+          <p:cNvPr id="17418" name="Connector 17417"/>
           <p:cNvCxnSpPr/>
           <p:nvPr/>
         </p:nvCxnSpPr>
@@ -7846,7 +7844,7 @@
       </p:cxnSp>
       <p:sp>
         <p:nvSpPr>
-          <p:cNvPr id="17418" name="Rounded Rectangle 17417"/>
+          <p:cNvPr id="17419" name="Rounded Rectangle 17418"/>
           <p:cNvSpPr/>
           <p:nvPr/>
         </p:nvSpPr>
@@ -7890,10 +7888,10 @@
               <a:lnSpc>
                 <a:spcPct val="100000"/>
               </a:lnSpc>
-              <a:buNone/>
               <a:spcAft>
                 <a:spcPts val="400"/>
               </a:spcAft>
+              <a:buNone/>
             </a:pPr>
             <a:r>
               <a:rPr sz="1100" b="1" i="0" u="none">
@@ -7930,7 +7928,7 @@
       </p:sp>
       <p:cxnSp>
         <p:nvCxnSpPr>
-          <p:cNvPr id="17419" name="Connector 17418"/>
+          <p:cNvPr id="17420" name="Connector 17419"/>
           <p:cNvCxnSpPr/>
           <p:nvPr/>
         </p:nvCxnSpPr>
@@ -7966,7 +7964,7 @@
       </p:cxnSp>
       <p:sp>
         <p:nvSpPr>
-          <p:cNvPr id="17420" name="Rounded Rectangle 17419"/>
+          <p:cNvPr id="17421" name="Rounded Rectangle 17420"/>
           <p:cNvSpPr/>
           <p:nvPr/>
         </p:nvSpPr>
@@ -8010,10 +8008,10 @@
               <a:lnSpc>
                 <a:spcPct val="100000"/>
               </a:lnSpc>
-              <a:buNone/>
               <a:spcAft>
                 <a:spcPts val="400"/>
               </a:spcAft>
+              <a:buNone/>
             </a:pPr>
             <a:r>
               <a:rPr sz="1100" b="1" i="0" u="none">
@@ -8050,7 +8048,7 @@
       </p:sp>
       <p:cxnSp>
         <p:nvCxnSpPr>
-          <p:cNvPr id="17421" name="Connector 17420"/>
+          <p:cNvPr id="17422" name="Connector 17421"/>
           <p:cNvCxnSpPr/>
           <p:nvPr/>
         </p:nvCxnSpPr>
@@ -8086,7 +8084,7 @@
       </p:cxnSp>
       <p:sp>
         <p:nvSpPr>
-          <p:cNvPr id="17422" name="Rounded Rectangle 17421"/>
+          <p:cNvPr id="17423" name="Rounded Rectangle 17422"/>
           <p:cNvSpPr/>
           <p:nvPr/>
         </p:nvSpPr>
@@ -8130,10 +8128,10 @@
               <a:lnSpc>
                 <a:spcPct val="100000"/>
               </a:lnSpc>
-              <a:buNone/>
               <a:spcAft>
                 <a:spcPts val="400"/>
               </a:spcAft>
+              <a:buNone/>
             </a:pPr>
             <a:r>
               <a:rPr sz="1100" b="1" i="0" u="none">
@@ -8170,7 +8168,7 @@
       </p:sp>
       <p:sp>
         <p:nvSpPr>
-          <p:cNvPr id="17423" name="TextBox 17422"/>
+          <p:cNvPr id="17424" name="TextBox 17423"/>
           <p:cNvSpPr txBox="1"/>
           <p:nvPr/>
         </p:nvSpPr>
@@ -8202,7 +8200,7 @@
                 <a:latin typeface="Arial"/>
                 <a:cs typeface="Arial" pitchFamily="34" charset="0"/>
               </a:rPr>
-              <a:t>Every mark is tied to a topic, and topics are linked into a prerequisite map - drafted from the syllabus, approved by the teacher. The system walks it to find the root gap, not the symptom.</a:t>
+              <a:t>Every mark is tied to a topic; topics link into a prerequisite map the system walks to find the root gap, not the symptom.</a:t>
             </a:r>
           </a:p>
         </p:txBody>
@@ -8348,7 +8346,7 @@
         </p:nvSpPr>
         <p:spPr bwMode="auto">
           <a:xfrm>
-            <a:off x="329184" y="1152144"/>
+            <a:off x="329184" y="1097280"/>
             <a:ext cx="6126480" cy="4206240"/>
           </a:xfrm>
           <a:prstGeom prst="rect">
@@ -8363,7 +8361,7 @@
           </a:ln>
         </p:spPr>
         <p:txBody>
-          <a:bodyPr wrap="square" lIns="45720" rIns="45720" tIns="22860" bIns="22860"/>
+          <a:bodyPr wrap="square" lIns="45720" rIns="45720" tIns="22860" bIns="22860" anchor="t"/>
           <a:lstStyle/>
           <a:p>
             <a:pPr marL="342900" marR="0" lvl="0" indent="-342900" algn="just" defTabSz="457200" rtl="0" eaLnBrk="1" fontAlgn="base" latinLnBrk="0" hangingPunct="1">
@@ -8403,17 +8401,17 @@
               <a:lnSpc>
                 <a:spcPct val="100000"/>
               </a:lnSpc>
+              <a:spcBef>
+                <a:spcPts val="500"/>
+              </a:spcBef>
+              <a:spcAft>
+                <a:spcPts val="600"/>
+              </a:spcAft>
               <a:buFont typeface="Wingdings" pitchFamily="34" charset="0"/>
               <a:buChar char="v"/>
-              <a:spcBef>
-                <a:spcPts val="1100"/>
-              </a:spcBef>
-              <a:spcAft>
-                <a:spcPts val="600"/>
-              </a:spcAft>
-            </a:pPr>
-            <a:r>
-              <a:rPr sz="1400" b="1" i="0" u="sng">
+            </a:pPr>
+            <a:r>
+              <a:rPr sz="1350" b="1" i="0" u="sng">
                 <a:solidFill>
                   <a:srgbClr val="1F497D"/>
                 </a:solidFill>
@@ -8430,12 +8428,9 @@
               </a:lnSpc>
               <a:buFont typeface="Arial" pitchFamily="34" charset="0"/>
               <a:buChar char="•"/>
-              <a:spcAft>
-                <a:spcPts val="200"/>
-              </a:spcAft>
-            </a:pPr>
-            <a:r>
-              <a:rPr sz="1150" b="0" i="0" u="none">
+            </a:pPr>
+            <a:r>
+              <a:rPr sz="1100" b="0" i="0" u="none">
                 <a:solidFill>
                   <a:srgbClr val="1A1A1A"/>
                 </a:solidFill>
@@ -8452,12 +8447,9 @@
               </a:lnSpc>
               <a:buFont typeface="Arial" pitchFamily="34" charset="0"/>
               <a:buChar char="•"/>
-              <a:spcAft>
-                <a:spcPts val="200"/>
-              </a:spcAft>
-            </a:pPr>
-            <a:r>
-              <a:rPr sz="1150" b="0" i="0" u="none">
+            </a:pPr>
+            <a:r>
+              <a:rPr sz="1100" b="0" i="0" u="none">
                 <a:solidFill>
                   <a:srgbClr val="1A1A1A"/>
                 </a:solidFill>
@@ -8474,12 +8466,9 @@
               </a:lnSpc>
               <a:buFont typeface="Arial" pitchFamily="34" charset="0"/>
               <a:buChar char="•"/>
-              <a:spcAft>
-                <a:spcPts val="200"/>
-              </a:spcAft>
-            </a:pPr>
-            <a:r>
-              <a:rPr sz="1150" b="0" i="0" u="none">
+            </a:pPr>
+            <a:r>
+              <a:rPr sz="1100" b="0" i="0" u="none">
                 <a:solidFill>
                   <a:srgbClr val="1A1A1A"/>
                 </a:solidFill>
@@ -8494,17 +8483,17 @@
               <a:lnSpc>
                 <a:spcPct val="100000"/>
               </a:lnSpc>
+              <a:spcBef>
+                <a:spcPts val="500"/>
+              </a:spcBef>
+              <a:spcAft>
+                <a:spcPts val="600"/>
+              </a:spcAft>
               <a:buFont typeface="Wingdings" pitchFamily="34" charset="0"/>
               <a:buChar char="v"/>
-              <a:spcBef>
-                <a:spcPts val="1100"/>
-              </a:spcBef>
-              <a:spcAft>
-                <a:spcPts val="600"/>
-              </a:spcAft>
-            </a:pPr>
-            <a:r>
-              <a:rPr sz="1400" b="1" i="0" u="sng">
+            </a:pPr>
+            <a:r>
+              <a:rPr sz="1350" b="1" i="0" u="sng">
                 <a:solidFill>
                   <a:srgbClr val="1F497D"/>
                 </a:solidFill>
@@ -8521,12 +8510,9 @@
               </a:lnSpc>
               <a:buFont typeface="Arial" pitchFamily="34" charset="0"/>
               <a:buChar char="•"/>
-              <a:spcAft>
-                <a:spcPts val="200"/>
-              </a:spcAft>
-            </a:pPr>
-            <a:r>
-              <a:rPr sz="1150" b="0" i="0" u="none">
+            </a:pPr>
+            <a:r>
+              <a:rPr sz="1100" b="0" i="0" u="none">
                 <a:solidFill>
                   <a:srgbClr val="1A1A1A"/>
                 </a:solidFill>
@@ -8543,12 +8529,9 @@
               </a:lnSpc>
               <a:buFont typeface="Arial" pitchFamily="34" charset="0"/>
               <a:buChar char="•"/>
-              <a:spcAft>
-                <a:spcPts val="200"/>
-              </a:spcAft>
-            </a:pPr>
-            <a:r>
-              <a:rPr sz="1150" b="0" i="0" u="none">
+            </a:pPr>
+            <a:r>
+              <a:rPr sz="1100" b="0" i="0" u="none">
                 <a:solidFill>
                   <a:srgbClr val="1A1A1A"/>
                 </a:solidFill>
@@ -8565,12 +8548,9 @@
               </a:lnSpc>
               <a:buFont typeface="Arial" pitchFamily="34" charset="0"/>
               <a:buChar char="•"/>
-              <a:spcAft>
-                <a:spcPts val="200"/>
-              </a:spcAft>
-            </a:pPr>
-            <a:r>
-              <a:rPr sz="1150" b="0" i="0" u="none">
+            </a:pPr>
+            <a:r>
+              <a:rPr sz="1100" b="0" i="0" u="none">
                 <a:solidFill>
                   <a:srgbClr val="1A1A1A"/>
                 </a:solidFill>
@@ -8587,12 +8567,9 @@
               </a:lnSpc>
               <a:buFont typeface="Arial" pitchFamily="34" charset="0"/>
               <a:buChar char="•"/>
-              <a:spcAft>
-                <a:spcPts val="200"/>
-              </a:spcAft>
-            </a:pPr>
-            <a:r>
-              <a:rPr sz="1150" b="0" i="0" u="none">
+            </a:pPr>
+            <a:r>
+              <a:rPr sz="1100" b="0" i="0" u="none">
                 <a:solidFill>
                   <a:srgbClr val="1A1A1A"/>
                 </a:solidFill>
@@ -8609,12 +8586,9 @@
               </a:lnSpc>
               <a:buFont typeface="Arial" pitchFamily="34" charset="0"/>
               <a:buChar char="•"/>
-              <a:spcAft>
-                <a:spcPts val="200"/>
-              </a:spcAft>
-            </a:pPr>
-            <a:r>
-              <a:rPr sz="1150" b="0" i="0" u="none">
+            </a:pPr>
+            <a:r>
+              <a:rPr sz="1100" b="0" i="0" u="none">
                 <a:solidFill>
                   <a:srgbClr val="1A1A1A"/>
                 </a:solidFill>
@@ -8631,12 +8605,9 @@
               </a:lnSpc>
               <a:buFont typeface="Arial" pitchFamily="34" charset="0"/>
               <a:buChar char="•"/>
-              <a:spcAft>
-                <a:spcPts val="200"/>
-              </a:spcAft>
-            </a:pPr>
-            <a:r>
-              <a:rPr sz="1150" b="0" i="0" u="none">
+            </a:pPr>
+            <a:r>
+              <a:rPr sz="1100" b="0" i="0" u="none">
                 <a:solidFill>
                   <a:srgbClr val="1A1A1A"/>
                 </a:solidFill>
@@ -8651,17 +8622,17 @@
               <a:lnSpc>
                 <a:spcPct val="100000"/>
               </a:lnSpc>
+              <a:spcBef>
+                <a:spcPts val="500"/>
+              </a:spcBef>
+              <a:spcAft>
+                <a:spcPts val="600"/>
+              </a:spcAft>
               <a:buFont typeface="Wingdings" pitchFamily="34" charset="0"/>
               <a:buChar char="v"/>
-              <a:spcBef>
-                <a:spcPts val="1100"/>
-              </a:spcBef>
-              <a:spcAft>
-                <a:spcPts val="600"/>
-              </a:spcAft>
-            </a:pPr>
-            <a:r>
-              <a:rPr sz="1400" b="1" i="0" u="sng">
+            </a:pPr>
+            <a:r>
+              <a:rPr sz="1350" b="1" i="0" u="sng">
                 <a:solidFill>
                   <a:srgbClr val="1F497D"/>
                 </a:solidFill>
@@ -8678,12 +8649,9 @@
               </a:lnSpc>
               <a:buFont typeface="Arial" pitchFamily="34" charset="0"/>
               <a:buChar char="•"/>
-              <a:spcAft>
-                <a:spcPts val="200"/>
-              </a:spcAft>
-            </a:pPr>
-            <a:r>
-              <a:rPr sz="1150" b="0" i="0" u="none">
+            </a:pPr>
+            <a:r>
+              <a:rPr sz="1100" b="0" i="0" u="none">
                 <a:solidFill>
                   <a:srgbClr val="1A1A1A"/>
                 </a:solidFill>
@@ -8700,12 +8668,9 @@
               </a:lnSpc>
               <a:buFont typeface="Arial" pitchFamily="34" charset="0"/>
               <a:buChar char="•"/>
-              <a:spcAft>
-                <a:spcPts val="200"/>
-              </a:spcAft>
-            </a:pPr>
-            <a:r>
-              <a:rPr sz="1150" b="0" i="0" u="none">
+            </a:pPr>
+            <a:r>
+              <a:rPr sz="1100" b="0" i="0" u="none">
                 <a:solidFill>
                   <a:srgbClr val="1A1A1A"/>
                 </a:solidFill>
@@ -8722,12 +8687,9 @@
               </a:lnSpc>
               <a:buFont typeface="Arial" pitchFamily="34" charset="0"/>
               <a:buChar char="•"/>
-              <a:spcAft>
-                <a:spcPts val="200"/>
-              </a:spcAft>
-            </a:pPr>
-            <a:r>
-              <a:rPr sz="1150" b="0" i="0" u="none">
+            </a:pPr>
+            <a:r>
+              <a:rPr sz="1100" b="0" i="0" u="none">
                 <a:solidFill>
                   <a:srgbClr val="1A1A1A"/>
                 </a:solidFill>
@@ -8744,12 +8706,9 @@
               </a:lnSpc>
               <a:buFont typeface="Arial" pitchFamily="34" charset="0"/>
               <a:buChar char="•"/>
-              <a:spcAft>
-                <a:spcPts val="200"/>
-              </a:spcAft>
-            </a:pPr>
-            <a:r>
-              <a:rPr sz="1150" b="0" i="0" u="none">
+            </a:pPr>
+            <a:r>
+              <a:rPr sz="1100" b="0" i="0" u="none">
                 <a:solidFill>
                   <a:srgbClr val="1A1A1A"/>
                 </a:solidFill>
@@ -8766,12 +8725,9 @@
               </a:lnSpc>
               <a:buFont typeface="Arial" pitchFamily="34" charset="0"/>
               <a:buChar char="•"/>
-              <a:spcAft>
-                <a:spcPts val="200"/>
-              </a:spcAft>
-            </a:pPr>
-            <a:r>
-              <a:rPr sz="1150" b="0" i="0" u="none">
+            </a:pPr>
+            <a:r>
+              <a:rPr sz="1100" b="0" i="0" u="none">
                 <a:solidFill>
                   <a:srgbClr val="1A1A1A"/>
                 </a:solidFill>
@@ -8788,12 +8744,9 @@
               </a:lnSpc>
               <a:buFont typeface="Arial" pitchFamily="34" charset="0"/>
               <a:buChar char="•"/>
-              <a:spcAft>
-                <a:spcPts val="200"/>
-              </a:spcAft>
-            </a:pPr>
-            <a:r>
-              <a:rPr sz="1150" b="0" i="0" u="none">
+            </a:pPr>
+            <a:r>
+              <a:rPr sz="1100" b="0" i="0" u="none">
                 <a:solidFill>
                   <a:srgbClr val="1A1A1A"/>
                 </a:solidFill>
@@ -8888,128 +8841,6 @@
           </a:p>
         </p:txBody>
       </p:sp>
-      <p:sp>
-        <p:nvSpPr>
-          <p:cNvPr id="7" name="Footer Placeholder 6"/>
-          <p:cNvSpPr>
-            <a:spLocks noGrp="1"/>
-          </p:cNvSpPr>
-          <p:nvPr>
-            <p:ph type="ftr" sz="quarter" idx="11"/>
-          </p:nvPr>
-        </p:nvSpPr>
-        <p:spPr>
-          <a:xfrm>
-            <a:off x="4648200" y="6356353"/>
-            <a:ext cx="3204000" cy="365125"/>
-          </a:xfrm>
-        </p:spPr>
-        <p:txBody>
-          <a:bodyPr/>
-          <a:lstStyle/>
-          <a:p>
-            <a:pPr marL="0" marR="0" lvl="0" indent="0" algn="ctr" defTabSz="457200" rtl="0" eaLnBrk="1" fontAlgn="auto" latinLnBrk="0" hangingPunct="1">
-              <a:lnSpc>
-                <a:spcPct val="100000"/>
-              </a:lnSpc>
-              <a:spcBef>
-                <a:spcPts val="0"/>
-              </a:spcBef>
-              <a:spcAft>
-                <a:spcPts val="0"/>
-              </a:spcAft>
-              <a:buClrTx/>
-              <a:buSzTx/>
-              <a:buFontTx/>
-              <a:buNone/>
-              <a:tabLst/>
-              <a:defRPr/>
-            </a:pPr>
-            <a:r>
-              <a:rPr kumimoji="0" lang="en-US" sz="1200" b="0" i="0" u="none" strike="noStrike" kern="1200" cap="none" spc="0" normalizeH="0" baseline="0" noProof="0">
-                <a:ln>
-                  <a:noFill/>
-                </a:ln>
-                <a:solidFill>
-                  <a:prstClr val="white"/>
-                </a:solidFill>
-                <a:effectLst/>
-                <a:uLnTx/>
-                <a:uFillTx/>
-                <a:latin typeface="TradeGothic"/>
-                <a:ea typeface="+mn-ea"/>
-                <a:cs typeface="+mn-cs"/>
-              </a:rPr>
-              <a:t>@SIH Idea submission- Template</a:t>
-            </a:r>
-            <a:endParaRPr kumimoji="0" lang="en-US" sz="1200" b="0" i="0" u="none" strike="noStrike" kern="1200" cap="none" spc="0" normalizeH="0" baseline="0" noProof="0" dirty="0">
-              <a:ln>
-                <a:noFill/>
-              </a:ln>
-              <a:solidFill>
-                <a:prstClr val="white"/>
-              </a:solidFill>
-              <a:effectLst/>
-              <a:uLnTx/>
-              <a:uFillTx/>
-              <a:latin typeface="TradeGothic"/>
-              <a:ea typeface="+mn-ea"/>
-              <a:cs typeface="+mn-cs"/>
-            </a:endParaRPr>
-          </a:p>
-        </p:txBody>
-      </p:sp>
-      <p:sp>
-        <p:nvSpPr>
-          <p:cNvPr id="12" name="Oval 11" descr="Your startup LOGO">
-            <a:extLst>
-              <a:ext uri="{FF2B5EF4-FFF2-40B4-BE49-F238E27FC236}">
-                <a16:creationId xmlns:a16="http://schemas.microsoft.com/office/drawing/2014/main" id="{5DBCE864-823D-4A13-9607-5DA1F0ED5FB8}"/>
-              </a:ext>
-              <a:ext uri="{C183D7F6-B498-43B3-948B-1728B52AA6E4}">
-                <adec:decorative xmlns:adec="http://schemas.microsoft.com/office/drawing/2017/decorative" xmlns="" val="0"/>
-              </a:ext>
-            </a:extLst>
-          </p:cNvPr>
-          <p:cNvSpPr/>
-          <p:nvPr/>
-        </p:nvSpPr>
-        <p:spPr>
-          <a:xfrm>
-            <a:off x="329773" y="252246"/>
-            <a:ext cx="1251857" cy="807334"/>
-          </a:xfrm>
-          <a:prstGeom prst="ellipse">
-            <a:avLst/>
-          </a:prstGeom>
-        </p:spPr>
-        <p:style>
-          <a:lnRef idx="2">
-            <a:schemeClr val="accent4"/>
-          </a:lnRef>
-          <a:fillRef idx="1">
-            <a:schemeClr val="lt1"/>
-          </a:fillRef>
-          <a:effectRef idx="0">
-            <a:schemeClr val="accent4"/>
-          </a:effectRef>
-          <a:fontRef idx="minor">
-            <a:schemeClr val="dk1"/>
-          </a:fontRef>
-        </p:style>
-        <p:txBody>
-          <a:bodyPr rtlCol="0" anchor="ctr"/>
-          <a:lstStyle/>
-          <a:p>
-            <a:pPr algn="ctr"/>
-            <a:r>
-              <a:rPr lang="en-US" dirty="0"/>
-              <a:t>Your Team Name</a:t>
-            </a:r>
-            <a:endParaRPr lang="en-IN" dirty="0"/>
-          </a:p>
-        </p:txBody>
-      </p:sp>
       <p:pic>
         <p:nvPicPr>
           <p:cNvPr id="11" name="Picture 10"/>
@@ -9049,7 +8880,7 @@
         <p:spPr>
           <a:xfrm>
             <a:off x="6693408" y="1152144"/>
-            <a:ext cx="5138928" cy="3010204"/>
+            <a:ext cx="5138928" cy="3922776"/>
           </a:xfrm>
           <a:prstGeom prst="roundRect">
             <a:avLst>
@@ -9097,7 +8928,7 @@
         <p:spPr>
           <a:xfrm>
             <a:off x="6876288" y="1271016"/>
-            <a:ext cx="4773168" cy="2772460"/>
+            <a:ext cx="4773168" cy="3685032"/>
           </a:xfrm>
           <a:prstGeom prst="rect">
             <a:avLst/>
@@ -9112,10 +8943,10 @@
               <a:lnSpc>
                 <a:spcPct val="100000"/>
               </a:lnSpc>
-              <a:buNone/>
               <a:spcAft>
                 <a:spcPts val="600"/>
               </a:spcAft>
+              <a:buNone/>
             </a:pPr>
             <a:r>
               <a:rPr sz="1250" b="1" i="0" u="none">
@@ -9150,12 +8981,12 @@
           <a:p>
             <a:pPr algn="l" marL="219456" indent="0">
               <a:lnSpc>
-                <a:spcPct val="102000"/>
-              </a:lnSpc>
-              <a:buNone/>
-              <a:spcAft>
-                <a:spcPts val="400"/>
-              </a:spcAft>
+                <a:spcPct val="104000"/>
+              </a:lnSpc>
+              <a:spcAft>
+                <a:spcPts val="800"/>
+              </a:spcAft>
+              <a:buNone/>
             </a:pPr>
             <a:r>
               <a:rPr sz="950" b="0" i="0" u="none">
@@ -9190,12 +9021,12 @@
           <a:p>
             <a:pPr algn="l" marL="219456" indent="0">
               <a:lnSpc>
-                <a:spcPct val="102000"/>
-              </a:lnSpc>
-              <a:buNone/>
-              <a:spcAft>
-                <a:spcPts val="400"/>
-              </a:spcAft>
+                <a:spcPct val="104000"/>
+              </a:lnSpc>
+              <a:spcAft>
+                <a:spcPts val="800"/>
+              </a:spcAft>
+              <a:buNone/>
             </a:pPr>
             <a:r>
               <a:rPr sz="950" b="0" i="0" u="none">
@@ -9230,12 +9061,12 @@
           <a:p>
             <a:pPr algn="l" marL="219456" indent="0">
               <a:lnSpc>
-                <a:spcPct val="102000"/>
-              </a:lnSpc>
-              <a:buNone/>
-              <a:spcAft>
-                <a:spcPts val="400"/>
-              </a:spcAft>
+                <a:spcPct val="104000"/>
+              </a:lnSpc>
+              <a:spcAft>
+                <a:spcPts val="800"/>
+              </a:spcAft>
+              <a:buNone/>
             </a:pPr>
             <a:r>
               <a:rPr sz="950" b="0" i="0" u="none">
@@ -9270,12 +9101,12 @@
           <a:p>
             <a:pPr algn="l" marL="219456" indent="0">
               <a:lnSpc>
-                <a:spcPct val="102000"/>
-              </a:lnSpc>
-              <a:buNone/>
-              <a:spcAft>
-                <a:spcPts val="400"/>
-              </a:spcAft>
+                <a:spcPct val="104000"/>
+              </a:lnSpc>
+              <a:spcAft>
+                <a:spcPts val="800"/>
+              </a:spcAft>
+              <a:buNone/>
             </a:pPr>
             <a:r>
               <a:rPr sz="950" b="0" i="0" u="none">
@@ -9310,12 +9141,12 @@
           <a:p>
             <a:pPr algn="l" marL="219456" indent="0">
               <a:lnSpc>
-                <a:spcPct val="102000"/>
-              </a:lnSpc>
-              <a:buNone/>
-              <a:spcAft>
-                <a:spcPts val="400"/>
-              </a:spcAft>
+                <a:spcPct val="104000"/>
+              </a:lnSpc>
+              <a:spcAft>
+                <a:spcPts val="800"/>
+              </a:spcAft>
+              <a:buNone/>
             </a:pPr>
             <a:r>
               <a:rPr sz="950" b="0" i="0" u="none">
@@ -9350,12 +9181,12 @@
           <a:p>
             <a:pPr algn="l" marL="219456" indent="0">
               <a:lnSpc>
-                <a:spcPct val="102000"/>
-              </a:lnSpc>
-              <a:buNone/>
-              <a:spcAft>
-                <a:spcPts val="400"/>
-              </a:spcAft>
+                <a:spcPct val="104000"/>
+              </a:lnSpc>
+              <a:spcAft>
+                <a:spcPts val="800"/>
+              </a:spcAft>
+              <a:buNone/>
             </a:pPr>
             <a:r>
               <a:rPr sz="950" b="0" i="0" u="none">
@@ -9753,8 +9584,8 @@
         </p:nvSpPr>
         <p:spPr bwMode="auto">
           <a:xfrm>
-            <a:off x="329184" y="1389888"/>
-            <a:ext cx="11503152" cy="4791456"/>
+            <a:off x="329184" y="1316736"/>
+            <a:ext cx="11503152" cy="2596896"/>
           </a:xfrm>
           <a:prstGeom prst="rect">
             <a:avLst/>
@@ -9768,7 +9599,7 @@
           </a:ln>
         </p:spPr>
         <p:txBody>
-          <a:bodyPr wrap="square" lIns="45720" rIns="45720" tIns="22860" bIns="22860"/>
+          <a:bodyPr wrap="square" lIns="45720" rIns="45720" tIns="22860" bIns="22860" anchor="t"/>
           <a:lstStyle/>
           <a:p>
             <a:pPr marL="342900" marR="0" lvl="0" indent="-342900" algn="just" defTabSz="457200" rtl="0" eaLnBrk="1" fontAlgn="base" latinLnBrk="0" hangingPunct="1">
@@ -9794,17 +9625,17 @@
               <a:lnSpc>
                 <a:spcPct val="100000"/>
               </a:lnSpc>
+              <a:spcBef>
+                <a:spcPts val="600"/>
+              </a:spcBef>
+              <a:spcAft>
+                <a:spcPts val="600"/>
+              </a:spcAft>
               <a:buFont typeface="Wingdings" pitchFamily="34" charset="0"/>
               <a:buChar char="v"/>
-              <a:spcBef>
-                <a:spcPts val="1700"/>
-              </a:spcBef>
-              <a:spcAft>
-                <a:spcPts val="600"/>
-              </a:spcAft>
-            </a:pPr>
-            <a:r>
-              <a:rPr sz="1700" b="1" i="0" u="sng">
+            </a:pPr>
+            <a:r>
+              <a:rPr sz="1500" b="1" i="0" u="sng">
                 <a:solidFill>
                   <a:srgbClr val="1F497D"/>
                 </a:solidFill>
@@ -9817,16 +9648,16 @@
           <a:p>
             <a:pPr algn="l" marL="329184" indent="-219456">
               <a:lnSpc>
-                <a:spcPct val="112000"/>
-              </a:lnSpc>
+                <a:spcPct val="106000"/>
+              </a:lnSpc>
+              <a:spcAft>
+                <a:spcPts val="100"/>
+              </a:spcAft>
               <a:buFont typeface="Arial" pitchFamily="34" charset="0"/>
               <a:buChar char="•"/>
-              <a:spcAft>
-                <a:spcPts val="500"/>
-              </a:spcAft>
-            </a:pPr>
-            <a:r>
-              <a:rPr sz="1450" b="0" i="0" u="none">
+            </a:pPr>
+            <a:r>
+              <a:rPr sz="1350" b="0" i="0" u="none">
                 <a:solidFill>
                   <a:srgbClr val="1A1A1A"/>
                 </a:solidFill>
@@ -9839,16 +9670,16 @@
           <a:p>
             <a:pPr algn="l" marL="329184" indent="-219456">
               <a:lnSpc>
-                <a:spcPct val="112000"/>
-              </a:lnSpc>
+                <a:spcPct val="106000"/>
+              </a:lnSpc>
+              <a:spcAft>
+                <a:spcPts val="100"/>
+              </a:spcAft>
               <a:buFont typeface="Arial" pitchFamily="34" charset="0"/>
               <a:buChar char="•"/>
-              <a:spcAft>
-                <a:spcPts val="500"/>
-              </a:spcAft>
-            </a:pPr>
-            <a:r>
-              <a:rPr sz="1450" b="0" i="0" u="none">
+            </a:pPr>
+            <a:r>
+              <a:rPr sz="1350" b="0" i="0" u="none">
                 <a:solidFill>
                   <a:srgbClr val="1A1A1A"/>
                 </a:solidFill>
@@ -9861,16 +9692,16 @@
           <a:p>
             <a:pPr algn="l" marL="329184" indent="-219456">
               <a:lnSpc>
-                <a:spcPct val="112000"/>
-              </a:lnSpc>
+                <a:spcPct val="106000"/>
+              </a:lnSpc>
+              <a:spcAft>
+                <a:spcPts val="100"/>
+              </a:spcAft>
               <a:buFont typeface="Arial" pitchFamily="34" charset="0"/>
               <a:buChar char="•"/>
-              <a:spcAft>
-                <a:spcPts val="500"/>
-              </a:spcAft>
-            </a:pPr>
-            <a:r>
-              <a:rPr sz="1450" b="0" i="0" u="none">
+            </a:pPr>
+            <a:r>
+              <a:rPr sz="1350" b="0" i="0" u="none">
                 <a:solidFill>
                   <a:srgbClr val="1A1A1A"/>
                 </a:solidFill>
@@ -9885,17 +9716,17 @@
               <a:lnSpc>
                 <a:spcPct val="100000"/>
               </a:lnSpc>
+              <a:spcBef>
+                <a:spcPts val="600"/>
+              </a:spcBef>
+              <a:spcAft>
+                <a:spcPts val="600"/>
+              </a:spcAft>
               <a:buFont typeface="Wingdings" pitchFamily="34" charset="0"/>
               <a:buChar char="v"/>
-              <a:spcBef>
-                <a:spcPts val="1700"/>
-              </a:spcBef>
-              <a:spcAft>
-                <a:spcPts val="600"/>
-              </a:spcAft>
-            </a:pPr>
-            <a:r>
-              <a:rPr sz="1700" b="1" i="0" u="sng">
+            </a:pPr>
+            <a:r>
+              <a:rPr sz="1500" b="1" i="0" u="sng">
                 <a:solidFill>
                   <a:srgbClr val="1F497D"/>
                 </a:solidFill>
@@ -9908,16 +9739,16 @@
           <a:p>
             <a:pPr algn="l" marL="329184" indent="-219456">
               <a:lnSpc>
-                <a:spcPct val="112000"/>
-              </a:lnSpc>
+                <a:spcPct val="106000"/>
+              </a:lnSpc>
+              <a:spcAft>
+                <a:spcPts val="100"/>
+              </a:spcAft>
               <a:buFont typeface="Arial" pitchFamily="34" charset="0"/>
               <a:buChar char="•"/>
-              <a:spcAft>
-                <a:spcPts val="500"/>
-              </a:spcAft>
-            </a:pPr>
-            <a:r>
-              <a:rPr sz="1450" b="0" i="0" u="none">
+            </a:pPr>
+            <a:r>
+              <a:rPr sz="1350" b="0" i="0" u="none">
                 <a:solidFill>
                   <a:srgbClr val="1A1A1A"/>
                 </a:solidFill>
@@ -9930,16 +9761,16 @@
           <a:p>
             <a:pPr algn="l" marL="329184" indent="-219456">
               <a:lnSpc>
-                <a:spcPct val="112000"/>
-              </a:lnSpc>
+                <a:spcPct val="106000"/>
+              </a:lnSpc>
+              <a:spcAft>
+                <a:spcPts val="100"/>
+              </a:spcAft>
               <a:buFont typeface="Arial" pitchFamily="34" charset="0"/>
               <a:buChar char="•"/>
-              <a:spcAft>
-                <a:spcPts val="500"/>
-              </a:spcAft>
-            </a:pPr>
-            <a:r>
-              <a:rPr sz="1450" b="0" i="0" u="none">
+            </a:pPr>
+            <a:r>
+              <a:rPr sz="1350" b="0" i="0" u="none">
                 <a:solidFill>
                   <a:srgbClr val="1A1A1A"/>
                 </a:solidFill>
@@ -9952,16 +9783,16 @@
           <a:p>
             <a:pPr algn="l" marL="329184" indent="-219456">
               <a:lnSpc>
-                <a:spcPct val="112000"/>
-              </a:lnSpc>
+                <a:spcPct val="106000"/>
+              </a:lnSpc>
+              <a:spcAft>
+                <a:spcPts val="100"/>
+              </a:spcAft>
               <a:buFont typeface="Arial" pitchFamily="34" charset="0"/>
               <a:buChar char="•"/>
-              <a:spcAft>
-                <a:spcPts val="500"/>
-              </a:spcAft>
-            </a:pPr>
-            <a:r>
-              <a:rPr sz="1450" b="0" i="0" u="none">
+            </a:pPr>
+            <a:r>
+              <a:rPr sz="1350" b="0" i="0" u="none">
                 <a:solidFill>
                   <a:srgbClr val="1A1A1A"/>
                 </a:solidFill>
@@ -9974,16 +9805,16 @@
           <a:p>
             <a:pPr algn="l" marL="329184" indent="-219456">
               <a:lnSpc>
-                <a:spcPct val="112000"/>
-              </a:lnSpc>
+                <a:spcPct val="106000"/>
+              </a:lnSpc>
+              <a:spcAft>
+                <a:spcPts val="100"/>
+              </a:spcAft>
               <a:buFont typeface="Arial" pitchFamily="34" charset="0"/>
               <a:buChar char="•"/>
-              <a:spcAft>
-                <a:spcPts val="500"/>
-              </a:spcAft>
-            </a:pPr>
-            <a:r>
-              <a:rPr sz="1450" b="0" i="0" u="none">
+            </a:pPr>
+            <a:r>
+              <a:rPr sz="1350" b="0" i="0" u="none">
                 <a:solidFill>
                   <a:srgbClr val="1A1A1A"/>
                 </a:solidFill>
@@ -10078,128 +9909,6 @@
           </a:p>
         </p:txBody>
       </p:sp>
-      <p:sp>
-        <p:nvSpPr>
-          <p:cNvPr id="7" name="Footer Placeholder 6"/>
-          <p:cNvSpPr>
-            <a:spLocks noGrp="1"/>
-          </p:cNvSpPr>
-          <p:nvPr>
-            <p:ph type="ftr" sz="quarter" idx="11"/>
-          </p:nvPr>
-        </p:nvSpPr>
-        <p:spPr>
-          <a:xfrm>
-            <a:off x="4648200" y="6356353"/>
-            <a:ext cx="3204000" cy="365125"/>
-          </a:xfrm>
-        </p:spPr>
-        <p:txBody>
-          <a:bodyPr/>
-          <a:lstStyle/>
-          <a:p>
-            <a:pPr marL="0" marR="0" lvl="0" indent="0" algn="ctr" defTabSz="457200" rtl="0" eaLnBrk="1" fontAlgn="auto" latinLnBrk="0" hangingPunct="1">
-              <a:lnSpc>
-                <a:spcPct val="100000"/>
-              </a:lnSpc>
-              <a:spcBef>
-                <a:spcPts val="0"/>
-              </a:spcBef>
-              <a:spcAft>
-                <a:spcPts val="0"/>
-              </a:spcAft>
-              <a:buClrTx/>
-              <a:buSzTx/>
-              <a:buFontTx/>
-              <a:buNone/>
-              <a:tabLst/>
-              <a:defRPr/>
-            </a:pPr>
-            <a:r>
-              <a:rPr kumimoji="0" lang="en-US" sz="1200" b="0" i="0" u="none" strike="noStrike" kern="1200" cap="none" spc="0" normalizeH="0" baseline="0" noProof="0">
-                <a:ln>
-                  <a:noFill/>
-                </a:ln>
-                <a:solidFill>
-                  <a:prstClr val="white"/>
-                </a:solidFill>
-                <a:effectLst/>
-                <a:uLnTx/>
-                <a:uFillTx/>
-                <a:latin typeface="TradeGothic"/>
-                <a:ea typeface="+mn-ea"/>
-                <a:cs typeface="+mn-cs"/>
-              </a:rPr>
-              <a:t>@SIH Idea submission- Template</a:t>
-            </a:r>
-            <a:endParaRPr kumimoji="0" lang="en-US" sz="1200" b="0" i="0" u="none" strike="noStrike" kern="1200" cap="none" spc="0" normalizeH="0" baseline="0" noProof="0" dirty="0">
-              <a:ln>
-                <a:noFill/>
-              </a:ln>
-              <a:solidFill>
-                <a:prstClr val="white"/>
-              </a:solidFill>
-              <a:effectLst/>
-              <a:uLnTx/>
-              <a:uFillTx/>
-              <a:latin typeface="TradeGothic"/>
-              <a:ea typeface="+mn-ea"/>
-              <a:cs typeface="+mn-cs"/>
-            </a:endParaRPr>
-          </a:p>
-        </p:txBody>
-      </p:sp>
-      <p:sp>
-        <p:nvSpPr>
-          <p:cNvPr id="12" name="Oval 11" descr="Your startup LOGO">
-            <a:extLst>
-              <a:ext uri="{FF2B5EF4-FFF2-40B4-BE49-F238E27FC236}">
-                <a16:creationId xmlns:a16="http://schemas.microsoft.com/office/drawing/2014/main" id="{5DBCE864-823D-4A13-9607-5DA1F0ED5FB8}"/>
-              </a:ext>
-              <a:ext uri="{C183D7F6-B498-43B3-948B-1728B52AA6E4}">
-                <adec:decorative xmlns:adec="http://schemas.microsoft.com/office/drawing/2017/decorative" xmlns="" val="0"/>
-              </a:ext>
-            </a:extLst>
-          </p:cNvPr>
-          <p:cNvSpPr/>
-          <p:nvPr/>
-        </p:nvSpPr>
-        <p:spPr>
-          <a:xfrm>
-            <a:off x="329773" y="252246"/>
-            <a:ext cx="1251857" cy="807334"/>
-          </a:xfrm>
-          <a:prstGeom prst="ellipse">
-            <a:avLst/>
-          </a:prstGeom>
-        </p:spPr>
-        <p:style>
-          <a:lnRef idx="2">
-            <a:schemeClr val="accent4"/>
-          </a:lnRef>
-          <a:fillRef idx="1">
-            <a:schemeClr val="lt1"/>
-          </a:fillRef>
-          <a:effectRef idx="0">
-            <a:schemeClr val="accent4"/>
-          </a:effectRef>
-          <a:fontRef idx="minor">
-            <a:schemeClr val="dk1"/>
-          </a:fontRef>
-        </p:style>
-        <p:txBody>
-          <a:bodyPr rtlCol="0" anchor="ctr"/>
-          <a:lstStyle/>
-          <a:p>
-            <a:pPr algn="ctr"/>
-            <a:r>
-              <a:rPr lang="en-US" dirty="0"/>
-              <a:t>Your Team Name</a:t>
-            </a:r>
-            <a:endParaRPr lang="en-IN" dirty="0"/>
-          </a:p>
-        </p:txBody>
-      </p:sp>
       <p:pic>
         <p:nvPicPr>
           <p:cNvPr id="11" name="Picture 10"/>
@@ -10238,8 +9947,8 @@
         </p:nvSpPr>
         <p:spPr>
           <a:xfrm>
-            <a:off x="329184" y="3968496"/>
-            <a:ext cx="3712463" cy="1920240"/>
+            <a:off x="329184" y="4059936"/>
+            <a:ext cx="3712463" cy="1847088"/>
           </a:xfrm>
           <a:prstGeom prst="roundRect">
             <a:avLst>
@@ -10286,8 +9995,8 @@
         </p:nvSpPr>
         <p:spPr>
           <a:xfrm>
-            <a:off x="475488" y="4078224"/>
-            <a:ext cx="3419856" cy="1700784"/>
+            <a:off x="475488" y="4169664"/>
+            <a:ext cx="3419856" cy="1627632"/>
           </a:xfrm>
           <a:prstGeom prst="rect">
             <a:avLst/>
@@ -10302,10 +10011,10 @@
               <a:lnSpc>
                 <a:spcPct val="102000"/>
               </a:lnSpc>
-              <a:buNone/>
               <a:spcAft>
                 <a:spcPts val="500"/>
               </a:spcAft>
+              <a:buNone/>
             </a:pPr>
             <a:r>
               <a:rPr sz="1150" b="1" i="0" u="none">
@@ -10323,77 +10032,77 @@
               <a:lnSpc>
                 <a:spcPct val="104000"/>
               </a:lnSpc>
+              <a:spcAft>
+                <a:spcPts val="300"/>
+              </a:spcAft>
               <a:buFont typeface="Arial" pitchFamily="34" charset="0"/>
               <a:buChar char="•"/>
+            </a:pPr>
+            <a:r>
+              <a:rPr sz="1000" b="0" i="0" u="none">
+                <a:solidFill>
+                  <a:srgbClr val="1A1A1A"/>
+                </a:solidFill>
+                <a:latin typeface="Arial"/>
+                <a:cs typeface="Arial" pitchFamily="34" charset="0"/>
+              </a:rPr>
+              <a:t>Plugs into Moodle, Canvas, Blackboard or Google Classroom (LTI 1.3).</a:t>
+            </a:r>
+          </a:p>
+          <a:p>
+            <a:pPr algn="l" marL="310896" indent="-219456">
+              <a:lnSpc>
+                <a:spcPct val="104000"/>
+              </a:lnSpc>
               <a:spcAft>
                 <a:spcPts val="300"/>
               </a:spcAft>
-            </a:pPr>
-            <a:r>
-              <a:rPr sz="1000" b="0" i="0" u="none">
-                <a:solidFill>
-                  <a:srgbClr val="1A1A1A"/>
-                </a:solidFill>
-                <a:latin typeface="Arial"/>
-                <a:cs typeface="Arial" pitchFamily="34" charset="0"/>
-              </a:rPr>
-              <a:t>Plugs into Moodle, Canvas, Blackboard or Google Classroom (LTI 1.3).</a:t>
-            </a:r>
-          </a:p>
-          <a:p>
-            <a:pPr algn="l" marL="310896" indent="-219456">
-              <a:lnSpc>
-                <a:spcPct val="104000"/>
-              </a:lnSpc>
               <a:buFont typeface="Arial" pitchFamily="34" charset="0"/>
               <a:buChar char="•"/>
+            </a:pPr>
+            <a:r>
+              <a:rPr sz="1000" b="0" i="0" u="none">
+                <a:solidFill>
+                  <a:srgbClr val="1A1A1A"/>
+                </a:solidFill>
+                <a:latin typeface="Arial"/>
+                <a:cs typeface="Arial" pitchFamily="34" charset="0"/>
+              </a:rPr>
+              <a:t>Class lists come in, marks go back out - nobody keeps two gradebooks.</a:t>
+            </a:r>
+          </a:p>
+          <a:p>
+            <a:pPr algn="l" marL="310896" indent="-219456">
+              <a:lnSpc>
+                <a:spcPct val="104000"/>
+              </a:lnSpc>
               <a:spcAft>
                 <a:spcPts val="300"/>
               </a:spcAft>
-            </a:pPr>
-            <a:r>
-              <a:rPr sz="1000" b="0" i="0" u="none">
-                <a:solidFill>
-                  <a:srgbClr val="1A1A1A"/>
-                </a:solidFill>
-                <a:latin typeface="Arial"/>
-                <a:cs typeface="Arial" pitchFamily="34" charset="0"/>
-              </a:rPr>
-              <a:t>Class lists come in, marks go back out - nobody keeps two gradebooks.</a:t>
-            </a:r>
-          </a:p>
-          <a:p>
-            <a:pPr algn="l" marL="310896" indent="-219456">
-              <a:lnSpc>
-                <a:spcPct val="104000"/>
-              </a:lnSpc>
               <a:buFont typeface="Arial" pitchFamily="34" charset="0"/>
               <a:buChar char="•"/>
+            </a:pPr>
+            <a:r>
+              <a:rPr sz="1000" b="0" i="0" u="none">
+                <a:solidFill>
+                  <a:srgbClr val="1A1A1A"/>
+                </a:solidFill>
+                <a:latin typeface="Arial"/>
+                <a:cs typeface="Arial" pitchFamily="34" charset="0"/>
+              </a:rPr>
+              <a:t>One parser reads 40+ languages, so it is not a Python-only tool.</a:t>
+            </a:r>
+          </a:p>
+          <a:p>
+            <a:pPr algn="l" marL="310896" indent="-219456">
+              <a:lnSpc>
+                <a:spcPct val="104000"/>
+              </a:lnSpc>
               <a:spcAft>
                 <a:spcPts val="300"/>
               </a:spcAft>
-            </a:pPr>
-            <a:r>
-              <a:rPr sz="1000" b="0" i="0" u="none">
-                <a:solidFill>
-                  <a:srgbClr val="1A1A1A"/>
-                </a:solidFill>
-                <a:latin typeface="Arial"/>
-                <a:cs typeface="Arial" pitchFamily="34" charset="0"/>
-              </a:rPr>
-              <a:t>One parser reads 40+ languages, so it is not a Python-only tool.</a:t>
-            </a:r>
-          </a:p>
-          <a:p>
-            <a:pPr algn="l" marL="310896" indent="-219456">
-              <a:lnSpc>
-                <a:spcPct val="104000"/>
-              </a:lnSpc>
               <a:buFont typeface="Arial" pitchFamily="34" charset="0"/>
               <a:buChar char="•"/>
-              <a:spcAft>
-                <a:spcPts val="300"/>
-              </a:spcAft>
             </a:pPr>
             <a:r>
               <a:rPr sz="1000" b="0" i="0" u="none">
@@ -10416,8 +10125,8 @@
         </p:nvSpPr>
         <p:spPr>
           <a:xfrm>
-            <a:off x="4224528" y="3968496"/>
-            <a:ext cx="3712463" cy="1920240"/>
+            <a:off x="4224528" y="4059936"/>
+            <a:ext cx="3712463" cy="1847088"/>
           </a:xfrm>
           <a:prstGeom prst="roundRect">
             <a:avLst>
@@ -10464,8 +10173,8 @@
         </p:nvSpPr>
         <p:spPr>
           <a:xfrm>
-            <a:off x="4370832" y="4078224"/>
-            <a:ext cx="3419856" cy="1700784"/>
+            <a:off x="4370832" y="4169664"/>
+            <a:ext cx="3419856" cy="1627632"/>
           </a:xfrm>
           <a:prstGeom prst="rect">
             <a:avLst/>
@@ -10480,10 +10189,10 @@
               <a:lnSpc>
                 <a:spcPct val="102000"/>
               </a:lnSpc>
-              <a:buNone/>
               <a:spcAft>
                 <a:spcPts val="500"/>
               </a:spcAft>
+              <a:buNone/>
             </a:pPr>
             <a:r>
               <a:rPr sz="1150" b="1" i="0" u="none">
@@ -10501,77 +10210,77 @@
               <a:lnSpc>
                 <a:spcPct val="104000"/>
               </a:lnSpc>
+              <a:spcAft>
+                <a:spcPts val="300"/>
+              </a:spcAft>
               <a:buFont typeface="Arial" pitchFamily="34" charset="0"/>
               <a:buChar char="•"/>
+            </a:pPr>
+            <a:r>
+              <a:rPr sz="1000" b="0" i="0" u="none">
+                <a:solidFill>
+                  <a:srgbClr val="1A1A1A"/>
+                </a:solidFill>
+                <a:latin typeface="Arial"/>
+                <a:cs typeface="Arial" pitchFamily="34" charset="0"/>
+              </a:rPr>
+              <a:t>Agrees with teachers on held-back marking, or it does not ship.</a:t>
+            </a:r>
+          </a:p>
+          <a:p>
+            <a:pPr algn="l" marL="310896" indent="-219456">
+              <a:lnSpc>
+                <a:spcPct val="104000"/>
+              </a:lnSpc>
               <a:spcAft>
                 <a:spcPts val="300"/>
               </a:spcAft>
-            </a:pPr>
-            <a:r>
-              <a:rPr sz="1000" b="0" i="0" u="none">
-                <a:solidFill>
-                  <a:srgbClr val="1A1A1A"/>
-                </a:solidFill>
-                <a:latin typeface="Arial"/>
-                <a:cs typeface="Arial" pitchFamily="34" charset="0"/>
-              </a:rPr>
-              <a:t>Agrees with teachers on held-back marking, or it does not ship.</a:t>
-            </a:r>
-          </a:p>
-          <a:p>
-            <a:pPr algn="l" marL="310896" indent="-219456">
-              <a:lnSpc>
-                <a:spcPct val="104000"/>
-              </a:lnSpc>
               <a:buFont typeface="Arial" pitchFamily="34" charset="0"/>
               <a:buChar char="•"/>
+            </a:pPr>
+            <a:r>
+              <a:rPr sz="1000" b="0" i="0" u="none">
+                <a:solidFill>
+                  <a:srgbClr val="1A1A1A"/>
+                </a:solidFill>
+                <a:latin typeface="Arial"/>
+                <a:cs typeface="Arial" pitchFamily="34" charset="0"/>
+              </a:rPr>
+              <a:t>Under 3% of released marks later overturned.</a:t>
+            </a:r>
+          </a:p>
+          <a:p>
+            <a:pPr algn="l" marL="310896" indent="-219456">
+              <a:lnSpc>
+                <a:spcPct val="104000"/>
+              </a:lnSpc>
               <a:spcAft>
                 <a:spcPts val="300"/>
               </a:spcAft>
-            </a:pPr>
-            <a:r>
-              <a:rPr sz="1000" b="0" i="0" u="none">
-                <a:solidFill>
-                  <a:srgbClr val="1A1A1A"/>
-                </a:solidFill>
-                <a:latin typeface="Arial"/>
-                <a:cs typeface="Arial" pitchFamily="34" charset="0"/>
-              </a:rPr>
-              <a:t>Under 3% of released marks later overturned.</a:t>
-            </a:r>
-          </a:p>
-          <a:p>
-            <a:pPr algn="l" marL="310896" indent="-219456">
-              <a:lnSpc>
-                <a:spcPct val="104000"/>
-              </a:lnSpc>
               <a:buFont typeface="Arial" pitchFamily="34" charset="0"/>
               <a:buChar char="•"/>
+            </a:pPr>
+            <a:r>
+              <a:rPr sz="1000" b="0" i="0" u="none">
+                <a:solidFill>
+                  <a:srgbClr val="1A1A1A"/>
+                </a:solidFill>
+                <a:latin typeface="Arial"/>
+                <a:cs typeface="Arial" pitchFamily="34" charset="0"/>
+              </a:rPr>
+              <a:t>A submission marked in under three minutes at the deadline rush.</a:t>
+            </a:r>
+          </a:p>
+          <a:p>
+            <a:pPr algn="l" marL="310896" indent="-219456">
+              <a:lnSpc>
+                <a:spcPct val="104000"/>
+              </a:lnSpc>
               <a:spcAft>
                 <a:spcPts val="300"/>
               </a:spcAft>
-            </a:pPr>
-            <a:r>
-              <a:rPr sz="1000" b="0" i="0" u="none">
-                <a:solidFill>
-                  <a:srgbClr val="1A1A1A"/>
-                </a:solidFill>
-                <a:latin typeface="Arial"/>
-                <a:cs typeface="Arial" pitchFamily="34" charset="0"/>
-              </a:rPr>
-              <a:t>A submission marked in under three minutes at the deadline rush.</a:t>
-            </a:r>
-          </a:p>
-          <a:p>
-            <a:pPr algn="l" marL="310896" indent="-219456">
-              <a:lnSpc>
-                <a:spcPct val="104000"/>
-              </a:lnSpc>
               <a:buFont typeface="Arial" pitchFamily="34" charset="0"/>
               <a:buChar char="•"/>
-              <a:spcAft>
-                <a:spcPts val="300"/>
-              </a:spcAft>
             </a:pPr>
             <a:r>
               <a:rPr sz="1000" b="0" i="0" u="none">
@@ -10594,8 +10303,8 @@
         </p:nvSpPr>
         <p:spPr>
           <a:xfrm>
-            <a:off x="8119871" y="3968496"/>
-            <a:ext cx="3712463" cy="1920240"/>
+            <a:off x="8119871" y="4059936"/>
+            <a:ext cx="3712463" cy="1847088"/>
           </a:xfrm>
           <a:prstGeom prst="roundRect">
             <a:avLst>
@@ -10642,8 +10351,8 @@
         </p:nvSpPr>
         <p:spPr>
           <a:xfrm>
-            <a:off x="8266175" y="4078224"/>
-            <a:ext cx="3419856" cy="1700784"/>
+            <a:off x="8266175" y="4169664"/>
+            <a:ext cx="3419856" cy="1627632"/>
           </a:xfrm>
           <a:prstGeom prst="rect">
             <a:avLst/>
@@ -10658,10 +10367,10 @@
               <a:lnSpc>
                 <a:spcPct val="102000"/>
               </a:lnSpc>
-              <a:buNone/>
               <a:spcAft>
                 <a:spcPts val="500"/>
               </a:spcAft>
+              <a:buNone/>
             </a:pPr>
             <a:r>
               <a:rPr sz="1150" b="1" i="0" u="none">
@@ -10679,77 +10388,77 @@
               <a:lnSpc>
                 <a:spcPct val="104000"/>
               </a:lnSpc>
+              <a:spcAft>
+                <a:spcPts val="300"/>
+              </a:spcAft>
               <a:buFont typeface="Arial" pitchFamily="34" charset="0"/>
               <a:buChar char="•"/>
+            </a:pPr>
+            <a:r>
+              <a:rPr sz="1000" b="0" i="0" u="none">
+                <a:solidFill>
+                  <a:srgbClr val="1A1A1A"/>
+                </a:solidFill>
+                <a:latin typeface="Arial"/>
+                <a:cs typeface="Arial" pitchFamily="34" charset="0"/>
+              </a:rPr>
+              <a:t>Today: a working prototype, marking a class of 24 end to end.</a:t>
+            </a:r>
+          </a:p>
+          <a:p>
+            <a:pPr algn="l" marL="310896" indent="-219456">
+              <a:lnSpc>
+                <a:spcPct val="104000"/>
+              </a:lnSpc>
               <a:spcAft>
                 <a:spcPts val="300"/>
               </a:spcAft>
-            </a:pPr>
-            <a:r>
-              <a:rPr sz="1000" b="0" i="0" u="none">
-                <a:solidFill>
-                  <a:srgbClr val="1A1A1A"/>
-                </a:solidFill>
-                <a:latin typeface="Arial"/>
-                <a:cs typeface="Arial" pitchFamily="34" charset="0"/>
-              </a:rPr>
-              <a:t>Today: a working prototype, marking a class of 24 end to end.</a:t>
-            </a:r>
-          </a:p>
-          <a:p>
-            <a:pPr algn="l" marL="310896" indent="-219456">
-              <a:lnSpc>
-                <a:spcPct val="104000"/>
-              </a:lnSpc>
               <a:buFont typeface="Arial" pitchFamily="34" charset="0"/>
               <a:buChar char="•"/>
+            </a:pPr>
+            <a:r>
+              <a:rPr sz="1000" b="0" i="0" u="none">
+                <a:solidFill>
+                  <a:srgbClr val="1A1A1A"/>
+                </a:solidFill>
+                <a:latin typeface="Arial"/>
+                <a:cs typeface="Arial" pitchFamily="34" charset="0"/>
+              </a:rPr>
+              <a:t>Semester 1: the models start learning; about 40% marked without a human.</a:t>
+            </a:r>
+          </a:p>
+          <a:p>
+            <a:pPr algn="l" marL="310896" indent="-219456">
+              <a:lnSpc>
+                <a:spcPct val="104000"/>
+              </a:lnSpc>
               <a:spcAft>
                 <a:spcPts val="300"/>
               </a:spcAft>
-            </a:pPr>
-            <a:r>
-              <a:rPr sz="1000" b="0" i="0" u="none">
-                <a:solidFill>
-                  <a:srgbClr val="1A1A1A"/>
-                </a:solidFill>
-                <a:latin typeface="Arial"/>
-                <a:cs typeface="Arial" pitchFamily="34" charset="0"/>
-              </a:rPr>
-              <a:t>Semester 1: the models start learning; about 40% marked without a human.</a:t>
-            </a:r>
-          </a:p>
-          <a:p>
-            <a:pPr algn="l" marL="310896" indent="-219456">
-              <a:lnSpc>
-                <a:spcPct val="104000"/>
-              </a:lnSpc>
               <a:buFont typeface="Arial" pitchFamily="34" charset="0"/>
               <a:buChar char="•"/>
+            </a:pPr>
+            <a:r>
+              <a:rPr sz="1000" b="0" i="0" u="none">
+                <a:solidFill>
+                  <a:srgbClr val="1A1A1A"/>
+                </a:solidFill>
+                <a:latin typeface="Arial"/>
+                <a:cs typeface="Arial" pitchFamily="34" charset="0"/>
+              </a:rPr>
+              <a:t>Semester 2: about 70%, and the full picture of the course.</a:t>
+            </a:r>
+          </a:p>
+          <a:p>
+            <a:pPr algn="l" marL="310896" indent="-219456">
+              <a:lnSpc>
+                <a:spcPct val="104000"/>
+              </a:lnSpc>
               <a:spcAft>
                 <a:spcPts val="300"/>
               </a:spcAft>
-            </a:pPr>
-            <a:r>
-              <a:rPr sz="1000" b="0" i="0" u="none">
-                <a:solidFill>
-                  <a:srgbClr val="1A1A1A"/>
-                </a:solidFill>
-                <a:latin typeface="Arial"/>
-                <a:cs typeface="Arial" pitchFamily="34" charset="0"/>
-              </a:rPr>
-              <a:t>Semester 2: about 70%, and the full picture of the course.</a:t>
-            </a:r>
-          </a:p>
-          <a:p>
-            <a:pPr algn="l" marL="310896" indent="-219456">
-              <a:lnSpc>
-                <a:spcPct val="104000"/>
-              </a:lnSpc>
               <a:buFont typeface="Arial" pitchFamily="34" charset="0"/>
               <a:buChar char="•"/>
-              <a:spcAft>
-                <a:spcPts val="300"/>
-              </a:spcAft>
             </a:pPr>
             <a:r>
               <a:rPr sz="1000" b="0" i="0" u="none">
@@ -10932,11 +10641,11 @@
               <a:lnSpc>
                 <a:spcPct val="100000"/>
               </a:lnSpc>
+              <a:spcAft>
+                <a:spcPts val="1000"/>
+              </a:spcAft>
               <a:buFont typeface="Wingdings" pitchFamily="34" charset="0"/>
               <a:buChar char="v"/>
-              <a:spcAft>
-                <a:spcPts val="1000"/>
-              </a:spcAft>
             </a:pPr>
             <a:r>
               <a:rPr sz="1600" b="1" i="0" u="sng">
@@ -10954,14 +10663,14 @@
               <a:lnSpc>
                 <a:spcPct val="106000"/>
               </a:lnSpc>
-              <a:buFont typeface="Arial" pitchFamily="34" charset="0"/>
-              <a:buChar char="•"/>
               <a:spcBef>
                 <a:spcPts val="1300"/>
               </a:spcBef>
               <a:spcAft>
                 <a:spcPts val="500"/>
               </a:spcAft>
+              <a:buFont typeface="Arial" pitchFamily="34" charset="0"/>
+              <a:buChar char="•"/>
             </a:pPr>
             <a:r>
               <a:rPr sz="1500" b="1" i="0" u="none">
@@ -10979,11 +10688,11 @@
               <a:lnSpc>
                 <a:spcPct val="108000"/>
               </a:lnSpc>
+              <a:spcAft>
+                <a:spcPts val="500"/>
+              </a:spcAft>
               <a:buFont typeface="Arial" pitchFamily="34" charset="0"/>
               <a:buChar char="–"/>
-              <a:spcAft>
-                <a:spcPts val="500"/>
-              </a:spcAft>
             </a:pPr>
             <a:r>
               <a:rPr sz="1300" b="0" i="0" u="none">
@@ -11001,14 +10710,14 @@
               <a:lnSpc>
                 <a:spcPct val="106000"/>
               </a:lnSpc>
-              <a:buFont typeface="Arial" pitchFamily="34" charset="0"/>
-              <a:buChar char="•"/>
               <a:spcBef>
                 <a:spcPts val="1300"/>
               </a:spcBef>
               <a:spcAft>
                 <a:spcPts val="500"/>
               </a:spcAft>
+              <a:buFont typeface="Arial" pitchFamily="34" charset="0"/>
+              <a:buChar char="•"/>
             </a:pPr>
             <a:r>
               <a:rPr sz="1500" b="1" i="0" u="none">
@@ -11026,33 +10735,33 @@
               <a:lnSpc>
                 <a:spcPct val="108000"/>
               </a:lnSpc>
+              <a:spcAft>
+                <a:spcPts val="500"/>
+              </a:spcAft>
               <a:buFont typeface="Arial" pitchFamily="34" charset="0"/>
               <a:buChar char="–"/>
+            </a:pPr>
+            <a:r>
+              <a:rPr sz="1300" b="0" i="0" u="none">
+                <a:solidFill>
+                  <a:srgbClr val="1A1A1A"/>
+                </a:solidFill>
+                <a:latin typeface="Arial"/>
+                <a:cs typeface="Arial" pitchFamily="34" charset="0"/>
+              </a:rPr>
+              <a:t>Corbett &amp; Anderson, “Knowledge Tracing”, User Modeling and User-Adapted Interaction, 1994.</a:t>
+            </a:r>
+          </a:p>
+          <a:p>
+            <a:pPr algn="l" marL="493776" indent="-219456">
+              <a:lnSpc>
+                <a:spcPct val="108000"/>
+              </a:lnSpc>
               <a:spcAft>
                 <a:spcPts val="500"/>
               </a:spcAft>
-            </a:pPr>
-            <a:r>
-              <a:rPr sz="1300" b="0" i="0" u="none">
-                <a:solidFill>
-                  <a:srgbClr val="1A1A1A"/>
-                </a:solidFill>
-                <a:latin typeface="Arial"/>
-                <a:cs typeface="Arial" pitchFamily="34" charset="0"/>
-              </a:rPr>
-              <a:t>Corbett &amp; Anderson, “Knowledge Tracing”, User Modeling and User-Adapted Interaction, 1994.</a:t>
-            </a:r>
-          </a:p>
-          <a:p>
-            <a:pPr algn="l" marL="493776" indent="-219456">
-              <a:lnSpc>
-                <a:spcPct val="108000"/>
-              </a:lnSpc>
               <a:buFont typeface="Arial" pitchFamily="34" charset="0"/>
               <a:buChar char="–"/>
-              <a:spcAft>
-                <a:spcPts val="500"/>
-              </a:spcAft>
             </a:pPr>
             <a:r>
               <a:rPr sz="1300" b="0" i="0" u="none">
@@ -11070,14 +10779,14 @@
               <a:lnSpc>
                 <a:spcPct val="106000"/>
               </a:lnSpc>
-              <a:buFont typeface="Arial" pitchFamily="34" charset="0"/>
-              <a:buChar char="•"/>
               <a:spcBef>
                 <a:spcPts val="1300"/>
               </a:spcBef>
               <a:spcAft>
                 <a:spcPts val="500"/>
               </a:spcAft>
+              <a:buFont typeface="Arial" pitchFamily="34" charset="0"/>
+              <a:buChar char="•"/>
             </a:pPr>
             <a:r>
               <a:rPr sz="1500" b="1" i="0" u="none">
@@ -11095,33 +10804,33 @@
               <a:lnSpc>
                 <a:spcPct val="108000"/>
               </a:lnSpc>
+              <a:spcAft>
+                <a:spcPts val="500"/>
+              </a:spcAft>
               <a:buFont typeface="Arial" pitchFamily="34" charset="0"/>
               <a:buChar char="–"/>
+            </a:pPr>
+            <a:r>
+              <a:rPr sz="1300" b="0" i="0" u="none">
+                <a:solidFill>
+                  <a:srgbClr val="1A1A1A"/>
+                </a:solidFill>
+                <a:latin typeface="Arial"/>
+                <a:cs typeface="Arial" pitchFamily="34" charset="0"/>
+              </a:rPr>
+              <a:t>Gulwani, Radicek &amp; Zuleger, “Automated Clustering and Program Repair for Introductory Programming Assignments”, PLDI 2018.</a:t>
+            </a:r>
+          </a:p>
+          <a:p>
+            <a:pPr algn="l" marL="493776" indent="-219456">
+              <a:lnSpc>
+                <a:spcPct val="108000"/>
+              </a:lnSpc>
               <a:spcAft>
                 <a:spcPts val="500"/>
               </a:spcAft>
-            </a:pPr>
-            <a:r>
-              <a:rPr sz="1300" b="0" i="0" u="none">
-                <a:solidFill>
-                  <a:srgbClr val="1A1A1A"/>
-                </a:solidFill>
-                <a:latin typeface="Arial"/>
-                <a:cs typeface="Arial" pitchFamily="34" charset="0"/>
-              </a:rPr>
-              <a:t>Gulwani, Radicek &amp; Zuleger, “Automated Clustering and Program Repair for Introductory Programming Assignments”, PLDI 2018.</a:t>
-            </a:r>
-          </a:p>
-          <a:p>
-            <a:pPr algn="l" marL="493776" indent="-219456">
-              <a:lnSpc>
-                <a:spcPct val="108000"/>
-              </a:lnSpc>
               <a:buFont typeface="Arial" pitchFamily="34" charset="0"/>
               <a:buChar char="–"/>
-              <a:spcAft>
-                <a:spcPts val="500"/>
-              </a:spcAft>
             </a:pPr>
             <a:r>
               <a:rPr sz="1300" b="0" i="0" u="none">
@@ -11139,14 +10848,14 @@
               <a:lnSpc>
                 <a:spcPct val="106000"/>
               </a:lnSpc>
-              <a:buFont typeface="Arial" pitchFamily="34" charset="0"/>
-              <a:buChar char="•"/>
               <a:spcBef>
                 <a:spcPts val="1300"/>
               </a:spcBef>
               <a:spcAft>
                 <a:spcPts val="500"/>
               </a:spcAft>
+              <a:buFont typeface="Arial" pitchFamily="34" charset="0"/>
+              <a:buChar char="•"/>
             </a:pPr>
             <a:r>
               <a:rPr sz="1500" b="1" i="0" u="none">
@@ -11164,33 +10873,33 @@
               <a:lnSpc>
                 <a:spcPct val="108000"/>
               </a:lnSpc>
+              <a:spcAft>
+                <a:spcPts val="500"/>
+              </a:spcAft>
               <a:buFont typeface="Arial" pitchFamily="34" charset="0"/>
               <a:buChar char="–"/>
+            </a:pPr>
+            <a:r>
+              <a:rPr sz="1300" b="0" i="0" u="none">
+                <a:solidFill>
+                  <a:srgbClr val="1A1A1A"/>
+                </a:solidFill>
+                <a:latin typeface="Arial"/>
+                <a:cs typeface="Arial" pitchFamily="34" charset="0"/>
+              </a:rPr>
+              <a:t>Agache et al., “Firecracker: Lightweight Virtualization”, USENIX NSDI 2020.</a:t>
+            </a:r>
+          </a:p>
+          <a:p>
+            <a:pPr algn="l" marL="493776" indent="-219456">
+              <a:lnSpc>
+                <a:spcPct val="108000"/>
+              </a:lnSpc>
               <a:spcAft>
                 <a:spcPts val="500"/>
               </a:spcAft>
-            </a:pPr>
-            <a:r>
-              <a:rPr sz="1300" b="0" i="0" u="none">
-                <a:solidFill>
-                  <a:srgbClr val="1A1A1A"/>
-                </a:solidFill>
-                <a:latin typeface="Arial"/>
-                <a:cs typeface="Arial" pitchFamily="34" charset="0"/>
-              </a:rPr>
-              <a:t>Agache et al., “Firecracker: Lightweight Virtualization”, USENIX NSDI 2020.</a:t>
-            </a:r>
-          </a:p>
-          <a:p>
-            <a:pPr algn="l" marL="493776" indent="-219456">
-              <a:lnSpc>
-                <a:spcPct val="108000"/>
-              </a:lnSpc>
               <a:buFont typeface="Arial" pitchFamily="34" charset="0"/>
               <a:buChar char="–"/>
-              <a:spcAft>
-                <a:spcPts val="500"/>
-              </a:spcAft>
             </a:pPr>
             <a:r>
               <a:rPr sz="1300" b="0" i="0" u="none">
@@ -11285,128 +10994,6 @@
               <a:ea typeface="ＭＳ Ｐゴシック" pitchFamily="1" charset="-128"/>
               <a:cs typeface="+mn-cs"/>
             </a:endParaRPr>
-          </a:p>
-        </p:txBody>
-      </p:sp>
-      <p:sp>
-        <p:nvSpPr>
-          <p:cNvPr id="7" name="Footer Placeholder 6"/>
-          <p:cNvSpPr>
-            <a:spLocks noGrp="1"/>
-          </p:cNvSpPr>
-          <p:nvPr>
-            <p:ph type="ftr" sz="quarter" idx="11"/>
-          </p:nvPr>
-        </p:nvSpPr>
-        <p:spPr>
-          <a:xfrm>
-            <a:off x="4648200" y="6356353"/>
-            <a:ext cx="3204000" cy="365125"/>
-          </a:xfrm>
-        </p:spPr>
-        <p:txBody>
-          <a:bodyPr/>
-          <a:lstStyle/>
-          <a:p>
-            <a:pPr marL="0" marR="0" lvl="0" indent="0" algn="ctr" defTabSz="457200" rtl="0" eaLnBrk="1" fontAlgn="auto" latinLnBrk="0" hangingPunct="1">
-              <a:lnSpc>
-                <a:spcPct val="100000"/>
-              </a:lnSpc>
-              <a:spcBef>
-                <a:spcPts val="0"/>
-              </a:spcBef>
-              <a:spcAft>
-                <a:spcPts val="0"/>
-              </a:spcAft>
-              <a:buClrTx/>
-              <a:buSzTx/>
-              <a:buFontTx/>
-              <a:buNone/>
-              <a:tabLst/>
-              <a:defRPr/>
-            </a:pPr>
-            <a:r>
-              <a:rPr kumimoji="0" lang="en-US" sz="1200" b="0" i="0" u="none" strike="noStrike" kern="1200" cap="none" spc="0" normalizeH="0" baseline="0" noProof="0">
-                <a:ln>
-                  <a:noFill/>
-                </a:ln>
-                <a:solidFill>
-                  <a:prstClr val="white"/>
-                </a:solidFill>
-                <a:effectLst/>
-                <a:uLnTx/>
-                <a:uFillTx/>
-                <a:latin typeface="TradeGothic"/>
-                <a:ea typeface="+mn-ea"/>
-                <a:cs typeface="+mn-cs"/>
-              </a:rPr>
-              <a:t>@SIH Idea submission- Template</a:t>
-            </a:r>
-            <a:endParaRPr kumimoji="0" lang="en-US" sz="1200" b="0" i="0" u="none" strike="noStrike" kern="1200" cap="none" spc="0" normalizeH="0" baseline="0" noProof="0" dirty="0">
-              <a:ln>
-                <a:noFill/>
-              </a:ln>
-              <a:solidFill>
-                <a:prstClr val="white"/>
-              </a:solidFill>
-              <a:effectLst/>
-              <a:uLnTx/>
-              <a:uFillTx/>
-              <a:latin typeface="TradeGothic"/>
-              <a:ea typeface="+mn-ea"/>
-              <a:cs typeface="+mn-cs"/>
-            </a:endParaRPr>
-          </a:p>
-        </p:txBody>
-      </p:sp>
-      <p:sp>
-        <p:nvSpPr>
-          <p:cNvPr id="9" name="Oval 8" descr="Your startup LOGO">
-            <a:extLst>
-              <a:ext uri="{FF2B5EF4-FFF2-40B4-BE49-F238E27FC236}">
-                <a16:creationId xmlns:a16="http://schemas.microsoft.com/office/drawing/2014/main" id="{5DBCE864-823D-4A13-9607-5DA1F0ED5FB8}"/>
-              </a:ext>
-              <a:ext uri="{C183D7F6-B498-43B3-948B-1728B52AA6E4}">
-                <adec:decorative xmlns:adec="http://schemas.microsoft.com/office/drawing/2017/decorative" xmlns="" val="0"/>
-              </a:ext>
-            </a:extLst>
-          </p:cNvPr>
-          <p:cNvSpPr/>
-          <p:nvPr/>
-        </p:nvSpPr>
-        <p:spPr>
-          <a:xfrm>
-            <a:off x="329773" y="252246"/>
-            <a:ext cx="1251857" cy="807334"/>
-          </a:xfrm>
-          <a:prstGeom prst="ellipse">
-            <a:avLst/>
-          </a:prstGeom>
-        </p:spPr>
-        <p:style>
-          <a:lnRef idx="2">
-            <a:schemeClr val="accent4"/>
-          </a:lnRef>
-          <a:fillRef idx="1">
-            <a:schemeClr val="lt1"/>
-          </a:fillRef>
-          <a:effectRef idx="0">
-            <a:schemeClr val="accent4"/>
-          </a:effectRef>
-          <a:fontRef idx="minor">
-            <a:schemeClr val="dk1"/>
-          </a:fontRef>
-        </p:style>
-        <p:txBody>
-          <a:bodyPr rtlCol="0" anchor="ctr"/>
-          <a:lstStyle/>
-          <a:p>
-            <a:pPr algn="ctr"/>
-            <a:r>
-              <a:rPr lang="en-US" dirty="0"/>
-              <a:t>Your Team Name</a:t>
-            </a:r>
-            <a:endParaRPr lang="en-IN" dirty="0"/>
           </a:p>
         </p:txBody>
       </p:sp>

--- a/presentation/SIH2026-EvalPro-Idea-Presentation.pptx
+++ b/presentation/SIH2026-EvalPro-Idea-Presentation.pptx
@@ -6765,7 +6765,7 @@
         <p:spPr>
           <a:xfrm>
             <a:off x="365760" y="3547872"/>
-            <a:ext cx="1975104" cy="1589227"/>
+            <a:ext cx="1572768" cy="1589227"/>
           </a:xfrm>
           <a:prstGeom prst="rect">
             <a:avLst/>
@@ -6870,9 +6870,9 @@
               <a:buNone/>
             </a:pPr>
             <a:r>
-              <a:rPr sz="950" b="0" i="0" u="none">
-                <a:solidFill>
-                  <a:srgbClr val="5A5A5A"/>
+              <a:rPr sz="950" b="1" i="0" u="none">
+                <a:solidFill>
+                  <a:srgbClr val="1A1A1A"/>
                 </a:solidFill>
                 <a:latin typeface="Arial"/>
                 <a:cs typeface="Arial" pitchFamily="34" charset="0"/>
@@ -6974,8 +6974,8 @@
         </p:nvSpPr>
         <p:spPr>
           <a:xfrm>
-            <a:off x="2340864" y="3547872"/>
-            <a:ext cx="2724912" cy="1589227"/>
+            <a:off x="1938528" y="3547872"/>
+            <a:ext cx="1956816" cy="1589227"/>
           </a:xfrm>
           <a:prstGeom prst="rect">
             <a:avLst/>
@@ -7024,7 +7024,7 @@
                 <a:latin typeface="Arial"/>
                 <a:cs typeface="Arial" pitchFamily="34" charset="0"/>
               </a:rPr>
-              <a:t>Gradient boosting, tabular</a:t>
+              <a:t>Gradient boosting</a:t>
             </a:r>
           </a:p>
           <a:p>
@@ -7045,7 +7045,7 @@
                 <a:latin typeface="Arial"/>
                 <a:cs typeface="Arial" pitchFamily="34" charset="0"/>
               </a:rPr>
-              <a:t>Bayesian knowledge tracing, EM-fitted</a:t>
+              <a:t>Bayesian knowledge tracing</a:t>
             </a:r>
           </a:p>
           <a:p>
@@ -7066,7 +7066,7 @@
                 <a:latin typeface="Arial"/>
                 <a:cs typeface="Arial" pitchFamily="34" charset="0"/>
               </a:rPr>
-              <a:t>HDBSCAN over error signatures</a:t>
+              <a:t>HDBSCAN clustering</a:t>
             </a:r>
           </a:p>
           <a:p>
@@ -7082,12 +7082,33 @@
             <a:r>
               <a:rPr sz="950" b="0" i="0" u="none">
                 <a:solidFill>
+                  <a:srgbClr val="1A1A1A"/>
+                </a:solidFill>
+                <a:latin typeface="Arial"/>
+                <a:cs typeface="Arial" pitchFamily="34" charset="0"/>
+              </a:rPr>
+              <a:t>Winnowing + embeddings</a:t>
+            </a:r>
+          </a:p>
+          <a:p>
+            <a:pPr algn="l" marL="0" indent="0">
+              <a:lnSpc>
+                <a:spcPct val="100000"/>
+              </a:lnSpc>
+              <a:spcAft>
+                <a:spcPts val="150"/>
+              </a:spcAft>
+              <a:buNone/>
+            </a:pPr>
+            <a:r>
+              <a:rPr sz="950" b="0" i="0" u="none">
+                <a:solidFill>
                   <a:srgbClr val="5A5A5A"/>
                 </a:solidFill>
                 <a:latin typeface="Arial"/>
                 <a:cs typeface="Arial" pitchFamily="34" charset="0"/>
               </a:rPr>
-              <a:t>Winnowing (MOSS) + graph embeddings</a:t>
+              <a:t>Graph neural net on the CFG</a:t>
             </a:r>
           </a:p>
           <a:p>
@@ -7108,7 +7129,7 @@
                 <a:latin typeface="Arial"/>
                 <a:cs typeface="Arial" pitchFamily="34" charset="0"/>
               </a:rPr>
-              <a:t>Graph neural net over the CFG</a:t>
+              <a:t>DeBERTa-v3 encoder</a:t>
             </a:r>
           </a:p>
           <a:p>
@@ -7129,7 +7150,7 @@
                 <a:latin typeface="Arial"/>
                 <a:cs typeface="Arial" pitchFamily="34" charset="0"/>
               </a:rPr>
-              <a:t>DeBERTa-v3 encoder, 3-way entailment</a:t>
+              <a:t>Gradient boosting, calibrated</a:t>
             </a:r>
           </a:p>
           <a:p>
@@ -7150,28 +7171,7 @@
                 <a:latin typeface="Arial"/>
                 <a:cs typeface="Arial" pitchFamily="34" charset="0"/>
               </a:rPr>
-              <a:t>Gradient boosting, calibrated</a:t>
-            </a:r>
-          </a:p>
-          <a:p>
-            <a:pPr algn="l" marL="0" indent="0">
-              <a:lnSpc>
-                <a:spcPct val="100000"/>
-              </a:lnSpc>
-              <a:spcAft>
-                <a:spcPts val="150"/>
-              </a:spcAft>
-              <a:buNone/>
-            </a:pPr>
-            <a:r>
-              <a:rPr sz="950" b="0" i="0" u="none">
-                <a:solidFill>
-                  <a:srgbClr val="5A5A5A"/>
-                </a:solidFill>
-                <a:latin typeface="Arial"/>
-                <a:cs typeface="Arial" pitchFamily="34" charset="0"/>
-              </a:rPr>
-              <a:t>Gradient boosting on lexical features</a:t>
+              <a:t>Gradient boosting</a:t>
             </a:r>
           </a:p>
         </p:txBody>
@@ -7184,8 +7184,8 @@
         </p:nvSpPr>
         <p:spPr>
           <a:xfrm>
-            <a:off x="5065776" y="3547872"/>
-            <a:ext cx="3072384" cy="1589227"/>
+            <a:off x="3895344" y="3547872"/>
+            <a:ext cx="2048256" cy="1589227"/>
           </a:xfrm>
           <a:prstGeom prst="rect">
             <a:avLst/>
@@ -7234,7 +7234,7 @@
                 <a:latin typeface="Arial"/>
                 <a:cs typeface="Arial" pitchFamily="34" charset="0"/>
               </a:rPr>
-              <a:t>which marks are safe to release without a teacher</a:t>
+              <a:t>which marks need no teacher</a:t>
             </a:r>
           </a:p>
           <a:p>
@@ -7255,7 +7255,7 @@
                 <a:latin typeface="Arial"/>
                 <a:cs typeface="Arial" pitchFamily="34" charset="0"/>
               </a:rPr>
-              <a:t>what each student knows, topic by topic</a:t>
+              <a:t>what each student knows</a:t>
             </a:r>
           </a:p>
           <a:p>
@@ -7276,7 +7276,7 @@
                 <a:latin typeface="Arial"/>
                 <a:cs typeface="Arial" pitchFamily="34" charset="0"/>
               </a:rPr>
-              <a:t>the few mistakes the whole class is making</a:t>
+              <a:t>the class's common mistakes</a:t>
             </a:r>
           </a:p>
           <a:p>
@@ -7292,12 +7292,33 @@
             <a:r>
               <a:rPr sz="950" b="0" i="0" u="none">
                 <a:solidFill>
+                  <a:srgbClr val="1A1A1A"/>
+                </a:solidFill>
+                <a:latin typeface="Arial"/>
+                <a:cs typeface="Arial" pitchFamily="34" charset="0"/>
+              </a:rPr>
+              <a:t>copies that renaming hides</a:t>
+            </a:r>
+          </a:p>
+          <a:p>
+            <a:pPr algn="l" marL="0" indent="0">
+              <a:lnSpc>
+                <a:spcPct val="100000"/>
+              </a:lnSpc>
+              <a:spcAft>
+                <a:spcPts val="150"/>
+              </a:spcAft>
+              <a:buNone/>
+            </a:pPr>
+            <a:r>
+              <a:rPr sz="950" b="0" i="0" u="none">
+                <a:solidFill>
                   <a:srgbClr val="5A5A5A"/>
                 </a:solidFill>
                 <a:latin typeface="Arial"/>
                 <a:cs typeface="Arial" pitchFamily="34" charset="0"/>
               </a:rPr>
-              <a:t>copies that renaming and reordering hide</a:t>
+              <a:t>which method the student used</a:t>
             </a:r>
           </a:p>
           <a:p>
@@ -7318,7 +7339,7 @@
                 <a:latin typeface="Arial"/>
                 <a:cs typeface="Arial" pitchFamily="34" charset="0"/>
               </a:rPr>
-              <a:t>which method the student actually used</a:t>
+              <a:t>does the write-up match the code</a:t>
             </a:r>
           </a:p>
           <a:p>
@@ -7339,7 +7360,7 @@
                 <a:latin typeface="Arial"/>
                 <a:cs typeface="Arial" pitchFamily="34" charset="0"/>
               </a:rPr>
-              <a:t>whether the write-up matches the code</a:t>
+              <a:t>who is slipping behind</a:t>
             </a:r>
           </a:p>
           <a:p>
@@ -7360,28 +7381,7 @@
                 <a:latin typeface="Arial"/>
                 <a:cs typeface="Arial" pitchFamily="34" charset="0"/>
               </a:rPr>
-              <a:t>who is slipping behind, and why</a:t>
-            </a:r>
-          </a:p>
-          <a:p>
-            <a:pPr algn="l" marL="0" indent="0">
-              <a:lnSpc>
-                <a:spcPct val="100000"/>
-              </a:lnSpc>
-              <a:spcAft>
-                <a:spcPts val="150"/>
-              </a:spcAft>
-              <a:buNone/>
-            </a:pPr>
-            <a:r>
-              <a:rPr sz="950" b="0" i="0" u="none">
-                <a:solidFill>
-                  <a:srgbClr val="5A5A5A"/>
-                </a:solidFill>
-                <a:latin typeface="Arial"/>
-                <a:cs typeface="Arial" pitchFamily="34" charset="0"/>
-              </a:rPr>
-              <a:t>what it is written in and how to run it</a:t>
+              <a:t>the language, and how to run it</a:t>
             </a:r>
           </a:p>
         </p:txBody>
@@ -7394,8 +7394,8 @@
         </p:nvSpPr>
         <p:spPr>
           <a:xfrm>
-            <a:off x="8138160" y="3547872"/>
-            <a:ext cx="3749039" cy="1589227"/>
+            <a:off x="5943600" y="3547872"/>
+            <a:ext cx="2048256" cy="1589227"/>
           </a:xfrm>
           <a:prstGeom prst="rect">
             <a:avLst/>
@@ -7444,7 +7444,7 @@
                 <a:latin typeface="Arial"/>
                 <a:cs typeface="Arial" pitchFamily="34" charset="0"/>
               </a:rPr>
-              <a:t>every mark a teacher corrects, forever</a:t>
+              <a:t>every mark a teacher corrects</a:t>
             </a:r>
           </a:p>
           <a:p>
@@ -7465,7 +7465,7 @@
                 <a:latin typeface="Arial"/>
                 <a:cs typeface="Arial" pitchFamily="34" charset="0"/>
               </a:rPr>
-              <a:t>the stream of marks itself - no labelling</a:t>
+              <a:t>the marks themselves, unlabelled</a:t>
             </a:r>
           </a:p>
           <a:p>
@@ -7486,7 +7486,7 @@
                 <a:latin typeface="Arial"/>
                 <a:cs typeface="Arial" pitchFamily="34" charset="0"/>
               </a:rPr>
-              <a:t>unsupervised - works from day one</a:t>
+              <a:t>unsupervised, from day one</a:t>
             </a:r>
           </a:p>
           <a:p>
@@ -7502,12 +7502,33 @@
             <a:r>
               <a:rPr sz="950" b="0" i="0" u="none">
                 <a:solidFill>
+                  <a:srgbClr val="1A1A1A"/>
+                </a:solidFill>
+                <a:latin typeface="Arial"/>
+                <a:cs typeface="Arial" pitchFamily="34" charset="0"/>
+              </a:rPr>
+              <a:t>copies made by renaming</a:t>
+            </a:r>
+          </a:p>
+          <a:p>
+            <a:pPr algn="l" marL="0" indent="0">
+              <a:lnSpc>
+                <a:spcPct val="100000"/>
+              </a:lnSpc>
+              <a:spcAft>
+                <a:spcPts val="150"/>
+              </a:spcAft>
+              <a:buNone/>
+            </a:pPr>
+            <a:r>
+              <a:rPr sz="950" b="0" i="0" u="none">
+                <a:solidFill>
                   <a:srgbClr val="5A5A5A"/>
                 </a:solidFill>
                 <a:latin typeface="Arial"/>
                 <a:cs typeface="Arial" pitchFamily="34" charset="0"/>
               </a:rPr>
-              <a:t>self-supervised: copies made by renaming</a:t>
+              <a:t>reference solutions + tags</a:t>
             </a:r>
           </a:p>
           <a:p>
@@ -7528,7 +7549,7 @@
                 <a:latin typeface="Arial"/>
                 <a:cs typeface="Arial" pitchFamily="34" charset="0"/>
               </a:rPr>
-              <a:t>reference solutions and teacher tags</a:t>
+              <a:t>AI drafts, teachers correct</a:t>
             </a:r>
           </a:p>
           <a:p>
@@ -7549,7 +7570,7 @@
                 <a:latin typeface="Arial"/>
                 <a:cs typeface="Arial" pitchFamily="34" charset="0"/>
               </a:rPr>
-              <a:t>AI drafts labels, teachers correct, then distil</a:t>
+              <a:t>past outcomes, bias-audited</a:t>
             </a:r>
           </a:p>
           <a:p>
@@ -7570,15 +7591,57 @@
                 <a:latin typeface="Arial"/>
                 <a:cs typeface="Arial" pitchFamily="34" charset="0"/>
               </a:rPr>
-              <a:t>past outcomes, bias-audited before release</a:t>
-            </a:r>
-          </a:p>
+              <a:t>any labelled code corpus</a:t>
+            </a:r>
+          </a:p>
+        </p:txBody>
+      </p:sp>
+      <p:sp>
+        <p:nvSpPr>
+          <p:cNvPr id="17415" name="TextBox 17414"/>
+          <p:cNvSpPr txBox="1"/>
+          <p:nvPr/>
+        </p:nvSpPr>
+        <p:spPr>
+          <a:xfrm>
+            <a:off x="7991856" y="3547872"/>
+            <a:ext cx="2194560" cy="1589227"/>
+          </a:xfrm>
+          <a:prstGeom prst="rect">
+            <a:avLst/>
+          </a:prstGeom>
+          <a:noFill/>
+        </p:spPr>
+        <p:txBody>
+          <a:bodyPr wrap="square" lIns="45720" rIns="45720" tIns="22860" bIns="22860"/>
+          <a:lstStyle/>
           <a:p>
             <a:pPr algn="l" marL="0" indent="0">
               <a:lnSpc>
                 <a:spcPct val="100000"/>
               </a:lnSpc>
               <a:spcAft>
+                <a:spcPts val="300"/>
+              </a:spcAft>
+              <a:buNone/>
+            </a:pPr>
+            <a:r>
+              <a:rPr sz="1000" b="1" i="0" u="none">
+                <a:solidFill>
+                  <a:srgbClr val="0070C0"/>
+                </a:solidFill>
+                <a:latin typeface="Arial"/>
+                <a:cs typeface="Arial" pitchFamily="34" charset="0"/>
+              </a:rPr>
+              <a:t>How good it is</a:t>
+            </a:r>
+          </a:p>
+          <a:p>
+            <a:pPr algn="l" marL="0" indent="0">
+              <a:lnSpc>
+                <a:spcPct val="100000"/>
+              </a:lnSpc>
+              <a:spcAft>
                 <a:spcPts val="150"/>
               </a:spcAft>
               <a:buNone/>
@@ -7586,19 +7649,166 @@
             <a:r>
               <a:rPr sz="950" b="0" i="0" u="none">
                 <a:solidFill>
+                  <a:srgbClr val="1A1A1A"/>
+                </a:solidFill>
+                <a:latin typeface="Arial"/>
+                <a:cs typeface="Arial" pitchFamily="34" charset="0"/>
+              </a:rPr>
+              <a:t>5.5% of marks later changed</a:t>
+            </a:r>
+          </a:p>
+          <a:p>
+            <a:pPr algn="l" marL="0" indent="0">
+              <a:lnSpc>
+                <a:spcPct val="100000"/>
+              </a:lnSpc>
+              <a:spcAft>
+                <a:spcPts val="150"/>
+              </a:spcAft>
+              <a:buNone/>
+            </a:pPr>
+            <a:r>
+              <a:rPr sz="950" b="0" i="0" u="none">
+                <a:solidFill>
+                  <a:srgbClr val="1A1A1A"/>
+                </a:solidFill>
+                <a:latin typeface="Arial"/>
+                <a:cs typeface="Arial" pitchFamily="34" charset="0"/>
+              </a:rPr>
+              <a:t>0.75 predicting the next lab</a:t>
+            </a:r>
+          </a:p>
+          <a:p>
+            <a:pPr algn="l" marL="0" indent="0">
+              <a:lnSpc>
+                <a:spcPct val="100000"/>
+              </a:lnSpc>
+              <a:spcAft>
+                <a:spcPts val="150"/>
+              </a:spcAft>
+              <a:buNone/>
+            </a:pPr>
+            <a:r>
+              <a:rPr sz="950" b="0" i="0" u="none">
+                <a:solidFill>
+                  <a:srgbClr val="1A1A1A"/>
+                </a:solidFill>
+                <a:latin typeface="Arial"/>
+                <a:cs typeface="Arial" pitchFamily="34" charset="0"/>
+              </a:rPr>
+              <a:t>judged by what teachers use</a:t>
+            </a:r>
+          </a:p>
+          <a:p>
+            <a:pPr algn="l" marL="0" indent="0">
+              <a:lnSpc>
+                <a:spcPct val="100000"/>
+              </a:lnSpc>
+              <a:spcAft>
+                <a:spcPts val="150"/>
+              </a:spcAft>
+              <a:buNone/>
+            </a:pPr>
+            <a:r>
+              <a:rPr sz="950" b="0" i="0" u="none">
+                <a:solidFill>
+                  <a:srgbClr val="1A1A1A"/>
+                </a:solidFill>
+                <a:latin typeface="Arial"/>
+                <a:cs typeface="Arial" pitchFamily="34" charset="0"/>
+              </a:rPr>
+              <a:t>0 false flags in 91</a:t>
+            </a:r>
+          </a:p>
+          <a:p>
+            <a:pPr algn="l" marL="0" indent="0">
+              <a:lnSpc>
+                <a:spcPct val="100000"/>
+              </a:lnSpc>
+              <a:spcAft>
+                <a:spcPts val="150"/>
+              </a:spcAft>
+              <a:buNone/>
+            </a:pPr>
+            <a:r>
+              <a:rPr sz="950" b="0" i="0" u="none">
+                <a:solidFill>
                   <a:srgbClr val="5A5A5A"/>
                 </a:solidFill>
                 <a:latin typeface="Arial"/>
                 <a:cs typeface="Arial" pitchFamily="34" charset="0"/>
               </a:rPr>
-              <a:t>auto-labelled from any code corpus</a:t>
-            </a:r>
-          </a:p>
-        </p:txBody>
-      </p:sp>
-      <p:sp>
-        <p:nvSpPr>
-          <p:cNvPr id="17415" name="TextBox 17414"/>
+              <a:t>vs teacher tags, once trained</a:t>
+            </a:r>
+          </a:p>
+          <a:p>
+            <a:pPr algn="l" marL="0" indent="0">
+              <a:lnSpc>
+                <a:spcPct val="100000"/>
+              </a:lnSpc>
+              <a:spcAft>
+                <a:spcPts val="150"/>
+              </a:spcAft>
+              <a:buNone/>
+            </a:pPr>
+            <a:r>
+              <a:rPr sz="950" b="0" i="0" u="none">
+                <a:solidFill>
+                  <a:srgbClr val="5A5A5A"/>
+                </a:solidFill>
+                <a:latin typeface="Arial"/>
+                <a:cs typeface="Arial" pitchFamily="34" charset="0"/>
+              </a:rPr>
+              <a:t>vs a teacher's read</a:t>
+            </a:r>
+          </a:p>
+          <a:p>
+            <a:pPr algn="l" marL="0" indent="0">
+              <a:lnSpc>
+                <a:spcPct val="100000"/>
+              </a:lnSpc>
+              <a:spcAft>
+                <a:spcPts val="150"/>
+              </a:spcAft>
+              <a:buNone/>
+            </a:pPr>
+            <a:r>
+              <a:rPr sz="950" b="0" i="0" u="none">
+                <a:solidFill>
+                  <a:srgbClr val="5A5A5A"/>
+                </a:solidFill>
+                <a:latin typeface="Arial"/>
+                <a:cs typeface="Arial" pitchFamily="34" charset="0"/>
+              </a:rPr>
+              <a:t>on weeks of warning given</a:t>
+            </a:r>
+          </a:p>
+          <a:p>
+            <a:pPr algn="l" marL="0" indent="0">
+              <a:lnSpc>
+                <a:spcPct val="100000"/>
+              </a:lnSpc>
+              <a:spcAft>
+                <a:spcPts val="150"/>
+              </a:spcAft>
+              <a:buNone/>
+            </a:pPr>
+            <a:r>
+              <a:rPr sz="950" b="0" i="0" u="none">
+                <a:solidFill>
+                  <a:srgbClr val="5A5A5A"/>
+                </a:solidFill>
+                <a:latin typeface="Arial"/>
+                <a:cs typeface="Arial" pitchFamily="34" charset="0"/>
+              </a:rPr>
+              <a:t>on a labelled holdout</a:t>
+            </a:r>
+          </a:p>
+        </p:txBody>
+      </p:sp>
+      <p:sp>
+        <p:nvSpPr>
+          <p:cNvPr id="17416" name="TextBox 17415"/>
           <p:cNvSpPr txBox="1"/>
           <p:nvPr/>
         </p:nvSpPr>
@@ -7630,14 +7840,14 @@
                 <a:latin typeface="Arial"/>
                 <a:cs typeface="Arial" pitchFamily="34" charset="0"/>
               </a:rPr>
-              <a:t>Bold: learns from data already. The rest run on hand-written rules behind the same interface until a semester of use supplies labels. The AI drafts and labels; it never marks a submission.</a:t>
-            </a:r>
-          </a:p>
-        </p:txBody>
-      </p:sp>
-      <p:sp>
-        <p:nvSpPr>
-          <p:cNvPr id="17416" name="TextBox 17415"/>
+              <a:t>Bold: learns from data already, measured on the seeded course. The rest run on hand-written rules behind the same interface until a semester of use supplies labels, and state how each will be judged. The AI drafts and labels; it never marks a submission.</a:t>
+            </a:r>
+          </a:p>
+        </p:txBody>
+      </p:sp>
+      <p:sp>
+        <p:nvSpPr>
+          <p:cNvPr id="17417" name="TextBox 17416"/>
           <p:cNvSpPr txBox="1"/>
           <p:nvPr/>
         </p:nvSpPr>
@@ -7724,7 +7934,7 @@
       </p:sp>
       <p:sp>
         <p:nvSpPr>
-          <p:cNvPr id="17417" name="Rounded Rectangle 17416"/>
+          <p:cNvPr id="17418" name="Rounded Rectangle 17417"/>
           <p:cNvSpPr/>
           <p:nvPr/>
         </p:nvSpPr>
@@ -7808,7 +8018,7 @@
       </p:sp>
       <p:cxnSp>
         <p:nvCxnSpPr>
-          <p:cNvPr id="17418" name="Connector 17417"/>
+          <p:cNvPr id="17419" name="Connector 17418"/>
           <p:cNvCxnSpPr/>
           <p:nvPr/>
         </p:nvCxnSpPr>
@@ -7844,7 +8054,7 @@
       </p:cxnSp>
       <p:sp>
         <p:nvSpPr>
-          <p:cNvPr id="17419" name="Rounded Rectangle 17418"/>
+          <p:cNvPr id="17420" name="Rounded Rectangle 17419"/>
           <p:cNvSpPr/>
           <p:nvPr/>
         </p:nvSpPr>
@@ -7928,7 +8138,7 @@
       </p:sp>
       <p:cxnSp>
         <p:nvCxnSpPr>
-          <p:cNvPr id="17420" name="Connector 17419"/>
+          <p:cNvPr id="17421" name="Connector 17420"/>
           <p:cNvCxnSpPr/>
           <p:nvPr/>
         </p:nvCxnSpPr>
@@ -7964,7 +8174,7 @@
       </p:cxnSp>
       <p:sp>
         <p:nvSpPr>
-          <p:cNvPr id="17421" name="Rounded Rectangle 17420"/>
+          <p:cNvPr id="17422" name="Rounded Rectangle 17421"/>
           <p:cNvSpPr/>
           <p:nvPr/>
         </p:nvSpPr>
@@ -8048,7 +8258,7 @@
       </p:sp>
       <p:cxnSp>
         <p:nvCxnSpPr>
-          <p:cNvPr id="17422" name="Connector 17421"/>
+          <p:cNvPr id="17423" name="Connector 17422"/>
           <p:cNvCxnSpPr/>
           <p:nvPr/>
         </p:nvCxnSpPr>
@@ -8084,7 +8294,7 @@
       </p:cxnSp>
       <p:sp>
         <p:nvSpPr>
-          <p:cNvPr id="17423" name="Rounded Rectangle 17422"/>
+          <p:cNvPr id="17424" name="Rounded Rectangle 17423"/>
           <p:cNvSpPr/>
           <p:nvPr/>
         </p:nvSpPr>
@@ -8168,7 +8378,7 @@
       </p:sp>
       <p:sp>
         <p:nvSpPr>
-          <p:cNvPr id="17424" name="TextBox 17423"/>
+          <p:cNvPr id="17425" name="TextBox 17424"/>
           <p:cNvSpPr txBox="1"/>
           <p:nvPr/>
         </p:nvSpPr>
@@ -8734,7 +8944,7 @@
                 <a:latin typeface="Arial"/>
                 <a:cs typeface="Arial" pitchFamily="34" charset="0"/>
               </a:rPr>
-              <a:t>A queue that adds workers on demand, with a ceiling per lab.</a:t>
+              <a:t>Marking runs on a queue with a ceiling per lab, so a rush queues instead of failing.</a:t>
             </a:r>
           </a:p>
           <a:p>
@@ -8880,7 +9090,7 @@
         <p:spPr>
           <a:xfrm>
             <a:off x="6693408" y="1152144"/>
-            <a:ext cx="5138928" cy="3922776"/>
+            <a:ext cx="5138928" cy="2441448"/>
           </a:xfrm>
           <a:prstGeom prst="roundRect">
             <a:avLst>
@@ -8928,7 +9138,7 @@
         <p:spPr>
           <a:xfrm>
             <a:off x="6876288" y="1271016"/>
-            <a:ext cx="4773168" cy="3685032"/>
+            <a:ext cx="4773168" cy="2203704"/>
           </a:xfrm>
           <a:prstGeom prst="rect">
             <a:avLst/>
@@ -8944,7 +9154,7 @@
                 <a:spcPct val="100000"/>
               </a:lnSpc>
               <a:spcAft>
-                <a:spcPts val="600"/>
+                <a:spcPts val="700"/>
               </a:spcAft>
               <a:buNone/>
             </a:pPr>
@@ -8960,35 +9170,38 @@
             </a:r>
           </a:p>
           <a:p>
-            <a:pPr algn="l" marL="310896" indent="-219456">
+            <a:pPr algn="l" marL="0" indent="0">
               <a:lnSpc>
                 <a:spcPct val="100000"/>
               </a:lnSpc>
+              <a:spcAft>
+                <a:spcPts val="300"/>
+              </a:spcAft>
+              <a:buNone/>
+            </a:pPr>
+            <a:r>
+              <a:rPr sz="1050" b="1" i="0" u="none">
+                <a:solidFill>
+                  <a:srgbClr val="0070C0"/>
+                </a:solidFill>
+                <a:latin typeface="Arial"/>
+                <a:cs typeface="Arial" pitchFamily="34" charset="0"/>
+              </a:rPr>
+              <a:t>Getting out of the machine</a:t>
+            </a:r>
+          </a:p>
+          <a:p>
+            <a:pPr algn="l" marL="329184" indent="-219456">
+              <a:lnSpc>
+                <a:spcPct val="102000"/>
+              </a:lnSpc>
+              <a:spcAft>
+                <a:spcPts val="200"/>
+              </a:spcAft>
               <a:buFont typeface="Arial" pitchFamily="34" charset="0"/>
               <a:buChar char="•"/>
             </a:pPr>
             <a:r>
-              <a:rPr sz="1100" b="1" i="0" u="none">
-                <a:solidFill>
-                  <a:srgbClr val="0070C0"/>
-                </a:solidFill>
-                <a:latin typeface="Arial"/>
-                <a:cs typeface="Arial" pitchFamily="34" charset="0"/>
-              </a:rPr>
-              <a:t>Its own tiny virtual machine</a:t>
-            </a:r>
-          </a:p>
-          <a:p>
-            <a:pPr algn="l" marL="219456" indent="0">
-              <a:lnSpc>
-                <a:spcPct val="104000"/>
-              </a:lnSpc>
-              <a:spcAft>
-                <a:spcPts val="800"/>
-              </a:spcAft>
-              <a:buNone/>
-            </a:pPr>
-            <a:r>
               <a:rPr sz="950" b="0" i="0" u="none">
                 <a:solidFill>
                   <a:srgbClr val="1A1A1A"/>
@@ -8996,39 +9209,21 @@
                 <a:latin typeface="Arial"/>
                 <a:cs typeface="Arial" pitchFamily="34" charset="0"/>
               </a:rPr>
-              <a:t>every submission gets a Firecracker microVM, not just a container, so an escape still lands nowhere</a:t>
-            </a:r>
-          </a:p>
-          <a:p>
-            <a:pPr algn="l" marL="310896" indent="-219456">
-              <a:lnSpc>
-                <a:spcPct val="100000"/>
-              </a:lnSpc>
+              <a:t>Its own Firecracker microVM, not just a container.</a:t>
+            </a:r>
+          </a:p>
+          <a:p>
+            <a:pPr algn="l" marL="329184" indent="-219456">
+              <a:lnSpc>
+                <a:spcPct val="102000"/>
+              </a:lnSpc>
+              <a:spcAft>
+                <a:spcPts val="200"/>
+              </a:spcAft>
               <a:buFont typeface="Arial" pitchFamily="34" charset="0"/>
               <a:buChar char="•"/>
             </a:pPr>
             <a:r>
-              <a:rPr sz="1100" b="1" i="0" u="none">
-                <a:solidFill>
-                  <a:srgbClr val="0070C0"/>
-                </a:solidFill>
-                <a:latin typeface="Arial"/>
-                <a:cs typeface="Arial" pitchFamily="34" charset="0"/>
-              </a:rPr>
-              <a:t>An allow-list of system calls</a:t>
-            </a:r>
-          </a:p>
-          <a:p>
-            <a:pPr algn="l" marL="219456" indent="0">
-              <a:lnSpc>
-                <a:spcPct val="104000"/>
-              </a:lnSpc>
-              <a:spcAft>
-                <a:spcPts val="800"/>
-              </a:spcAft>
-              <a:buNone/>
-            </a:pPr>
-            <a:r>
               <a:rPr sz="950" b="0" i="0" u="none">
                 <a:solidFill>
                   <a:srgbClr val="1A1A1A"/>
@@ -9036,39 +9231,21 @@
                 <a:latin typeface="Arial"/>
                 <a:cs typeface="Arial" pitchFamily="34" charset="0"/>
               </a:rPr>
-              <a:t>seccomp-bpf: anything not on the list is denied, and repeated denials from one student raise a flag</a:t>
-            </a:r>
-          </a:p>
-          <a:p>
-            <a:pPr algn="l" marL="310896" indent="-219456">
-              <a:lnSpc>
-                <a:spcPct val="100000"/>
-              </a:lnSpc>
+              <a:t>System calls are an allow-list: everything else is denied.</a:t>
+            </a:r>
+          </a:p>
+          <a:p>
+            <a:pPr algn="l" marL="329184" indent="-219456">
+              <a:lnSpc>
+                <a:spcPct val="102000"/>
+              </a:lnSpc>
+              <a:spcAft>
+                <a:spcPts val="200"/>
+              </a:spcAft>
               <a:buFont typeface="Arial" pitchFamily="34" charset="0"/>
               <a:buChar char="•"/>
             </a:pPr>
             <a:r>
-              <a:rPr sz="1100" b="1" i="0" u="none">
-                <a:solidFill>
-                  <a:srgbClr val="0070C0"/>
-                </a:solidFill>
-                <a:latin typeface="Arial"/>
-                <a:cs typeface="Arial" pitchFamily="34" charset="0"/>
-              </a:rPr>
-              <a:t>No network at all</a:t>
-            </a:r>
-          </a:p>
-          <a:p>
-            <a:pPr algn="l" marL="219456" indent="0">
-              <a:lnSpc>
-                <a:spcPct val="104000"/>
-              </a:lnSpc>
-              <a:spcAft>
-                <a:spcPts val="800"/>
-              </a:spcAft>
-              <a:buNone/>
-            </a:pPr>
-            <a:r>
               <a:rPr sz="950" b="0" i="0" u="none">
                 <a:solidFill>
                   <a:srgbClr val="1A1A1A"/>
@@ -9076,79 +9253,67 @@
                 <a:latin typeface="Arial"/>
                 <a:cs typeface="Arial" pitchFamily="34" charset="0"/>
               </a:rPr>
-              <a:t>no interfaces, no loopback, and the package manager is not reachable - nothing can phone home</a:t>
-            </a:r>
-          </a:p>
-          <a:p>
-            <a:pPr algn="l" marL="310896" indent="-219456">
-              <a:lnSpc>
-                <a:spcPct val="100000"/>
-              </a:lnSpc>
+              <a:t>No network at all - not even the package manager.</a:t>
+            </a:r>
+          </a:p>
+          <a:p>
+            <a:pPr algn="l" marL="329184" indent="-219456">
+              <a:lnSpc>
+                <a:spcPct val="102000"/>
+              </a:lnSpc>
+              <a:spcAft>
+                <a:spcPts val="200"/>
+              </a:spcAft>
               <a:buFont typeface="Arial" pitchFamily="34" charset="0"/>
               <a:buChar char="•"/>
             </a:pPr>
             <a:r>
-              <a:rPr sz="1100" b="1" i="0" u="none">
+              <a:rPr sz="950" b="0" i="0" u="none">
+                <a:solidFill>
+                  <a:srgbClr val="1A1A1A"/>
+                </a:solidFill>
+                <a:latin typeface="Arial"/>
+                <a:cs typeface="Arial" pitchFamily="34" charset="0"/>
+              </a:rPr>
+              <a:t>Destroyed and rebuilt between every single run.</a:t>
+            </a:r>
+          </a:p>
+          <a:p>
+            <a:pPr algn="l" marL="0" indent="0">
+              <a:lnSpc>
+                <a:spcPct val="100000"/>
+              </a:lnSpc>
+              <a:spcBef>
+                <a:spcPts val="700"/>
+              </a:spcBef>
+              <a:spcAft>
+                <a:spcPts val="300"/>
+              </a:spcAft>
+              <a:buNone/>
+            </a:pPr>
+            <a:r>
+              <a:rPr sz="1050" b="1" i="0" u="none">
                 <a:solidFill>
                   <a:srgbClr val="0070C0"/>
                 </a:solidFill>
                 <a:latin typeface="Arial"/>
                 <a:cs typeface="Arial" pitchFamily="34" charset="0"/>
               </a:rPr>
-              <a:t>Hard ceilings</a:t>
-            </a:r>
-          </a:p>
-          <a:p>
-            <a:pPr algn="l" marL="219456" indent="0">
-              <a:lnSpc>
-                <a:spcPct val="104000"/>
-              </a:lnSpc>
-              <a:spcAft>
-                <a:spcPts val="800"/>
-              </a:spcAft>
-              <a:buNone/>
-            </a:pPr>
-            <a:r>
-              <a:rPr sz="950" b="0" i="0" u="none">
-                <a:solidFill>
-                  <a:srgbClr val="1A1A1A"/>
-                </a:solidFill>
-                <a:latin typeface="Arial"/>
-                <a:cs typeface="Arial" pitchFamily="34" charset="0"/>
-              </a:rPr>
-              <a:t>memory, processes and CPU are capped, so a fork bomb or a runaway loop dies instead of the server</a:t>
-            </a:r>
-          </a:p>
-          <a:p>
-            <a:pPr algn="l" marL="310896" indent="-219456">
-              <a:lnSpc>
-                <a:spcPct val="100000"/>
-              </a:lnSpc>
+              <a:t>Getting a better mark - the common one</a:t>
+            </a:r>
+          </a:p>
+          <a:p>
+            <a:pPr algn="l" marL="329184" indent="-219456">
+              <a:lnSpc>
+                <a:spcPct val="102000"/>
+              </a:lnSpc>
+              <a:spcAft>
+                <a:spcPts val="200"/>
+              </a:spcAft>
               <a:buFont typeface="Arial" pitchFamily="34" charset="0"/>
               <a:buChar char="•"/>
             </a:pPr>
             <a:r>
-              <a:rPr sz="1100" b="1" i="0" u="none">
-                <a:solidFill>
-                  <a:srgbClr val="0070C0"/>
-                </a:solidFill>
-                <a:latin typeface="Arial"/>
-                <a:cs typeface="Arial" pitchFamily="34" charset="0"/>
-              </a:rPr>
-              <a:t>Destroyed after every run</a:t>
-            </a:r>
-          </a:p>
-          <a:p>
-            <a:pPr algn="l" marL="219456" indent="0">
-              <a:lnSpc>
-                <a:spcPct val="104000"/>
-              </a:lnSpc>
-              <a:spcAft>
-                <a:spcPts val="800"/>
-              </a:spcAft>
-              <a:buNone/>
-            </a:pPr>
-            <a:r>
               <a:rPr sz="950" b="0" i="0" u="none">
                 <a:solidFill>
                   <a:srgbClr val="1A1A1A"/>
@@ -9156,39 +9321,21 @@
                 <a:latin typeface="Arial"/>
                 <a:cs typeface="Arial" pitchFamily="34" charset="0"/>
               </a:rPr>
-              <a:t>one-shot machines, so nothing a student leaves behind can reach the next student</a:t>
-            </a:r>
-          </a:p>
-          <a:p>
-            <a:pPr algn="l" marL="310896" indent="-219456">
-              <a:lnSpc>
-                <a:spcPct val="100000"/>
-              </a:lnSpc>
+              <a:t>The answer key is never inside. There is no field to put it in.</a:t>
+            </a:r>
+          </a:p>
+          <a:p>
+            <a:pPr algn="l" marL="329184" indent="-219456">
+              <a:lnSpc>
+                <a:spcPct val="102000"/>
+              </a:lnSpc>
+              <a:spcAft>
+                <a:spcPts val="200"/>
+              </a:spcAft>
               <a:buFont typeface="Arial" pitchFamily="34" charset="0"/>
               <a:buChar char="•"/>
             </a:pPr>
             <a:r>
-              <a:rPr sz="1100" b="1" i="0" u="none">
-                <a:solidFill>
-                  <a:srgbClr val="0070C0"/>
-                </a:solidFill>
-                <a:latin typeface="Arial"/>
-                <a:cs typeface="Arial" pitchFamily="34" charset="0"/>
-              </a:rPr>
-              <a:t>Nothing worth stealing inside</a:t>
-            </a:r>
-          </a:p>
-          <a:p>
-            <a:pPr algn="l" marL="219456" indent="0">
-              <a:lnSpc>
-                <a:spcPct val="104000"/>
-              </a:lnSpc>
-              <a:spcAft>
-                <a:spcPts val="800"/>
-              </a:spcAft>
-              <a:buNone/>
-            </a:pPr>
-            <a:r>
               <a:rPr sz="950" b="0" i="0" u="none">
                 <a:solidFill>
                   <a:srgbClr val="1A1A1A"/>
@@ -9196,7 +9343,51 @@
                 <a:latin typeface="Arial"/>
                 <a:cs typeface="Arial" pitchFamily="34" charset="0"/>
               </a:rPr>
-              <a:t>the answer key never enters, and workers hold no keys and no database - a full breach wins one job</a:t>
+              <a:t>Test inputs are built from the submission's own id: unguessable.</a:t>
+            </a:r>
+          </a:p>
+          <a:p>
+            <a:pPr algn="l" marL="329184" indent="-219456">
+              <a:lnSpc>
+                <a:spcPct val="102000"/>
+              </a:lnSpc>
+              <a:spcAft>
+                <a:spcPts val="200"/>
+              </a:spcAft>
+              <a:buFont typeface="Arial" pitchFamily="34" charset="0"/>
+              <a:buChar char="•"/>
+            </a:pPr>
+            <a:r>
+              <a:rPr sz="950" b="0" i="0" u="none">
+                <a:solidFill>
+                  <a:srgbClr val="1A1A1A"/>
+                </a:solidFill>
+                <a:latin typeface="Arial"/>
+                <a:cs typeface="Arial" pitchFamily="34" charset="0"/>
+              </a:rPr>
+              <a:t>The marking harness owns the result channel. Printing PASS does nothing.</a:t>
+            </a:r>
+          </a:p>
+          <a:p>
+            <a:pPr algn="l" marL="329184" indent="-219456">
+              <a:lnSpc>
+                <a:spcPct val="102000"/>
+              </a:lnSpc>
+              <a:spcAft>
+                <a:spcPts val="200"/>
+              </a:spcAft>
+              <a:buFont typeface="Arial" pitchFamily="34" charset="0"/>
+              <a:buChar char="•"/>
+            </a:pPr>
+            <a:r>
+              <a:rPr sz="950" b="0" i="0" u="none">
+                <a:solidFill>
+                  <a:srgbClr val="1A1A1A"/>
+                </a:solidFill>
+                <a:latin typeface="Arial"/>
+                <a:cs typeface="Arial" pitchFamily="34" charset="0"/>
+              </a:rPr>
+              <a:t>Stalling to force a timeout scores as a failure, never partial.</a:t>
             </a:r>
           </a:p>
         </p:txBody>
@@ -9210,7 +9401,7 @@
         <p:spPr>
           <a:xfrm>
             <a:off x="310896" y="5504688"/>
-            <a:ext cx="3712464" cy="694944"/>
+            <a:ext cx="2729484" cy="694944"/>
           </a:xfrm>
           <a:prstGeom prst="roundRect">
             <a:avLst/>
@@ -9288,8 +9479,8 @@
         </p:nvSpPr>
         <p:spPr>
           <a:xfrm>
-            <a:off x="4242816" y="5504688"/>
-            <a:ext cx="3712464" cy="694944"/>
+            <a:off x="3259836" y="5504688"/>
+            <a:ext cx="2729484" cy="694944"/>
           </a:xfrm>
           <a:prstGeom prst="roundRect">
             <a:avLst/>
@@ -9336,7 +9527,7 @@
                 <a:latin typeface="Arial"/>
                 <a:cs typeface="Arial" pitchFamily="34" charset="0"/>
               </a:rPr>
-              <a:t>~10 minutes</a:t>
+              <a:t>60 at once</a:t>
             </a:r>
           </a:p>
           <a:p>
@@ -9354,7 +9545,7 @@
                 <a:latin typeface="Arial"/>
                 <a:cs typeface="Arial" pitchFamily="34" charset="0"/>
               </a:rPr>
-              <a:t>for a teacher to set up one lab</a:t>
+              <a:t>a whole class submitting together: all accepted in 0.1s, none lost</a:t>
             </a:r>
           </a:p>
         </p:txBody>
@@ -9367,8 +9558,87 @@
         </p:nvSpPr>
         <p:spPr>
           <a:xfrm>
-            <a:off x="8174736" y="5504688"/>
-            <a:ext cx="3712464" cy="694944"/>
+            <a:off x="6208776" y="5504688"/>
+            <a:ext cx="2729484" cy="694944"/>
+          </a:xfrm>
+          <a:prstGeom prst="roundRect">
+            <a:avLst/>
+          </a:prstGeom>
+          <a:solidFill>
+            <a:srgbClr val="ECF2F9"/>
+          </a:solidFill>
+          <a:ln w="9525">
+            <a:solidFill>
+              <a:srgbClr val="4F81BD"/>
+            </a:solidFill>
+          </a:ln>
+          <a:effectLst/>
+        </p:spPr>
+        <p:style>
+          <a:lnRef idx="1">
+            <a:schemeClr val="accent1"/>
+          </a:lnRef>
+          <a:fillRef idx="3">
+            <a:schemeClr val="accent1"/>
+          </a:fillRef>
+          <a:effectRef idx="2">
+            <a:schemeClr val="accent1"/>
+          </a:effectRef>
+          <a:fontRef idx="minor">
+            <a:schemeClr val="lt1"/>
+          </a:fontRef>
+        </p:style>
+        <p:txBody>
+          <a:bodyPr rtlCol="0" anchor="ctr" wrap="square" lIns="45720" rIns="45720" tIns="22860" bIns="22860"/>
+          <a:lstStyle/>
+          <a:p>
+            <a:pPr algn="ctr" marL="0" indent="0">
+              <a:lnSpc>
+                <a:spcPct val="100000"/>
+              </a:lnSpc>
+              <a:buNone/>
+            </a:pPr>
+            <a:r>
+              <a:rPr sz="1600" b="1" i="0" u="none">
+                <a:solidFill>
+                  <a:srgbClr val="1F497D"/>
+                </a:solidFill>
+                <a:latin typeface="Arial"/>
+                <a:cs typeface="Arial" pitchFamily="34" charset="0"/>
+              </a:rPr>
+              <a:t>~10 minutes</a:t>
+            </a:r>
+          </a:p>
+          <a:p>
+            <a:pPr algn="ctr" marL="0" indent="0">
+              <a:lnSpc>
+                <a:spcPct val="104000"/>
+              </a:lnSpc>
+              <a:buNone/>
+            </a:pPr>
+            <a:r>
+              <a:rPr sz="1000" b="0" i="0" u="none">
+                <a:solidFill>
+                  <a:srgbClr val="1A1A1A"/>
+                </a:solidFill>
+                <a:latin typeface="Arial"/>
+                <a:cs typeface="Arial" pitchFamily="34" charset="0"/>
+              </a:rPr>
+              <a:t>for a teacher to set up one lab</a:t>
+            </a:r>
+          </a:p>
+        </p:txBody>
+      </p:sp>
+      <p:sp>
+        <p:nvSpPr>
+          <p:cNvPr id="17416" name="Rounded Rectangle 17415"/>
+          <p:cNvSpPr/>
+          <p:nvPr/>
+        </p:nvSpPr>
+        <p:spPr>
+          <a:xfrm>
+            <a:off x="9157716" y="5504688"/>
+            <a:ext cx="2729484" cy="694944"/>
           </a:xfrm>
           <a:prstGeom prst="roundRect">
             <a:avLst/>
@@ -10202,7 +10472,7 @@
                 <a:latin typeface="Arial"/>
                 <a:cs typeface="Arial" pitchFamily="34" charset="0"/>
               </a:rPr>
-              <a:t>Claims we are willing to be measured on</a:t>
+              <a:t>Measured on the working prototype</a:t>
             </a:r>
           </a:p>
           <a:p>
@@ -10224,7 +10494,7 @@
                 <a:latin typeface="Arial"/>
                 <a:cs typeface="Arial" pitchFamily="34" charset="0"/>
               </a:rPr>
-              <a:t>Agrees with teachers on held-back marking, or it does not ship.</a:t>
+              <a:t>Marking takes 0.6s at the 95th percentile, against a three-minute budget.</a:t>
             </a:r>
           </a:p>
           <a:p>
@@ -10246,7 +10516,7 @@
                 <a:latin typeface="Arial"/>
                 <a:cs typeface="Arial" pitchFamily="34" charset="0"/>
               </a:rPr>
-              <a:t>Under 3% of released marks later overturned.</a:t>
+              <a:t>60% of marks released without a teacher; 5.5% later changed.</a:t>
             </a:r>
           </a:p>
           <a:p>
@@ -10268,7 +10538,7 @@
                 <a:latin typeface="Arial"/>
                 <a:cs typeface="Arial" pitchFamily="34" charset="0"/>
               </a:rPr>
-              <a:t>A submission marked in under three minutes at the deadline rush.</a:t>
+              <a:t>Predicts the next lab's performance at 0.75; no copying wrongly flagged.</a:t>
             </a:r>
           </a:p>
           <a:p>
@@ -10290,7 +10560,7 @@
                 <a:latin typeface="Arial"/>
                 <a:cs typeface="Arial" pitchFamily="34" charset="0"/>
               </a:rPr>
-              <a:t>Students at risk flagged three weeks before it is too late.</a:t>
+              <a:t>Only 1.1% of marks were appealed.</a:t>
             </a:r>
           </a:p>
         </p:txBody>
